--- a/decks/odis.pptx
+++ b/decks/odis.pptx
@@ -13,9 +13,16 @@
     <p:sldId id="261" r:id="rId7"/>
     <p:sldId id="262" r:id="rId8"/>
     <p:sldId id="263" r:id="rId9"/>
+    <p:sldId id="264" r:id="rId10"/>
+    <p:sldId id="265" r:id="rId11"/>
+    <p:sldId id="266" r:id="rId12"/>
+    <p:sldId id="267" r:id="rId13"/>
+    <p:sldId id="268" r:id="rId14"/>
+    <p:sldId id="269" r:id="rId15"/>
+    <p:sldId id="270" r:id="rId16"/>
   </p:sldIdLst>
   <p:notesMasterIdLst>
-    <p:notesMasterId r:id="rId10"/>
+    <p:notesMasterId r:id="rId17"/>
   </p:notesMasterIdLst>
   <p:sldSz cx="12191695" cy="6858000"/>
   <p:notesSz cx="6858000" cy="12191695"/>
@@ -112,6 +119,1058 @@
     </a:lvl9pPr>
   </p:defaultTextStyle>
 </p:presentation>
+</file>
+
+<file path=ppt/charts/chart10.xml><?xml version="1.0" encoding="utf-8"?>
+<c:chartSpace xmlns:c="http://schemas.openxmlformats.org/drawingml/2006/chart" xmlns:a="http://schemas.openxmlformats.org/drawingml/2006/main" xmlns:r="http://schemas.openxmlformats.org/officeDocument/2006/relationships">
+  <c:date1904 val="0"/>
+  <c:roundedCorners val="1"/>
+  <c:chart>
+    <c:autoTitleDeleted val="1"/>
+    <c:plotArea>
+      <c:layout/>
+      <c:doughnutChart>
+        <c:varyColors val="1"/>
+        <c:ser>
+          <c:idx val="0"/>
+          <c:order val="0"/>
+          <c:tx>
+            <c:strRef>
+              <c:f>Sheet1!$B$1</c:f>
+              <c:strCache>
+                <c:ptCount val="1"/>
+                <c:pt idx="0">
+                  <c:v>Breakdown</c:v>
+                </c:pt>
+              </c:strCache>
+            </c:strRef>
+          </c:tx>
+          <c:spPr>
+            <a:solidFill>
+              <a:schemeClr val="accent1"/>
+            </a:solidFill>
+            <a:ln w="9525" cap="flat">
+              <a:solidFill>
+                <a:srgbClr val="F9F9F9"/>
+              </a:solidFill>
+              <a:prstDash val="solid"/>
+              <a:round/>
+            </a:ln>
+            <a:effectLst/>
+          </c:spPr>
+          <c:dPt>
+            <c:idx val="0"/>
+            <c:bubble3D val="0"/>
+            <c:spPr>
+              <a:solidFill>
+                <a:srgbClr val="3B82F6"/>
+              </a:solidFill>
+              <a:effectLst/>
+            </c:spPr>
+          </c:dPt>
+          <c:dPt>
+            <c:idx val="1"/>
+            <c:bubble3D val="0"/>
+            <c:spPr>
+              <a:solidFill>
+                <a:srgbClr val="06B6D4"/>
+              </a:solidFill>
+              <a:effectLst/>
+            </c:spPr>
+          </c:dPt>
+          <c:dPt>
+            <c:idx val="2"/>
+            <c:bubble3D val="0"/>
+            <c:spPr>
+              <a:solidFill>
+                <a:srgbClr val="22D3A0"/>
+              </a:solidFill>
+              <a:effectLst/>
+            </c:spPr>
+          </c:dPt>
+          <c:dPt>
+            <c:idx val="3"/>
+            <c:bubble3D val="0"/>
+            <c:spPr>
+              <a:solidFill>
+                <a:srgbClr val="F59E0B"/>
+              </a:solidFill>
+              <a:effectLst/>
+            </c:spPr>
+          </c:dPt>
+          <c:dPt>
+            <c:idx val="4"/>
+            <c:bubble3D val="0"/>
+            <c:spPr>
+              <a:solidFill>
+                <a:srgbClr val="3B82F6"/>
+              </a:solidFill>
+              <a:effectLst/>
+            </c:spPr>
+          </c:dPt>
+          <c:dLbls>
+            <c:dLbl>
+              <c:idx val="0"/>
+              <c:numFmt formatCode="0%" sourceLinked="0"/>
+              <c:spPr/>
+              <c:txPr>
+                <a:bodyPr/>
+                <a:lstStyle/>
+                <a:p>
+                  <a:pPr>
+                    <a:defRPr sz="1000" b="0" i="0" u="none" strike="noStrike">
+                      <a:solidFill>
+                        <a:srgbClr val="E2E8F0"/>
+                      </a:solidFill>
+                      <a:latin typeface="Segoe UI"/>
+                    </a:defRPr>
+                  </a:pPr>
+                </a:p>
+              </c:txPr>
+              <c:showLegendKey val="0"/>
+              <c:showVal val="0"/>
+              <c:showCatName val="0"/>
+              <c:showSerName val="0"/>
+              <c:showPercent val="1"/>
+              <c:showBubbleSize val="0"/>
+            </c:dLbl>
+            <c:dLbl>
+              <c:idx val="1"/>
+              <c:numFmt formatCode="0%" sourceLinked="0"/>
+              <c:spPr/>
+              <c:txPr>
+                <a:bodyPr/>
+                <a:lstStyle/>
+                <a:p>
+                  <a:pPr>
+                    <a:defRPr sz="1000" b="0" i="0" u="none" strike="noStrike">
+                      <a:solidFill>
+                        <a:srgbClr val="E2E8F0"/>
+                      </a:solidFill>
+                      <a:latin typeface="Segoe UI"/>
+                    </a:defRPr>
+                  </a:pPr>
+                </a:p>
+              </c:txPr>
+              <c:showLegendKey val="0"/>
+              <c:showVal val="0"/>
+              <c:showCatName val="0"/>
+              <c:showSerName val="0"/>
+              <c:showPercent val="1"/>
+              <c:showBubbleSize val="0"/>
+            </c:dLbl>
+            <c:dLbl>
+              <c:idx val="2"/>
+              <c:numFmt formatCode="0%" sourceLinked="0"/>
+              <c:spPr/>
+              <c:txPr>
+                <a:bodyPr/>
+                <a:lstStyle/>
+                <a:p>
+                  <a:pPr>
+                    <a:defRPr sz="1000" b="0" i="0" u="none" strike="noStrike">
+                      <a:solidFill>
+                        <a:srgbClr val="E2E8F0"/>
+                      </a:solidFill>
+                      <a:latin typeface="Segoe UI"/>
+                    </a:defRPr>
+                  </a:pPr>
+                </a:p>
+              </c:txPr>
+              <c:showLegendKey val="0"/>
+              <c:showVal val="0"/>
+              <c:showCatName val="0"/>
+              <c:showSerName val="0"/>
+              <c:showPercent val="1"/>
+              <c:showBubbleSize val="0"/>
+            </c:dLbl>
+            <c:dLbl>
+              <c:idx val="3"/>
+              <c:numFmt formatCode="0%" sourceLinked="0"/>
+              <c:spPr/>
+              <c:txPr>
+                <a:bodyPr/>
+                <a:lstStyle/>
+                <a:p>
+                  <a:pPr>
+                    <a:defRPr sz="1000" b="0" i="0" u="none" strike="noStrike">
+                      <a:solidFill>
+                        <a:srgbClr val="E2E8F0"/>
+                      </a:solidFill>
+                      <a:latin typeface="Segoe UI"/>
+                    </a:defRPr>
+                  </a:pPr>
+                </a:p>
+              </c:txPr>
+              <c:showLegendKey val="0"/>
+              <c:showVal val="0"/>
+              <c:showCatName val="0"/>
+              <c:showSerName val="0"/>
+              <c:showPercent val="1"/>
+              <c:showBubbleSize val="0"/>
+            </c:dLbl>
+            <c:dLbl>
+              <c:idx val="4"/>
+              <c:numFmt formatCode="0%" sourceLinked="0"/>
+              <c:spPr/>
+              <c:txPr>
+                <a:bodyPr/>
+                <a:lstStyle/>
+                <a:p>
+                  <a:pPr>
+                    <a:defRPr sz="1000" b="0" i="0" u="none" strike="noStrike">
+                      <a:solidFill>
+                        <a:srgbClr val="E2E8F0"/>
+                      </a:solidFill>
+                      <a:latin typeface="Segoe UI"/>
+                    </a:defRPr>
+                  </a:pPr>
+                </a:p>
+              </c:txPr>
+              <c:showLegendKey val="0"/>
+              <c:showVal val="0"/>
+              <c:showCatName val="0"/>
+              <c:showSerName val="0"/>
+              <c:showPercent val="1"/>
+              <c:showBubbleSize val="0"/>
+            </c:dLbl>
+            <c:numFmt formatCode="0%" sourceLinked="0"/>
+            <c:txPr>
+              <a:bodyPr/>
+              <a:lstStyle/>
+              <a:p>
+                <a:pPr>
+                  <a:defRPr sz="1800" b="0" i="0" u="none" strike="noStrike">
+                    <a:solidFill>
+                      <a:srgbClr val="000000"/>
+                    </a:solidFill>
+                    <a:latin typeface="Arial"/>
+                  </a:defRPr>
+                </a:pPr>
+              </a:p>
+            </c:txPr>
+            <c:showLegendKey val="0"/>
+            <c:showVal val="0"/>
+            <c:showCatName val="1"/>
+            <c:showSerName val="0"/>
+            <c:showPercent val="1"/>
+            <c:showBubbleSize val="0"/>
+            <c:showLeaderLines val="0"/>
+          </c:dLbls>
+          <c:cat>
+            <c:strRef>
+              <c:f>Sheet1!$A$2:$A$6</c:f>
+              <c:strCache>
+                <c:ptCount val="5"/>
+                <c:pt idx="0">
+                  <c:v>Cleaning</c:v>
+                </c:pt>
+                <c:pt idx="1">
+                  <c:v>Ingestion</c:v>
+                </c:pt>
+                <c:pt idx="2">
+                  <c:v>Enrichment</c:v>
+                </c:pt>
+                <c:pt idx="3">
+                  <c:v>Export and reporting</c:v>
+                </c:pt>
+                <c:pt idx="4">
+                  <c:v>Actual analysis</c:v>
+                </c:pt>
+              </c:strCache>
+            </c:strRef>
+          </c:cat>
+          <c:val>
+            <c:numRef>
+              <c:f>Sheet1!$B$2:$B$6</c:f>
+              <c:numCache>
+                <c:ptCount val="5"/>
+                <c:pt idx="0">
+                  <c:v>30</c:v>
+                </c:pt>
+                <c:pt idx="1">
+                  <c:v>20</c:v>
+                </c:pt>
+                <c:pt idx="2">
+                  <c:v>10</c:v>
+                </c:pt>
+                <c:pt idx="3">
+                  <c:v>10</c:v>
+                </c:pt>
+                <c:pt idx="4">
+                  <c:v>30</c:v>
+                </c:pt>
+              </c:numCache>
+            </c:numRef>
+          </c:val>
+        </c:ser>
+        <c:firstSliceAng val="0"/>
+        <c:holeSize val="62"/>
+      </c:doughnutChart>
+      <c:spPr>
+        <a:solidFill>
+          <a:srgbClr val="0D1420"/>
+        </a:solidFill>
+        <a:ln>
+          <a:noFill/>
+        </a:ln>
+        <a:effectLst/>
+      </c:spPr>
+    </c:plotArea>
+    <c:legend>
+      <c:legendPos val="r"/>
+      <c:overlay val="0"/>
+      <c:txPr>
+        <a:bodyPr/>
+        <a:lstStyle/>
+        <a:p>
+          <a:pPr>
+            <a:defRPr sz="1100">
+              <a:solidFill>
+                <a:srgbClr val="CBD5E1"/>
+              </a:solidFill>
+              <a:latin typeface="Segoe UI"/>
+              <a:cs typeface="Segoe UI"/>
+            </a:defRPr>
+          </a:pPr>
+          <a:endParaRPr lang="en-US"/>
+        </a:p>
+      </c:txPr>
+    </c:legend>
+    <c:plotVisOnly val="1"/>
+    <c:dispBlanksAs val="span"/>
+  </c:chart>
+  <c:spPr>
+    <a:solidFill>
+      <a:srgbClr val="0D1420"/>
+    </a:solidFill>
+    <a:ln w="12700" cap="flat">
+      <a:solidFill>
+        <a:srgbClr val="24365A"/>
+      </a:solidFill>
+    </a:ln>
+    <a:effectLst/>
+  </c:spPr>
+  <c:externalData r:id="rId1">
+    <c:autoUpdate val="0"/>
+  </c:externalData>
+</c:chartSpace>
+</file>
+
+<file path=ppt/charts/chart11.xml><?xml version="1.0" encoding="utf-8"?>
+<c:chartSpace xmlns:c="http://schemas.openxmlformats.org/drawingml/2006/chart" xmlns:a="http://schemas.openxmlformats.org/drawingml/2006/main" xmlns:r="http://schemas.openxmlformats.org/officeDocument/2006/relationships">
+  <c:date1904 val="0"/>
+  <c:roundedCorners val="1"/>
+  <c:chart>
+    <c:autoTitleDeleted val="1"/>
+    <c:plotArea>
+      <c:layout/>
+      <c:barChart>
+        <c:barDir val="col"/>
+        <c:grouping val="clustered"/>
+        <c:varyColors val="0"/>
+        <c:ser>
+          <c:idx val="0"/>
+          <c:order val="0"/>
+          <c:tx>
+            <c:strRef>
+              <c:f>Sheet1!$B$1</c:f>
+              <c:strCache>
+                <c:ptCount val="1"/>
+                <c:pt idx="0">
+                  <c:v>Share of codebase %</c:v>
+                </c:pt>
+              </c:strCache>
+            </c:strRef>
+          </c:tx>
+          <c:spPr>
+            <a:solidFill>
+              <a:srgbClr val="3B82F6"/>
+            </a:solidFill>
+            <a:effectLst/>
+          </c:spPr>
+          <c:invertIfNegative val="0"/>
+          <c:dLbls>
+            <c:numFmt formatCode="#,##0" sourceLinked="0"/>
+            <c:txPr>
+              <a:bodyPr/>
+              <a:lstStyle/>
+              <a:p>
+                <a:pPr>
+                  <a:defRPr b="0" i="0" strike="noStrike" sz="1000" u="none">
+                    <a:solidFill>
+                      <a:srgbClr val="E2E8F0"/>
+                    </a:solidFill>
+                    <a:latin typeface="Segoe UI"/>
+                  </a:defRPr>
+                </a:pPr>
+              </a:p>
+            </c:txPr>
+            <c:showLegendKey val="0"/>
+            <c:showVal val="1"/>
+            <c:showCatName val="0"/>
+            <c:showSerName val="0"/>
+            <c:showPercent val="0"/>
+            <c:showBubbleSize val="0"/>
+            <c:showLeaderLines val="0"/>
+          </c:dLbls>
+          <c:dPt>
+            <c:idx val="0"/>
+            <c:invertIfNegative val="0"/>
+            <c:bubble3D val="0"/>
+            <c:spPr>
+              <a:solidFill>
+                <a:srgbClr val="3B82F6"/>
+              </a:solidFill>
+              <a:effectLst/>
+            </c:spPr>
+          </c:dPt>
+          <c:dPt>
+            <c:idx val="1"/>
+            <c:invertIfNegative val="0"/>
+            <c:bubble3D val="0"/>
+            <c:spPr>
+              <a:solidFill>
+                <a:srgbClr val="06B6D4"/>
+              </a:solidFill>
+              <a:effectLst/>
+            </c:spPr>
+          </c:dPt>
+          <c:dPt>
+            <c:idx val="2"/>
+            <c:invertIfNegative val="0"/>
+            <c:bubble3D val="0"/>
+            <c:spPr>
+              <a:solidFill>
+                <a:srgbClr val="22D3A0"/>
+              </a:solidFill>
+              <a:effectLst/>
+            </c:spPr>
+          </c:dPt>
+          <c:dPt>
+            <c:idx val="3"/>
+            <c:invertIfNegative val="0"/>
+            <c:bubble3D val="0"/>
+            <c:spPr>
+              <a:solidFill>
+                <a:srgbClr val="F59E0B"/>
+              </a:solidFill>
+              <a:effectLst/>
+            </c:spPr>
+          </c:dPt>
+          <c:cat>
+            <c:multiLvlStrRef>
+              <c:f>Sheet1!$A$2:$A$5</c:f>
+              <c:multiLvlStrCache>
+                <c:ptCount val="4"/>
+                <c:lvl>
+                  <c:pt idx="0">
+                    <c:v>Cleaning</c:v>
+                  </c:pt>
+                  <c:pt idx="1">
+                    <c:v>Ingestion</c:v>
+                  </c:pt>
+                  <c:pt idx="2">
+                    <c:v>Enrichment</c:v>
+                  </c:pt>
+                  <c:pt idx="3">
+                    <c:v>Export and reporting</c:v>
+                  </c:pt>
+                </c:lvl>
+              </c:multiLvlStrCache>
+            </c:multiLvlStrRef>
+          </c:cat>
+          <c:val>
+            <c:numRef>
+              <c:f>Sheet1!$B$2:$B$5</c:f>
+              <c:numCache>
+                <c:formatCode>General</c:formatCode>
+                <c:ptCount val="4"/>
+                <c:pt idx="0">
+                  <c:v>35</c:v>
+                </c:pt>
+                <c:pt idx="1">
+                  <c:v>30</c:v>
+                </c:pt>
+                <c:pt idx="2">
+                  <c:v>20</c:v>
+                </c:pt>
+                <c:pt idx="3">
+                  <c:v>15</c:v>
+                </c:pt>
+              </c:numCache>
+            </c:numRef>
+          </c:val>
+        </c:ser>
+        <c:dLbls>
+          <c:numFmt formatCode="#,##0" sourceLinked="0"/>
+          <c:txPr>
+            <a:bodyPr/>
+            <a:lstStyle/>
+            <a:p>
+              <a:pPr>
+                <a:defRPr b="0" i="0" strike="noStrike" sz="1000" u="none">
+                  <a:solidFill>
+                    <a:srgbClr val="E2E8F0"/>
+                  </a:solidFill>
+                  <a:latin typeface="Segoe UI"/>
+                </a:defRPr>
+              </a:pPr>
+            </a:p>
+          </c:txPr>
+          <c:showLegendKey val="0"/>
+          <c:showVal val="1"/>
+          <c:showCatName val="0"/>
+          <c:showSerName val="0"/>
+          <c:showPercent val="0"/>
+          <c:showBubbleSize val="0"/>
+          <c:showLeaderLines val="0"/>
+        </c:dLbls>
+        <c:gapWidth val="55"/>
+        <c:overlap val="0"/>
+        <c:axId val="2094734554"/>
+        <c:axId val="2094734552"/>
+        <c:axId val="2094734556"/>
+      </c:barChart>
+      <c:catAx>
+        <c:axId val="2094734554"/>
+        <c:scaling>
+          <c:orientation val="minMax"/>
+        </c:scaling>
+        <c:delete val="0"/>
+        <c:axPos val="b"/>
+        <c:numFmt formatCode="General" sourceLinked="1"/>
+        <c:majorTickMark val="out"/>
+        <c:minorTickMark val="none"/>
+        <c:tickLblPos val="low"/>
+        <c:spPr>
+          <a:ln w="12700" cap="flat">
+            <a:solidFill>
+              <a:srgbClr val="24365A"/>
+            </a:solidFill>
+            <a:prstDash val="solid"/>
+            <a:round/>
+          </a:ln>
+        </c:spPr>
+        <c:txPr>
+          <a:bodyPr/>
+          <a:lstStyle/>
+          <a:p>
+            <a:pPr>
+              <a:defRPr sz="1100" b="0" i="0" u="none" strike="noStrike">
+                <a:solidFill>
+                  <a:srgbClr val="94A3B8"/>
+                </a:solidFill>
+                <a:latin typeface="Segoe UI"/>
+              </a:defRPr>
+            </a:pPr>
+            <a:endParaRPr lang="en-US"/>
+          </a:p>
+        </c:txPr>
+        <c:crossAx val="2094734552"/>
+        <c:crosses val="autoZero"/>
+        <c:auto val="1"/>
+        <c:lblAlgn val="ctr"/>
+        <c:noMultiLvlLbl val="1"/>
+      </c:catAx>
+      <c:valAx>
+        <c:axId val="2094734552"/>
+        <c:scaling>
+          <c:orientation val="minMax"/>
+        </c:scaling>
+        <c:delete val="0"/>
+        <c:axPos val="l"/>
+        <c:majorGridlines>
+          <c:spPr>
+            <a:ln w="12700" cap="flat">
+              <a:solidFill>
+                <a:srgbClr val="18243D"/>
+              </a:solidFill>
+              <a:prstDash val="solid"/>
+              <a:round/>
+            </a:ln>
+          </c:spPr>
+        </c:majorGridlines>
+        <c:numFmt formatCode="General" sourceLinked="0"/>
+        <c:majorTickMark val="out"/>
+        <c:minorTickMark val="none"/>
+        <c:tickLblPos val="nextTo"/>
+        <c:spPr>
+          <a:ln w="12700" cap="flat">
+            <a:solidFill>
+              <a:srgbClr val="24365A"/>
+            </a:solidFill>
+            <a:prstDash val="solid"/>
+            <a:round/>
+          </a:ln>
+        </c:spPr>
+        <c:txPr>
+          <a:bodyPr/>
+          <a:lstStyle/>
+          <a:p>
+            <a:pPr>
+              <a:defRPr sz="1000" b="0" i="0" u="none" strike="noStrike">
+                <a:solidFill>
+                  <a:srgbClr val="94A3B8"/>
+                </a:solidFill>
+                <a:latin typeface="Segoe UI"/>
+              </a:defRPr>
+            </a:pPr>
+            <a:endParaRPr lang="en-US"/>
+          </a:p>
+        </c:txPr>
+        <c:crossAx val="2094734554"/>
+        <c:crosses val="autoZero"/>
+        <c:crossBetween val="between"/>
+      </c:valAx>
+      <c:spPr>
+        <a:solidFill>
+          <a:srgbClr val="0D1420"/>
+        </a:solidFill>
+        <a:ln>
+          <a:noFill/>
+        </a:ln>
+        <a:effectLst/>
+      </c:spPr>
+    </c:plotArea>
+    <c:plotVisOnly val="1"/>
+    <c:dispBlanksAs val="span"/>
+  </c:chart>
+  <c:spPr>
+    <a:solidFill>
+      <a:srgbClr val="0D1420"/>
+    </a:solidFill>
+    <a:ln w="12700" cap="flat">
+      <a:solidFill>
+        <a:srgbClr val="24365A"/>
+      </a:solidFill>
+    </a:ln>
+    <a:effectLst/>
+  </c:spPr>
+  <c:externalData r:id="rId1">
+    <c:autoUpdate val="0"/>
+  </c:externalData>
+</c:chartSpace>
+</file>
+
+<file path=ppt/charts/chart12.xml><?xml version="1.0" encoding="utf-8"?>
+<c:chartSpace xmlns:c="http://schemas.openxmlformats.org/drawingml/2006/chart" xmlns:a="http://schemas.openxmlformats.org/drawingml/2006/main" xmlns:r="http://schemas.openxmlformats.org/officeDocument/2006/relationships">
+  <c:date1904 val="0"/>
+  <c:roundedCorners val="1"/>
+  <c:chart>
+    <c:autoTitleDeleted val="1"/>
+    <c:plotArea>
+      <c:layout/>
+      <c:lineChart>
+        <c:varyColors val="0"/>
+        <c:ser>
+          <c:idx val="0"/>
+          <c:order val="0"/>
+          <c:tx>
+            <c:strRef>
+              <c:f>Sheet1!$B$1</c:f>
+              <c:strCache>
+                <c:ptCount val="1"/>
+                <c:pt idx="0">
+                  <c:v>Glue hours</c:v>
+                </c:pt>
+              </c:strCache>
+            </c:strRef>
+          </c:tx>
+          <c:spPr>
+            <a:solidFill>
+              <a:srgbClr val="3B82F6"/>
+            </a:solidFill>
+            <a:ln w="31750" cap="flat">
+              <a:solidFill>
+                <a:srgbClr val="3B82F6"/>
+              </a:solidFill>
+              <a:prstDash val="solid"/>
+              <a:round/>
+            </a:ln>
+            <a:effectLst/>
+          </c:spPr>
+          <c:invertIfNegative val="0"/>
+          <c:dLbls>
+            <c:numFmt formatCode="#,##0" sourceLinked="0"/>
+            <c:txPr>
+              <a:bodyPr/>
+              <a:lstStyle/>
+              <a:p>
+                <a:pPr>
+                  <a:defRPr b="0" i="0" strike="noStrike" sz="1200" u="none">
+                    <a:solidFill>
+                      <a:srgbClr val="000000"/>
+                    </a:solidFill>
+                    <a:latin typeface="Arial"/>
+                  </a:defRPr>
+                </a:pPr>
+              </a:p>
+            </c:txPr>
+            <c:showLegendKey val="0"/>
+            <c:showVal val="0"/>
+            <c:showCatName val="0"/>
+            <c:showSerName val="0"/>
+            <c:showPercent val="0"/>
+            <c:showBubbleSize val="0"/>
+            <c:showLeaderLines val="0"/>
+          </c:dLbls>
+          <c:marker>
+            <c:symbol val="circle"/>
+            <c:size val="6"/>
+            <c:spPr>
+              <a:solidFill>
+                <a:srgbClr val="3B82F6"/>
+              </a:solidFill>
+              <a:ln w="9525" cap="flat">
+                <a:solidFill>
+                  <a:srgbClr val="3B82F6"/>
+                </a:solidFill>
+                <a:prstDash val="solid"/>
+                <a:round/>
+              </a:ln>
+              <a:effectLst/>
+            </c:spPr>
+          </c:marker>
+          <c:cat>
+            <c:multiLvlStrRef>
+              <c:f>Sheet1!$A$2:$A$6</c:f>
+              <c:multiLvlStrCache>
+                <c:ptCount val="5"/>
+                <c:lvl>
+                  <c:pt idx="0">
+                    <c:v>Kickoff</c:v>
+                  </c:pt>
+                  <c:pt idx="1">
+                    <c:v>Week 1</c:v>
+                  </c:pt>
+                  <c:pt idx="2">
+                    <c:v>Week 2</c:v>
+                  </c:pt>
+                  <c:pt idx="3">
+                    <c:v>Week 3</c:v>
+                  </c:pt>
+                  <c:pt idx="4">
+                    <c:v>Wrap-up</c:v>
+                  </c:pt>
+                </c:lvl>
+              </c:multiLvlStrCache>
+            </c:multiLvlStrRef>
+          </c:cat>
+          <c:val>
+            <c:numRef>
+              <c:f>Sheet1!$B$2:$B$6</c:f>
+              <c:numCache>
+                <c:formatCode>General</c:formatCode>
+                <c:ptCount val="5"/>
+                <c:pt idx="0">
+                  <c:v>14</c:v>
+                </c:pt>
+                <c:pt idx="1">
+                  <c:v>9</c:v>
+                </c:pt>
+                <c:pt idx="2">
+                  <c:v>5</c:v>
+                </c:pt>
+                <c:pt idx="3">
+                  <c:v>3</c:v>
+                </c:pt>
+                <c:pt idx="4">
+                  <c:v>2</c:v>
+                </c:pt>
+              </c:numCache>
+            </c:numRef>
+          </c:val>
+          <c:smooth val="0"/>
+        </c:ser>
+        <c:ser>
+          <c:idx val="1"/>
+          <c:order val="1"/>
+          <c:tx>
+            <c:strRef>
+              <c:f>Sheet1!$C$1</c:f>
+              <c:strCache>
+                <c:ptCount val="1"/>
+                <c:pt idx="0">
+                  <c:v>Analysis hours</c:v>
+                </c:pt>
+              </c:strCache>
+            </c:strRef>
+          </c:tx>
+          <c:spPr>
+            <a:solidFill>
+              <a:srgbClr val="06B6D4"/>
+            </a:solidFill>
+            <a:ln w="31750" cap="flat">
+              <a:solidFill>
+                <a:srgbClr val="06B6D4"/>
+              </a:solidFill>
+              <a:prstDash val="solid"/>
+              <a:round/>
+            </a:ln>
+            <a:effectLst/>
+          </c:spPr>
+          <c:invertIfNegative val="0"/>
+          <c:dLbls>
+            <c:numFmt formatCode="#,##0" sourceLinked="0"/>
+            <c:txPr>
+              <a:bodyPr/>
+              <a:lstStyle/>
+              <a:p>
+                <a:pPr>
+                  <a:defRPr b="0" i="0" strike="noStrike" sz="1200" u="none">
+                    <a:solidFill>
+                      <a:srgbClr val="000000"/>
+                    </a:solidFill>
+                    <a:latin typeface="Arial"/>
+                  </a:defRPr>
+                </a:pPr>
+              </a:p>
+            </c:txPr>
+            <c:showLegendKey val="0"/>
+            <c:showVal val="0"/>
+            <c:showCatName val="0"/>
+            <c:showSerName val="0"/>
+            <c:showPercent val="0"/>
+            <c:showBubbleSize val="0"/>
+            <c:showLeaderLines val="0"/>
+          </c:dLbls>
+          <c:marker>
+            <c:symbol val="circle"/>
+            <c:size val="6"/>
+            <c:spPr>
+              <a:solidFill>
+                <a:srgbClr val="06B6D4"/>
+              </a:solidFill>
+              <a:ln w="9525" cap="flat">
+                <a:solidFill>
+                  <a:srgbClr val="06B6D4"/>
+                </a:solidFill>
+                <a:prstDash val="solid"/>
+                <a:round/>
+              </a:ln>
+              <a:effectLst/>
+            </c:spPr>
+          </c:marker>
+          <c:cat>
+            <c:multiLvlStrRef>
+              <c:f>Sheet1!$A$2:$A$6</c:f>
+              <c:multiLvlStrCache>
+                <c:ptCount val="5"/>
+                <c:lvl>
+                  <c:pt idx="0">
+                    <c:v>Kickoff</c:v>
+                  </c:pt>
+                  <c:pt idx="1">
+                    <c:v>Week 1</c:v>
+                  </c:pt>
+                  <c:pt idx="2">
+                    <c:v>Week 2</c:v>
+                  </c:pt>
+                  <c:pt idx="3">
+                    <c:v>Week 3</c:v>
+                  </c:pt>
+                  <c:pt idx="4">
+                    <c:v>Wrap-up</c:v>
+                  </c:pt>
+                </c:lvl>
+              </c:multiLvlStrCache>
+            </c:multiLvlStrRef>
+          </c:cat>
+          <c:val>
+            <c:numRef>
+              <c:f>Sheet1!$C$2:$C$6</c:f>
+              <c:numCache>
+                <c:formatCode>General</c:formatCode>
+                <c:ptCount val="5"/>
+                <c:pt idx="0">
+                  <c:v>2</c:v>
+                </c:pt>
+                <c:pt idx="1">
+                  <c:v>5</c:v>
+                </c:pt>
+                <c:pt idx="2">
+                  <c:v>8</c:v>
+                </c:pt>
+                <c:pt idx="3">
+                  <c:v>11</c:v>
+                </c:pt>
+                <c:pt idx="4">
+                  <c:v>12</c:v>
+                </c:pt>
+              </c:numCache>
+            </c:numRef>
+          </c:val>
+          <c:smooth val="0"/>
+        </c:ser>
+        <c:dLbls>
+          <c:numFmt formatCode="#,##0" sourceLinked="0"/>
+          <c:txPr>
+            <a:bodyPr/>
+            <a:lstStyle/>
+            <a:p>
+              <a:pPr>
+                <a:defRPr b="0" i="0" strike="noStrike" sz="1200" u="none">
+                  <a:solidFill>
+                    <a:srgbClr val="000000"/>
+                  </a:solidFill>
+                  <a:latin typeface="Arial"/>
+                </a:defRPr>
+              </a:pPr>
+            </a:p>
+          </c:txPr>
+          <c:showLegendKey val="0"/>
+          <c:showVal val="0"/>
+          <c:showCatName val="0"/>
+          <c:showSerName val="0"/>
+          <c:showPercent val="0"/>
+          <c:showBubbleSize val="0"/>
+          <c:showLeaderLines val="0"/>
+        </c:dLbls>
+        <c:marker val="1"/>
+        <c:axId val="2094734554"/>
+        <c:axId val="2094734552"/>
+        <c:axId val="2094734556"/>
+      </c:lineChart>
+      <c:catAx>
+        <c:axId val="2094734554"/>
+        <c:scaling>
+          <c:orientation val="minMax"/>
+        </c:scaling>
+        <c:delete val="0"/>
+        <c:axPos val="b"/>
+        <c:numFmt formatCode="General" sourceLinked="1"/>
+        <c:majorTickMark val="out"/>
+        <c:minorTickMark val="none"/>
+        <c:tickLblPos val="low"/>
+        <c:spPr>
+          <a:ln w="12700" cap="flat">
+            <a:solidFill>
+              <a:srgbClr val="24365A"/>
+            </a:solidFill>
+            <a:prstDash val="solid"/>
+            <a:round/>
+          </a:ln>
+        </c:spPr>
+        <c:txPr>
+          <a:bodyPr/>
+          <a:lstStyle/>
+          <a:p>
+            <a:pPr>
+              <a:defRPr sz="1100" b="0" i="0" u="none" strike="noStrike">
+                <a:solidFill>
+                  <a:srgbClr val="94A3B8"/>
+                </a:solidFill>
+                <a:latin typeface="Segoe UI"/>
+              </a:defRPr>
+            </a:pPr>
+            <a:endParaRPr lang="en-US"/>
+          </a:p>
+        </c:txPr>
+        <c:crossAx val="2094734552"/>
+        <c:crosses val="autoZero"/>
+        <c:auto val="1"/>
+        <c:lblAlgn val="ctr"/>
+        <c:noMultiLvlLbl val="1"/>
+      </c:catAx>
+      <c:valAx>
+        <c:axId val="2094734552"/>
+        <c:scaling>
+          <c:orientation val="minMax"/>
+        </c:scaling>
+        <c:delete val="0"/>
+        <c:axPos val="l"/>
+        <c:majorGridlines>
+          <c:spPr>
+            <a:ln w="12700" cap="flat">
+              <a:solidFill>
+                <a:srgbClr val="18243D"/>
+              </a:solidFill>
+              <a:prstDash val="solid"/>
+              <a:round/>
+            </a:ln>
+          </c:spPr>
+        </c:majorGridlines>
+        <c:numFmt formatCode="General" sourceLinked="0"/>
+        <c:majorTickMark val="out"/>
+        <c:minorTickMark val="none"/>
+        <c:tickLblPos val="nextTo"/>
+        <c:spPr>
+          <a:ln w="12700" cap="flat">
+            <a:solidFill>
+              <a:srgbClr val="24365A"/>
+            </a:solidFill>
+            <a:prstDash val="solid"/>
+            <a:round/>
+          </a:ln>
+        </c:spPr>
+        <c:txPr>
+          <a:bodyPr/>
+          <a:lstStyle/>
+          <a:p>
+            <a:pPr>
+              <a:defRPr sz="1000" b="0" i="0" u="none" strike="noStrike">
+                <a:solidFill>
+                  <a:srgbClr val="94A3B8"/>
+                </a:solidFill>
+                <a:latin typeface="Segoe UI"/>
+              </a:defRPr>
+            </a:pPr>
+            <a:endParaRPr lang="en-US"/>
+          </a:p>
+        </c:txPr>
+        <c:crossAx val="2094734554"/>
+        <c:crosses val="autoZero"/>
+        <c:crossBetween val="between"/>
+      </c:valAx>
+      <c:spPr>
+        <a:solidFill>
+          <a:srgbClr val="0D1420"/>
+        </a:solidFill>
+        <a:ln>
+          <a:noFill/>
+        </a:ln>
+        <a:effectLst/>
+      </c:spPr>
+    </c:plotArea>
+    <c:legend>
+      <c:legendPos val="b"/>
+      <c:overlay val="0"/>
+      <c:txPr>
+        <a:bodyPr/>
+        <a:lstStyle/>
+        <a:p>
+          <a:pPr>
+            <a:defRPr sz="1100">
+              <a:solidFill>
+                <a:srgbClr val="CBD5E1"/>
+              </a:solidFill>
+              <a:latin typeface="Segoe UI"/>
+              <a:cs typeface="Segoe UI"/>
+            </a:defRPr>
+          </a:pPr>
+          <a:endParaRPr lang="en-US"/>
+        </a:p>
+      </c:txPr>
+    </c:legend>
+    <c:plotVisOnly val="1"/>
+    <c:dispBlanksAs val="span"/>
+  </c:chart>
+  <c:spPr>
+    <a:solidFill>
+      <a:srgbClr val="0D1420"/>
+    </a:solidFill>
+    <a:ln w="12700" cap="flat">
+      <a:solidFill>
+        <a:srgbClr val="24365A"/>
+      </a:solidFill>
+    </a:ln>
+    <a:effectLst/>
+  </c:spPr>
+  <c:externalData r:id="rId1">
+    <c:autoUpdate val="0"/>
+  </c:externalData>
+</c:chartSpace>
 </file>
 
 <file path=ppt/notesMasters/notesMaster1.xml><?xml version="1.0" encoding="utf-8"?>
@@ -551,6 +1610,534 @@
 </p:notes>
 </file>
 
+<file path=ppt/notesSlides/notesSlide10.xml><?xml version="1.0" encoding="utf-8"?>
+<p:notes xmlns:a="http://schemas.openxmlformats.org/drawingml/2006/main" xmlns:r="http://schemas.openxmlformats.org/officeDocument/2006/relationships" xmlns:p="http://schemas.openxmlformats.org/presentationml/2006/main">
+  <p:cSld>
+    <p:spTree>
+      <p:nvGrpSpPr>
+        <p:cNvPr id="1" name=""/>
+        <p:cNvGrpSpPr/>
+        <p:nvPr/>
+      </p:nvGrpSpPr>
+      <p:grpSpPr>
+        <a:xfrm>
+          <a:off x="0" y="0"/>
+          <a:ext cx="0" cy="0"/>
+          <a:chOff x="0" y="0"/>
+          <a:chExt cx="0" cy="0"/>
+        </a:xfrm>
+      </p:grpSpPr>
+      <p:sp>
+        <p:nvSpPr>
+          <p:cNvPr id="2" name="Slide Image Placeholder 1"/>
+          <p:cNvSpPr>
+            <a:spLocks noGrp="1" noRot="1" noChangeAspect="1"/>
+          </p:cNvSpPr>
+          <p:nvPr>
+            <p:ph type="sldImg"/>
+          </p:nvPr>
+        </p:nvSpPr>
+        <p:spPr/>
+      </p:sp>
+      <p:sp>
+        <p:nvSpPr>
+          <p:cNvPr id="3" name="Notes Placeholder 2"/>
+          <p:cNvSpPr>
+            <a:spLocks noGrp="1"/>
+          </p:cNvSpPr>
+          <p:nvPr>
+            <p:ph type="body" idx="1"/>
+          </p:nvPr>
+        </p:nvSpPr>
+        <p:spPr/>
+        <p:txBody>
+          <a:bodyPr/>
+          <a:lstStyle/>
+          <a:p>
+            <a:r>
+              <a:rPr lang="en-US" dirty="0"/>
+              <a:t/>
+            </a:r>
+            <a:endParaRPr lang="en-US" dirty="0"/>
+          </a:p>
+        </p:txBody>
+      </p:sp>
+      <p:sp>
+        <p:nvSpPr>
+          <p:cNvPr id="4" name="Slide Number Placeholder 3"/>
+          <p:cNvSpPr>
+            <a:spLocks noGrp="1"/>
+          </p:cNvSpPr>
+          <p:nvPr>
+            <p:ph type="sldNum" sz="quarter" idx="10"/>
+          </p:nvPr>
+        </p:nvSpPr>
+        <p:spPr/>
+        <p:txBody>
+          <a:bodyPr/>
+          <a:lstStyle/>
+          <a:p>
+            <a:fld id="{F7021451-1387-4CA6-816F-3879F97B5CBC}" type="slidenum">
+              <a:rPr lang="en-US"/>
+              <a:t>10</a:t>
+            </a:fld>
+            <a:endParaRPr lang="en-US"/>
+          </a:p>
+        </p:txBody>
+      </p:sp>
+    </p:spTree>
+    <p:extLst>
+      <p:ext uri="{BB962C8B-B14F-4D97-AF65-F5344CB8AC3E}">
+        <p14:creationId xmlns:p14="http://schemas.microsoft.com/office/powerpoint/2010/main" val="1024086991"/>
+      </p:ext>
+    </p:extLst>
+  </p:cSld>
+  <p:clrMapOvr>
+    <a:masterClrMapping/>
+  </p:clrMapOvr>
+</p:notes>
+</file>
+
+<file path=ppt/notesSlides/notesSlide11.xml><?xml version="1.0" encoding="utf-8"?>
+<p:notes xmlns:a="http://schemas.openxmlformats.org/drawingml/2006/main" xmlns:r="http://schemas.openxmlformats.org/officeDocument/2006/relationships" xmlns:p="http://schemas.openxmlformats.org/presentationml/2006/main">
+  <p:cSld>
+    <p:spTree>
+      <p:nvGrpSpPr>
+        <p:cNvPr id="1" name=""/>
+        <p:cNvGrpSpPr/>
+        <p:nvPr/>
+      </p:nvGrpSpPr>
+      <p:grpSpPr>
+        <a:xfrm>
+          <a:off x="0" y="0"/>
+          <a:ext cx="0" cy="0"/>
+          <a:chOff x="0" y="0"/>
+          <a:chExt cx="0" cy="0"/>
+        </a:xfrm>
+      </p:grpSpPr>
+      <p:sp>
+        <p:nvSpPr>
+          <p:cNvPr id="2" name="Slide Image Placeholder 1"/>
+          <p:cNvSpPr>
+            <a:spLocks noGrp="1" noRot="1" noChangeAspect="1"/>
+          </p:cNvSpPr>
+          <p:nvPr>
+            <p:ph type="sldImg"/>
+          </p:nvPr>
+        </p:nvSpPr>
+        <p:spPr/>
+      </p:sp>
+      <p:sp>
+        <p:nvSpPr>
+          <p:cNvPr id="3" name="Notes Placeholder 2"/>
+          <p:cNvSpPr>
+            <a:spLocks noGrp="1"/>
+          </p:cNvSpPr>
+          <p:nvPr>
+            <p:ph type="body" idx="1"/>
+          </p:nvPr>
+        </p:nvSpPr>
+        <p:spPr/>
+        <p:txBody>
+          <a:bodyPr/>
+          <a:lstStyle/>
+          <a:p>
+            <a:r>
+              <a:rPr lang="en-US" dirty="0"/>
+              <a:t/>
+            </a:r>
+            <a:endParaRPr lang="en-US" dirty="0"/>
+          </a:p>
+        </p:txBody>
+      </p:sp>
+      <p:sp>
+        <p:nvSpPr>
+          <p:cNvPr id="4" name="Slide Number Placeholder 3"/>
+          <p:cNvSpPr>
+            <a:spLocks noGrp="1"/>
+          </p:cNvSpPr>
+          <p:nvPr>
+            <p:ph type="sldNum" sz="quarter" idx="10"/>
+          </p:nvPr>
+        </p:nvSpPr>
+        <p:spPr/>
+        <p:txBody>
+          <a:bodyPr/>
+          <a:lstStyle/>
+          <a:p>
+            <a:fld id="{F7021451-1387-4CA6-816F-3879F97B5CBC}" type="slidenum">
+              <a:rPr lang="en-US"/>
+              <a:t>11</a:t>
+            </a:fld>
+            <a:endParaRPr lang="en-US"/>
+          </a:p>
+        </p:txBody>
+      </p:sp>
+    </p:spTree>
+    <p:extLst>
+      <p:ext uri="{BB962C8B-B14F-4D97-AF65-F5344CB8AC3E}">
+        <p14:creationId xmlns:p14="http://schemas.microsoft.com/office/powerpoint/2010/main" val="1024086991"/>
+      </p:ext>
+    </p:extLst>
+  </p:cSld>
+  <p:clrMapOvr>
+    <a:masterClrMapping/>
+  </p:clrMapOvr>
+</p:notes>
+</file>
+
+<file path=ppt/notesSlides/notesSlide12.xml><?xml version="1.0" encoding="utf-8"?>
+<p:notes xmlns:a="http://schemas.openxmlformats.org/drawingml/2006/main" xmlns:r="http://schemas.openxmlformats.org/officeDocument/2006/relationships" xmlns:p="http://schemas.openxmlformats.org/presentationml/2006/main">
+  <p:cSld>
+    <p:spTree>
+      <p:nvGrpSpPr>
+        <p:cNvPr id="1" name=""/>
+        <p:cNvGrpSpPr/>
+        <p:nvPr/>
+      </p:nvGrpSpPr>
+      <p:grpSpPr>
+        <a:xfrm>
+          <a:off x="0" y="0"/>
+          <a:ext cx="0" cy="0"/>
+          <a:chOff x="0" y="0"/>
+          <a:chExt cx="0" cy="0"/>
+        </a:xfrm>
+      </p:grpSpPr>
+      <p:sp>
+        <p:nvSpPr>
+          <p:cNvPr id="2" name="Slide Image Placeholder 1"/>
+          <p:cNvSpPr>
+            <a:spLocks noGrp="1" noRot="1" noChangeAspect="1"/>
+          </p:cNvSpPr>
+          <p:nvPr>
+            <p:ph type="sldImg"/>
+          </p:nvPr>
+        </p:nvSpPr>
+        <p:spPr/>
+      </p:sp>
+      <p:sp>
+        <p:nvSpPr>
+          <p:cNvPr id="3" name="Notes Placeholder 2"/>
+          <p:cNvSpPr>
+            <a:spLocks noGrp="1"/>
+          </p:cNvSpPr>
+          <p:nvPr>
+            <p:ph type="body" idx="1"/>
+          </p:nvPr>
+        </p:nvSpPr>
+        <p:spPr/>
+        <p:txBody>
+          <a:bodyPr/>
+          <a:lstStyle/>
+          <a:p>
+            <a:r>
+              <a:rPr lang="en-US" dirty="0"/>
+              <a:t/>
+            </a:r>
+            <a:endParaRPr lang="en-US" dirty="0"/>
+          </a:p>
+        </p:txBody>
+      </p:sp>
+      <p:sp>
+        <p:nvSpPr>
+          <p:cNvPr id="4" name="Slide Number Placeholder 3"/>
+          <p:cNvSpPr>
+            <a:spLocks noGrp="1"/>
+          </p:cNvSpPr>
+          <p:nvPr>
+            <p:ph type="sldNum" sz="quarter" idx="10"/>
+          </p:nvPr>
+        </p:nvSpPr>
+        <p:spPr/>
+        <p:txBody>
+          <a:bodyPr/>
+          <a:lstStyle/>
+          <a:p>
+            <a:fld id="{F7021451-1387-4CA6-816F-3879F97B5CBC}" type="slidenum">
+              <a:rPr lang="en-US"/>
+              <a:t>12</a:t>
+            </a:fld>
+            <a:endParaRPr lang="en-US"/>
+          </a:p>
+        </p:txBody>
+      </p:sp>
+    </p:spTree>
+    <p:extLst>
+      <p:ext uri="{BB962C8B-B14F-4D97-AF65-F5344CB8AC3E}">
+        <p14:creationId xmlns:p14="http://schemas.microsoft.com/office/powerpoint/2010/main" val="1024086991"/>
+      </p:ext>
+    </p:extLst>
+  </p:cSld>
+  <p:clrMapOvr>
+    <a:masterClrMapping/>
+  </p:clrMapOvr>
+</p:notes>
+</file>
+
+<file path=ppt/notesSlides/notesSlide13.xml><?xml version="1.0" encoding="utf-8"?>
+<p:notes xmlns:a="http://schemas.openxmlformats.org/drawingml/2006/main" xmlns:r="http://schemas.openxmlformats.org/officeDocument/2006/relationships" xmlns:p="http://schemas.openxmlformats.org/presentationml/2006/main">
+  <p:cSld>
+    <p:spTree>
+      <p:nvGrpSpPr>
+        <p:cNvPr id="1" name=""/>
+        <p:cNvGrpSpPr/>
+        <p:nvPr/>
+      </p:nvGrpSpPr>
+      <p:grpSpPr>
+        <a:xfrm>
+          <a:off x="0" y="0"/>
+          <a:ext cx="0" cy="0"/>
+          <a:chOff x="0" y="0"/>
+          <a:chExt cx="0" cy="0"/>
+        </a:xfrm>
+      </p:grpSpPr>
+      <p:sp>
+        <p:nvSpPr>
+          <p:cNvPr id="2" name="Slide Image Placeholder 1"/>
+          <p:cNvSpPr>
+            <a:spLocks noGrp="1" noRot="1" noChangeAspect="1"/>
+          </p:cNvSpPr>
+          <p:nvPr>
+            <p:ph type="sldImg"/>
+          </p:nvPr>
+        </p:nvSpPr>
+        <p:spPr/>
+      </p:sp>
+      <p:sp>
+        <p:nvSpPr>
+          <p:cNvPr id="3" name="Notes Placeholder 2"/>
+          <p:cNvSpPr>
+            <a:spLocks noGrp="1"/>
+          </p:cNvSpPr>
+          <p:nvPr>
+            <p:ph type="body" idx="1"/>
+          </p:nvPr>
+        </p:nvSpPr>
+        <p:spPr/>
+        <p:txBody>
+          <a:bodyPr/>
+          <a:lstStyle/>
+          <a:p>
+            <a:r>
+              <a:rPr lang="en-US" dirty="0"/>
+              <a:t/>
+            </a:r>
+            <a:endParaRPr lang="en-US" dirty="0"/>
+          </a:p>
+        </p:txBody>
+      </p:sp>
+      <p:sp>
+        <p:nvSpPr>
+          <p:cNvPr id="4" name="Slide Number Placeholder 3"/>
+          <p:cNvSpPr>
+            <a:spLocks noGrp="1"/>
+          </p:cNvSpPr>
+          <p:nvPr>
+            <p:ph type="sldNum" sz="quarter" idx="10"/>
+          </p:nvPr>
+        </p:nvSpPr>
+        <p:spPr/>
+        <p:txBody>
+          <a:bodyPr/>
+          <a:lstStyle/>
+          <a:p>
+            <a:fld id="{F7021451-1387-4CA6-816F-3879F97B5CBC}" type="slidenum">
+              <a:rPr lang="en-US"/>
+              <a:t>13</a:t>
+            </a:fld>
+            <a:endParaRPr lang="en-US"/>
+          </a:p>
+        </p:txBody>
+      </p:sp>
+    </p:spTree>
+    <p:extLst>
+      <p:ext uri="{BB962C8B-B14F-4D97-AF65-F5344CB8AC3E}">
+        <p14:creationId xmlns:p14="http://schemas.microsoft.com/office/powerpoint/2010/main" val="1024086991"/>
+      </p:ext>
+    </p:extLst>
+  </p:cSld>
+  <p:clrMapOvr>
+    <a:masterClrMapping/>
+  </p:clrMapOvr>
+</p:notes>
+</file>
+
+<file path=ppt/notesSlides/notesSlide14.xml><?xml version="1.0" encoding="utf-8"?>
+<p:notes xmlns:a="http://schemas.openxmlformats.org/drawingml/2006/main" xmlns:r="http://schemas.openxmlformats.org/officeDocument/2006/relationships" xmlns:p="http://schemas.openxmlformats.org/presentationml/2006/main">
+  <p:cSld>
+    <p:spTree>
+      <p:nvGrpSpPr>
+        <p:cNvPr id="1" name=""/>
+        <p:cNvGrpSpPr/>
+        <p:nvPr/>
+      </p:nvGrpSpPr>
+      <p:grpSpPr>
+        <a:xfrm>
+          <a:off x="0" y="0"/>
+          <a:ext cx="0" cy="0"/>
+          <a:chOff x="0" y="0"/>
+          <a:chExt cx="0" cy="0"/>
+        </a:xfrm>
+      </p:grpSpPr>
+      <p:sp>
+        <p:nvSpPr>
+          <p:cNvPr id="2" name="Slide Image Placeholder 1"/>
+          <p:cNvSpPr>
+            <a:spLocks noGrp="1" noRot="1" noChangeAspect="1"/>
+          </p:cNvSpPr>
+          <p:nvPr>
+            <p:ph type="sldImg"/>
+          </p:nvPr>
+        </p:nvSpPr>
+        <p:spPr/>
+      </p:sp>
+      <p:sp>
+        <p:nvSpPr>
+          <p:cNvPr id="3" name="Notes Placeholder 2"/>
+          <p:cNvSpPr>
+            <a:spLocks noGrp="1"/>
+          </p:cNvSpPr>
+          <p:nvPr>
+            <p:ph type="body" idx="1"/>
+          </p:nvPr>
+        </p:nvSpPr>
+        <p:spPr/>
+        <p:txBody>
+          <a:bodyPr/>
+          <a:lstStyle/>
+          <a:p>
+            <a:r>
+              <a:rPr lang="en-US" dirty="0"/>
+              <a:t/>
+            </a:r>
+            <a:endParaRPr lang="en-US" dirty="0"/>
+          </a:p>
+        </p:txBody>
+      </p:sp>
+      <p:sp>
+        <p:nvSpPr>
+          <p:cNvPr id="4" name="Slide Number Placeholder 3"/>
+          <p:cNvSpPr>
+            <a:spLocks noGrp="1"/>
+          </p:cNvSpPr>
+          <p:nvPr>
+            <p:ph type="sldNum" sz="quarter" idx="10"/>
+          </p:nvPr>
+        </p:nvSpPr>
+        <p:spPr/>
+        <p:txBody>
+          <a:bodyPr/>
+          <a:lstStyle/>
+          <a:p>
+            <a:fld id="{F7021451-1387-4CA6-816F-3879F97B5CBC}" type="slidenum">
+              <a:rPr lang="en-US"/>
+              <a:t>14</a:t>
+            </a:fld>
+            <a:endParaRPr lang="en-US"/>
+          </a:p>
+        </p:txBody>
+      </p:sp>
+    </p:spTree>
+    <p:extLst>
+      <p:ext uri="{BB962C8B-B14F-4D97-AF65-F5344CB8AC3E}">
+        <p14:creationId xmlns:p14="http://schemas.microsoft.com/office/powerpoint/2010/main" val="1024086991"/>
+      </p:ext>
+    </p:extLst>
+  </p:cSld>
+  <p:clrMapOvr>
+    <a:masterClrMapping/>
+  </p:clrMapOvr>
+</p:notes>
+</file>
+
+<file path=ppt/notesSlides/notesSlide15.xml><?xml version="1.0" encoding="utf-8"?>
+<p:notes xmlns:a="http://schemas.openxmlformats.org/drawingml/2006/main" xmlns:r="http://schemas.openxmlformats.org/officeDocument/2006/relationships" xmlns:p="http://schemas.openxmlformats.org/presentationml/2006/main">
+  <p:cSld>
+    <p:spTree>
+      <p:nvGrpSpPr>
+        <p:cNvPr id="1" name=""/>
+        <p:cNvGrpSpPr/>
+        <p:nvPr/>
+      </p:nvGrpSpPr>
+      <p:grpSpPr>
+        <a:xfrm>
+          <a:off x="0" y="0"/>
+          <a:ext cx="0" cy="0"/>
+          <a:chOff x="0" y="0"/>
+          <a:chExt cx="0" cy="0"/>
+        </a:xfrm>
+      </p:grpSpPr>
+      <p:sp>
+        <p:nvSpPr>
+          <p:cNvPr id="2" name="Slide Image Placeholder 1"/>
+          <p:cNvSpPr>
+            <a:spLocks noGrp="1" noRot="1" noChangeAspect="1"/>
+          </p:cNvSpPr>
+          <p:nvPr>
+            <p:ph type="sldImg"/>
+          </p:nvPr>
+        </p:nvSpPr>
+        <p:spPr/>
+      </p:sp>
+      <p:sp>
+        <p:nvSpPr>
+          <p:cNvPr id="3" name="Notes Placeholder 2"/>
+          <p:cNvSpPr>
+            <a:spLocks noGrp="1"/>
+          </p:cNvSpPr>
+          <p:nvPr>
+            <p:ph type="body" idx="1"/>
+          </p:nvPr>
+        </p:nvSpPr>
+        <p:spPr/>
+        <p:txBody>
+          <a:bodyPr/>
+          <a:lstStyle/>
+          <a:p>
+            <a:r>
+              <a:rPr lang="en-US" dirty="0"/>
+              <a:t/>
+            </a:r>
+            <a:endParaRPr lang="en-US" dirty="0"/>
+          </a:p>
+        </p:txBody>
+      </p:sp>
+      <p:sp>
+        <p:nvSpPr>
+          <p:cNvPr id="4" name="Slide Number Placeholder 3"/>
+          <p:cNvSpPr>
+            <a:spLocks noGrp="1"/>
+          </p:cNvSpPr>
+          <p:nvPr>
+            <p:ph type="sldNum" sz="quarter" idx="10"/>
+          </p:nvPr>
+        </p:nvSpPr>
+        <p:spPr/>
+        <p:txBody>
+          <a:bodyPr/>
+          <a:lstStyle/>
+          <a:p>
+            <a:fld id="{F7021451-1387-4CA6-816F-3879F97B5CBC}" type="slidenum">
+              <a:rPr lang="en-US"/>
+              <a:t>15</a:t>
+            </a:fld>
+            <a:endParaRPr lang="en-US"/>
+          </a:p>
+        </p:txBody>
+      </p:sp>
+    </p:spTree>
+    <p:extLst>
+      <p:ext uri="{BB962C8B-B14F-4D97-AF65-F5344CB8AC3E}">
+        <p14:creationId xmlns:p14="http://schemas.microsoft.com/office/powerpoint/2010/main" val="1024086991"/>
+      </p:ext>
+    </p:extLst>
+  </p:cSld>
+  <p:clrMapOvr>
+    <a:masterClrMapping/>
+  </p:clrMapOvr>
+</p:notes>
+</file>
+
 <file path=ppt/notesSlides/notesSlide2.xml><?xml version="1.0" encoding="utf-8"?>
 <p:notes xmlns:a="http://schemas.openxmlformats.org/drawingml/2006/main" xmlns:r="http://schemas.openxmlformats.org/officeDocument/2006/relationships" xmlns:p="http://schemas.openxmlformats.org/presentationml/2006/main">
   <p:cSld>
@@ -1149,6 +2736,94 @@
             <a:fld id="{F7021451-1387-4CA6-816F-3879F97B5CBC}" type="slidenum">
               <a:rPr lang="en-US"/>
               <a:t>8</a:t>
+            </a:fld>
+            <a:endParaRPr lang="en-US"/>
+          </a:p>
+        </p:txBody>
+      </p:sp>
+    </p:spTree>
+    <p:extLst>
+      <p:ext uri="{BB962C8B-B14F-4D97-AF65-F5344CB8AC3E}">
+        <p14:creationId xmlns:p14="http://schemas.microsoft.com/office/powerpoint/2010/main" val="1024086991"/>
+      </p:ext>
+    </p:extLst>
+  </p:cSld>
+  <p:clrMapOvr>
+    <a:masterClrMapping/>
+  </p:clrMapOvr>
+</p:notes>
+</file>
+
+<file path=ppt/notesSlides/notesSlide9.xml><?xml version="1.0" encoding="utf-8"?>
+<p:notes xmlns:a="http://schemas.openxmlformats.org/drawingml/2006/main" xmlns:r="http://schemas.openxmlformats.org/officeDocument/2006/relationships" xmlns:p="http://schemas.openxmlformats.org/presentationml/2006/main">
+  <p:cSld>
+    <p:spTree>
+      <p:nvGrpSpPr>
+        <p:cNvPr id="1" name=""/>
+        <p:cNvGrpSpPr/>
+        <p:nvPr/>
+      </p:nvGrpSpPr>
+      <p:grpSpPr>
+        <a:xfrm>
+          <a:off x="0" y="0"/>
+          <a:ext cx="0" cy="0"/>
+          <a:chOff x="0" y="0"/>
+          <a:chExt cx="0" cy="0"/>
+        </a:xfrm>
+      </p:grpSpPr>
+      <p:sp>
+        <p:nvSpPr>
+          <p:cNvPr id="2" name="Slide Image Placeholder 1"/>
+          <p:cNvSpPr>
+            <a:spLocks noGrp="1" noRot="1" noChangeAspect="1"/>
+          </p:cNvSpPr>
+          <p:nvPr>
+            <p:ph type="sldImg"/>
+          </p:nvPr>
+        </p:nvSpPr>
+        <p:spPr/>
+      </p:sp>
+      <p:sp>
+        <p:nvSpPr>
+          <p:cNvPr id="3" name="Notes Placeholder 2"/>
+          <p:cNvSpPr>
+            <a:spLocks noGrp="1"/>
+          </p:cNvSpPr>
+          <p:nvPr>
+            <p:ph type="body" idx="1"/>
+          </p:nvPr>
+        </p:nvSpPr>
+        <p:spPr/>
+        <p:txBody>
+          <a:bodyPr/>
+          <a:lstStyle/>
+          <a:p>
+            <a:r>
+              <a:rPr lang="en-US" dirty="0"/>
+              <a:t/>
+            </a:r>
+            <a:endParaRPr lang="en-US" dirty="0"/>
+          </a:p>
+        </p:txBody>
+      </p:sp>
+      <p:sp>
+        <p:nvSpPr>
+          <p:cNvPr id="4" name="Slide Number Placeholder 3"/>
+          <p:cNvSpPr>
+            <a:spLocks noGrp="1"/>
+          </p:cNvSpPr>
+          <p:nvPr>
+            <p:ph type="sldNum" sz="quarter" idx="10"/>
+          </p:nvPr>
+        </p:nvSpPr>
+        <p:spPr/>
+        <p:txBody>
+          <a:bodyPr/>
+          <a:lstStyle/>
+          <a:p>
+            <a:fld id="{F7021451-1387-4CA6-816F-3879F97B5CBC}" type="slidenum">
+              <a:rPr lang="en-US"/>
+              <a:t>9</a:t>
             </a:fld>
             <a:endParaRPr lang="en-US"/>
           </a:p>
@@ -1546,7 +3221,7 @@
         </p:nvSpPr>
         <p:spPr>
           <a:xfrm>
-            <a:off x="822960" y="1554480"/>
+            <a:off x="822960" y="1783080"/>
             <a:ext cx="10515600" cy="457200"/>
           </a:xfrm>
           <a:prstGeom prst="rect">
@@ -1571,7 +3246,7 @@
                 <a:ea typeface="Consolas" pitchFamily="34" charset="-122"/>
                 <a:cs typeface="Consolas" pitchFamily="34" charset="-120"/>
               </a:rPr>
-              <a:t>OPEN SOURCE · 4,305 LOC</a:t>
+              <a:t>ZALIN PLATFORM · OPEN SOURCE</a:t>
             </a:r>
             <a:endParaRPr lang="en-US" sz="1400" dirty="0"/>
           </a:p>
@@ -1586,7 +3261,7 @@
         <p:spPr>
           <a:xfrm>
             <a:off x="822960" y="2286000"/>
-            <a:ext cx="10515600" cy="1737360"/>
+            <a:ext cx="10607040" cy="1691640"/>
           </a:xfrm>
           <a:prstGeom prst="rect">
             <a:avLst/>
@@ -1602,7 +3277,7 @@
               <a:buNone/>
             </a:pPr>
             <a:r>
-              <a:rPr lang="en-US" sz="4400" b="1" dirty="0">
+              <a:rPr lang="en-US" sz="4100" b="1" dirty="0">
                 <a:solidFill>
                   <a:srgbClr val="FFFFFF"/>
                 </a:solidFill>
@@ -1612,7 +3287,7 @@
               </a:rPr>
               <a:t>Open Data Intelligence Suite</a:t>
             </a:r>
-            <a:endParaRPr lang="en-US" sz="4400" dirty="0"/>
+            <a:endParaRPr lang="en-US" sz="4100" dirty="0"/>
           </a:p>
         </p:txBody>
       </p:sp>
@@ -1624,8 +3299,8 @@
         </p:nvSpPr>
         <p:spPr>
           <a:xfrm>
-            <a:off x="822960" y="4206240"/>
-            <a:ext cx="10515600" cy="914400"/>
+            <a:off x="822960" y="4023360"/>
+            <a:ext cx="10058400" cy="777240"/>
           </a:xfrm>
           <a:prstGeom prst="rect">
             <a:avLst/>
@@ -1641,7 +3316,7 @@
               <a:buNone/>
             </a:pPr>
             <a:r>
-              <a:rPr lang="en-US" sz="1600" dirty="0">
+              <a:rPr lang="en-US" sz="1700" dirty="0">
                 <a:solidFill>
                   <a:srgbClr val="94A3B8"/>
                 </a:solidFill>
@@ -1649,21 +3324,83 @@
                 <a:ea typeface="Segoe UI" pitchFamily="34" charset="-122"/>
                 <a:cs typeface="Segoe UI" pitchFamily="34" charset="-120"/>
               </a:rPr>
-              <a:t>Ingest, clean, enrich, report - without rewriting the glue · Rezalian Vatiady</a:t>
-            </a:r>
-            <a:endParaRPr lang="en-US" sz="1600" dirty="0"/>
-          </a:p>
-        </p:txBody>
-      </p:sp>
-      <p:sp>
-        <p:nvSpPr>
-          <p:cNvPr id="7" name="Text 5"/>
-          <p:cNvSpPr/>
-          <p:nvPr/>
-        </p:nvSpPr>
-        <p:spPr>
-          <a:xfrm>
-            <a:off x="10698480" y="6355080"/>
+              <a:t>Ingest, clean, enrich, report - without rewriting the glue</a:t>
+            </a:r>
+            <a:endParaRPr lang="en-US" sz="1700" dirty="0"/>
+          </a:p>
+        </p:txBody>
+      </p:sp>
+      <p:sp>
+        <p:nvSpPr>
+          <p:cNvPr id="7" name="Shape 5"/>
+          <p:cNvSpPr/>
+          <p:nvPr/>
+        </p:nvSpPr>
+        <p:spPr>
+          <a:xfrm>
+            <a:off x="822960" y="5440680"/>
+            <a:ext cx="4114800" cy="0"/>
+          </a:xfrm>
+          <a:prstGeom prst="line">
+            <a:avLst/>
+          </a:prstGeom>
+          <a:noFill/>
+          <a:ln w="31750">
+            <a:solidFill>
+              <a:srgbClr val="3B82F6"/>
+            </a:solidFill>
+            <a:prstDash val="solid"/>
+          </a:ln>
+        </p:spPr>
+      </p:sp>
+      <p:sp>
+        <p:nvSpPr>
+          <p:cNvPr id="8" name="Text 6"/>
+          <p:cNvSpPr/>
+          <p:nvPr/>
+        </p:nvSpPr>
+        <p:spPr>
+          <a:xfrm>
+            <a:off x="822960" y="5596128"/>
+            <a:ext cx="10058400" cy="457200"/>
+          </a:xfrm>
+          <a:prstGeom prst="rect">
+            <a:avLst/>
+          </a:prstGeom>
+          <a:noFill/>
+          <a:ln/>
+        </p:spPr>
+        <p:txBody>
+          <a:bodyPr wrap="square" rtlCol="0" anchor="ctr"/>
+          <a:lstStyle/>
+          <a:p>
+            <a:pPr indent="0" marL="0">
+              <a:buNone/>
+            </a:pPr>
+            <a:r>
+              <a:rPr lang="en-US" sz="1250" dirty="0">
+                <a:solidFill>
+                  <a:srgbClr val="64748B"/>
+                </a:solidFill>
+                <a:latin typeface="Segoe UI" pitchFamily="34" charset="0"/>
+                <a:ea typeface="Segoe UI" pitchFamily="34" charset="-122"/>
+                <a:cs typeface="Segoe UI" pitchFamily="34" charset="-120"/>
+              </a:rPr>
+              <a:t>Rezalian Vatiady · Zalin Labs · 2026</a:t>
+            </a:r>
+            <a:endParaRPr lang="en-US" sz="1250" dirty="0"/>
+          </a:p>
+        </p:txBody>
+      </p:sp>
+      <p:sp>
+        <p:nvSpPr>
+          <p:cNvPr id="9" name="Text 7"/>
+          <p:cNvSpPr/>
+          <p:nvPr/>
+        </p:nvSpPr>
+        <p:spPr>
+          <a:xfrm>
+            <a:off x="10698480" y="6382512"/>
             <a:ext cx="1188720" cy="365760"/>
           </a:xfrm>
           <a:prstGeom prst="rect">
@@ -1688,7 +3425,2886 @@
                 <a:ea typeface="Consolas" pitchFamily="34" charset="-122"/>
                 <a:cs typeface="Consolas" pitchFamily="34" charset="-120"/>
               </a:rPr>
-              <a:t>1 / 8</a:t>
+              <a:t>1 / 15</a:t>
+            </a:r>
+            <a:endParaRPr lang="en-US" sz="1000" dirty="0"/>
+          </a:p>
+        </p:txBody>
+      </p:sp>
+    </p:spTree>
+  </p:cSld>
+  <p:clrMapOvr>
+    <a:masterClrMapping/>
+  </p:clrMapOvr>
+</p:sld>
+</file>
+
+<file path=ppt/slides/slide10.xml><?xml version="1.0" encoding="utf-8"?>
+<p:sld xmlns:a="http://schemas.openxmlformats.org/drawingml/2006/main" xmlns:r="http://schemas.openxmlformats.org/officeDocument/2006/relationships" xmlns:p="http://schemas.openxmlformats.org/presentationml/2006/main">
+  <p:cSld name="Slide 10">
+    <p:bg>
+      <p:bgPr>
+        <a:solidFill>
+          <a:srgbClr val="0A0C12"/>
+        </a:solidFill>
+      </p:bgPr>
+    </p:bg>
+    <p:spTree>
+      <p:nvGrpSpPr>
+        <p:cNvPr id="1" name=""/>
+        <p:cNvGrpSpPr/>
+        <p:nvPr/>
+      </p:nvGrpSpPr>
+      <p:grpSpPr>
+        <a:xfrm>
+          <a:off x="0" y="0"/>
+          <a:ext cx="0" cy="0"/>
+          <a:chOff x="0" y="0"/>
+          <a:chExt cx="0" cy="0"/>
+        </a:xfrm>
+      </p:grpSpPr>
+      <p:sp>
+        <p:nvSpPr>
+          <p:cNvPr id="2" name="Shape 0"/>
+          <p:cNvSpPr/>
+          <p:nvPr/>
+        </p:nvSpPr>
+        <p:spPr>
+          <a:xfrm>
+            <a:off x="0" y="0"/>
+            <a:ext cx="7680960" cy="64008"/>
+          </a:xfrm>
+          <a:prstGeom prst="rect">
+            <a:avLst/>
+          </a:prstGeom>
+          <a:solidFill>
+            <a:srgbClr val="3B82F6"/>
+          </a:solidFill>
+          <a:ln/>
+        </p:spPr>
+      </p:sp>
+      <p:sp>
+        <p:nvSpPr>
+          <p:cNvPr id="3" name="Shape 1"/>
+          <p:cNvSpPr/>
+          <p:nvPr/>
+        </p:nvSpPr>
+        <p:spPr>
+          <a:xfrm>
+            <a:off x="7680960" y="0"/>
+            <a:ext cx="4510735" cy="64008"/>
+          </a:xfrm>
+          <a:prstGeom prst="rect">
+            <a:avLst/>
+          </a:prstGeom>
+          <a:solidFill>
+            <a:srgbClr val="06B6D4"/>
+          </a:solidFill>
+          <a:ln/>
+        </p:spPr>
+      </p:sp>
+      <p:sp>
+        <p:nvSpPr>
+          <p:cNvPr id="4" name="Text 2"/>
+          <p:cNvSpPr/>
+          <p:nvPr/>
+        </p:nvSpPr>
+        <p:spPr>
+          <a:xfrm>
+            <a:off x="822960" y="502920"/>
+            <a:ext cx="10515600" cy="365760"/>
+          </a:xfrm>
+          <a:prstGeom prst="rect">
+            <a:avLst/>
+          </a:prstGeom>
+          <a:noFill/>
+          <a:ln/>
+        </p:spPr>
+        <p:txBody>
+          <a:bodyPr wrap="square" rtlCol="0" anchor="ctr"/>
+          <a:lstStyle/>
+          <a:p>
+            <a:pPr indent="0" marL="0">
+              <a:buNone/>
+            </a:pPr>
+            <a:r>
+              <a:rPr lang="en-US" sz="1200" spc="300" kern="0" dirty="0">
+                <a:solidFill>
+                  <a:srgbClr val="06B6D4"/>
+                </a:solidFill>
+                <a:latin typeface="Consolas" pitchFamily="34" charset="0"/>
+                <a:ea typeface="Consolas" pitchFamily="34" charset="-122"/>
+                <a:cs typeface="Consolas" pitchFamily="34" charset="-120"/>
+              </a:rPr>
+              <a:t>WHY OPEN</a:t>
+            </a:r>
+            <a:endParaRPr lang="en-US" sz="1200" dirty="0"/>
+          </a:p>
+        </p:txBody>
+      </p:sp>
+      <p:sp>
+        <p:nvSpPr>
+          <p:cNvPr id="5" name="Text 3"/>
+          <p:cNvSpPr/>
+          <p:nvPr/>
+        </p:nvSpPr>
+        <p:spPr>
+          <a:xfrm>
+            <a:off x="822960" y="914400"/>
+            <a:ext cx="10561320" cy="868680"/>
+          </a:xfrm>
+          <a:prstGeom prst="rect">
+            <a:avLst/>
+          </a:prstGeom>
+          <a:noFill/>
+          <a:ln/>
+        </p:spPr>
+        <p:txBody>
+          <a:bodyPr wrap="square" rtlCol="0" anchor="ctr"/>
+          <a:lstStyle/>
+          <a:p>
+            <a:pPr indent="0" marL="0">
+              <a:buNone/>
+            </a:pPr>
+            <a:r>
+              <a:rPr lang="en-US" sz="2700" b="1" dirty="0">
+                <a:solidFill>
+                  <a:srgbClr val="FFFFFF"/>
+                </a:solidFill>
+                <a:latin typeface="Segoe UI" pitchFamily="34" charset="0"/>
+                <a:ea typeface="Segoe UI" pitchFamily="34" charset="-122"/>
+                <a:cs typeface="Segoe UI" pitchFamily="34" charset="-120"/>
+              </a:rPr>
+              <a:t>What releasing it changed</a:t>
+            </a:r>
+            <a:endParaRPr lang="en-US" sz="2700" dirty="0"/>
+          </a:p>
+        </p:txBody>
+      </p:sp>
+      <p:sp>
+        <p:nvSpPr>
+          <p:cNvPr id="6" name="Shape 4"/>
+          <p:cNvSpPr/>
+          <p:nvPr/>
+        </p:nvSpPr>
+        <p:spPr>
+          <a:xfrm>
+            <a:off x="1371600" y="3035808"/>
+            <a:ext cx="9464040" cy="0"/>
+          </a:xfrm>
+          <a:prstGeom prst="line">
+            <a:avLst/>
+          </a:prstGeom>
+          <a:noFill/>
+          <a:ln w="25400">
+            <a:solidFill>
+              <a:srgbClr val="24365A"/>
+            </a:solidFill>
+            <a:prstDash val="solid"/>
+          </a:ln>
+        </p:spPr>
+      </p:sp>
+      <p:sp>
+        <p:nvSpPr>
+          <p:cNvPr id="7" name="Shape 5"/>
+          <p:cNvSpPr/>
+          <p:nvPr/>
+        </p:nvSpPr>
+        <p:spPr>
+          <a:xfrm>
+            <a:off x="1289304" y="2953512"/>
+            <a:ext cx="164592" cy="164592"/>
+          </a:xfrm>
+          <a:prstGeom prst="ellipse">
+            <a:avLst/>
+          </a:prstGeom>
+          <a:solidFill>
+            <a:srgbClr val="3B82F6"/>
+          </a:solidFill>
+          <a:ln w="19050">
+            <a:solidFill>
+              <a:srgbClr val="0A0C12"/>
+            </a:solidFill>
+            <a:prstDash val="solid"/>
+          </a:ln>
+        </p:spPr>
+      </p:sp>
+      <p:sp>
+        <p:nvSpPr>
+          <p:cNvPr id="8" name="Text 6"/>
+          <p:cNvSpPr/>
+          <p:nvPr/>
+        </p:nvSpPr>
+        <p:spPr>
+          <a:xfrm>
+            <a:off x="342900" y="2395728"/>
+            <a:ext cx="2057400" cy="365760"/>
+          </a:xfrm>
+          <a:prstGeom prst="rect">
+            <a:avLst/>
+          </a:prstGeom>
+          <a:noFill/>
+          <a:ln/>
+        </p:spPr>
+        <p:txBody>
+          <a:bodyPr wrap="square" rtlCol="0" anchor="ctr"/>
+          <a:lstStyle/>
+          <a:p>
+            <a:pPr algn="ctr" indent="0" marL="0">
+              <a:buNone/>
+            </a:pPr>
+            <a:r>
+              <a:rPr lang="en-US" sz="1100" b="1" dirty="0">
+                <a:solidFill>
+                  <a:srgbClr val="3B82F6"/>
+                </a:solidFill>
+                <a:latin typeface="Consolas" pitchFamily="34" charset="0"/>
+                <a:ea typeface="Consolas" pitchFamily="34" charset="-122"/>
+                <a:cs typeface="Consolas" pitchFamily="34" charset="-120"/>
+              </a:rPr>
+              <a:t>Week 1</a:t>
+            </a:r>
+            <a:endParaRPr lang="en-US" sz="1100" dirty="0"/>
+          </a:p>
+        </p:txBody>
+      </p:sp>
+      <p:sp>
+        <p:nvSpPr>
+          <p:cNvPr id="9" name="Text 7"/>
+          <p:cNvSpPr/>
+          <p:nvPr/>
+        </p:nvSpPr>
+        <p:spPr>
+          <a:xfrm>
+            <a:off x="342900" y="3310128"/>
+            <a:ext cx="2057400" cy="566928"/>
+          </a:xfrm>
+          <a:prstGeom prst="rect">
+            <a:avLst/>
+          </a:prstGeom>
+          <a:noFill/>
+          <a:ln/>
+        </p:spPr>
+        <p:txBody>
+          <a:bodyPr wrap="square" rtlCol="0" anchor="ctr"/>
+          <a:lstStyle/>
+          <a:p>
+            <a:pPr algn="ctr" indent="0" marL="0">
+              <a:buNone/>
+            </a:pPr>
+            <a:r>
+              <a:rPr lang="en-US" sz="1250" b="1" dirty="0">
+                <a:solidFill>
+                  <a:srgbClr val="FFFFFF"/>
+                </a:solidFill>
+                <a:latin typeface="Segoe UI" pitchFamily="34" charset="0"/>
+                <a:ea typeface="Segoe UI" pitchFamily="34" charset="-122"/>
+                <a:cs typeface="Segoe UI" pitchFamily="34" charset="-120"/>
+              </a:rPr>
+              <a:t>Schemas stricter</a:t>
+            </a:r>
+            <a:endParaRPr lang="en-US" sz="1250" dirty="0"/>
+          </a:p>
+        </p:txBody>
+      </p:sp>
+      <p:sp>
+        <p:nvSpPr>
+          <p:cNvPr id="10" name="Text 8"/>
+          <p:cNvSpPr/>
+          <p:nvPr/>
+        </p:nvSpPr>
+        <p:spPr>
+          <a:xfrm>
+            <a:off x="342900" y="3895344"/>
+            <a:ext cx="2057400" cy="1234440"/>
+          </a:xfrm>
+          <a:prstGeom prst="rect">
+            <a:avLst/>
+          </a:prstGeom>
+          <a:noFill/>
+          <a:ln/>
+        </p:spPr>
+        <p:txBody>
+          <a:bodyPr wrap="square" rtlCol="0" anchor="ctr"/>
+          <a:lstStyle/>
+          <a:p>
+            <a:pPr algn="ctr" indent="0" marL="0">
+              <a:buNone/>
+            </a:pPr>
+            <a:r>
+              <a:rPr lang="en-US" sz="1000" dirty="0">
+                <a:solidFill>
+                  <a:srgbClr val="CBD5E1"/>
+                </a:solidFill>
+                <a:latin typeface="Segoe UI" pitchFamily="34" charset="0"/>
+                <a:ea typeface="Segoe UI" pitchFamily="34" charset="-122"/>
+                <a:cs typeface="Segoe UI" pitchFamily="34" charset="-120"/>
+              </a:rPr>
+              <a:t>Public code cannot survive vague assumptions - every schema got explicit.</a:t>
+            </a:r>
+            <a:endParaRPr lang="en-US" sz="1000" dirty="0"/>
+          </a:p>
+        </p:txBody>
+      </p:sp>
+      <p:sp>
+        <p:nvSpPr>
+          <p:cNvPr id="11" name="Shape 9"/>
+          <p:cNvSpPr/>
+          <p:nvPr/>
+        </p:nvSpPr>
+        <p:spPr>
+          <a:xfrm>
+            <a:off x="4443984" y="2953512"/>
+            <a:ext cx="164592" cy="164592"/>
+          </a:xfrm>
+          <a:prstGeom prst="ellipse">
+            <a:avLst/>
+          </a:prstGeom>
+          <a:solidFill>
+            <a:srgbClr val="06B6D4"/>
+          </a:solidFill>
+          <a:ln w="19050">
+            <a:solidFill>
+              <a:srgbClr val="0A0C12"/>
+            </a:solidFill>
+            <a:prstDash val="solid"/>
+          </a:ln>
+        </p:spPr>
+      </p:sp>
+      <p:sp>
+        <p:nvSpPr>
+          <p:cNvPr id="12" name="Text 10"/>
+          <p:cNvSpPr/>
+          <p:nvPr/>
+        </p:nvSpPr>
+        <p:spPr>
+          <a:xfrm>
+            <a:off x="3497580" y="2395728"/>
+            <a:ext cx="2057400" cy="365760"/>
+          </a:xfrm>
+          <a:prstGeom prst="rect">
+            <a:avLst/>
+          </a:prstGeom>
+          <a:noFill/>
+          <a:ln/>
+        </p:spPr>
+        <p:txBody>
+          <a:bodyPr wrap="square" rtlCol="0" anchor="ctr"/>
+          <a:lstStyle/>
+          <a:p>
+            <a:pPr algn="ctr" indent="0" marL="0">
+              <a:buNone/>
+            </a:pPr>
+            <a:r>
+              <a:rPr lang="en-US" sz="1100" b="1" dirty="0">
+                <a:solidFill>
+                  <a:srgbClr val="06B6D4"/>
+                </a:solidFill>
+                <a:latin typeface="Consolas" pitchFamily="34" charset="0"/>
+                <a:ea typeface="Consolas" pitchFamily="34" charset="-122"/>
+                <a:cs typeface="Consolas" pitchFamily="34" charset="-120"/>
+              </a:rPr>
+              <a:t>Week 1</a:t>
+            </a:r>
+            <a:endParaRPr lang="en-US" sz="1100" dirty="0"/>
+          </a:p>
+        </p:txBody>
+      </p:sp>
+      <p:sp>
+        <p:nvSpPr>
+          <p:cNvPr id="13" name="Text 11"/>
+          <p:cNvSpPr/>
+          <p:nvPr/>
+        </p:nvSpPr>
+        <p:spPr>
+          <a:xfrm>
+            <a:off x="3497580" y="3310128"/>
+            <a:ext cx="2057400" cy="566928"/>
+          </a:xfrm>
+          <a:prstGeom prst="rect">
+            <a:avLst/>
+          </a:prstGeom>
+          <a:noFill/>
+          <a:ln/>
+        </p:spPr>
+        <p:txBody>
+          <a:bodyPr wrap="square" rtlCol="0" anchor="ctr"/>
+          <a:lstStyle/>
+          <a:p>
+            <a:pPr algn="ctr" indent="0" marL="0">
+              <a:buNone/>
+            </a:pPr>
+            <a:r>
+              <a:rPr lang="en-US" sz="1250" b="1" dirty="0">
+                <a:solidFill>
+                  <a:srgbClr val="FFFFFF"/>
+                </a:solidFill>
+                <a:latin typeface="Segoe UI" pitchFamily="34" charset="0"/>
+                <a:ea typeface="Segoe UI" pitchFamily="34" charset="-122"/>
+                <a:cs typeface="Segoe UI" pitchFamily="34" charset="-120"/>
+              </a:rPr>
+              <a:t>Errors clearer</a:t>
+            </a:r>
+            <a:endParaRPr lang="en-US" sz="1250" dirty="0"/>
+          </a:p>
+        </p:txBody>
+      </p:sp>
+      <p:sp>
+        <p:nvSpPr>
+          <p:cNvPr id="14" name="Text 12"/>
+          <p:cNvSpPr/>
+          <p:nvPr/>
+        </p:nvSpPr>
+        <p:spPr>
+          <a:xfrm>
+            <a:off x="3497580" y="3895344"/>
+            <a:ext cx="2057400" cy="1234440"/>
+          </a:xfrm>
+          <a:prstGeom prst="rect">
+            <a:avLst/>
+          </a:prstGeom>
+          <a:noFill/>
+          <a:ln/>
+        </p:spPr>
+        <p:txBody>
+          <a:bodyPr wrap="square" rtlCol="0" anchor="ctr"/>
+          <a:lstStyle/>
+          <a:p>
+            <a:pPr algn="ctr" indent="0" marL="0">
+              <a:buNone/>
+            </a:pPr>
+            <a:r>
+              <a:rPr lang="en-US" sz="1000" dirty="0">
+                <a:solidFill>
+                  <a:srgbClr val="CBD5E1"/>
+                </a:solidFill>
+                <a:latin typeface="Segoe UI" pitchFamily="34" charset="0"/>
+                <a:ea typeface="Segoe UI" pitchFamily="34" charset="-122"/>
+                <a:cs typeface="Segoe UI" pitchFamily="34" charset="-120"/>
+              </a:rPr>
+              <a:t>Messages were rewritten for strangers who do not share the author's context.</a:t>
+            </a:r>
+            <a:endParaRPr lang="en-US" sz="1000" dirty="0"/>
+          </a:p>
+        </p:txBody>
+      </p:sp>
+      <p:sp>
+        <p:nvSpPr>
+          <p:cNvPr id="15" name="Shape 13"/>
+          <p:cNvSpPr/>
+          <p:nvPr/>
+        </p:nvSpPr>
+        <p:spPr>
+          <a:xfrm>
+            <a:off x="7598664" y="2953512"/>
+            <a:ext cx="164592" cy="164592"/>
+          </a:xfrm>
+          <a:prstGeom prst="ellipse">
+            <a:avLst/>
+          </a:prstGeom>
+          <a:solidFill>
+            <a:srgbClr val="3B82F6"/>
+          </a:solidFill>
+          <a:ln w="19050">
+            <a:solidFill>
+              <a:srgbClr val="0A0C12"/>
+            </a:solidFill>
+            <a:prstDash val="solid"/>
+          </a:ln>
+        </p:spPr>
+      </p:sp>
+      <p:sp>
+        <p:nvSpPr>
+          <p:cNvPr id="16" name="Text 14"/>
+          <p:cNvSpPr/>
+          <p:nvPr/>
+        </p:nvSpPr>
+        <p:spPr>
+          <a:xfrm>
+            <a:off x="6652260" y="2395728"/>
+            <a:ext cx="2057400" cy="365760"/>
+          </a:xfrm>
+          <a:prstGeom prst="rect">
+            <a:avLst/>
+          </a:prstGeom>
+          <a:noFill/>
+          <a:ln/>
+        </p:spPr>
+        <p:txBody>
+          <a:bodyPr wrap="square" rtlCol="0" anchor="ctr"/>
+          <a:lstStyle/>
+          <a:p>
+            <a:pPr algn="ctr" indent="0" marL="0">
+              <a:buNone/>
+            </a:pPr>
+            <a:r>
+              <a:rPr lang="en-US" sz="1100" b="1" dirty="0">
+                <a:solidFill>
+                  <a:srgbClr val="3B82F6"/>
+                </a:solidFill>
+                <a:latin typeface="Consolas" pitchFamily="34" charset="0"/>
+                <a:ea typeface="Consolas" pitchFamily="34" charset="-122"/>
+                <a:cs typeface="Consolas" pitchFamily="34" charset="-120"/>
+              </a:rPr>
+              <a:t>Week 2</a:t>
+            </a:r>
+            <a:endParaRPr lang="en-US" sz="1100" dirty="0"/>
+          </a:p>
+        </p:txBody>
+      </p:sp>
+      <p:sp>
+        <p:nvSpPr>
+          <p:cNvPr id="17" name="Text 15"/>
+          <p:cNvSpPr/>
+          <p:nvPr/>
+        </p:nvSpPr>
+        <p:spPr>
+          <a:xfrm>
+            <a:off x="6652260" y="3310128"/>
+            <a:ext cx="2057400" cy="566928"/>
+          </a:xfrm>
+          <a:prstGeom prst="rect">
+            <a:avLst/>
+          </a:prstGeom>
+          <a:noFill/>
+          <a:ln/>
+        </p:spPr>
+        <p:txBody>
+          <a:bodyPr wrap="square" rtlCol="0" anchor="ctr"/>
+          <a:lstStyle/>
+          <a:p>
+            <a:pPr algn="ctr" indent="0" marL="0">
+              <a:buNone/>
+            </a:pPr>
+            <a:r>
+              <a:rPr lang="en-US" sz="1250" b="1" dirty="0">
+                <a:solidFill>
+                  <a:srgbClr val="FFFFFF"/>
+                </a:solidFill>
+                <a:latin typeface="Segoe UI" pitchFamily="34" charset="0"/>
+                <a:ea typeface="Segoe UI" pitchFamily="34" charset="-122"/>
+                <a:cs typeface="Segoe UI" pitchFamily="34" charset="-120"/>
+              </a:rPr>
+              <a:t>Docs honest</a:t>
+            </a:r>
+            <a:endParaRPr lang="en-US" sz="1250" dirty="0"/>
+          </a:p>
+        </p:txBody>
+      </p:sp>
+      <p:sp>
+        <p:nvSpPr>
+          <p:cNvPr id="18" name="Text 16"/>
+          <p:cNvSpPr/>
+          <p:nvPr/>
+        </p:nvSpPr>
+        <p:spPr>
+          <a:xfrm>
+            <a:off x="6652260" y="3895344"/>
+            <a:ext cx="2057400" cy="1234440"/>
+          </a:xfrm>
+          <a:prstGeom prst="rect">
+            <a:avLst/>
+          </a:prstGeom>
+          <a:noFill/>
+          <a:ln/>
+        </p:spPr>
+        <p:txBody>
+          <a:bodyPr wrap="square" rtlCol="0" anchor="ctr"/>
+          <a:lstStyle/>
+          <a:p>
+            <a:pPr algn="ctr" indent="0" marL="0">
+              <a:buNone/>
+            </a:pPr>
+            <a:r>
+              <a:rPr lang="en-US" sz="1000" dirty="0">
+                <a:solidFill>
+                  <a:srgbClr val="CBD5E1"/>
+                </a:solidFill>
+                <a:latin typeface="Segoe UI" pitchFamily="34" charset="0"/>
+                <a:ea typeface="Segoe UI" pitchFamily="34" charset="-122"/>
+                <a:cs typeface="Segoe UI" pitchFamily="34" charset="-120"/>
+              </a:rPr>
+              <a:t>Documentation stopped describing intentions and started describing behavior.</a:t>
+            </a:r>
+            <a:endParaRPr lang="en-US" sz="1000" dirty="0"/>
+          </a:p>
+        </p:txBody>
+      </p:sp>
+      <p:sp>
+        <p:nvSpPr>
+          <p:cNvPr id="19" name="Shape 17"/>
+          <p:cNvSpPr/>
+          <p:nvPr/>
+        </p:nvSpPr>
+        <p:spPr>
+          <a:xfrm>
+            <a:off x="10753344" y="2953512"/>
+            <a:ext cx="164592" cy="164592"/>
+          </a:xfrm>
+          <a:prstGeom prst="ellipse">
+            <a:avLst/>
+          </a:prstGeom>
+          <a:solidFill>
+            <a:srgbClr val="06B6D4"/>
+          </a:solidFill>
+          <a:ln w="19050">
+            <a:solidFill>
+              <a:srgbClr val="0A0C12"/>
+            </a:solidFill>
+            <a:prstDash val="solid"/>
+          </a:ln>
+        </p:spPr>
+      </p:sp>
+      <p:sp>
+        <p:nvSpPr>
+          <p:cNvPr id="20" name="Text 18"/>
+          <p:cNvSpPr/>
+          <p:nvPr/>
+        </p:nvSpPr>
+        <p:spPr>
+          <a:xfrm>
+            <a:off x="9806940" y="2395728"/>
+            <a:ext cx="2057400" cy="365760"/>
+          </a:xfrm>
+          <a:prstGeom prst="rect">
+            <a:avLst/>
+          </a:prstGeom>
+          <a:noFill/>
+          <a:ln/>
+        </p:spPr>
+        <p:txBody>
+          <a:bodyPr wrap="square" rtlCol="0" anchor="ctr"/>
+          <a:lstStyle/>
+          <a:p>
+            <a:pPr algn="ctr" indent="0" marL="0">
+              <a:buNone/>
+            </a:pPr>
+            <a:r>
+              <a:rPr lang="en-US" sz="1100" b="1" dirty="0">
+                <a:solidFill>
+                  <a:srgbClr val="06B6D4"/>
+                </a:solidFill>
+                <a:latin typeface="Consolas" pitchFamily="34" charset="0"/>
+                <a:ea typeface="Consolas" pitchFamily="34" charset="-122"/>
+                <a:cs typeface="Consolas" pitchFamily="34" charset="-120"/>
+              </a:rPr>
+              <a:t>Same week</a:t>
+            </a:r>
+            <a:endParaRPr lang="en-US" sz="1100" dirty="0"/>
+          </a:p>
+        </p:txBody>
+      </p:sp>
+      <p:sp>
+        <p:nvSpPr>
+          <p:cNvPr id="21" name="Text 19"/>
+          <p:cNvSpPr/>
+          <p:nvPr/>
+        </p:nvSpPr>
+        <p:spPr>
+          <a:xfrm>
+            <a:off x="9806940" y="3310128"/>
+            <a:ext cx="2057400" cy="566928"/>
+          </a:xfrm>
+          <a:prstGeom prst="rect">
+            <a:avLst/>
+          </a:prstGeom>
+          <a:noFill/>
+          <a:ln/>
+        </p:spPr>
+        <p:txBody>
+          <a:bodyPr wrap="square" rtlCol="0" anchor="ctr"/>
+          <a:lstStyle/>
+          <a:p>
+            <a:pPr algn="ctr" indent="0" marL="0">
+              <a:buNone/>
+            </a:pPr>
+            <a:r>
+              <a:rPr lang="en-US" sz="1250" b="1" dirty="0">
+                <a:solidFill>
+                  <a:srgbClr val="FFFFFF"/>
+                </a:solidFill>
+                <a:latin typeface="Segoe UI" pitchFamily="34" charset="0"/>
+                <a:ea typeface="Segoe UI" pitchFamily="34" charset="-122"/>
+                <a:cs typeface="Segoe UI" pitchFamily="34" charset="-120"/>
+              </a:rPr>
+              <a:t>Internal pipeline improved</a:t>
+            </a:r>
+            <a:endParaRPr lang="en-US" sz="1250" dirty="0"/>
+          </a:p>
+        </p:txBody>
+      </p:sp>
+      <p:sp>
+        <p:nvSpPr>
+          <p:cNvPr id="22" name="Text 20"/>
+          <p:cNvSpPr/>
+          <p:nvPr/>
+        </p:nvSpPr>
+        <p:spPr>
+          <a:xfrm>
+            <a:off x="9806940" y="3895344"/>
+            <a:ext cx="2057400" cy="1234440"/>
+          </a:xfrm>
+          <a:prstGeom prst="rect">
+            <a:avLst/>
+          </a:prstGeom>
+          <a:noFill/>
+          <a:ln/>
+        </p:spPr>
+        <p:txBody>
+          <a:bodyPr wrap="square" rtlCol="0" anchor="ctr"/>
+          <a:lstStyle/>
+          <a:p>
+            <a:pPr algn="ctr" indent="0" marL="0">
+              <a:buNone/>
+            </a:pPr>
+            <a:r>
+              <a:rPr lang="en-US" sz="1000" dirty="0">
+                <a:solidFill>
+                  <a:srgbClr val="CBD5E1"/>
+                </a:solidFill>
+                <a:latin typeface="Segoe UI" pitchFamily="34" charset="0"/>
+                <a:ea typeface="Segoe UI" pitchFamily="34" charset="-122"/>
+                <a:cs typeface="Segoe UI" pitchFamily="34" charset="-120"/>
+              </a:rPr>
+              <a:t>The internal version got more reliable the same week it went public.</a:t>
+            </a:r>
+            <a:endParaRPr lang="en-US" sz="1000" dirty="0"/>
+          </a:p>
+        </p:txBody>
+      </p:sp>
+      <p:sp>
+        <p:nvSpPr>
+          <p:cNvPr id="23" name="Shape 21"/>
+          <p:cNvSpPr/>
+          <p:nvPr/>
+        </p:nvSpPr>
+        <p:spPr>
+          <a:xfrm>
+            <a:off x="822960" y="5961888"/>
+            <a:ext cx="10515600" cy="0"/>
+          </a:xfrm>
+          <a:prstGeom prst="line">
+            <a:avLst/>
+          </a:prstGeom>
+          <a:noFill/>
+          <a:ln w="12700">
+            <a:solidFill>
+              <a:srgbClr val="1E2D45"/>
+            </a:solidFill>
+            <a:prstDash val="solid"/>
+          </a:ln>
+        </p:spPr>
+      </p:sp>
+      <p:sp>
+        <p:nvSpPr>
+          <p:cNvPr id="24" name="Text 22"/>
+          <p:cNvSpPr/>
+          <p:nvPr/>
+        </p:nvSpPr>
+        <p:spPr>
+          <a:xfrm>
+            <a:off x="822960" y="6053328"/>
+            <a:ext cx="9692640" cy="457200"/>
+          </a:xfrm>
+          <a:prstGeom prst="rect">
+            <a:avLst/>
+          </a:prstGeom>
+          <a:noFill/>
+          <a:ln/>
+        </p:spPr>
+        <p:txBody>
+          <a:bodyPr wrap="square" rtlCol="0" anchor="ctr"/>
+          <a:lstStyle/>
+          <a:p>
+            <a:pPr indent="0" marL="0">
+              <a:buNone/>
+            </a:pPr>
+            <a:r>
+              <a:rPr lang="en-US" sz="1150" dirty="0">
+                <a:solidFill>
+                  <a:srgbClr val="64748B"/>
+                </a:solidFill>
+                <a:latin typeface="Segoe UI" pitchFamily="34" charset="0"/>
+                <a:ea typeface="Segoe UI" pitchFamily="34" charset="-122"/>
+                <a:cs typeface="Segoe UI" pitchFamily="34" charset="-120"/>
+              </a:rPr>
+              <a:t>The fastest way to improve internal tools is to pretend a stranger will read them - open source makes the stranger real.</a:t>
+            </a:r>
+            <a:endParaRPr lang="en-US" sz="1150" dirty="0"/>
+          </a:p>
+        </p:txBody>
+      </p:sp>
+      <p:sp>
+        <p:nvSpPr>
+          <p:cNvPr id="25" name="Text 23"/>
+          <p:cNvSpPr/>
+          <p:nvPr/>
+        </p:nvSpPr>
+        <p:spPr>
+          <a:xfrm>
+            <a:off x="10698480" y="6382512"/>
+            <a:ext cx="1188720" cy="365760"/>
+          </a:xfrm>
+          <a:prstGeom prst="rect">
+            <a:avLst/>
+          </a:prstGeom>
+          <a:noFill/>
+          <a:ln/>
+        </p:spPr>
+        <p:txBody>
+          <a:bodyPr wrap="square" rtlCol="0" anchor="ctr"/>
+          <a:lstStyle/>
+          <a:p>
+            <a:pPr algn="r" indent="0" marL="0">
+              <a:buNone/>
+            </a:pPr>
+            <a:r>
+              <a:rPr lang="en-US" sz="1000" dirty="0">
+                <a:solidFill>
+                  <a:srgbClr val="64748B"/>
+                </a:solidFill>
+                <a:latin typeface="Consolas" pitchFamily="34" charset="0"/>
+                <a:ea typeface="Consolas" pitchFamily="34" charset="-122"/>
+                <a:cs typeface="Consolas" pitchFamily="34" charset="-120"/>
+              </a:rPr>
+              <a:t>10 / 15</a:t>
+            </a:r>
+            <a:endParaRPr lang="en-US" sz="1000" dirty="0"/>
+          </a:p>
+        </p:txBody>
+      </p:sp>
+    </p:spTree>
+  </p:cSld>
+  <p:clrMapOvr>
+    <a:masterClrMapping/>
+  </p:clrMapOvr>
+</p:sld>
+</file>
+
+<file path=ppt/slides/slide11.xml><?xml version="1.0" encoding="utf-8"?>
+<p:sld xmlns:a="http://schemas.openxmlformats.org/drawingml/2006/main" xmlns:r="http://schemas.openxmlformats.org/officeDocument/2006/relationships" xmlns:p="http://schemas.openxmlformats.org/presentationml/2006/main">
+  <p:cSld name="Slide 11">
+    <p:bg>
+      <p:bgPr>
+        <a:solidFill>
+          <a:srgbClr val="0A0C12"/>
+        </a:solidFill>
+      </p:bgPr>
+    </p:bg>
+    <p:spTree>
+      <p:nvGrpSpPr>
+        <p:cNvPr id="1" name=""/>
+        <p:cNvGrpSpPr/>
+        <p:nvPr/>
+      </p:nvGrpSpPr>
+      <p:grpSpPr>
+        <a:xfrm>
+          <a:off x="0" y="0"/>
+          <a:ext cx="0" cy="0"/>
+          <a:chOff x="0" y="0"/>
+          <a:chExt cx="0" cy="0"/>
+        </a:xfrm>
+      </p:grpSpPr>
+      <p:sp>
+        <p:nvSpPr>
+          <p:cNvPr id="2" name="Shape 0"/>
+          <p:cNvSpPr/>
+          <p:nvPr/>
+        </p:nvSpPr>
+        <p:spPr>
+          <a:xfrm>
+            <a:off x="0" y="0"/>
+            <a:ext cx="7680960" cy="64008"/>
+          </a:xfrm>
+          <a:prstGeom prst="rect">
+            <a:avLst/>
+          </a:prstGeom>
+          <a:solidFill>
+            <a:srgbClr val="3B82F6"/>
+          </a:solidFill>
+          <a:ln/>
+        </p:spPr>
+      </p:sp>
+      <p:sp>
+        <p:nvSpPr>
+          <p:cNvPr id="3" name="Shape 1"/>
+          <p:cNvSpPr/>
+          <p:nvPr/>
+        </p:nvSpPr>
+        <p:spPr>
+          <a:xfrm>
+            <a:off x="7680960" y="0"/>
+            <a:ext cx="4510735" cy="64008"/>
+          </a:xfrm>
+          <a:prstGeom prst="rect">
+            <a:avLst/>
+          </a:prstGeom>
+          <a:solidFill>
+            <a:srgbClr val="06B6D4"/>
+          </a:solidFill>
+          <a:ln/>
+        </p:spPr>
+      </p:sp>
+      <p:sp>
+        <p:nvSpPr>
+          <p:cNvPr id="4" name="Text 2"/>
+          <p:cNvSpPr/>
+          <p:nvPr/>
+        </p:nvSpPr>
+        <p:spPr>
+          <a:xfrm>
+            <a:off x="822960" y="502920"/>
+            <a:ext cx="10515600" cy="365760"/>
+          </a:xfrm>
+          <a:prstGeom prst="rect">
+            <a:avLst/>
+          </a:prstGeom>
+          <a:noFill/>
+          <a:ln/>
+        </p:spPr>
+        <p:txBody>
+          <a:bodyPr wrap="square" rtlCol="0" anchor="ctr"/>
+          <a:lstStyle/>
+          <a:p>
+            <a:pPr indent="0" marL="0">
+              <a:buNone/>
+            </a:pPr>
+            <a:r>
+              <a:rPr lang="en-US" sz="1200" spc="300" kern="0" dirty="0">
+                <a:solidFill>
+                  <a:srgbClr val="06B6D4"/>
+                </a:solidFill>
+                <a:latin typeface="Consolas" pitchFamily="34" charset="0"/>
+                <a:ea typeface="Consolas" pitchFamily="34" charset="-122"/>
+                <a:cs typeface="Consolas" pitchFamily="34" charset="-120"/>
+              </a:rPr>
+              <a:t>BEFORE / AFTER</a:t>
+            </a:r>
+            <a:endParaRPr lang="en-US" sz="1200" dirty="0"/>
+          </a:p>
+        </p:txBody>
+      </p:sp>
+      <p:sp>
+        <p:nvSpPr>
+          <p:cNvPr id="5" name="Text 3"/>
+          <p:cNvSpPr/>
+          <p:nvPr/>
+        </p:nvSpPr>
+        <p:spPr>
+          <a:xfrm>
+            <a:off x="822960" y="914400"/>
+            <a:ext cx="10561320" cy="868680"/>
+          </a:xfrm>
+          <a:prstGeom prst="rect">
+            <a:avLst/>
+          </a:prstGeom>
+          <a:noFill/>
+          <a:ln/>
+        </p:spPr>
+        <p:txBody>
+          <a:bodyPr wrap="square" rtlCol="0" anchor="ctr"/>
+          <a:lstStyle/>
+          <a:p>
+            <a:pPr indent="0" marL="0">
+              <a:buNone/>
+            </a:pPr>
+            <a:r>
+              <a:rPr lang="en-US" sz="2700" b="1" dirty="0">
+                <a:solidFill>
+                  <a:srgbClr val="FFFFFF"/>
+                </a:solidFill>
+                <a:latin typeface="Segoe UI" pitchFamily="34" charset="0"/>
+                <a:ea typeface="Segoe UI" pitchFamily="34" charset="-122"/>
+                <a:cs typeface="Segoe UI" pitchFamily="34" charset="-120"/>
+              </a:rPr>
+              <a:t>Internal glue code vs open-source framework</a:t>
+            </a:r>
+            <a:endParaRPr lang="en-US" sz="2700" dirty="0"/>
+          </a:p>
+        </p:txBody>
+      </p:sp>
+      <p:sp>
+        <p:nvSpPr>
+          <p:cNvPr id="6" name="Shape 4"/>
+          <p:cNvSpPr/>
+          <p:nvPr/>
+        </p:nvSpPr>
+        <p:spPr>
+          <a:xfrm>
+            <a:off x="822960" y="2011680"/>
+            <a:ext cx="5074920" cy="3611880"/>
+          </a:xfrm>
+          <a:prstGeom prst="roundRect">
+            <a:avLst>
+              <a:gd name="adj" fmla="val 2025"/>
+            </a:avLst>
+          </a:prstGeom>
+          <a:solidFill>
+            <a:srgbClr val="111A2E"/>
+          </a:solidFill>
+          <a:ln w="12700">
+            <a:solidFill>
+              <a:srgbClr val="1E2D45"/>
+            </a:solidFill>
+            <a:prstDash val="solid"/>
+          </a:ln>
+        </p:spPr>
+      </p:sp>
+      <p:sp>
+        <p:nvSpPr>
+          <p:cNvPr id="7" name="Text 5"/>
+          <p:cNvSpPr/>
+          <p:nvPr/>
+        </p:nvSpPr>
+        <p:spPr>
+          <a:xfrm>
+            <a:off x="1097280" y="2240280"/>
+            <a:ext cx="4526280" cy="502920"/>
+          </a:xfrm>
+          <a:prstGeom prst="rect">
+            <a:avLst/>
+          </a:prstGeom>
+          <a:noFill/>
+          <a:ln/>
+        </p:spPr>
+        <p:txBody>
+          <a:bodyPr wrap="square" rtlCol="0" anchor="ctr"/>
+          <a:lstStyle/>
+          <a:p>
+            <a:pPr indent="0" marL="0">
+              <a:buNone/>
+            </a:pPr>
+            <a:r>
+              <a:rPr lang="en-US" sz="1650" b="1" dirty="0">
+                <a:solidFill>
+                  <a:srgbClr val="06B6D4"/>
+                </a:solidFill>
+                <a:latin typeface="Segoe UI" pitchFamily="34" charset="0"/>
+                <a:ea typeface="Segoe UI" pitchFamily="34" charset="-122"/>
+                <a:cs typeface="Segoe UI" pitchFamily="34" charset="-120"/>
+              </a:rPr>
+              <a:t>Internal glue code</a:t>
+            </a:r>
+            <a:endParaRPr lang="en-US" sz="1650" dirty="0"/>
+          </a:p>
+        </p:txBody>
+      </p:sp>
+      <p:sp>
+        <p:nvSpPr>
+          <p:cNvPr id="8" name="Text 6"/>
+          <p:cNvSpPr/>
+          <p:nvPr/>
+        </p:nvSpPr>
+        <p:spPr>
+          <a:xfrm>
+            <a:off x="1097280" y="2834640"/>
+            <a:ext cx="4553712" cy="2651760"/>
+          </a:xfrm>
+          <a:prstGeom prst="rect">
+            <a:avLst/>
+          </a:prstGeom>
+          <a:noFill/>
+          <a:ln/>
+        </p:spPr>
+        <p:txBody>
+          <a:bodyPr wrap="square" rtlCol="0" anchor="t"/>
+          <a:lstStyle/>
+          <a:p>
+            <a:pPr marL="342900" indent="-342900">
+              <a:lnSpc>
+                <a:spcPct val="112000"/>
+              </a:lnSpc>
+              <a:spcAft>
+                <a:spcPts val="900"/>
+              </a:spcAft>
+              <a:buSzPct val="100000"/>
+              <a:buChar char="▸"/>
+            </a:pPr>
+            <a:r>
+              <a:rPr lang="en-US" sz="1280" dirty="0">
+                <a:solidFill>
+                  <a:srgbClr val="CBD5E1"/>
+                </a:solidFill>
+                <a:latin typeface="Segoe UI" pitchFamily="34" charset="0"/>
+                <a:ea typeface="Segoe UI" pitchFamily="34" charset="-122"/>
+                <a:cs typeface="Segoe UI" pitchFamily="34" charset="-120"/>
+              </a:rPr>
+              <a:t>Vague assumptions survive because nobody checks</a:t>
+            </a:r>
+            <a:endParaRPr lang="en-US" sz="1280" dirty="0"/>
+          </a:p>
+          <a:p>
+            <a:pPr marL="342900" indent="-342900">
+              <a:lnSpc>
+                <a:spcPct val="112000"/>
+              </a:lnSpc>
+              <a:spcAft>
+                <a:spcPts val="900"/>
+              </a:spcAft>
+              <a:buSzPct val="100000"/>
+              <a:buChar char="▸"/>
+            </a:pPr>
+            <a:r>
+              <a:rPr lang="en-US" sz="1280" dirty="0">
+                <a:solidFill>
+                  <a:srgbClr val="CBD5E1"/>
+                </a:solidFill>
+                <a:latin typeface="Segoe UI" pitchFamily="34" charset="0"/>
+                <a:ea typeface="Segoe UI" pitchFamily="34" charset="-122"/>
+                <a:cs typeface="Segoe UI" pitchFamily="34" charset="-120"/>
+              </a:rPr>
+              <a:t>Errors only the author can decode</a:t>
+            </a:r>
+            <a:endParaRPr lang="en-US" sz="1280" dirty="0"/>
+          </a:p>
+          <a:p>
+            <a:pPr marL="342900" indent="-342900">
+              <a:lnSpc>
+                <a:spcPct val="112000"/>
+              </a:lnSpc>
+              <a:spcAft>
+                <a:spcPts val="900"/>
+              </a:spcAft>
+              <a:buSzPct val="100000"/>
+              <a:buChar char="▸"/>
+            </a:pPr>
+            <a:r>
+              <a:rPr lang="en-US" sz="1280" dirty="0">
+                <a:solidFill>
+                  <a:srgbClr val="CBD5E1"/>
+                </a:solidFill>
+                <a:latin typeface="Segoe UI" pitchFamily="34" charset="0"/>
+                <a:ea typeface="Segoe UI" pitchFamily="34" charset="-122"/>
+                <a:cs typeface="Segoe UI" pitchFamily="34" charset="-120"/>
+              </a:rPr>
+              <a:t>Documentation is a best-effort afterthought</a:t>
+            </a:r>
+            <a:endParaRPr lang="en-US" sz="1280" dirty="0"/>
+          </a:p>
+          <a:p>
+            <a:pPr marL="342900" indent="-342900">
+              <a:lnSpc>
+                <a:spcPct val="112000"/>
+              </a:lnSpc>
+              <a:spcAft>
+                <a:spcPts val="900"/>
+              </a:spcAft>
+              <a:buSzPct val="100000"/>
+              <a:buChar char="▸"/>
+            </a:pPr>
+            <a:r>
+              <a:rPr lang="en-US" sz="1280" dirty="0">
+                <a:solidFill>
+                  <a:srgbClr val="CBD5E1"/>
+                </a:solidFill>
+                <a:latin typeface="Segoe UI" pitchFamily="34" charset="0"/>
+                <a:ea typeface="Segoe UI" pitchFamily="34" charset="-122"/>
+                <a:cs typeface="Segoe UI" pitchFamily="34" charset="-120"/>
+              </a:rPr>
+              <a:t>Quality depends on the mood of the deadline</a:t>
+            </a:r>
+            <a:endParaRPr lang="en-US" sz="1280" dirty="0"/>
+          </a:p>
+        </p:txBody>
+      </p:sp>
+      <p:sp>
+        <p:nvSpPr>
+          <p:cNvPr id="9" name="Shape 7"/>
+          <p:cNvSpPr/>
+          <p:nvPr/>
+        </p:nvSpPr>
+        <p:spPr>
+          <a:xfrm>
+            <a:off x="6291072" y="2011680"/>
+            <a:ext cx="5074920" cy="3611880"/>
+          </a:xfrm>
+          <a:prstGeom prst="roundRect">
+            <a:avLst>
+              <a:gd name="adj" fmla="val 2025"/>
+            </a:avLst>
+          </a:prstGeom>
+          <a:solidFill>
+            <a:srgbClr val="111A2E"/>
+          </a:solidFill>
+          <a:ln w="12700">
+            <a:solidFill>
+              <a:srgbClr val="1E2D45"/>
+            </a:solidFill>
+            <a:prstDash val="solid"/>
+          </a:ln>
+        </p:spPr>
+      </p:sp>
+      <p:sp>
+        <p:nvSpPr>
+          <p:cNvPr id="10" name="Text 8"/>
+          <p:cNvSpPr/>
+          <p:nvPr/>
+        </p:nvSpPr>
+        <p:spPr>
+          <a:xfrm>
+            <a:off x="6565392" y="2240280"/>
+            <a:ext cx="4526280" cy="502920"/>
+          </a:xfrm>
+          <a:prstGeom prst="rect">
+            <a:avLst/>
+          </a:prstGeom>
+          <a:noFill/>
+          <a:ln/>
+        </p:spPr>
+        <p:txBody>
+          <a:bodyPr wrap="square" rtlCol="0" anchor="ctr"/>
+          <a:lstStyle/>
+          <a:p>
+            <a:pPr indent="0" marL="0">
+              <a:buNone/>
+            </a:pPr>
+            <a:r>
+              <a:rPr lang="en-US" sz="1650" b="1" dirty="0">
+                <a:solidFill>
+                  <a:srgbClr val="93C5FD"/>
+                </a:solidFill>
+                <a:latin typeface="Segoe UI" pitchFamily="34" charset="0"/>
+                <a:ea typeface="Segoe UI" pitchFamily="34" charset="-122"/>
+                <a:cs typeface="Segoe UI" pitchFamily="34" charset="-120"/>
+              </a:rPr>
+              <a:t>Open-source framework</a:t>
+            </a:r>
+            <a:endParaRPr lang="en-US" sz="1650" dirty="0"/>
+          </a:p>
+        </p:txBody>
+      </p:sp>
+      <p:sp>
+        <p:nvSpPr>
+          <p:cNvPr id="11" name="Text 9"/>
+          <p:cNvSpPr/>
+          <p:nvPr/>
+        </p:nvSpPr>
+        <p:spPr>
+          <a:xfrm>
+            <a:off x="6565392" y="2834640"/>
+            <a:ext cx="4553712" cy="2651760"/>
+          </a:xfrm>
+          <a:prstGeom prst="rect">
+            <a:avLst/>
+          </a:prstGeom>
+          <a:noFill/>
+          <a:ln/>
+        </p:spPr>
+        <p:txBody>
+          <a:bodyPr wrap="square" rtlCol="0" anchor="t"/>
+          <a:lstStyle/>
+          <a:p>
+            <a:pPr marL="342900" indent="-342900">
+              <a:lnSpc>
+                <a:spcPct val="112000"/>
+              </a:lnSpc>
+              <a:spcAft>
+                <a:spcPts val="900"/>
+              </a:spcAft>
+              <a:buSzPct val="100000"/>
+              <a:buChar char="▸"/>
+            </a:pPr>
+            <a:r>
+              <a:rPr lang="en-US" sz="1280" dirty="0">
+                <a:solidFill>
+                  <a:srgbClr val="CBD5E1"/>
+                </a:solidFill>
+                <a:latin typeface="Segoe UI" pitchFamily="34" charset="0"/>
+                <a:ea typeface="Segoe UI" pitchFamily="34" charset="-122"/>
+                <a:cs typeface="Segoe UI" pitchFamily="34" charset="-120"/>
+              </a:rPr>
+              <a:t>Assumptions must hold for people you will never meet</a:t>
+            </a:r>
+            <a:endParaRPr lang="en-US" sz="1280" dirty="0"/>
+          </a:p>
+          <a:p>
+            <a:pPr marL="342900" indent="-342900">
+              <a:lnSpc>
+                <a:spcPct val="112000"/>
+              </a:lnSpc>
+              <a:spcAft>
+                <a:spcPts val="900"/>
+              </a:spcAft>
+              <a:buSzPct val="100000"/>
+              <a:buChar char="▸"/>
+            </a:pPr>
+            <a:r>
+              <a:rPr lang="en-US" sz="1280" dirty="0">
+                <a:solidFill>
+                  <a:srgbClr val="CBD5E1"/>
+                </a:solidFill>
+                <a:latin typeface="Segoe UI" pitchFamily="34" charset="0"/>
+                <a:ea typeface="Segoe UI" pitchFamily="34" charset="-122"/>
+                <a:cs typeface="Segoe UI" pitchFamily="34" charset="-120"/>
+              </a:rPr>
+              <a:t>Errors written so anyone can act on them</a:t>
+            </a:r>
+            <a:endParaRPr lang="en-US" sz="1280" dirty="0"/>
+          </a:p>
+          <a:p>
+            <a:pPr marL="342900" indent="-342900">
+              <a:lnSpc>
+                <a:spcPct val="112000"/>
+              </a:lnSpc>
+              <a:spcAft>
+                <a:spcPts val="900"/>
+              </a:spcAft>
+              <a:buSzPct val="100000"/>
+              <a:buChar char="▸"/>
+            </a:pPr>
+            <a:r>
+              <a:rPr lang="en-US" sz="1280" dirty="0">
+                <a:solidFill>
+                  <a:srgbClr val="CBD5E1"/>
+                </a:solidFill>
+                <a:latin typeface="Segoe UI" pitchFamily="34" charset="0"/>
+                <a:ea typeface="Segoe UI" pitchFamily="34" charset="-122"/>
+                <a:cs typeface="Segoe UI" pitchFamily="34" charset="-120"/>
+              </a:rPr>
+              <a:t>Docs that strangers actually rely on</a:t>
+            </a:r>
+            <a:endParaRPr lang="en-US" sz="1280" dirty="0"/>
+          </a:p>
+          <a:p>
+            <a:pPr marL="342900" indent="-342900">
+              <a:lnSpc>
+                <a:spcPct val="112000"/>
+              </a:lnSpc>
+              <a:spcAft>
+                <a:spcPts val="900"/>
+              </a:spcAft>
+              <a:buSzPct val="100000"/>
+              <a:buChar char="▸"/>
+            </a:pPr>
+            <a:r>
+              <a:rPr lang="en-US" sz="1280" dirty="0">
+                <a:solidFill>
+                  <a:srgbClr val="CBD5E1"/>
+                </a:solidFill>
+                <a:latin typeface="Segoe UI" pitchFamily="34" charset="0"/>
+                <a:ea typeface="Segoe UI" pitchFamily="34" charset="-122"/>
+                <a:cs typeface="Segoe UI" pitchFamily="34" charset="-120"/>
+              </a:rPr>
+              <a:t>Quality enforced by gates, not goodwill</a:t>
+            </a:r>
+            <a:endParaRPr lang="en-US" sz="1280" dirty="0"/>
+          </a:p>
+        </p:txBody>
+      </p:sp>
+      <p:sp>
+        <p:nvSpPr>
+          <p:cNvPr id="12" name="Shape 10"/>
+          <p:cNvSpPr/>
+          <p:nvPr/>
+        </p:nvSpPr>
+        <p:spPr>
+          <a:xfrm>
+            <a:off x="822960" y="5961888"/>
+            <a:ext cx="10515600" cy="0"/>
+          </a:xfrm>
+          <a:prstGeom prst="line">
+            <a:avLst/>
+          </a:prstGeom>
+          <a:noFill/>
+          <a:ln w="12700">
+            <a:solidFill>
+              <a:srgbClr val="1E2D45"/>
+            </a:solidFill>
+            <a:prstDash val="solid"/>
+          </a:ln>
+        </p:spPr>
+      </p:sp>
+      <p:sp>
+        <p:nvSpPr>
+          <p:cNvPr id="13" name="Text 11"/>
+          <p:cNvSpPr/>
+          <p:nvPr/>
+        </p:nvSpPr>
+        <p:spPr>
+          <a:xfrm>
+            <a:off x="822960" y="6053328"/>
+            <a:ext cx="9692640" cy="457200"/>
+          </a:xfrm>
+          <a:prstGeom prst="rect">
+            <a:avLst/>
+          </a:prstGeom>
+          <a:noFill/>
+          <a:ln/>
+        </p:spPr>
+        <p:txBody>
+          <a:bodyPr wrap="square" rtlCol="0" anchor="ctr"/>
+          <a:lstStyle/>
+          <a:p>
+            <a:pPr indent="0" marL="0">
+              <a:buNone/>
+            </a:pPr>
+            <a:r>
+              <a:rPr lang="en-US" sz="1150" dirty="0">
+                <a:solidFill>
+                  <a:srgbClr val="64748B"/>
+                </a:solidFill>
+                <a:latin typeface="Segoe UI" pitchFamily="34" charset="0"/>
+                <a:ea typeface="Segoe UI" pitchFamily="34" charset="-122"/>
+                <a:cs typeface="Segoe UI" pitchFamily="34" charset="-120"/>
+              </a:rPr>
+              <a:t>Releasing it was a forcing function - the code got better because it had to.</a:t>
+            </a:r>
+            <a:endParaRPr lang="en-US" sz="1150" dirty="0"/>
+          </a:p>
+        </p:txBody>
+      </p:sp>
+      <p:sp>
+        <p:nvSpPr>
+          <p:cNvPr id="14" name="Text 12"/>
+          <p:cNvSpPr/>
+          <p:nvPr/>
+        </p:nvSpPr>
+        <p:spPr>
+          <a:xfrm>
+            <a:off x="10698480" y="6382512"/>
+            <a:ext cx="1188720" cy="365760"/>
+          </a:xfrm>
+          <a:prstGeom prst="rect">
+            <a:avLst/>
+          </a:prstGeom>
+          <a:noFill/>
+          <a:ln/>
+        </p:spPr>
+        <p:txBody>
+          <a:bodyPr wrap="square" rtlCol="0" anchor="ctr"/>
+          <a:lstStyle/>
+          <a:p>
+            <a:pPr algn="r" indent="0" marL="0">
+              <a:buNone/>
+            </a:pPr>
+            <a:r>
+              <a:rPr lang="en-US" sz="1000" dirty="0">
+                <a:solidFill>
+                  <a:srgbClr val="64748B"/>
+                </a:solidFill>
+                <a:latin typeface="Consolas" pitchFamily="34" charset="0"/>
+                <a:ea typeface="Consolas" pitchFamily="34" charset="-122"/>
+                <a:cs typeface="Consolas" pitchFamily="34" charset="-120"/>
+              </a:rPr>
+              <a:t>11 / 15</a:t>
+            </a:r>
+            <a:endParaRPr lang="en-US" sz="1000" dirty="0"/>
+          </a:p>
+        </p:txBody>
+      </p:sp>
+    </p:spTree>
+  </p:cSld>
+  <p:clrMapOvr>
+    <a:masterClrMapping/>
+  </p:clrMapOvr>
+</p:sld>
+</file>
+
+<file path=ppt/slides/slide12.xml><?xml version="1.0" encoding="utf-8"?>
+<p:sld xmlns:a="http://schemas.openxmlformats.org/drawingml/2006/main" xmlns:r="http://schemas.openxmlformats.org/officeDocument/2006/relationships" xmlns:p="http://schemas.openxmlformats.org/presentationml/2006/main">
+  <p:cSld name="Slide 12">
+    <p:bg>
+      <p:bgPr>
+        <a:solidFill>
+          <a:srgbClr val="0A0C12"/>
+        </a:solidFill>
+      </p:bgPr>
+    </p:bg>
+    <p:spTree>
+      <p:nvGrpSpPr>
+        <p:cNvPr id="1" name=""/>
+        <p:cNvGrpSpPr/>
+        <p:nvPr/>
+      </p:nvGrpSpPr>
+      <p:grpSpPr>
+        <a:xfrm>
+          <a:off x="0" y="0"/>
+          <a:ext cx="0" cy="0"/>
+          <a:chOff x="0" y="0"/>
+          <a:chExt cx="0" cy="0"/>
+        </a:xfrm>
+      </p:grpSpPr>
+      <p:sp>
+        <p:nvSpPr>
+          <p:cNvPr id="2" name="Shape 0"/>
+          <p:cNvSpPr/>
+          <p:nvPr/>
+        </p:nvSpPr>
+        <p:spPr>
+          <a:xfrm>
+            <a:off x="0" y="0"/>
+            <a:ext cx="7680960" cy="64008"/>
+          </a:xfrm>
+          <a:prstGeom prst="rect">
+            <a:avLst/>
+          </a:prstGeom>
+          <a:solidFill>
+            <a:srgbClr val="3B82F6"/>
+          </a:solidFill>
+          <a:ln/>
+        </p:spPr>
+      </p:sp>
+      <p:sp>
+        <p:nvSpPr>
+          <p:cNvPr id="3" name="Shape 1"/>
+          <p:cNvSpPr/>
+          <p:nvPr/>
+        </p:nvSpPr>
+        <p:spPr>
+          <a:xfrm>
+            <a:off x="7680960" y="0"/>
+            <a:ext cx="4510735" cy="64008"/>
+          </a:xfrm>
+          <a:prstGeom prst="rect">
+            <a:avLst/>
+          </a:prstGeom>
+          <a:solidFill>
+            <a:srgbClr val="06B6D4"/>
+          </a:solidFill>
+          <a:ln/>
+        </p:spPr>
+      </p:sp>
+      <p:sp>
+        <p:nvSpPr>
+          <p:cNvPr id="4" name="Text 2"/>
+          <p:cNvSpPr/>
+          <p:nvPr/>
+        </p:nvSpPr>
+        <p:spPr>
+          <a:xfrm>
+            <a:off x="822960" y="502920"/>
+            <a:ext cx="10515600" cy="365760"/>
+          </a:xfrm>
+          <a:prstGeom prst="rect">
+            <a:avLst/>
+          </a:prstGeom>
+          <a:noFill/>
+          <a:ln/>
+        </p:spPr>
+        <p:txBody>
+          <a:bodyPr wrap="square" rtlCol="0" anchor="ctr"/>
+          <a:lstStyle/>
+          <a:p>
+            <a:pPr indent="0" marL="0">
+              <a:buNone/>
+            </a:pPr>
+            <a:r>
+              <a:rPr lang="en-US" sz="1200" spc="300" kern="0" dirty="0">
+                <a:solidFill>
+                  <a:srgbClr val="06B6D4"/>
+                </a:solidFill>
+                <a:latin typeface="Consolas" pitchFamily="34" charset="0"/>
+                <a:ea typeface="Consolas" pitchFamily="34" charset="-122"/>
+                <a:cs typeface="Consolas" pitchFamily="34" charset="-120"/>
+              </a:rPr>
+              <a:t>IN PRODUCTION</a:t>
+            </a:r>
+            <a:endParaRPr lang="en-US" sz="1200" dirty="0"/>
+          </a:p>
+        </p:txBody>
+      </p:sp>
+      <p:sp>
+        <p:nvSpPr>
+          <p:cNvPr id="5" name="Text 3"/>
+          <p:cNvSpPr/>
+          <p:nvPr/>
+        </p:nvSpPr>
+        <p:spPr>
+          <a:xfrm>
+            <a:off x="822960" y="914400"/>
+            <a:ext cx="10561320" cy="868680"/>
+          </a:xfrm>
+          <a:prstGeom prst="rect">
+            <a:avLst/>
+          </a:prstGeom>
+          <a:noFill/>
+          <a:ln/>
+        </p:spPr>
+        <p:txBody>
+          <a:bodyPr wrap="square" rtlCol="0" anchor="ctr"/>
+          <a:lstStyle/>
+          <a:p>
+            <a:pPr indent="0" marL="0">
+              <a:buNone/>
+            </a:pPr>
+            <a:r>
+              <a:rPr lang="en-US" sz="2700" b="1" dirty="0">
+                <a:solidFill>
+                  <a:srgbClr val="FFFFFF"/>
+                </a:solidFill>
+                <a:latin typeface="Segoe UI" pitchFamily="34" charset="0"/>
+                <a:ea typeface="Segoe UI" pitchFamily="34" charset="-122"/>
+                <a:cs typeface="Segoe UI" pitchFamily="34" charset="-120"/>
+              </a:rPr>
+              <a:t>Where ODIS earns its keep</a:t>
+            </a:r>
+            <a:endParaRPr lang="en-US" sz="2700" dirty="0"/>
+          </a:p>
+        </p:txBody>
+      </p:sp>
+      <p:sp>
+        <p:nvSpPr>
+          <p:cNvPr id="6" name="Text 4"/>
+          <p:cNvSpPr/>
+          <p:nvPr/>
+        </p:nvSpPr>
+        <p:spPr>
+          <a:xfrm>
+            <a:off x="868680" y="2011680"/>
+            <a:ext cx="10424160" cy="3566160"/>
+          </a:xfrm>
+          <a:prstGeom prst="rect">
+            <a:avLst/>
+          </a:prstGeom>
+          <a:noFill/>
+          <a:ln/>
+        </p:spPr>
+        <p:txBody>
+          <a:bodyPr wrap="square" rtlCol="0" anchor="t"/>
+          <a:lstStyle/>
+          <a:p>
+            <a:pPr marL="342900" indent="-342900">
+              <a:lnSpc>
+                <a:spcPct val="112000"/>
+              </a:lnSpc>
+              <a:spcAft>
+                <a:spcPts val="900"/>
+              </a:spcAft>
+              <a:buSzPct val="100000"/>
+              <a:buChar char="▸"/>
+            </a:pPr>
+            <a:r>
+              <a:rPr lang="en-US" sz="1600" dirty="0">
+                <a:solidFill>
+                  <a:srgbClr val="CBD5E1"/>
+                </a:solidFill>
+                <a:latin typeface="Segoe UI" pitchFamily="34" charset="0"/>
+                <a:ea typeface="Segoe UI" pitchFamily="34" charset="-122"/>
+                <a:cs typeface="Segoe UI" pitchFamily="34" charset="-120"/>
+              </a:rPr>
+              <a:t>It powers data apps across the Zalin Labs suite, from ingestion to reporting.</a:t>
+            </a:r>
+            <a:endParaRPr lang="en-US" sz="1600" dirty="0"/>
+          </a:p>
+          <a:p>
+            <a:pPr marL="342900" indent="-342900">
+              <a:lnSpc>
+                <a:spcPct val="112000"/>
+              </a:lnSpc>
+              <a:spcAft>
+                <a:spcPts val="900"/>
+              </a:spcAft>
+              <a:buSzPct val="100000"/>
+              <a:buChar char="▸"/>
+            </a:pPr>
+            <a:r>
+              <a:rPr lang="en-US" sz="1600" dirty="0">
+                <a:solidFill>
+                  <a:srgbClr val="CBD5E1"/>
+                </a:solidFill>
+                <a:latin typeface="Segoe UI" pitchFamily="34" charset="0"/>
+                <a:ea typeface="Segoe UI" pitchFamily="34" charset="-122"/>
+                <a:cs typeface="Segoe UI" pitchFamily="34" charset="-120"/>
+              </a:rPr>
+              <a:t>It feeds BI and analytics workflows for client engagements.</a:t>
+            </a:r>
+            <a:endParaRPr lang="en-US" sz="1600" dirty="0"/>
+          </a:p>
+          <a:p>
+            <a:pPr marL="342900" indent="-342900">
+              <a:lnSpc>
+                <a:spcPct val="112000"/>
+              </a:lnSpc>
+              <a:spcAft>
+                <a:spcPts val="900"/>
+              </a:spcAft>
+              <a:buSzPct val="100000"/>
+              <a:buChar char="▸"/>
+            </a:pPr>
+            <a:r>
+              <a:rPr lang="en-US" sz="1600" dirty="0">
+                <a:solidFill>
+                  <a:srgbClr val="CBD5E1"/>
+                </a:solidFill>
+                <a:latin typeface="Segoe UI" pitchFamily="34" charset="0"/>
+                <a:ea typeface="Segoe UI" pitchFamily="34" charset="-122"/>
+                <a:cs typeface="Segoe UI" pitchFamily="34" charset="-120"/>
+              </a:rPr>
+              <a:t>4,305 lines maintained by an agent team under quality gates.</a:t>
+            </a:r>
+            <a:endParaRPr lang="en-US" sz="1600" dirty="0"/>
+          </a:p>
+          <a:p>
+            <a:pPr marL="342900" indent="-342900">
+              <a:lnSpc>
+                <a:spcPct val="112000"/>
+              </a:lnSpc>
+              <a:spcAft>
+                <a:spcPts val="900"/>
+              </a:spcAft>
+              <a:buSzPct val="100000"/>
+              <a:buChar char="▸"/>
+            </a:pPr>
+            <a:r>
+              <a:rPr lang="en-US" sz="1600" dirty="0">
+                <a:solidFill>
+                  <a:srgbClr val="CBD5E1"/>
+                </a:solidFill>
+                <a:latin typeface="Segoe UI" pitchFamily="34" charset="0"/>
+                <a:ea typeface="Segoe UI" pitchFamily="34" charset="-122"/>
+                <a:cs typeface="Segoe UI" pitchFamily="34" charset="-120"/>
+              </a:rPr>
+              <a:t>New sources plug in - they do not fork the framework.</a:t>
+            </a:r>
+            <a:endParaRPr lang="en-US" sz="1600" dirty="0"/>
+          </a:p>
+          <a:p>
+            <a:pPr marL="342900" indent="-342900">
+              <a:lnSpc>
+                <a:spcPct val="112000"/>
+              </a:lnSpc>
+              <a:spcAft>
+                <a:spcPts val="900"/>
+              </a:spcAft>
+              <a:buSzPct val="100000"/>
+              <a:buChar char="▸"/>
+            </a:pPr>
+            <a:r>
+              <a:rPr lang="en-US" sz="1600" dirty="0">
+                <a:solidFill>
+                  <a:srgbClr val="CBD5E1"/>
+                </a:solidFill>
+                <a:latin typeface="Segoe UI" pitchFamily="34" charset="0"/>
+                <a:ea typeface="Segoe UI" pitchFamily="34" charset="-122"/>
+                <a:cs typeface="Segoe UI" pitchFamily="34" charset="-120"/>
+              </a:rPr>
+              <a:t>It is open source: the stranger who reads it makes it better.</a:t>
+            </a:r>
+            <a:endParaRPr lang="en-US" sz="1600" dirty="0"/>
+          </a:p>
+        </p:txBody>
+      </p:sp>
+      <p:sp>
+        <p:nvSpPr>
+          <p:cNvPr id="7" name="Shape 5"/>
+          <p:cNvSpPr/>
+          <p:nvPr/>
+        </p:nvSpPr>
+        <p:spPr>
+          <a:xfrm>
+            <a:off x="822960" y="5961888"/>
+            <a:ext cx="10515600" cy="0"/>
+          </a:xfrm>
+          <a:prstGeom prst="line">
+            <a:avLst/>
+          </a:prstGeom>
+          <a:noFill/>
+          <a:ln w="12700">
+            <a:solidFill>
+              <a:srgbClr val="1E2D45"/>
+            </a:solidFill>
+            <a:prstDash val="solid"/>
+          </a:ln>
+        </p:spPr>
+      </p:sp>
+      <p:sp>
+        <p:nvSpPr>
+          <p:cNvPr id="8" name="Text 6"/>
+          <p:cNvSpPr/>
+          <p:nvPr/>
+        </p:nvSpPr>
+        <p:spPr>
+          <a:xfrm>
+            <a:off x="822960" y="6053328"/>
+            <a:ext cx="9692640" cy="457200"/>
+          </a:xfrm>
+          <a:prstGeom prst="rect">
+            <a:avLst/>
+          </a:prstGeom>
+          <a:noFill/>
+          <a:ln/>
+        </p:spPr>
+        <p:txBody>
+          <a:bodyPr wrap="square" rtlCol="0" anchor="ctr"/>
+          <a:lstStyle/>
+          <a:p>
+            <a:pPr indent="0" marL="0">
+              <a:buNone/>
+            </a:pPr>
+            <a:r>
+              <a:rPr lang="en-US" sz="1150" dirty="0">
+                <a:solidFill>
+                  <a:srgbClr val="64748B"/>
+                </a:solidFill>
+                <a:latin typeface="Segoe UI" pitchFamily="34" charset="0"/>
+                <a:ea typeface="Segoe UI" pitchFamily="34" charset="-122"/>
+                <a:cs typeface="Segoe UI" pitchFamily="34" charset="-120"/>
+              </a:rPr>
+              <a:t>Production-ready means it ships in work a client is paying for.</a:t>
+            </a:r>
+            <a:endParaRPr lang="en-US" sz="1150" dirty="0"/>
+          </a:p>
+        </p:txBody>
+      </p:sp>
+      <p:sp>
+        <p:nvSpPr>
+          <p:cNvPr id="9" name="Text 7"/>
+          <p:cNvSpPr/>
+          <p:nvPr/>
+        </p:nvSpPr>
+        <p:spPr>
+          <a:xfrm>
+            <a:off x="10698480" y="6382512"/>
+            <a:ext cx="1188720" cy="365760"/>
+          </a:xfrm>
+          <a:prstGeom prst="rect">
+            <a:avLst/>
+          </a:prstGeom>
+          <a:noFill/>
+          <a:ln/>
+        </p:spPr>
+        <p:txBody>
+          <a:bodyPr wrap="square" rtlCol="0" anchor="ctr"/>
+          <a:lstStyle/>
+          <a:p>
+            <a:pPr algn="r" indent="0" marL="0">
+              <a:buNone/>
+            </a:pPr>
+            <a:r>
+              <a:rPr lang="en-US" sz="1000" dirty="0">
+                <a:solidFill>
+                  <a:srgbClr val="64748B"/>
+                </a:solidFill>
+                <a:latin typeface="Consolas" pitchFamily="34" charset="0"/>
+                <a:ea typeface="Consolas" pitchFamily="34" charset="-122"/>
+                <a:cs typeface="Consolas" pitchFamily="34" charset="-120"/>
+              </a:rPr>
+              <a:t>12 / 15</a:t>
+            </a:r>
+            <a:endParaRPr lang="en-US" sz="1000" dirty="0"/>
+          </a:p>
+        </p:txBody>
+      </p:sp>
+    </p:spTree>
+  </p:cSld>
+  <p:clrMapOvr>
+    <a:masterClrMapping/>
+  </p:clrMapOvr>
+</p:sld>
+</file>
+
+<file path=ppt/slides/slide13.xml><?xml version="1.0" encoding="utf-8"?>
+<p:sld xmlns:a="http://schemas.openxmlformats.org/drawingml/2006/main" xmlns:r="http://schemas.openxmlformats.org/officeDocument/2006/relationships" xmlns:p="http://schemas.openxmlformats.org/presentationml/2006/main">
+  <p:cSld name="Slide 13">
+    <p:bg>
+      <p:bgPr>
+        <a:solidFill>
+          <a:srgbClr val="0A0C12"/>
+        </a:solidFill>
+      </p:bgPr>
+    </p:bg>
+    <p:spTree>
+      <p:nvGrpSpPr>
+        <p:cNvPr id="1" name=""/>
+        <p:cNvGrpSpPr/>
+        <p:nvPr/>
+      </p:nvGrpSpPr>
+      <p:grpSpPr>
+        <a:xfrm>
+          <a:off x="0" y="0"/>
+          <a:ext cx="0" cy="0"/>
+          <a:chOff x="0" y="0"/>
+          <a:chExt cx="0" cy="0"/>
+        </a:xfrm>
+      </p:grpSpPr>
+      <p:sp>
+        <p:nvSpPr>
+          <p:cNvPr id="2" name="Shape 0"/>
+          <p:cNvSpPr/>
+          <p:nvPr/>
+        </p:nvSpPr>
+        <p:spPr>
+          <a:xfrm>
+            <a:off x="0" y="0"/>
+            <a:ext cx="7680960" cy="64008"/>
+          </a:xfrm>
+          <a:prstGeom prst="rect">
+            <a:avLst/>
+          </a:prstGeom>
+          <a:solidFill>
+            <a:srgbClr val="3B82F6"/>
+          </a:solidFill>
+          <a:ln/>
+        </p:spPr>
+      </p:sp>
+      <p:sp>
+        <p:nvSpPr>
+          <p:cNvPr id="3" name="Shape 1"/>
+          <p:cNvSpPr/>
+          <p:nvPr/>
+        </p:nvSpPr>
+        <p:spPr>
+          <a:xfrm>
+            <a:off x="7680960" y="0"/>
+            <a:ext cx="4510735" cy="64008"/>
+          </a:xfrm>
+          <a:prstGeom prst="rect">
+            <a:avLst/>
+          </a:prstGeom>
+          <a:solidFill>
+            <a:srgbClr val="06B6D4"/>
+          </a:solidFill>
+          <a:ln/>
+        </p:spPr>
+      </p:sp>
+      <p:sp>
+        <p:nvSpPr>
+          <p:cNvPr id="4" name="Text 2"/>
+          <p:cNvSpPr/>
+          <p:nvPr/>
+        </p:nvSpPr>
+        <p:spPr>
+          <a:xfrm>
+            <a:off x="822960" y="502920"/>
+            <a:ext cx="10515600" cy="365760"/>
+          </a:xfrm>
+          <a:prstGeom prst="rect">
+            <a:avLst/>
+          </a:prstGeom>
+          <a:noFill/>
+          <a:ln/>
+        </p:spPr>
+        <p:txBody>
+          <a:bodyPr wrap="square" rtlCol="0" anchor="ctr"/>
+          <a:lstStyle/>
+          <a:p>
+            <a:pPr indent="0" marL="0">
+              <a:buNone/>
+            </a:pPr>
+            <a:r>
+              <a:rPr lang="en-US" sz="1200" spc="300" kern="0" dirty="0">
+                <a:solidFill>
+                  <a:srgbClr val="06B6D4"/>
+                </a:solidFill>
+                <a:latin typeface="Consolas" pitchFamily="34" charset="0"/>
+                <a:ea typeface="Consolas" pitchFamily="34" charset="-122"/>
+                <a:cs typeface="Consolas" pitchFamily="34" charset="-120"/>
+              </a:rPr>
+              <a:t>IMPACT</a:t>
+            </a:r>
+            <a:endParaRPr lang="en-US" sz="1200" dirty="0"/>
+          </a:p>
+        </p:txBody>
+      </p:sp>
+      <p:sp>
+        <p:nvSpPr>
+          <p:cNvPr id="5" name="Text 3"/>
+          <p:cNvSpPr/>
+          <p:nvPr/>
+        </p:nvSpPr>
+        <p:spPr>
+          <a:xfrm>
+            <a:off x="822960" y="914400"/>
+            <a:ext cx="10561320" cy="868680"/>
+          </a:xfrm>
+          <a:prstGeom prst="rect">
+            <a:avLst/>
+          </a:prstGeom>
+          <a:noFill/>
+          <a:ln/>
+        </p:spPr>
+        <p:txBody>
+          <a:bodyPr wrap="square" rtlCol="0" anchor="ctr"/>
+          <a:lstStyle/>
+          <a:p>
+            <a:pPr indent="0" marL="0">
+              <a:buNone/>
+            </a:pPr>
+            <a:r>
+              <a:rPr lang="en-US" sz="2700" b="1" dirty="0">
+                <a:solidFill>
+                  <a:srgbClr val="FFFFFF"/>
+                </a:solidFill>
+                <a:latin typeface="Segoe UI" pitchFamily="34" charset="0"/>
+                <a:ea typeface="Segoe UI" pitchFamily="34" charset="-122"/>
+                <a:cs typeface="Segoe UI" pitchFamily="34" charset="-120"/>
+              </a:rPr>
+              <a:t>Hours per engagement: glue vs analysis</a:t>
+            </a:r>
+            <a:endParaRPr lang="en-US" sz="2700" dirty="0"/>
+          </a:p>
+        </p:txBody>
+      </p:sp>
+      <p:graphicFrame>
+        <p:nvGraphicFramePr>
+          <p:cNvPr id="6" name="Chart 0" descr=""/>
+          <p:cNvGraphicFramePr/>
+          <p:nvPr/>
+        </p:nvGraphicFramePr>
+        <p:xfrm>
+          <a:off x="822960" y="1874520"/>
+          <a:ext cx="10515600" cy="3337560"/>
+        </p:xfrm>
+        <a:graphic xmlns:a="http://schemas.openxmlformats.org/drawingml/2006/main">
+          <a:graphicData uri="http://schemas.openxmlformats.org/drawingml/2006/chart">
+            <c:chart xmlns:c="http://schemas.openxmlformats.org/drawingml/2006/chart" r:id="rId1"/>
+          </a:graphicData>
+        </a:graphic>
+      </p:graphicFrame>
+      <p:sp>
+        <p:nvSpPr>
+          <p:cNvPr id="7" name="Shape 4"/>
+          <p:cNvSpPr/>
+          <p:nvPr/>
+        </p:nvSpPr>
+        <p:spPr>
+          <a:xfrm>
+            <a:off x="822960" y="5413248"/>
+            <a:ext cx="10515600" cy="0"/>
+          </a:xfrm>
+          <a:prstGeom prst="line">
+            <a:avLst/>
+          </a:prstGeom>
+          <a:noFill/>
+          <a:ln w="12700">
+            <a:solidFill>
+              <a:srgbClr val="1E2D45"/>
+            </a:solidFill>
+            <a:prstDash val="solid"/>
+          </a:ln>
+        </p:spPr>
+      </p:sp>
+      <p:sp>
+        <p:nvSpPr>
+          <p:cNvPr id="8" name="Text 5"/>
+          <p:cNvSpPr/>
+          <p:nvPr/>
+        </p:nvSpPr>
+        <p:spPr>
+          <a:xfrm>
+            <a:off x="822960" y="5504688"/>
+            <a:ext cx="10424160" cy="411480"/>
+          </a:xfrm>
+          <a:prstGeom prst="rect">
+            <a:avLst/>
+          </a:prstGeom>
+          <a:noFill/>
+          <a:ln/>
+        </p:spPr>
+        <p:txBody>
+          <a:bodyPr wrap="square" rtlCol="0" anchor="ctr"/>
+          <a:lstStyle/>
+          <a:p>
+            <a:pPr indent="0" marL="0">
+              <a:buNone/>
+            </a:pPr>
+            <a:r>
+              <a:rPr lang="en-US" sz="1300" i="1" dirty="0">
+                <a:solidFill>
+                  <a:srgbClr val="06B6D4"/>
+                </a:solidFill>
+                <a:latin typeface="Segoe UI" pitchFamily="34" charset="0"/>
+                <a:ea typeface="Segoe UI" pitchFamily="34" charset="-122"/>
+                <a:cs typeface="Segoe UI" pitchFamily="34" charset="-120"/>
+              </a:rPr>
+              <a:t>→  Once the skeleton runs itself, the hours shift from glue to the analysis clients are actually paying for.</a:t>
+            </a:r>
+            <a:endParaRPr lang="en-US" sz="1300" dirty="0"/>
+          </a:p>
+        </p:txBody>
+      </p:sp>
+      <p:sp>
+        <p:nvSpPr>
+          <p:cNvPr id="9" name="Shape 6"/>
+          <p:cNvSpPr/>
+          <p:nvPr/>
+        </p:nvSpPr>
+        <p:spPr>
+          <a:xfrm>
+            <a:off x="822960" y="5961888"/>
+            <a:ext cx="10515600" cy="0"/>
+          </a:xfrm>
+          <a:prstGeom prst="line">
+            <a:avLst/>
+          </a:prstGeom>
+          <a:noFill/>
+          <a:ln w="12700">
+            <a:solidFill>
+              <a:srgbClr val="1E2D45"/>
+            </a:solidFill>
+            <a:prstDash val="solid"/>
+          </a:ln>
+        </p:spPr>
+      </p:sp>
+      <p:sp>
+        <p:nvSpPr>
+          <p:cNvPr id="10" name="Text 7"/>
+          <p:cNvSpPr/>
+          <p:nvPr/>
+        </p:nvSpPr>
+        <p:spPr>
+          <a:xfrm>
+            <a:off x="822960" y="6053328"/>
+            <a:ext cx="9692640" cy="457200"/>
+          </a:xfrm>
+          <a:prstGeom prst="rect">
+            <a:avLst/>
+          </a:prstGeom>
+          <a:noFill/>
+          <a:ln/>
+        </p:spPr>
+        <p:txBody>
+          <a:bodyPr wrap="square" rtlCol="0" anchor="ctr"/>
+          <a:lstStyle/>
+          <a:p>
+            <a:pPr indent="0" marL="0">
+              <a:buNone/>
+            </a:pPr>
+            <a:r>
+              <a:rPr lang="en-US" sz="1150" dirty="0">
+                <a:solidFill>
+                  <a:srgbClr val="64748B"/>
+                </a:solidFill>
+                <a:latin typeface="Segoe UI" pitchFamily="34" charset="0"/>
+                <a:ea typeface="Segoe UI" pitchFamily="34" charset="-122"/>
+                <a:cs typeface="Segoe UI" pitchFamily="34" charset="-120"/>
+              </a:rPr>
+              <a:t>Illustrative effort pattern on an engagement running ODIS from kickoff.</a:t>
+            </a:r>
+            <a:endParaRPr lang="en-US" sz="1150" dirty="0"/>
+          </a:p>
+        </p:txBody>
+      </p:sp>
+      <p:sp>
+        <p:nvSpPr>
+          <p:cNvPr id="11" name="Text 8"/>
+          <p:cNvSpPr/>
+          <p:nvPr/>
+        </p:nvSpPr>
+        <p:spPr>
+          <a:xfrm>
+            <a:off x="10698480" y="6382512"/>
+            <a:ext cx="1188720" cy="365760"/>
+          </a:xfrm>
+          <a:prstGeom prst="rect">
+            <a:avLst/>
+          </a:prstGeom>
+          <a:noFill/>
+          <a:ln/>
+        </p:spPr>
+        <p:txBody>
+          <a:bodyPr wrap="square" rtlCol="0" anchor="ctr"/>
+          <a:lstStyle/>
+          <a:p>
+            <a:pPr algn="r" indent="0" marL="0">
+              <a:buNone/>
+            </a:pPr>
+            <a:r>
+              <a:rPr lang="en-US" sz="1000" dirty="0">
+                <a:solidFill>
+                  <a:srgbClr val="64748B"/>
+                </a:solidFill>
+                <a:latin typeface="Consolas" pitchFamily="34" charset="0"/>
+                <a:ea typeface="Consolas" pitchFamily="34" charset="-122"/>
+                <a:cs typeface="Consolas" pitchFamily="34" charset="-120"/>
+              </a:rPr>
+              <a:t>13 / 15</a:t>
+            </a:r>
+            <a:endParaRPr lang="en-US" sz="1000" dirty="0"/>
+          </a:p>
+        </p:txBody>
+      </p:sp>
+    </p:spTree>
+  </p:cSld>
+  <p:clrMapOvr>
+    <a:masterClrMapping/>
+  </p:clrMapOvr>
+</p:sld>
+</file>
+
+<file path=ppt/slides/slide14.xml><?xml version="1.0" encoding="utf-8"?>
+<p:sld xmlns:a="http://schemas.openxmlformats.org/drawingml/2006/main" xmlns:r="http://schemas.openxmlformats.org/officeDocument/2006/relationships" xmlns:p="http://schemas.openxmlformats.org/presentationml/2006/main">
+  <p:cSld name="Slide 14">
+    <p:bg>
+      <p:bgPr>
+        <a:solidFill>
+          <a:srgbClr val="0A0C12"/>
+        </a:solidFill>
+      </p:bgPr>
+    </p:bg>
+    <p:spTree>
+      <p:nvGrpSpPr>
+        <p:cNvPr id="1" name=""/>
+        <p:cNvGrpSpPr/>
+        <p:nvPr/>
+      </p:nvGrpSpPr>
+      <p:grpSpPr>
+        <a:xfrm>
+          <a:off x="0" y="0"/>
+          <a:ext cx="0" cy="0"/>
+          <a:chOff x="0" y="0"/>
+          <a:chExt cx="0" cy="0"/>
+        </a:xfrm>
+      </p:grpSpPr>
+      <p:sp>
+        <p:nvSpPr>
+          <p:cNvPr id="2" name="Shape 0"/>
+          <p:cNvSpPr/>
+          <p:nvPr/>
+        </p:nvSpPr>
+        <p:spPr>
+          <a:xfrm>
+            <a:off x="0" y="0"/>
+            <a:ext cx="7680960" cy="64008"/>
+          </a:xfrm>
+          <a:prstGeom prst="rect">
+            <a:avLst/>
+          </a:prstGeom>
+          <a:solidFill>
+            <a:srgbClr val="3B82F6"/>
+          </a:solidFill>
+          <a:ln/>
+        </p:spPr>
+      </p:sp>
+      <p:sp>
+        <p:nvSpPr>
+          <p:cNvPr id="3" name="Shape 1"/>
+          <p:cNvSpPr/>
+          <p:nvPr/>
+        </p:nvSpPr>
+        <p:spPr>
+          <a:xfrm>
+            <a:off x="7680960" y="0"/>
+            <a:ext cx="4510735" cy="64008"/>
+          </a:xfrm>
+          <a:prstGeom prst="rect">
+            <a:avLst/>
+          </a:prstGeom>
+          <a:solidFill>
+            <a:srgbClr val="06B6D4"/>
+          </a:solidFill>
+          <a:ln/>
+        </p:spPr>
+      </p:sp>
+      <p:sp>
+        <p:nvSpPr>
+          <p:cNvPr id="4" name="Text 2"/>
+          <p:cNvSpPr/>
+          <p:nvPr/>
+        </p:nvSpPr>
+        <p:spPr>
+          <a:xfrm>
+            <a:off x="822960" y="502920"/>
+            <a:ext cx="10515600" cy="365760"/>
+          </a:xfrm>
+          <a:prstGeom prst="rect">
+            <a:avLst/>
+          </a:prstGeom>
+          <a:noFill/>
+          <a:ln/>
+        </p:spPr>
+        <p:txBody>
+          <a:bodyPr wrap="square" rtlCol="0" anchor="ctr"/>
+          <a:lstStyle/>
+          <a:p>
+            <a:pPr indent="0" marL="0">
+              <a:buNone/>
+            </a:pPr>
+            <a:r>
+              <a:rPr lang="en-US" sz="1200" spc="300" kern="0" dirty="0">
+                <a:solidFill>
+                  <a:srgbClr val="06B6D4"/>
+                </a:solidFill>
+                <a:latin typeface="Consolas" pitchFamily="34" charset="0"/>
+                <a:ea typeface="Consolas" pitchFamily="34" charset="-122"/>
+                <a:cs typeface="Consolas" pitchFamily="34" charset="-120"/>
+              </a:rPr>
+              <a:t>ROADMAP</a:t>
+            </a:r>
+            <a:endParaRPr lang="en-US" sz="1200" dirty="0"/>
+          </a:p>
+        </p:txBody>
+      </p:sp>
+      <p:sp>
+        <p:nvSpPr>
+          <p:cNvPr id="5" name="Text 3"/>
+          <p:cNvSpPr/>
+          <p:nvPr/>
+        </p:nvSpPr>
+        <p:spPr>
+          <a:xfrm>
+            <a:off x="822960" y="914400"/>
+            <a:ext cx="10561320" cy="868680"/>
+          </a:xfrm>
+          <a:prstGeom prst="rect">
+            <a:avLst/>
+          </a:prstGeom>
+          <a:noFill/>
+          <a:ln/>
+        </p:spPr>
+        <p:txBody>
+          <a:bodyPr wrap="square" rtlCol="0" anchor="ctr"/>
+          <a:lstStyle/>
+          <a:p>
+            <a:pPr indent="0" marL="0">
+              <a:buNone/>
+            </a:pPr>
+            <a:r>
+              <a:rPr lang="en-US" sz="2700" b="1" dirty="0">
+                <a:solidFill>
+                  <a:srgbClr val="FFFFFF"/>
+                </a:solidFill>
+                <a:latin typeface="Segoe UI" pitchFamily="34" charset="0"/>
+                <a:ea typeface="Segoe UI" pitchFamily="34" charset="-122"/>
+                <a:cs typeface="Segoe UI" pitchFamily="34" charset="-120"/>
+              </a:rPr>
+              <a:t>Where it is heading</a:t>
+            </a:r>
+            <a:endParaRPr lang="en-US" sz="2700" dirty="0"/>
+          </a:p>
+        </p:txBody>
+      </p:sp>
+      <p:sp>
+        <p:nvSpPr>
+          <p:cNvPr id="6" name="Text 4"/>
+          <p:cNvSpPr/>
+          <p:nvPr/>
+        </p:nvSpPr>
+        <p:spPr>
+          <a:xfrm>
+            <a:off x="868680" y="2011680"/>
+            <a:ext cx="10424160" cy="3566160"/>
+          </a:xfrm>
+          <a:prstGeom prst="rect">
+            <a:avLst/>
+          </a:prstGeom>
+          <a:noFill/>
+          <a:ln/>
+        </p:spPr>
+        <p:txBody>
+          <a:bodyPr wrap="square" rtlCol="0" anchor="t"/>
+          <a:lstStyle/>
+          <a:p>
+            <a:pPr marL="342900" indent="-342900">
+              <a:lnSpc>
+                <a:spcPct val="112000"/>
+              </a:lnSpc>
+              <a:spcAft>
+                <a:spcPts val="900"/>
+              </a:spcAft>
+              <a:buSzPct val="100000"/>
+              <a:buChar char="▸"/>
+            </a:pPr>
+            <a:r>
+              <a:rPr lang="en-US" sz="1600" dirty="0">
+                <a:solidFill>
+                  <a:srgbClr val="CBD5E1"/>
+                </a:solidFill>
+                <a:latin typeface="Segoe UI" pitchFamily="34" charset="0"/>
+                <a:ea typeface="Segoe UI" pitchFamily="34" charset="-122"/>
+                <a:cs typeface="Segoe UI" pitchFamily="34" charset="-120"/>
+              </a:rPr>
+              <a:t>More connectors for the sources every engagement seems to bring.</a:t>
+            </a:r>
+            <a:endParaRPr lang="en-US" sz="1600" dirty="0"/>
+          </a:p>
+          <a:p>
+            <a:pPr marL="342900" indent="-342900">
+              <a:lnSpc>
+                <a:spcPct val="112000"/>
+              </a:lnSpc>
+              <a:spcAft>
+                <a:spcPts val="900"/>
+              </a:spcAft>
+              <a:buSzPct val="100000"/>
+              <a:buChar char="▸"/>
+            </a:pPr>
+            <a:r>
+              <a:rPr lang="en-US" sz="1600" dirty="0">
+                <a:solidFill>
+                  <a:srgbClr val="CBD5E1"/>
+                </a:solidFill>
+                <a:latin typeface="Segoe UI" pitchFamily="34" charset="0"/>
+                <a:ea typeface="Segoe UI" pitchFamily="34" charset="-122"/>
+                <a:cs typeface="Segoe UI" pitchFamily="34" charset="-120"/>
+              </a:rPr>
+              <a:t>Lightweight visualization exports for outputs that speak for themselves.</a:t>
+            </a:r>
+            <a:endParaRPr lang="en-US" sz="1600" dirty="0"/>
+          </a:p>
+          <a:p>
+            <a:pPr marL="342900" indent="-342900">
+              <a:lnSpc>
+                <a:spcPct val="112000"/>
+              </a:lnSpc>
+              <a:spcAft>
+                <a:spcPts val="900"/>
+              </a:spcAft>
+              <a:buSzPct val="100000"/>
+              <a:buChar char="▸"/>
+            </a:pPr>
+            <a:r>
+              <a:rPr lang="en-US" sz="1600" dirty="0">
+                <a:solidFill>
+                  <a:srgbClr val="CBD5E1"/>
+                </a:solidFill>
+                <a:latin typeface="Segoe UI" pitchFamily="34" charset="0"/>
+                <a:ea typeface="Segoe UI" pitchFamily="34" charset="-122"/>
+                <a:cs typeface="Segoe UI" pitchFamily="34" charset="-120"/>
+              </a:rPr>
+              <a:t>Deeper agent integration: ODIS pipelines exposed as tools any agent can call.</a:t>
+            </a:r>
+            <a:endParaRPr lang="en-US" sz="1600" dirty="0"/>
+          </a:p>
+          <a:p>
+            <a:pPr marL="342900" indent="-342900">
+              <a:lnSpc>
+                <a:spcPct val="112000"/>
+              </a:lnSpc>
+              <a:spcAft>
+                <a:spcPts val="900"/>
+              </a:spcAft>
+              <a:buSzPct val="100000"/>
+              <a:buChar char="▸"/>
+            </a:pPr>
+            <a:r>
+              <a:rPr lang="en-US" sz="1600" dirty="0">
+                <a:solidFill>
+                  <a:srgbClr val="CBD5E1"/>
+                </a:solidFill>
+                <a:latin typeface="Segoe UI" pitchFamily="34" charset="0"/>
+                <a:ea typeface="Segoe UI" pitchFamily="34" charset="-122"/>
+                <a:cs typeface="Segoe UI" pitchFamily="34" charset="-120"/>
+              </a:rPr>
+              <a:t>The roadmap is public, like the code - priorities set by what users hit first.</a:t>
+            </a:r>
+            <a:endParaRPr lang="en-US" sz="1600" dirty="0"/>
+          </a:p>
+        </p:txBody>
+      </p:sp>
+      <p:sp>
+        <p:nvSpPr>
+          <p:cNvPr id="7" name="Shape 5"/>
+          <p:cNvSpPr/>
+          <p:nvPr/>
+        </p:nvSpPr>
+        <p:spPr>
+          <a:xfrm>
+            <a:off x="822960" y="5961888"/>
+            <a:ext cx="10515600" cy="0"/>
+          </a:xfrm>
+          <a:prstGeom prst="line">
+            <a:avLst/>
+          </a:prstGeom>
+          <a:noFill/>
+          <a:ln w="12700">
+            <a:solidFill>
+              <a:srgbClr val="1E2D45"/>
+            </a:solidFill>
+            <a:prstDash val="solid"/>
+          </a:ln>
+        </p:spPr>
+      </p:sp>
+      <p:sp>
+        <p:nvSpPr>
+          <p:cNvPr id="8" name="Text 6"/>
+          <p:cNvSpPr/>
+          <p:nvPr/>
+        </p:nvSpPr>
+        <p:spPr>
+          <a:xfrm>
+            <a:off x="822960" y="6053328"/>
+            <a:ext cx="9692640" cy="457200"/>
+          </a:xfrm>
+          <a:prstGeom prst="rect">
+            <a:avLst/>
+          </a:prstGeom>
+          <a:noFill/>
+          <a:ln/>
+        </p:spPr>
+        <p:txBody>
+          <a:bodyPr wrap="square" rtlCol="0" anchor="ctr"/>
+          <a:lstStyle/>
+          <a:p>
+            <a:pPr indent="0" marL="0">
+              <a:buNone/>
+            </a:pPr>
+            <a:r>
+              <a:rPr lang="en-US" sz="1150" dirty="0">
+                <a:solidFill>
+                  <a:srgbClr val="64748B"/>
+                </a:solidFill>
+                <a:latin typeface="Segoe UI" pitchFamily="34" charset="0"/>
+                <a:ea typeface="Segoe UI" pitchFamily="34" charset="-122"/>
+                <a:cs typeface="Segoe UI" pitchFamily="34" charset="-120"/>
+              </a:rPr>
+              <a:t>Built in the open, shipped in the open.</a:t>
+            </a:r>
+            <a:endParaRPr lang="en-US" sz="1150" dirty="0"/>
+          </a:p>
+        </p:txBody>
+      </p:sp>
+      <p:sp>
+        <p:nvSpPr>
+          <p:cNvPr id="9" name="Text 7"/>
+          <p:cNvSpPr/>
+          <p:nvPr/>
+        </p:nvSpPr>
+        <p:spPr>
+          <a:xfrm>
+            <a:off x="10698480" y="6382512"/>
+            <a:ext cx="1188720" cy="365760"/>
+          </a:xfrm>
+          <a:prstGeom prst="rect">
+            <a:avLst/>
+          </a:prstGeom>
+          <a:noFill/>
+          <a:ln/>
+        </p:spPr>
+        <p:txBody>
+          <a:bodyPr wrap="square" rtlCol="0" anchor="ctr"/>
+          <a:lstStyle/>
+          <a:p>
+            <a:pPr algn="r" indent="0" marL="0">
+              <a:buNone/>
+            </a:pPr>
+            <a:r>
+              <a:rPr lang="en-US" sz="1000" dirty="0">
+                <a:solidFill>
+                  <a:srgbClr val="64748B"/>
+                </a:solidFill>
+                <a:latin typeface="Consolas" pitchFamily="34" charset="0"/>
+                <a:ea typeface="Consolas" pitchFamily="34" charset="-122"/>
+                <a:cs typeface="Consolas" pitchFamily="34" charset="-120"/>
+              </a:rPr>
+              <a:t>14 / 15</a:t>
+            </a:r>
+            <a:endParaRPr lang="en-US" sz="1000" dirty="0"/>
+          </a:p>
+        </p:txBody>
+      </p:sp>
+    </p:spTree>
+  </p:cSld>
+  <p:clrMapOvr>
+    <a:masterClrMapping/>
+  </p:clrMapOvr>
+</p:sld>
+</file>
+
+<file path=ppt/slides/slide15.xml><?xml version="1.0" encoding="utf-8"?>
+<p:sld xmlns:a="http://schemas.openxmlformats.org/drawingml/2006/main" xmlns:r="http://schemas.openxmlformats.org/officeDocument/2006/relationships" xmlns:p="http://schemas.openxmlformats.org/presentationml/2006/main">
+  <p:cSld name="Slide 15">
+    <p:bg>
+      <p:bgPr>
+        <a:solidFill>
+          <a:srgbClr val="0A0C12"/>
+        </a:solidFill>
+      </p:bgPr>
+    </p:bg>
+    <p:spTree>
+      <p:nvGrpSpPr>
+        <p:cNvPr id="1" name=""/>
+        <p:cNvGrpSpPr/>
+        <p:nvPr/>
+      </p:nvGrpSpPr>
+      <p:grpSpPr>
+        <a:xfrm>
+          <a:off x="0" y="0"/>
+          <a:ext cx="0" cy="0"/>
+          <a:chOff x="0" y="0"/>
+          <a:chExt cx="0" cy="0"/>
+        </a:xfrm>
+      </p:grpSpPr>
+      <p:sp>
+        <p:nvSpPr>
+          <p:cNvPr id="2" name="Shape 0"/>
+          <p:cNvSpPr/>
+          <p:nvPr/>
+        </p:nvSpPr>
+        <p:spPr>
+          <a:xfrm>
+            <a:off x="0" y="0"/>
+            <a:ext cx="7680960" cy="64008"/>
+          </a:xfrm>
+          <a:prstGeom prst="rect">
+            <a:avLst/>
+          </a:prstGeom>
+          <a:solidFill>
+            <a:srgbClr val="3B82F6"/>
+          </a:solidFill>
+          <a:ln/>
+        </p:spPr>
+      </p:sp>
+      <p:sp>
+        <p:nvSpPr>
+          <p:cNvPr id="3" name="Shape 1"/>
+          <p:cNvSpPr/>
+          <p:nvPr/>
+        </p:nvSpPr>
+        <p:spPr>
+          <a:xfrm>
+            <a:off x="7680960" y="0"/>
+            <a:ext cx="4510735" cy="64008"/>
+          </a:xfrm>
+          <a:prstGeom prst="rect">
+            <a:avLst/>
+          </a:prstGeom>
+          <a:solidFill>
+            <a:srgbClr val="06B6D4"/>
+          </a:solidFill>
+          <a:ln/>
+        </p:spPr>
+      </p:sp>
+      <p:sp>
+        <p:nvSpPr>
+          <p:cNvPr id="4" name="Text 2"/>
+          <p:cNvSpPr/>
+          <p:nvPr/>
+        </p:nvSpPr>
+        <p:spPr>
+          <a:xfrm>
+            <a:off x="822960" y="1417320"/>
+            <a:ext cx="10515600" cy="411480"/>
+          </a:xfrm>
+          <a:prstGeom prst="rect">
+            <a:avLst/>
+          </a:prstGeom>
+          <a:noFill/>
+          <a:ln/>
+        </p:spPr>
+        <p:txBody>
+          <a:bodyPr wrap="square" rtlCol="0" anchor="ctr"/>
+          <a:lstStyle/>
+          <a:p>
+            <a:pPr algn="ctr" indent="0" marL="0">
+              <a:buNone/>
+            </a:pPr>
+            <a:r>
+              <a:rPr lang="en-US" sz="1300" spc="400" kern="0" dirty="0">
+                <a:solidFill>
+                  <a:srgbClr val="06B6D4"/>
+                </a:solidFill>
+                <a:latin typeface="Consolas" pitchFamily="34" charset="0"/>
+                <a:ea typeface="Consolas" pitchFamily="34" charset="-122"/>
+                <a:cs typeface="Consolas" pitchFamily="34" charset="-120"/>
+              </a:rPr>
+              <a:t>WORK WITH ME</a:t>
+            </a:r>
+            <a:endParaRPr lang="en-US" sz="1300" dirty="0"/>
+          </a:p>
+        </p:txBody>
+      </p:sp>
+      <p:sp>
+        <p:nvSpPr>
+          <p:cNvPr id="5" name="Text 3"/>
+          <p:cNvSpPr/>
+          <p:nvPr/>
+        </p:nvSpPr>
+        <p:spPr>
+          <a:xfrm>
+            <a:off x="822960" y="1920240"/>
+            <a:ext cx="10515600" cy="1371600"/>
+          </a:xfrm>
+          <a:prstGeom prst="rect">
+            <a:avLst/>
+          </a:prstGeom>
+          <a:noFill/>
+          <a:ln/>
+        </p:spPr>
+        <p:txBody>
+          <a:bodyPr wrap="square" rtlCol="0" anchor="ctr"/>
+          <a:lstStyle/>
+          <a:p>
+            <a:pPr algn="ctr" indent="0" marL="0">
+              <a:buNone/>
+            </a:pPr>
+            <a:r>
+              <a:rPr lang="en-US" sz="3200" b="1" dirty="0">
+                <a:solidFill>
+                  <a:srgbClr val="FFFFFF"/>
+                </a:solidFill>
+                <a:latin typeface="Segoe UI" pitchFamily="34" charset="0"/>
+                <a:ea typeface="Segoe UI" pitchFamily="34" charset="-122"/>
+                <a:cs typeface="Segoe UI" pitchFamily="34" charset="-120"/>
+              </a:rPr>
+              <a:t>Own the boring 70%, spend on the brilliant 30%</a:t>
+            </a:r>
+            <a:endParaRPr lang="en-US" sz="3200" dirty="0"/>
+          </a:p>
+        </p:txBody>
+      </p:sp>
+      <p:sp>
+        <p:nvSpPr>
+          <p:cNvPr id="6" name="Text 4"/>
+          <p:cNvSpPr/>
+          <p:nvPr/>
+        </p:nvSpPr>
+        <p:spPr>
+          <a:xfrm>
+            <a:off x="2011680" y="3429000"/>
+            <a:ext cx="8183880" cy="1554480"/>
+          </a:xfrm>
+          <a:prstGeom prst="rect">
+            <a:avLst/>
+          </a:prstGeom>
+          <a:noFill/>
+          <a:ln/>
+        </p:spPr>
+        <p:txBody>
+          <a:bodyPr wrap="square" rtlCol="0" anchor="t"/>
+          <a:lstStyle/>
+          <a:p>
+            <a:pPr algn="ctr" indent="0" marL="0">
+              <a:spcAft>
+                <a:spcPts val="800"/>
+              </a:spcAft>
+              <a:buNone/>
+            </a:pPr>
+            <a:r>
+              <a:rPr lang="en-US" sz="1500" dirty="0">
+                <a:solidFill>
+                  <a:srgbClr val="CBD5E1"/>
+                </a:solidFill>
+                <a:latin typeface="Segoe UI" pitchFamily="34" charset="0"/>
+                <a:ea typeface="Segoe UI" pitchFamily="34" charset="-122"/>
+                <a:cs typeface="Segoe UI" pitchFamily="34" charset="-120"/>
+              </a:rPr>
+              <a:t>Stop paying engineers to rewrite the same pipeline every contract.</a:t>
+            </a:r>
+            <a:pPr algn="ctr" indent="0" marL="0">
+              <a:spcAft>
+                <a:spcPts val="800"/>
+              </a:spcAft>
+              <a:buNone/>
+            </a:pPr>
+            <a:r>
+              <a:rPr lang="en-US" sz="1500" dirty="0">
+                <a:solidFill>
+                  <a:srgbClr val="CBD5E1"/>
+                </a:solidFill>
+                <a:latin typeface="Segoe UI" pitchFamily="34" charset="0"/>
+                <a:ea typeface="Segoe UI" pitchFamily="34" charset="-122"/>
+                <a:cs typeface="Segoe UI" pitchFamily="34" charset="-120"/>
+              </a:rPr>
+              <a:t>ODIS is open source and production-ready - inspect the code before we ever talk.</a:t>
+            </a:r>
+            <a:pPr algn="ctr" indent="0" marL="0">
+              <a:spcAft>
+                <a:spcPts val="800"/>
+              </a:spcAft>
+              <a:buNone/>
+            </a:pPr>
+            <a:r>
+              <a:rPr lang="en-US" sz="1500" dirty="0">
+                <a:solidFill>
+                  <a:srgbClr val="CBD5E1"/>
+                </a:solidFill>
+                <a:latin typeface="Segoe UI" pitchFamily="34" charset="0"/>
+                <a:ea typeface="Segoe UI" pitchFamily="34" charset="-122"/>
+                <a:cs typeface="Segoe UI" pitchFamily="34" charset="-120"/>
+              </a:rPr>
+              <a:t>Bring your pipeline pain; leave with a running, validated skeleton.</a:t>
+            </a:r>
+            <a:endParaRPr lang="en-US" sz="1500" dirty="0"/>
+          </a:p>
+        </p:txBody>
+      </p:sp>
+      <p:sp>
+        <p:nvSpPr>
+          <p:cNvPr id="7" name="Shape 5"/>
+          <p:cNvSpPr/>
+          <p:nvPr/>
+        </p:nvSpPr>
+        <p:spPr>
+          <a:xfrm>
+            <a:off x="3566160" y="5212080"/>
+            <a:ext cx="5074920" cy="0"/>
+          </a:xfrm>
+          <a:prstGeom prst="line">
+            <a:avLst/>
+          </a:prstGeom>
+          <a:noFill/>
+          <a:ln w="25400">
+            <a:solidFill>
+              <a:srgbClr val="3B82F6"/>
+            </a:solidFill>
+            <a:prstDash val="solid"/>
+          </a:ln>
+        </p:spPr>
+      </p:sp>
+      <p:sp>
+        <p:nvSpPr>
+          <p:cNvPr id="8" name="Text 6"/>
+          <p:cNvSpPr/>
+          <p:nvPr/>
+        </p:nvSpPr>
+        <p:spPr>
+          <a:xfrm>
+            <a:off x="822960" y="5376672"/>
+            <a:ext cx="10515600" cy="457200"/>
+          </a:xfrm>
+          <a:prstGeom prst="rect">
+            <a:avLst/>
+          </a:prstGeom>
+          <a:noFill/>
+          <a:ln/>
+        </p:spPr>
+        <p:txBody>
+          <a:bodyPr wrap="square" rtlCol="0" anchor="ctr"/>
+          <a:lstStyle/>
+          <a:p>
+            <a:pPr algn="ctr" indent="0" marL="0">
+              <a:buNone/>
+            </a:pPr>
+            <a:r>
+              <a:rPr lang="en-US" sz="1350" b="1" dirty="0">
+                <a:solidFill>
+                  <a:srgbClr val="06B6D4"/>
+                </a:solidFill>
+                <a:latin typeface="Consolas" pitchFamily="34" charset="0"/>
+                <a:ea typeface="Consolas" pitchFamily="34" charset="-122"/>
+                <a:cs typeface="Consolas" pitchFamily="34" charset="-120"/>
+              </a:rPr>
+              <a:t>rezalianvatiady.github.io · github.com/rezalianvatiady</a:t>
+            </a:r>
+            <a:endParaRPr lang="en-US" sz="1350" dirty="0"/>
+          </a:p>
+        </p:txBody>
+      </p:sp>
+      <p:sp>
+        <p:nvSpPr>
+          <p:cNvPr id="9" name="Text 7"/>
+          <p:cNvSpPr/>
+          <p:nvPr/>
+        </p:nvSpPr>
+        <p:spPr>
+          <a:xfrm>
+            <a:off x="10698480" y="6382512"/>
+            <a:ext cx="1188720" cy="365760"/>
+          </a:xfrm>
+          <a:prstGeom prst="rect">
+            <a:avLst/>
+          </a:prstGeom>
+          <a:noFill/>
+          <a:ln/>
+        </p:spPr>
+        <p:txBody>
+          <a:bodyPr wrap="square" rtlCol="0" anchor="ctr"/>
+          <a:lstStyle/>
+          <a:p>
+            <a:pPr algn="r" indent="0" marL="0">
+              <a:buNone/>
+            </a:pPr>
+            <a:r>
+              <a:rPr lang="en-US" sz="1000" dirty="0">
+                <a:solidFill>
+                  <a:srgbClr val="64748B"/>
+                </a:solidFill>
+                <a:latin typeface="Consolas" pitchFamily="34" charset="0"/>
+                <a:ea typeface="Consolas" pitchFamily="34" charset="-122"/>
+                <a:cs typeface="Consolas" pitchFamily="34" charset="-120"/>
+              </a:rPr>
+              <a:t>15 / 15</a:t>
             </a:r>
             <a:endParaRPr lang="en-US" sz="1000" dirty="0"/>
           </a:p>
@@ -1799,7 +6415,7 @@
                 <a:ea typeface="Consolas" pitchFamily="34" charset="-122"/>
                 <a:cs typeface="Consolas" pitchFamily="34" charset="-120"/>
               </a:rPr>
-              <a:t>THE PROBLEM</a:t>
+              <a:t>AGENDA</a:t>
             </a:r>
             <a:endParaRPr lang="en-US" sz="1200" dirty="0"/>
           </a:p>
@@ -1813,8 +6429,8 @@
         </p:nvSpPr>
         <p:spPr>
           <a:xfrm>
-            <a:off x="822960" y="960120"/>
-            <a:ext cx="10515600" cy="868680"/>
+            <a:off x="822960" y="914400"/>
+            <a:ext cx="10561320" cy="868680"/>
           </a:xfrm>
           <a:prstGeom prst="rect">
             <a:avLst/>
@@ -1830,7 +6446,7 @@
               <a:buNone/>
             </a:pPr>
             <a:r>
-              <a:rPr lang="en-US" sz="3000" b="1" dirty="0">
+              <a:rPr lang="en-US" sz="2700" b="1" dirty="0">
                 <a:solidFill>
                   <a:srgbClr val="FFFFFF"/>
                 </a:solidFill>
@@ -1838,45 +6454,102 @@
                 <a:ea typeface="Segoe UI" pitchFamily="34" charset="-122"/>
                 <a:cs typeface="Segoe UI" pitchFamily="34" charset="-120"/>
               </a:rPr>
-              <a:t>Data work repeats itself</a:t>
-            </a:r>
-            <a:endParaRPr lang="en-US" sz="3000" dirty="0"/>
-          </a:p>
-        </p:txBody>
-      </p:sp>
-      <p:sp>
-        <p:nvSpPr>
-          <p:cNvPr id="6" name="Text 4"/>
-          <p:cNvSpPr/>
-          <p:nvPr/>
-        </p:nvSpPr>
-        <p:spPr>
-          <a:xfrm>
-            <a:off x="868680" y="2057400"/>
-            <a:ext cx="10424160" cy="3566160"/>
-          </a:xfrm>
-          <a:prstGeom prst="rect">
-            <a:avLst/>
-          </a:prstGeom>
-          <a:noFill/>
-          <a:ln/>
-        </p:spPr>
-        <p:txBody>
-          <a:bodyPr wrap="square" rtlCol="0" anchor="t"/>
-          <a:lstStyle/>
-          <a:p>
-            <a:pPr marL="342900" indent="-342900">
-              <a:lnSpc>
-                <a:spcPct val="115000"/>
-              </a:lnSpc>
-              <a:spcAft>
-                <a:spcPts val="1000"/>
-              </a:spcAft>
-              <a:buSzPct val="100000"/>
-              <a:buChar char="▸"/>
-            </a:pPr>
-            <a:r>
-              <a:rPr lang="en-US" sz="1600" dirty="0">
+              <a:t>What this deck covers</a:t>
+            </a:r>
+            <a:endParaRPr lang="en-US" sz="2700" dirty="0"/>
+          </a:p>
+        </p:txBody>
+      </p:sp>
+      <p:sp>
+        <p:nvSpPr>
+          <p:cNvPr id="6" name="Shape 4"/>
+          <p:cNvSpPr/>
+          <p:nvPr/>
+        </p:nvSpPr>
+        <p:spPr>
+          <a:xfrm>
+            <a:off x="868680" y="2112264"/>
+            <a:ext cx="420624" cy="420624"/>
+          </a:xfrm>
+          <a:prstGeom prst="ellipse">
+            <a:avLst/>
+          </a:prstGeom>
+          <a:solidFill>
+            <a:srgbClr val="111A2E"/>
+          </a:solidFill>
+          <a:ln w="19050">
+            <a:solidFill>
+              <a:srgbClr val="3B82F6"/>
+            </a:solidFill>
+            <a:prstDash val="solid"/>
+          </a:ln>
+        </p:spPr>
+      </p:sp>
+      <p:sp>
+        <p:nvSpPr>
+          <p:cNvPr id="7" name="Text 5"/>
+          <p:cNvSpPr/>
+          <p:nvPr/>
+        </p:nvSpPr>
+        <p:spPr>
+          <a:xfrm>
+            <a:off x="868680" y="2112264"/>
+            <a:ext cx="420624" cy="420624"/>
+          </a:xfrm>
+          <a:prstGeom prst="rect">
+            <a:avLst/>
+          </a:prstGeom>
+          <a:noFill/>
+          <a:ln/>
+        </p:spPr>
+        <p:txBody>
+          <a:bodyPr wrap="square" rtlCol="0" anchor="ctr"/>
+          <a:lstStyle/>
+          <a:p>
+            <a:pPr algn="ctr" indent="0" marL="0">
+              <a:buNone/>
+            </a:pPr>
+            <a:r>
+              <a:rPr lang="en-US" sz="1300" b="1" dirty="0">
+                <a:solidFill>
+                  <a:srgbClr val="3B82F6"/>
+                </a:solidFill>
+                <a:latin typeface="Consolas" pitchFamily="34" charset="0"/>
+                <a:ea typeface="Consolas" pitchFamily="34" charset="-122"/>
+                <a:cs typeface="Consolas" pitchFamily="34" charset="-120"/>
+              </a:rPr>
+              <a:t>1</a:t>
+            </a:r>
+            <a:endParaRPr lang="en-US" sz="1300" dirty="0"/>
+          </a:p>
+        </p:txBody>
+      </p:sp>
+      <p:sp>
+        <p:nvSpPr>
+          <p:cNvPr id="8" name="Text 6"/>
+          <p:cNvSpPr/>
+          <p:nvPr/>
+        </p:nvSpPr>
+        <p:spPr>
+          <a:xfrm>
+            <a:off x="1435608" y="2057400"/>
+            <a:ext cx="4480560" cy="822960"/>
+          </a:xfrm>
+          <a:prstGeom prst="rect">
+            <a:avLst/>
+          </a:prstGeom>
+          <a:noFill/>
+          <a:ln/>
+        </p:spPr>
+        <p:txBody>
+          <a:bodyPr wrap="square" rtlCol="0" anchor="ctr"/>
+          <a:lstStyle/>
+          <a:p>
+            <a:pPr indent="0" marL="0">
+              <a:buNone/>
+            </a:pPr>
+            <a:r>
+              <a:rPr lang="en-US" sz="1450" dirty="0">
                 <a:solidFill>
                   <a:srgbClr val="CBD5E1"/>
                 </a:solidFill>
@@ -1884,23 +6557,102 @@
                 <a:ea typeface="Segoe UI" pitchFamily="34" charset="-122"/>
                 <a:cs typeface="Segoe UI" pitchFamily="34" charset="-120"/>
               </a:rPr>
-              <a:t>Every project starts by rebuilding the same skeleton</a:t>
-            </a:r>
-            <a:endParaRPr lang="en-US" sz="1600" dirty="0"/>
-          </a:p>
-          <a:p>
-            <a:pPr marL="342900" indent="-342900">
-              <a:lnSpc>
-                <a:spcPct val="115000"/>
-              </a:lnSpc>
-              <a:spcAft>
-                <a:spcPts val="1000"/>
-              </a:spcAft>
-              <a:buSzPct val="100000"/>
-              <a:buChar char="▸"/>
-            </a:pPr>
-            <a:r>
-              <a:rPr lang="en-US" sz="1600" dirty="0">
+              <a:t>The glue problem that kills most data projects before the insight</a:t>
+            </a:r>
+            <a:endParaRPr lang="en-US" sz="1450" dirty="0"/>
+          </a:p>
+        </p:txBody>
+      </p:sp>
+      <p:sp>
+        <p:nvSpPr>
+          <p:cNvPr id="9" name="Shape 7"/>
+          <p:cNvSpPr/>
+          <p:nvPr/>
+        </p:nvSpPr>
+        <p:spPr>
+          <a:xfrm>
+            <a:off x="868680" y="3044952"/>
+            <a:ext cx="420624" cy="420624"/>
+          </a:xfrm>
+          <a:prstGeom prst="ellipse">
+            <a:avLst/>
+          </a:prstGeom>
+          <a:solidFill>
+            <a:srgbClr val="111A2E"/>
+          </a:solidFill>
+          <a:ln w="19050">
+            <a:solidFill>
+              <a:srgbClr val="06B6D4"/>
+            </a:solidFill>
+            <a:prstDash val="solid"/>
+          </a:ln>
+        </p:spPr>
+      </p:sp>
+      <p:sp>
+        <p:nvSpPr>
+          <p:cNvPr id="10" name="Text 8"/>
+          <p:cNvSpPr/>
+          <p:nvPr/>
+        </p:nvSpPr>
+        <p:spPr>
+          <a:xfrm>
+            <a:off x="868680" y="3044952"/>
+            <a:ext cx="420624" cy="420624"/>
+          </a:xfrm>
+          <a:prstGeom prst="rect">
+            <a:avLst/>
+          </a:prstGeom>
+          <a:noFill/>
+          <a:ln/>
+        </p:spPr>
+        <p:txBody>
+          <a:bodyPr wrap="square" rtlCol="0" anchor="ctr"/>
+          <a:lstStyle/>
+          <a:p>
+            <a:pPr algn="ctr" indent="0" marL="0">
+              <a:buNone/>
+            </a:pPr>
+            <a:r>
+              <a:rPr lang="en-US" sz="1300" b="1" dirty="0">
+                <a:solidFill>
+                  <a:srgbClr val="06B6D4"/>
+                </a:solidFill>
+                <a:latin typeface="Consolas" pitchFamily="34" charset="0"/>
+                <a:ea typeface="Consolas" pitchFamily="34" charset="-122"/>
+                <a:cs typeface="Consolas" pitchFamily="34" charset="-120"/>
+              </a:rPr>
+              <a:t>2</a:t>
+            </a:r>
+            <a:endParaRPr lang="en-US" sz="1300" dirty="0"/>
+          </a:p>
+        </p:txBody>
+      </p:sp>
+      <p:sp>
+        <p:nvSpPr>
+          <p:cNvPr id="11" name="Text 9"/>
+          <p:cNvSpPr/>
+          <p:nvPr/>
+        </p:nvSpPr>
+        <p:spPr>
+          <a:xfrm>
+            <a:off x="1435608" y="2990088"/>
+            <a:ext cx="4480560" cy="822960"/>
+          </a:xfrm>
+          <a:prstGeom prst="rect">
+            <a:avLst/>
+          </a:prstGeom>
+          <a:noFill/>
+          <a:ln/>
+        </p:spPr>
+        <p:txBody>
+          <a:bodyPr wrap="square" rtlCol="0" anchor="ctr"/>
+          <a:lstStyle/>
+          <a:p>
+            <a:pPr indent="0" marL="0">
+              <a:buNone/>
+            </a:pPr>
+            <a:r>
+              <a:rPr lang="en-US" sz="1450" dirty="0">
                 <a:solidFill>
                   <a:srgbClr val="CBD5E1"/>
                 </a:solidFill>
@@ -1908,23 +6660,102 @@
                 <a:ea typeface="Segoe UI" pitchFamily="34" charset="-122"/>
                 <a:cs typeface="Segoe UI" pitchFamily="34" charset="-120"/>
               </a:rPr>
-              <a:t>Collect, clean, transform, export - always the same shape</a:t>
-            </a:r>
-            <a:endParaRPr lang="en-US" sz="1600" dirty="0"/>
-          </a:p>
-          <a:p>
-            <a:pPr marL="342900" indent="-342900">
-              <a:lnSpc>
-                <a:spcPct val="115000"/>
-              </a:lnSpc>
-              <a:spcAft>
-                <a:spcPts val="1000"/>
-              </a:spcAft>
-              <a:buSzPct val="100000"/>
-              <a:buChar char="▸"/>
-            </a:pPr>
-            <a:r>
-              <a:rPr lang="en-US" sz="1600" dirty="0">
+              <a:t>Four modules: ingest, clean, enrich, export and report</a:t>
+            </a:r>
+            <a:endParaRPr lang="en-US" sz="1450" dirty="0"/>
+          </a:p>
+        </p:txBody>
+      </p:sp>
+      <p:sp>
+        <p:nvSpPr>
+          <p:cNvPr id="12" name="Shape 10"/>
+          <p:cNvSpPr/>
+          <p:nvPr/>
+        </p:nvSpPr>
+        <p:spPr>
+          <a:xfrm>
+            <a:off x="868680" y="3977640"/>
+            <a:ext cx="420624" cy="420624"/>
+          </a:xfrm>
+          <a:prstGeom prst="ellipse">
+            <a:avLst/>
+          </a:prstGeom>
+          <a:solidFill>
+            <a:srgbClr val="111A2E"/>
+          </a:solidFill>
+          <a:ln w="19050">
+            <a:solidFill>
+              <a:srgbClr val="3B82F6"/>
+            </a:solidFill>
+            <a:prstDash val="solid"/>
+          </a:ln>
+        </p:spPr>
+      </p:sp>
+      <p:sp>
+        <p:nvSpPr>
+          <p:cNvPr id="13" name="Text 11"/>
+          <p:cNvSpPr/>
+          <p:nvPr/>
+        </p:nvSpPr>
+        <p:spPr>
+          <a:xfrm>
+            <a:off x="868680" y="3977640"/>
+            <a:ext cx="420624" cy="420624"/>
+          </a:xfrm>
+          <a:prstGeom prst="rect">
+            <a:avLst/>
+          </a:prstGeom>
+          <a:noFill/>
+          <a:ln/>
+        </p:spPr>
+        <p:txBody>
+          <a:bodyPr wrap="square" rtlCol="0" anchor="ctr"/>
+          <a:lstStyle/>
+          <a:p>
+            <a:pPr algn="ctr" indent="0" marL="0">
+              <a:buNone/>
+            </a:pPr>
+            <a:r>
+              <a:rPr lang="en-US" sz="1300" b="1" dirty="0">
+                <a:solidFill>
+                  <a:srgbClr val="3B82F6"/>
+                </a:solidFill>
+                <a:latin typeface="Consolas" pitchFamily="34" charset="0"/>
+                <a:ea typeface="Consolas" pitchFamily="34" charset="-122"/>
+                <a:cs typeface="Consolas" pitchFamily="34" charset="-120"/>
+              </a:rPr>
+              <a:t>3</a:t>
+            </a:r>
+            <a:endParaRPr lang="en-US" sz="1300" dirty="0"/>
+          </a:p>
+        </p:txBody>
+      </p:sp>
+      <p:sp>
+        <p:nvSpPr>
+          <p:cNvPr id="14" name="Text 12"/>
+          <p:cNvSpPr/>
+          <p:nvPr/>
+        </p:nvSpPr>
+        <p:spPr>
+          <a:xfrm>
+            <a:off x="1435608" y="3922776"/>
+            <a:ext cx="4480560" cy="822960"/>
+          </a:xfrm>
+          <a:prstGeom prst="rect">
+            <a:avLst/>
+          </a:prstGeom>
+          <a:noFill/>
+          <a:ln/>
+        </p:spPr>
+        <p:txBody>
+          <a:bodyPr wrap="square" rtlCol="0" anchor="ctr"/>
+          <a:lstStyle/>
+          <a:p>
+            <a:pPr indent="0" marL="0">
+              <a:buNone/>
+            </a:pPr>
+            <a:r>
+              <a:rPr lang="en-US" sz="1450" dirty="0">
                 <a:solidFill>
                   <a:srgbClr val="CBD5E1"/>
                 </a:solidFill>
@@ -1932,23 +6763,102 @@
                 <a:ea typeface="Segoe UI" pitchFamily="34" charset="-122"/>
                 <a:cs typeface="Segoe UI" pitchFamily="34" charset="-120"/>
               </a:rPr>
-              <a:t>Glue code is where quality quietly dies</a:t>
-            </a:r>
-            <a:endParaRPr lang="en-US" sz="1600" dirty="0"/>
-          </a:p>
-          <a:p>
-            <a:pPr marL="342900" indent="-342900">
-              <a:lnSpc>
-                <a:spcPct val="115000"/>
-              </a:lnSpc>
-              <a:spcAft>
-                <a:spcPts val="1000"/>
-              </a:spcAft>
-              <a:buSzPct val="100000"/>
-              <a:buChar char="▸"/>
-            </a:pPr>
-            <a:r>
-              <a:rPr lang="en-US" sz="1600" dirty="0">
+              <a:t>Design principles that survived production</a:t>
+            </a:r>
+            <a:endParaRPr lang="en-US" sz="1450" dirty="0"/>
+          </a:p>
+        </p:txBody>
+      </p:sp>
+      <p:sp>
+        <p:nvSpPr>
+          <p:cNvPr id="15" name="Shape 13"/>
+          <p:cNvSpPr/>
+          <p:nvPr/>
+        </p:nvSpPr>
+        <p:spPr>
+          <a:xfrm>
+            <a:off x="6355080" y="2112264"/>
+            <a:ext cx="420624" cy="420624"/>
+          </a:xfrm>
+          <a:prstGeom prst="ellipse">
+            <a:avLst/>
+          </a:prstGeom>
+          <a:solidFill>
+            <a:srgbClr val="111A2E"/>
+          </a:solidFill>
+          <a:ln w="19050">
+            <a:solidFill>
+              <a:srgbClr val="06B6D4"/>
+            </a:solidFill>
+            <a:prstDash val="solid"/>
+          </a:ln>
+        </p:spPr>
+      </p:sp>
+      <p:sp>
+        <p:nvSpPr>
+          <p:cNvPr id="16" name="Text 14"/>
+          <p:cNvSpPr/>
+          <p:nvPr/>
+        </p:nvSpPr>
+        <p:spPr>
+          <a:xfrm>
+            <a:off x="6355080" y="2112264"/>
+            <a:ext cx="420624" cy="420624"/>
+          </a:xfrm>
+          <a:prstGeom prst="rect">
+            <a:avLst/>
+          </a:prstGeom>
+          <a:noFill/>
+          <a:ln/>
+        </p:spPr>
+        <p:txBody>
+          <a:bodyPr wrap="square" rtlCol="0" anchor="ctr"/>
+          <a:lstStyle/>
+          <a:p>
+            <a:pPr algn="ctr" indent="0" marL="0">
+              <a:buNone/>
+            </a:pPr>
+            <a:r>
+              <a:rPr lang="en-US" sz="1300" b="1" dirty="0">
+                <a:solidFill>
+                  <a:srgbClr val="06B6D4"/>
+                </a:solidFill>
+                <a:latin typeface="Consolas" pitchFamily="34" charset="0"/>
+                <a:ea typeface="Consolas" pitchFamily="34" charset="-122"/>
+                <a:cs typeface="Consolas" pitchFamily="34" charset="-120"/>
+              </a:rPr>
+              <a:t>4</a:t>
+            </a:r>
+            <a:endParaRPr lang="en-US" sz="1300" dirty="0"/>
+          </a:p>
+        </p:txBody>
+      </p:sp>
+      <p:sp>
+        <p:nvSpPr>
+          <p:cNvPr id="17" name="Text 15"/>
+          <p:cNvSpPr/>
+          <p:nvPr/>
+        </p:nvSpPr>
+        <p:spPr>
+          <a:xfrm>
+            <a:off x="6922008" y="2057400"/>
+            <a:ext cx="4480560" cy="822960"/>
+          </a:xfrm>
+          <a:prstGeom prst="rect">
+            <a:avLst/>
+          </a:prstGeom>
+          <a:noFill/>
+          <a:ln/>
+        </p:spPr>
+        <p:txBody>
+          <a:bodyPr wrap="square" rtlCol="0" anchor="ctr"/>
+          <a:lstStyle/>
+          <a:p>
+            <a:pPr indent="0" marL="0">
+              <a:buNone/>
+            </a:pPr>
+            <a:r>
+              <a:rPr lang="en-US" sz="1450" dirty="0">
                 <a:solidFill>
                   <a:srgbClr val="CBD5E1"/>
                 </a:solidFill>
@@ -1956,22 +6866,47 @@
                 <a:ea typeface="Segoe UI" pitchFamily="34" charset="-122"/>
                 <a:cs typeface="Segoe UI" pitchFamily="34" charset="-120"/>
               </a:rPr>
-              <a:t>ODIS standardizes the skeleton so judgment gets the attention</a:t>
-            </a:r>
-            <a:endParaRPr lang="en-US" sz="1600" dirty="0"/>
-          </a:p>
-        </p:txBody>
-      </p:sp>
-      <p:sp>
-        <p:nvSpPr>
-          <p:cNvPr id="7" name="Text 5"/>
-          <p:cNvSpPr/>
-          <p:nvPr/>
-        </p:nvSpPr>
-        <p:spPr>
-          <a:xfrm>
-            <a:off x="10698480" y="6355080"/>
-            <a:ext cx="1188720" cy="365760"/>
+              <a:t>What open-sourcing 4,305 lines changed in the code itself</a:t>
+            </a:r>
+            <a:endParaRPr lang="en-US" sz="1450" dirty="0"/>
+          </a:p>
+        </p:txBody>
+      </p:sp>
+      <p:sp>
+        <p:nvSpPr>
+          <p:cNvPr id="18" name="Shape 16"/>
+          <p:cNvSpPr/>
+          <p:nvPr/>
+        </p:nvSpPr>
+        <p:spPr>
+          <a:xfrm>
+            <a:off x="6355080" y="3044952"/>
+            <a:ext cx="420624" cy="420624"/>
+          </a:xfrm>
+          <a:prstGeom prst="ellipse">
+            <a:avLst/>
+          </a:prstGeom>
+          <a:solidFill>
+            <a:srgbClr val="111A2E"/>
+          </a:solidFill>
+          <a:ln w="19050">
+            <a:solidFill>
+              <a:srgbClr val="3B82F6"/>
+            </a:solidFill>
+            <a:prstDash val="solid"/>
+          </a:ln>
+        </p:spPr>
+      </p:sp>
+      <p:sp>
+        <p:nvSpPr>
+          <p:cNvPr id="19" name="Text 17"/>
+          <p:cNvSpPr/>
+          <p:nvPr/>
+        </p:nvSpPr>
+        <p:spPr>
+          <a:xfrm>
+            <a:off x="6355080" y="3044952"/>
+            <a:ext cx="420624" cy="420624"/>
           </a:xfrm>
           <a:prstGeom prst="rect">
             <a:avLst/>
@@ -1983,19 +6918,97 @@
           <a:bodyPr wrap="square" rtlCol="0" anchor="ctr"/>
           <a:lstStyle/>
           <a:p>
-            <a:pPr algn="r" indent="0" marL="0">
+            <a:pPr algn="ctr" indent="0" marL="0">
               <a:buNone/>
             </a:pPr>
             <a:r>
-              <a:rPr lang="en-US" sz="1000" dirty="0">
-                <a:solidFill>
-                  <a:srgbClr val="64748B"/>
+              <a:rPr lang="en-US" sz="1300" b="1" dirty="0">
+                <a:solidFill>
+                  <a:srgbClr val="3B82F6"/>
                 </a:solidFill>
                 <a:latin typeface="Consolas" pitchFamily="34" charset="0"/>
                 <a:ea typeface="Consolas" pitchFamily="34" charset="-122"/>
                 <a:cs typeface="Consolas" pitchFamily="34" charset="-120"/>
               </a:rPr>
-              <a:t>2 / 8</a:t>
+              <a:t>5</a:t>
+            </a:r>
+            <a:endParaRPr lang="en-US" sz="1300" dirty="0"/>
+          </a:p>
+        </p:txBody>
+      </p:sp>
+      <p:sp>
+        <p:nvSpPr>
+          <p:cNvPr id="20" name="Text 18"/>
+          <p:cNvSpPr/>
+          <p:nvPr/>
+        </p:nvSpPr>
+        <p:spPr>
+          <a:xfrm>
+            <a:off x="6922008" y="2990088"/>
+            <a:ext cx="4480560" cy="822960"/>
+          </a:xfrm>
+          <a:prstGeom prst="rect">
+            <a:avLst/>
+          </a:prstGeom>
+          <a:noFill/>
+          <a:ln/>
+        </p:spPr>
+        <p:txBody>
+          <a:bodyPr wrap="square" rtlCol="0" anchor="ctr"/>
+          <a:lstStyle/>
+          <a:p>
+            <a:pPr indent="0" marL="0">
+              <a:buNone/>
+            </a:pPr>
+            <a:r>
+              <a:rPr lang="en-US" sz="1450" dirty="0">
+                <a:solidFill>
+                  <a:srgbClr val="CBD5E1"/>
+                </a:solidFill>
+                <a:latin typeface="Segoe UI" pitchFamily="34" charset="0"/>
+                <a:ea typeface="Segoe UI" pitchFamily="34" charset="-122"/>
+                <a:cs typeface="Segoe UI" pitchFamily="34" charset="-120"/>
+              </a:rPr>
+              <a:t>Where ODIS runs today - and where it is heading</a:t>
+            </a:r>
+            <a:endParaRPr lang="en-US" sz="1450" dirty="0"/>
+          </a:p>
+        </p:txBody>
+      </p:sp>
+      <p:sp>
+        <p:nvSpPr>
+          <p:cNvPr id="21" name="Text 19"/>
+          <p:cNvSpPr/>
+          <p:nvPr/>
+        </p:nvSpPr>
+        <p:spPr>
+          <a:xfrm>
+            <a:off x="10698480" y="6382512"/>
+            <a:ext cx="1188720" cy="365760"/>
+          </a:xfrm>
+          <a:prstGeom prst="rect">
+            <a:avLst/>
+          </a:prstGeom>
+          <a:noFill/>
+          <a:ln/>
+        </p:spPr>
+        <p:txBody>
+          <a:bodyPr wrap="square" rtlCol="0" anchor="ctr"/>
+          <a:lstStyle/>
+          <a:p>
+            <a:pPr algn="r" indent="0" marL="0">
+              <a:buNone/>
+            </a:pPr>
+            <a:r>
+              <a:rPr lang="en-US" sz="1000" dirty="0">
+                <a:solidFill>
+                  <a:srgbClr val="64748B"/>
+                </a:solidFill>
+                <a:latin typeface="Consolas" pitchFamily="34" charset="0"/>
+                <a:ea typeface="Consolas" pitchFamily="34" charset="-122"/>
+                <a:cs typeface="Consolas" pitchFamily="34" charset="-120"/>
+              </a:rPr>
+              <a:t>2 / 15</a:t>
             </a:r>
             <a:endParaRPr lang="en-US" sz="1000" dirty="0"/>
           </a:p>
@@ -2106,7 +7119,7 @@
                 <a:ea typeface="Consolas" pitchFamily="34" charset="-122"/>
                 <a:cs typeface="Consolas" pitchFamily="34" charset="-120"/>
               </a:rPr>
-              <a:t>MODULES</a:t>
+              <a:t>THE PROBLEM</a:t>
             </a:r>
             <a:endParaRPr lang="en-US" sz="1200" dirty="0"/>
           </a:p>
@@ -2120,8 +7133,8 @@
         </p:nvSpPr>
         <p:spPr>
           <a:xfrm>
-            <a:off x="822960" y="960120"/>
-            <a:ext cx="10515600" cy="868680"/>
+            <a:off x="822960" y="914400"/>
+            <a:ext cx="10561320" cy="868680"/>
           </a:xfrm>
           <a:prstGeom prst="rect">
             <a:avLst/>
@@ -2137,7 +7150,7 @@
               <a:buNone/>
             </a:pPr>
             <a:r>
-              <a:rPr lang="en-US" sz="3000" b="1" dirty="0">
+              <a:rPr lang="en-US" sz="2700" b="1" dirty="0">
                 <a:solidFill>
                   <a:srgbClr val="FFFFFF"/>
                 </a:solidFill>
@@ -2145,9 +7158,9 @@
                 <a:ea typeface="Segoe UI" pitchFamily="34" charset="-122"/>
                 <a:cs typeface="Segoe UI" pitchFamily="34" charset="-120"/>
               </a:rPr>
-              <a:t>The pipeline, as first-class citizens</a:t>
-            </a:r>
-            <a:endParaRPr lang="en-US" sz="3000" dirty="0"/>
+              <a:t>Data work repeats itself</a:t>
+            </a:r>
+            <a:endParaRPr lang="en-US" sz="2700" dirty="0"/>
           </a:p>
         </p:txBody>
       </p:sp>
@@ -2159,7 +7172,7 @@
         </p:nvSpPr>
         <p:spPr>
           <a:xfrm>
-            <a:off x="868680" y="2057400"/>
+            <a:off x="868680" y="2011680"/>
             <a:ext cx="10424160" cy="3566160"/>
           </a:xfrm>
           <a:prstGeom prst="rect">
@@ -2174,10 +7187,10 @@
           <a:p>
             <a:pPr marL="342900" indent="-342900">
               <a:lnSpc>
-                <a:spcPct val="115000"/>
+                <a:spcPct val="112000"/>
               </a:lnSpc>
               <a:spcAft>
-                <a:spcPts val="1000"/>
+                <a:spcPts val="900"/>
               </a:spcAft>
               <a:buSzPct val="100000"/>
               <a:buChar char="▸"/>
@@ -2191,17 +7204,17 @@
                 <a:ea typeface="Segoe UI" pitchFamily="34" charset="-122"/>
                 <a:cs typeface="Segoe UI" pitchFamily="34" charset="-120"/>
               </a:rPr>
-              <a:t>Ingestion - files, APIs, and scrapes into a common shape</a:t>
+              <a:t>Every engagement starts by rebuilding the same skeleton from scratch.</a:t>
             </a:r>
             <a:endParaRPr lang="en-US" sz="1600" dirty="0"/>
           </a:p>
           <a:p>
             <a:pPr marL="342900" indent="-342900">
               <a:lnSpc>
-                <a:spcPct val="115000"/>
+                <a:spcPct val="112000"/>
               </a:lnSpc>
               <a:spcAft>
-                <a:spcPts val="1000"/>
+                <a:spcPts val="900"/>
               </a:spcAft>
               <a:buSzPct val="100000"/>
               <a:buChar char="▸"/>
@@ -2215,17 +7228,17 @@
                 <a:ea typeface="Segoe UI" pitchFamily="34" charset="-122"/>
                 <a:cs typeface="Segoe UI" pitchFamily="34" charset="-120"/>
               </a:rPr>
-              <a:t>Cleaning - schema checks, dedup, normalization</a:t>
+              <a:t>Collect, clean, transform, export - the shape never changes, only the sources do.</a:t>
             </a:r>
             <a:endParaRPr lang="en-US" sz="1600" dirty="0"/>
           </a:p>
           <a:p>
             <a:pPr marL="342900" indent="-342900">
               <a:lnSpc>
-                <a:spcPct val="115000"/>
+                <a:spcPct val="112000"/>
               </a:lnSpc>
               <a:spcAft>
-                <a:spcPts val="1000"/>
+                <a:spcPts val="900"/>
               </a:spcAft>
               <a:buSzPct val="100000"/>
               <a:buChar char="▸"/>
@@ -2239,17 +7252,17 @@
                 <a:ea typeface="Segoe UI" pitchFamily="34" charset="-122"/>
                 <a:cs typeface="Segoe UI" pitchFamily="34" charset="-120"/>
               </a:rPr>
-              <a:t>Enrichment - joins and derived features without spaghetti</a:t>
+              <a:t>Glue code is where quality quietly dies: unvalidated joins, silent dedup, mystery exports.</a:t>
             </a:r>
             <a:endParaRPr lang="en-US" sz="1600" dirty="0"/>
           </a:p>
           <a:p>
             <a:pPr marL="342900" indent="-342900">
               <a:lnSpc>
-                <a:spcPct val="115000"/>
+                <a:spcPct val="112000"/>
               </a:lnSpc>
               <a:spcAft>
-                <a:spcPts val="1000"/>
+                <a:spcPts val="900"/>
               </a:spcAft>
               <a:buSzPct val="100000"/>
               <a:buChar char="▸"/>
@@ -2263,21 +7276,107 @@
                 <a:ea typeface="Segoe UI" pitchFamily="34" charset="-122"/>
                 <a:cs typeface="Segoe UI" pitchFamily="34" charset="-120"/>
               </a:rPr>
-              <a:t>Export and reporting - outputs analysts actually want</a:t>
+              <a:t>The interesting 30% of data work loses its time to the boring 70%.</a:t>
             </a:r>
             <a:endParaRPr lang="en-US" sz="1600" dirty="0"/>
           </a:p>
-        </p:txBody>
-      </p:sp>
-      <p:sp>
-        <p:nvSpPr>
-          <p:cNvPr id="7" name="Text 5"/>
-          <p:cNvSpPr/>
-          <p:nvPr/>
-        </p:nvSpPr>
-        <p:spPr>
-          <a:xfrm>
-            <a:off x="10698480" y="6355080"/>
+          <a:p>
+            <a:pPr marL="342900" indent="-342900">
+              <a:lnSpc>
+                <a:spcPct val="112000"/>
+              </a:lnSpc>
+              <a:spcAft>
+                <a:spcPts val="900"/>
+              </a:spcAft>
+              <a:buSzPct val="100000"/>
+              <a:buChar char="▸"/>
+            </a:pPr>
+            <a:r>
+              <a:rPr lang="en-US" sz="1600" dirty="0">
+                <a:solidFill>
+                  <a:srgbClr val="CBD5E1"/>
+                </a:solidFill>
+                <a:latin typeface="Segoe UI" pitchFamily="34" charset="0"/>
+                <a:ea typeface="Segoe UI" pitchFamily="34" charset="-122"/>
+                <a:cs typeface="Segoe UI" pitchFamily="34" charset="-120"/>
+              </a:rPr>
+              <a:t>ODIS standardizes the skeleton so judgment gets the attention.</a:t>
+            </a:r>
+            <a:endParaRPr lang="en-US" sz="1600" dirty="0"/>
+          </a:p>
+        </p:txBody>
+      </p:sp>
+      <p:sp>
+        <p:nvSpPr>
+          <p:cNvPr id="7" name="Shape 5"/>
+          <p:cNvSpPr/>
+          <p:nvPr/>
+        </p:nvSpPr>
+        <p:spPr>
+          <a:xfrm>
+            <a:off x="822960" y="5961888"/>
+            <a:ext cx="10515600" cy="0"/>
+          </a:xfrm>
+          <a:prstGeom prst="line">
+            <a:avLst/>
+          </a:prstGeom>
+          <a:noFill/>
+          <a:ln w="12700">
+            <a:solidFill>
+              <a:srgbClr val="1E2D45"/>
+            </a:solidFill>
+            <a:prstDash val="solid"/>
+          </a:ln>
+        </p:spPr>
+      </p:sp>
+      <p:sp>
+        <p:nvSpPr>
+          <p:cNvPr id="8" name="Text 6"/>
+          <p:cNvSpPr/>
+          <p:nvPr/>
+        </p:nvSpPr>
+        <p:spPr>
+          <a:xfrm>
+            <a:off x="822960" y="6053328"/>
+            <a:ext cx="9692640" cy="457200"/>
+          </a:xfrm>
+          <a:prstGeom prst="rect">
+            <a:avLst/>
+          </a:prstGeom>
+          <a:noFill/>
+          <a:ln/>
+        </p:spPr>
+        <p:txBody>
+          <a:bodyPr wrap="square" rtlCol="0" anchor="ctr"/>
+          <a:lstStyle/>
+          <a:p>
+            <a:pPr indent="0" marL="0">
+              <a:buNone/>
+            </a:pPr>
+            <a:r>
+              <a:rPr lang="en-US" sz="1150" dirty="0">
+                <a:solidFill>
+                  <a:srgbClr val="64748B"/>
+                </a:solidFill>
+                <a:latin typeface="Segoe UI" pitchFamily="34" charset="0"/>
+                <a:ea typeface="Segoe UI" pitchFamily="34" charset="-122"/>
+                <a:cs typeface="Segoe UI" pitchFamily="34" charset="-120"/>
+              </a:rPr>
+              <a:t>Most data projects do not die from hard problems - they die from repeated ones.</a:t>
+            </a:r>
+            <a:endParaRPr lang="en-US" sz="1150" dirty="0"/>
+          </a:p>
+        </p:txBody>
+      </p:sp>
+      <p:sp>
+        <p:nvSpPr>
+          <p:cNvPr id="9" name="Text 7"/>
+          <p:cNvSpPr/>
+          <p:nvPr/>
+        </p:nvSpPr>
+        <p:spPr>
+          <a:xfrm>
+            <a:off x="10698480" y="6382512"/>
             <a:ext cx="1188720" cy="365760"/>
           </a:xfrm>
           <a:prstGeom prst="rect">
@@ -2302,7 +7401,7 @@
                 <a:ea typeface="Consolas" pitchFamily="34" charset="-122"/>
                 <a:cs typeface="Consolas" pitchFamily="34" charset="-120"/>
               </a:rPr>
-              <a:t>3 / 8</a:t>
+              <a:t>3 / 15</a:t>
             </a:r>
             <a:endParaRPr lang="en-US" sz="1000" dirty="0"/>
           </a:p>
@@ -2413,7 +7512,7 @@
                 <a:ea typeface="Consolas" pitchFamily="34" charset="-122"/>
                 <a:cs typeface="Consolas" pitchFamily="34" charset="-120"/>
               </a:rPr>
-              <a:t>DESIGN</a:t>
+              <a:t>MODULES</a:t>
             </a:r>
             <a:endParaRPr lang="en-US" sz="1200" dirty="0"/>
           </a:p>
@@ -2427,8 +7526,8 @@
         </p:nvSpPr>
         <p:spPr>
           <a:xfrm>
-            <a:off x="822960" y="960120"/>
-            <a:ext cx="10515600" cy="868680"/>
+            <a:off x="822960" y="914400"/>
+            <a:ext cx="10561320" cy="868680"/>
           </a:xfrm>
           <a:prstGeom prst="rect">
             <a:avLst/>
@@ -2444,7 +7543,7 @@
               <a:buNone/>
             </a:pPr>
             <a:r>
-              <a:rPr lang="en-US" sz="3000" b="1" dirty="0">
+              <a:rPr lang="en-US" sz="2700" b="1" dirty="0">
                 <a:solidFill>
                   <a:srgbClr val="FFFFFF"/>
                 </a:solidFill>
@@ -2452,69 +7551,143 @@
                 <a:ea typeface="Segoe UI" pitchFamily="34" charset="-122"/>
                 <a:cs typeface="Segoe UI" pitchFamily="34" charset="-120"/>
               </a:rPr>
-              <a:t>Principles that survived production</a:t>
-            </a:r>
-            <a:endParaRPr lang="en-US" sz="3000" dirty="0"/>
-          </a:p>
-        </p:txBody>
-      </p:sp>
-      <p:sp>
-        <p:nvSpPr>
-          <p:cNvPr id="6" name="Text 4"/>
-          <p:cNvSpPr/>
-          <p:nvPr/>
-        </p:nvSpPr>
-        <p:spPr>
-          <a:xfrm>
-            <a:off x="868680" y="2057400"/>
-            <a:ext cx="10424160" cy="3566160"/>
-          </a:xfrm>
-          <a:prstGeom prst="rect">
-            <a:avLst/>
-          </a:prstGeom>
-          <a:noFill/>
-          <a:ln/>
-        </p:spPr>
-        <p:txBody>
-          <a:bodyPr wrap="square" rtlCol="0" anchor="t"/>
-          <a:lstStyle/>
-          <a:p>
-            <a:pPr marL="342900" indent="-342900">
-              <a:lnSpc>
-                <a:spcPct val="115000"/>
-              </a:lnSpc>
-              <a:spcAft>
-                <a:spcPts val="1000"/>
-              </a:spcAft>
-              <a:buSzPct val="100000"/>
-              <a:buChar char="▸"/>
-            </a:pPr>
-            <a:r>
-              <a:rPr lang="en-US" sz="1600" dirty="0">
-                <a:solidFill>
-                  <a:srgbClr val="CBD5E1"/>
+              <a:t>The pipeline, as first-class citizens</a:t>
+            </a:r>
+            <a:endParaRPr lang="en-US" sz="2700" dirty="0"/>
+          </a:p>
+        </p:txBody>
+      </p:sp>
+      <p:sp>
+        <p:nvSpPr>
+          <p:cNvPr id="6" name="Shape 4"/>
+          <p:cNvSpPr/>
+          <p:nvPr/>
+        </p:nvSpPr>
+        <p:spPr>
+          <a:xfrm>
+            <a:off x="774040" y="2514600"/>
+            <a:ext cx="1938528" cy="2103120"/>
+          </a:xfrm>
+          <a:prstGeom prst="roundRect">
+            <a:avLst>
+              <a:gd name="adj" fmla="val 3302"/>
+            </a:avLst>
+          </a:prstGeom>
+          <a:solidFill>
+            <a:srgbClr val="111A2E"/>
+          </a:solidFill>
+          <a:ln w="19050">
+            <a:solidFill>
+              <a:srgbClr val="3B82F6"/>
+            </a:solidFill>
+            <a:prstDash val="solid"/>
+          </a:ln>
+        </p:spPr>
+      </p:sp>
+      <p:sp>
+        <p:nvSpPr>
+          <p:cNvPr id="7" name="Text 5"/>
+          <p:cNvSpPr/>
+          <p:nvPr/>
+        </p:nvSpPr>
+        <p:spPr>
+          <a:xfrm>
+            <a:off x="902056" y="2633472"/>
+            <a:ext cx="1682496" cy="310896"/>
+          </a:xfrm>
+          <a:prstGeom prst="rect">
+            <a:avLst/>
+          </a:prstGeom>
+          <a:noFill/>
+          <a:ln/>
+        </p:spPr>
+        <p:txBody>
+          <a:bodyPr wrap="square" rtlCol="0" anchor="ctr"/>
+          <a:lstStyle/>
+          <a:p>
+            <a:pPr indent="0" marL="0">
+              <a:buNone/>
+            </a:pPr>
+            <a:r>
+              <a:rPr lang="en-US" sz="1100" b="1" dirty="0">
+                <a:solidFill>
+                  <a:srgbClr val="3B82F6"/>
+                </a:solidFill>
+                <a:latin typeface="Consolas" pitchFamily="34" charset="0"/>
+                <a:ea typeface="Consolas" pitchFamily="34" charset="-122"/>
+                <a:cs typeface="Consolas" pitchFamily="34" charset="-120"/>
+              </a:rPr>
+              <a:t>01</a:t>
+            </a:r>
+            <a:endParaRPr lang="en-US" sz="1100" dirty="0"/>
+          </a:p>
+        </p:txBody>
+      </p:sp>
+      <p:sp>
+        <p:nvSpPr>
+          <p:cNvPr id="8" name="Text 6"/>
+          <p:cNvSpPr/>
+          <p:nvPr/>
+        </p:nvSpPr>
+        <p:spPr>
+          <a:xfrm>
+            <a:off x="902056" y="2962656"/>
+            <a:ext cx="1682496" cy="566928"/>
+          </a:xfrm>
+          <a:prstGeom prst="rect">
+            <a:avLst/>
+          </a:prstGeom>
+          <a:noFill/>
+          <a:ln/>
+        </p:spPr>
+        <p:txBody>
+          <a:bodyPr wrap="square" rtlCol="0" anchor="ctr"/>
+          <a:lstStyle/>
+          <a:p>
+            <a:pPr indent="0" marL="0">
+              <a:buNone/>
+            </a:pPr>
+            <a:r>
+              <a:rPr lang="en-US" sz="1350" b="1" dirty="0">
+                <a:solidFill>
+                  <a:srgbClr val="FFFFFF"/>
                 </a:solidFill>
                 <a:latin typeface="Segoe UI" pitchFamily="34" charset="0"/>
                 <a:ea typeface="Segoe UI" pitchFamily="34" charset="-122"/>
                 <a:cs typeface="Segoe UI" pitchFamily="34" charset="-120"/>
               </a:rPr>
-              <a:t>Composable pipelines over monolithic scripts</a:t>
-            </a:r>
-            <a:endParaRPr lang="en-US" sz="1600" dirty="0"/>
-          </a:p>
-          <a:p>
-            <a:pPr marL="342900" indent="-342900">
-              <a:lnSpc>
-                <a:spcPct val="115000"/>
-              </a:lnSpc>
-              <a:spcAft>
-                <a:spcPts val="1000"/>
-              </a:spcAft>
-              <a:buSzPct val="100000"/>
-              <a:buChar char="▸"/>
-            </a:pPr>
-            <a:r>
-              <a:rPr lang="en-US" sz="1600" dirty="0">
+              <a:t>Ingest</a:t>
+            </a:r>
+            <a:endParaRPr lang="en-US" sz="1350" dirty="0"/>
+          </a:p>
+        </p:txBody>
+      </p:sp>
+      <p:sp>
+        <p:nvSpPr>
+          <p:cNvPr id="9" name="Text 7"/>
+          <p:cNvSpPr/>
+          <p:nvPr/>
+        </p:nvSpPr>
+        <p:spPr>
+          <a:xfrm>
+            <a:off x="902056" y="3566160"/>
+            <a:ext cx="1682496" cy="960120"/>
+          </a:xfrm>
+          <a:prstGeom prst="rect">
+            <a:avLst/>
+          </a:prstGeom>
+          <a:noFill/>
+          <a:ln/>
+        </p:spPr>
+        <p:txBody>
+          <a:bodyPr wrap="square" rtlCol="0" anchor="ctr"/>
+          <a:lstStyle/>
+          <a:p>
+            <a:pPr indent="0" marL="0">
+              <a:buNone/>
+            </a:pPr>
+            <a:r>
+              <a:rPr lang="en-US" sz="980" dirty="0">
                 <a:solidFill>
                   <a:srgbClr val="CBD5E1"/>
                 </a:solidFill>
@@ -2522,47 +7695,163 @@
                 <a:ea typeface="Segoe UI" pitchFamily="34" charset="-122"/>
                 <a:cs typeface="Segoe UI" pitchFamily="34" charset="-120"/>
               </a:rPr>
-              <a:t>Schema-first: validate at every seam</a:t>
-            </a:r>
-            <a:endParaRPr lang="en-US" sz="1600" dirty="0"/>
-          </a:p>
-          <a:p>
-            <a:pPr marL="342900" indent="-342900">
-              <a:lnSpc>
-                <a:spcPct val="115000"/>
-              </a:lnSpc>
-              <a:spcAft>
-                <a:spcPts val="1000"/>
-              </a:spcAft>
-              <a:buSzPct val="100000"/>
-              <a:buChar char="▸"/>
-            </a:pPr>
-            <a:r>
-              <a:rPr lang="en-US" sz="1600" dirty="0">
-                <a:solidFill>
-                  <a:srgbClr val="CBD5E1"/>
+              <a:t>Files, APIs, and scrapes land in a common, schema-checked shape.</a:t>
+            </a:r>
+            <a:endParaRPr lang="en-US" sz="980" dirty="0"/>
+          </a:p>
+        </p:txBody>
+      </p:sp>
+      <p:sp>
+        <p:nvSpPr>
+          <p:cNvPr id="10" name="Shape 8"/>
+          <p:cNvSpPr/>
+          <p:nvPr/>
+        </p:nvSpPr>
+        <p:spPr>
+          <a:xfrm>
+            <a:off x="2726284" y="3419856"/>
+            <a:ext cx="210312" cy="274320"/>
+          </a:xfrm>
+          <a:prstGeom prst="rightArrow">
+            <a:avLst/>
+          </a:prstGeom>
+          <a:solidFill>
+            <a:srgbClr val="06B6D4"/>
+          </a:solidFill>
+          <a:ln/>
+        </p:spPr>
+      </p:sp>
+      <p:sp>
+        <p:nvSpPr>
+          <p:cNvPr id="11" name="Shape 9"/>
+          <p:cNvSpPr/>
+          <p:nvPr/>
+        </p:nvSpPr>
+        <p:spPr>
+          <a:xfrm>
+            <a:off x="2950312" y="2514600"/>
+            <a:ext cx="1938528" cy="2103120"/>
+          </a:xfrm>
+          <a:prstGeom prst="roundRect">
+            <a:avLst>
+              <a:gd name="adj" fmla="val 3302"/>
+            </a:avLst>
+          </a:prstGeom>
+          <a:solidFill>
+            <a:srgbClr val="111A2E"/>
+          </a:solidFill>
+          <a:ln w="19050">
+            <a:solidFill>
+              <a:srgbClr val="06B6D4"/>
+            </a:solidFill>
+            <a:prstDash val="solid"/>
+          </a:ln>
+        </p:spPr>
+      </p:sp>
+      <p:sp>
+        <p:nvSpPr>
+          <p:cNvPr id="12" name="Text 10"/>
+          <p:cNvSpPr/>
+          <p:nvPr/>
+        </p:nvSpPr>
+        <p:spPr>
+          <a:xfrm>
+            <a:off x="3078328" y="2633472"/>
+            <a:ext cx="1682496" cy="310896"/>
+          </a:xfrm>
+          <a:prstGeom prst="rect">
+            <a:avLst/>
+          </a:prstGeom>
+          <a:noFill/>
+          <a:ln/>
+        </p:spPr>
+        <p:txBody>
+          <a:bodyPr wrap="square" rtlCol="0" anchor="ctr"/>
+          <a:lstStyle/>
+          <a:p>
+            <a:pPr indent="0" marL="0">
+              <a:buNone/>
+            </a:pPr>
+            <a:r>
+              <a:rPr lang="en-US" sz="1100" b="1" dirty="0">
+                <a:solidFill>
+                  <a:srgbClr val="06B6D4"/>
+                </a:solidFill>
+                <a:latin typeface="Consolas" pitchFamily="34" charset="0"/>
+                <a:ea typeface="Consolas" pitchFamily="34" charset="-122"/>
+                <a:cs typeface="Consolas" pitchFamily="34" charset="-120"/>
+              </a:rPr>
+              <a:t>02</a:t>
+            </a:r>
+            <a:endParaRPr lang="en-US" sz="1100" dirty="0"/>
+          </a:p>
+        </p:txBody>
+      </p:sp>
+      <p:sp>
+        <p:nvSpPr>
+          <p:cNvPr id="13" name="Text 11"/>
+          <p:cNvSpPr/>
+          <p:nvPr/>
+        </p:nvSpPr>
+        <p:spPr>
+          <a:xfrm>
+            <a:off x="3078328" y="2962656"/>
+            <a:ext cx="1682496" cy="566928"/>
+          </a:xfrm>
+          <a:prstGeom prst="rect">
+            <a:avLst/>
+          </a:prstGeom>
+          <a:noFill/>
+          <a:ln/>
+        </p:spPr>
+        <p:txBody>
+          <a:bodyPr wrap="square" rtlCol="0" anchor="ctr"/>
+          <a:lstStyle/>
+          <a:p>
+            <a:pPr indent="0" marL="0">
+              <a:buNone/>
+            </a:pPr>
+            <a:r>
+              <a:rPr lang="en-US" sz="1350" b="1" dirty="0">
+                <a:solidFill>
+                  <a:srgbClr val="FFFFFF"/>
                 </a:solidFill>
                 <a:latin typeface="Segoe UI" pitchFamily="34" charset="0"/>
                 <a:ea typeface="Segoe UI" pitchFamily="34" charset="-122"/>
                 <a:cs typeface="Segoe UI" pitchFamily="34" charset="-120"/>
               </a:rPr>
-              <a:t>Local-first: your data never has to leave the machine</a:t>
-            </a:r>
-            <a:endParaRPr lang="en-US" sz="1600" dirty="0"/>
-          </a:p>
-          <a:p>
-            <a:pPr marL="342900" indent="-342900">
-              <a:lnSpc>
-                <a:spcPct val="115000"/>
-              </a:lnSpc>
-              <a:spcAft>
-                <a:spcPts val="1000"/>
-              </a:spcAft>
-              <a:buSzPct val="100000"/>
-              <a:buChar char="▸"/>
-            </a:pPr>
-            <a:r>
-              <a:rPr lang="en-US" sz="1600" dirty="0">
+              <a:t>Clean</a:t>
+            </a:r>
+            <a:endParaRPr lang="en-US" sz="1350" dirty="0"/>
+          </a:p>
+        </p:txBody>
+      </p:sp>
+      <p:sp>
+        <p:nvSpPr>
+          <p:cNvPr id="14" name="Text 12"/>
+          <p:cNvSpPr/>
+          <p:nvPr/>
+        </p:nvSpPr>
+        <p:spPr>
+          <a:xfrm>
+            <a:off x="3078328" y="3566160"/>
+            <a:ext cx="1682496" cy="960120"/>
+          </a:xfrm>
+          <a:prstGeom prst="rect">
+            <a:avLst/>
+          </a:prstGeom>
+          <a:noFill/>
+          <a:ln/>
+        </p:spPr>
+        <p:txBody>
+          <a:bodyPr wrap="square" rtlCol="0" anchor="ctr"/>
+          <a:lstStyle/>
+          <a:p>
+            <a:pPr indent="0" marL="0">
+              <a:buNone/>
+            </a:pPr>
+            <a:r>
+              <a:rPr lang="en-US" sz="980" dirty="0">
                 <a:solidFill>
                   <a:srgbClr val="CBD5E1"/>
                 </a:solidFill>
@@ -2570,22 +7859,69 @@
                 <a:ea typeface="Segoe UI" pitchFamily="34" charset="-122"/>
                 <a:cs typeface="Segoe UI" pitchFamily="34" charset="-120"/>
               </a:rPr>
-              <a:t>Readable output: logs a human can audit</a:t>
-            </a:r>
-            <a:endParaRPr lang="en-US" sz="1600" dirty="0"/>
-          </a:p>
-        </p:txBody>
-      </p:sp>
-      <p:sp>
-        <p:nvSpPr>
-          <p:cNvPr id="7" name="Text 5"/>
-          <p:cNvSpPr/>
-          <p:nvPr/>
-        </p:nvSpPr>
-        <p:spPr>
-          <a:xfrm>
-            <a:off x="10698480" y="6355080"/>
-            <a:ext cx="1188720" cy="365760"/>
+              <a:t>Schema validation, deduplication, and normalization - no silent assumptions.</a:t>
+            </a:r>
+            <a:endParaRPr lang="en-US" sz="980" dirty="0"/>
+          </a:p>
+        </p:txBody>
+      </p:sp>
+      <p:sp>
+        <p:nvSpPr>
+          <p:cNvPr id="15" name="Shape 13"/>
+          <p:cNvSpPr/>
+          <p:nvPr/>
+        </p:nvSpPr>
+        <p:spPr>
+          <a:xfrm>
+            <a:off x="4902556" y="3419856"/>
+            <a:ext cx="210312" cy="274320"/>
+          </a:xfrm>
+          <a:prstGeom prst="rightArrow">
+            <a:avLst/>
+          </a:prstGeom>
+          <a:solidFill>
+            <a:srgbClr val="06B6D4"/>
+          </a:solidFill>
+          <a:ln/>
+        </p:spPr>
+      </p:sp>
+      <p:sp>
+        <p:nvSpPr>
+          <p:cNvPr id="16" name="Shape 14"/>
+          <p:cNvSpPr/>
+          <p:nvPr/>
+        </p:nvSpPr>
+        <p:spPr>
+          <a:xfrm>
+            <a:off x="5126584" y="2514600"/>
+            <a:ext cx="1938528" cy="2103120"/>
+          </a:xfrm>
+          <a:prstGeom prst="roundRect">
+            <a:avLst>
+              <a:gd name="adj" fmla="val 3302"/>
+            </a:avLst>
+          </a:prstGeom>
+          <a:solidFill>
+            <a:srgbClr val="111A2E"/>
+          </a:solidFill>
+          <a:ln w="19050">
+            <a:solidFill>
+              <a:srgbClr val="3B82F6"/>
+            </a:solidFill>
+            <a:prstDash val="solid"/>
+          </a:ln>
+        </p:spPr>
+      </p:sp>
+      <p:sp>
+        <p:nvSpPr>
+          <p:cNvPr id="17" name="Text 15"/>
+          <p:cNvSpPr/>
+          <p:nvPr/>
+        </p:nvSpPr>
+        <p:spPr>
+          <a:xfrm>
+            <a:off x="5254600" y="2633472"/>
+            <a:ext cx="1682496" cy="310896"/>
           </a:xfrm>
           <a:prstGeom prst="rect">
             <a:avLst/>
@@ -2597,19 +7933,526 @@
           <a:bodyPr wrap="square" rtlCol="0" anchor="ctr"/>
           <a:lstStyle/>
           <a:p>
-            <a:pPr algn="r" indent="0" marL="0">
+            <a:pPr indent="0" marL="0">
               <a:buNone/>
             </a:pPr>
             <a:r>
-              <a:rPr lang="en-US" sz="1000" dirty="0">
-                <a:solidFill>
-                  <a:srgbClr val="64748B"/>
+              <a:rPr lang="en-US" sz="1100" b="1" dirty="0">
+                <a:solidFill>
+                  <a:srgbClr val="3B82F6"/>
                 </a:solidFill>
                 <a:latin typeface="Consolas" pitchFamily="34" charset="0"/>
                 <a:ea typeface="Consolas" pitchFamily="34" charset="-122"/>
                 <a:cs typeface="Consolas" pitchFamily="34" charset="-120"/>
               </a:rPr>
-              <a:t>4 / 8</a:t>
+              <a:t>03</a:t>
+            </a:r>
+            <a:endParaRPr lang="en-US" sz="1100" dirty="0"/>
+          </a:p>
+        </p:txBody>
+      </p:sp>
+      <p:sp>
+        <p:nvSpPr>
+          <p:cNvPr id="18" name="Text 16"/>
+          <p:cNvSpPr/>
+          <p:nvPr/>
+        </p:nvSpPr>
+        <p:spPr>
+          <a:xfrm>
+            <a:off x="5254600" y="2962656"/>
+            <a:ext cx="1682496" cy="566928"/>
+          </a:xfrm>
+          <a:prstGeom prst="rect">
+            <a:avLst/>
+          </a:prstGeom>
+          <a:noFill/>
+          <a:ln/>
+        </p:spPr>
+        <p:txBody>
+          <a:bodyPr wrap="square" rtlCol="0" anchor="ctr"/>
+          <a:lstStyle/>
+          <a:p>
+            <a:pPr indent="0" marL="0">
+              <a:buNone/>
+            </a:pPr>
+            <a:r>
+              <a:rPr lang="en-US" sz="1350" b="1" dirty="0">
+                <a:solidFill>
+                  <a:srgbClr val="FFFFFF"/>
+                </a:solidFill>
+                <a:latin typeface="Segoe UI" pitchFamily="34" charset="0"/>
+                <a:ea typeface="Segoe UI" pitchFamily="34" charset="-122"/>
+                <a:cs typeface="Segoe UI" pitchFamily="34" charset="-120"/>
+              </a:rPr>
+              <a:t>Enrich</a:t>
+            </a:r>
+            <a:endParaRPr lang="en-US" sz="1350" dirty="0"/>
+          </a:p>
+        </p:txBody>
+      </p:sp>
+      <p:sp>
+        <p:nvSpPr>
+          <p:cNvPr id="19" name="Text 17"/>
+          <p:cNvSpPr/>
+          <p:nvPr/>
+        </p:nvSpPr>
+        <p:spPr>
+          <a:xfrm>
+            <a:off x="5254600" y="3566160"/>
+            <a:ext cx="1682496" cy="960120"/>
+          </a:xfrm>
+          <a:prstGeom prst="rect">
+            <a:avLst/>
+          </a:prstGeom>
+          <a:noFill/>
+          <a:ln/>
+        </p:spPr>
+        <p:txBody>
+          <a:bodyPr wrap="square" rtlCol="0" anchor="ctr"/>
+          <a:lstStyle/>
+          <a:p>
+            <a:pPr indent="0" marL="0">
+              <a:buNone/>
+            </a:pPr>
+            <a:r>
+              <a:rPr lang="en-US" sz="980" dirty="0">
+                <a:solidFill>
+                  <a:srgbClr val="CBD5E1"/>
+                </a:solidFill>
+                <a:latin typeface="Segoe UI" pitchFamily="34" charset="0"/>
+                <a:ea typeface="Segoe UI" pitchFamily="34" charset="-122"/>
+                <a:cs typeface="Segoe UI" pitchFamily="34" charset="-120"/>
+              </a:rPr>
+              <a:t>Joins and derived features without spaghetti SQL or hidden dependencies.</a:t>
+            </a:r>
+            <a:endParaRPr lang="en-US" sz="980" dirty="0"/>
+          </a:p>
+        </p:txBody>
+      </p:sp>
+      <p:sp>
+        <p:nvSpPr>
+          <p:cNvPr id="20" name="Shape 18"/>
+          <p:cNvSpPr/>
+          <p:nvPr/>
+        </p:nvSpPr>
+        <p:spPr>
+          <a:xfrm>
+            <a:off x="7078828" y="3419856"/>
+            <a:ext cx="210312" cy="274320"/>
+          </a:xfrm>
+          <a:prstGeom prst="rightArrow">
+            <a:avLst/>
+          </a:prstGeom>
+          <a:solidFill>
+            <a:srgbClr val="06B6D4"/>
+          </a:solidFill>
+          <a:ln/>
+        </p:spPr>
+      </p:sp>
+      <p:sp>
+        <p:nvSpPr>
+          <p:cNvPr id="21" name="Shape 19"/>
+          <p:cNvSpPr/>
+          <p:nvPr/>
+        </p:nvSpPr>
+        <p:spPr>
+          <a:xfrm>
+            <a:off x="7302856" y="2514600"/>
+            <a:ext cx="1938528" cy="2103120"/>
+          </a:xfrm>
+          <a:prstGeom prst="roundRect">
+            <a:avLst>
+              <a:gd name="adj" fmla="val 3302"/>
+            </a:avLst>
+          </a:prstGeom>
+          <a:solidFill>
+            <a:srgbClr val="111A2E"/>
+          </a:solidFill>
+          <a:ln w="19050">
+            <a:solidFill>
+              <a:srgbClr val="06B6D4"/>
+            </a:solidFill>
+            <a:prstDash val="solid"/>
+          </a:ln>
+        </p:spPr>
+      </p:sp>
+      <p:sp>
+        <p:nvSpPr>
+          <p:cNvPr id="22" name="Text 20"/>
+          <p:cNvSpPr/>
+          <p:nvPr/>
+        </p:nvSpPr>
+        <p:spPr>
+          <a:xfrm>
+            <a:off x="7430872" y="2633472"/>
+            <a:ext cx="1682496" cy="310896"/>
+          </a:xfrm>
+          <a:prstGeom prst="rect">
+            <a:avLst/>
+          </a:prstGeom>
+          <a:noFill/>
+          <a:ln/>
+        </p:spPr>
+        <p:txBody>
+          <a:bodyPr wrap="square" rtlCol="0" anchor="ctr"/>
+          <a:lstStyle/>
+          <a:p>
+            <a:pPr indent="0" marL="0">
+              <a:buNone/>
+            </a:pPr>
+            <a:r>
+              <a:rPr lang="en-US" sz="1100" b="1" dirty="0">
+                <a:solidFill>
+                  <a:srgbClr val="06B6D4"/>
+                </a:solidFill>
+                <a:latin typeface="Consolas" pitchFamily="34" charset="0"/>
+                <a:ea typeface="Consolas" pitchFamily="34" charset="-122"/>
+                <a:cs typeface="Consolas" pitchFamily="34" charset="-120"/>
+              </a:rPr>
+              <a:t>04</a:t>
+            </a:r>
+            <a:endParaRPr lang="en-US" sz="1100" dirty="0"/>
+          </a:p>
+        </p:txBody>
+      </p:sp>
+      <p:sp>
+        <p:nvSpPr>
+          <p:cNvPr id="23" name="Text 21"/>
+          <p:cNvSpPr/>
+          <p:nvPr/>
+        </p:nvSpPr>
+        <p:spPr>
+          <a:xfrm>
+            <a:off x="7430872" y="2962656"/>
+            <a:ext cx="1682496" cy="566928"/>
+          </a:xfrm>
+          <a:prstGeom prst="rect">
+            <a:avLst/>
+          </a:prstGeom>
+          <a:noFill/>
+          <a:ln/>
+        </p:spPr>
+        <p:txBody>
+          <a:bodyPr wrap="square" rtlCol="0" anchor="ctr"/>
+          <a:lstStyle/>
+          <a:p>
+            <a:pPr indent="0" marL="0">
+              <a:buNone/>
+            </a:pPr>
+            <a:r>
+              <a:rPr lang="en-US" sz="1350" b="1" dirty="0">
+                <a:solidFill>
+                  <a:srgbClr val="FFFFFF"/>
+                </a:solidFill>
+                <a:latin typeface="Segoe UI" pitchFamily="34" charset="0"/>
+                <a:ea typeface="Segoe UI" pitchFamily="34" charset="-122"/>
+                <a:cs typeface="Segoe UI" pitchFamily="34" charset="-120"/>
+              </a:rPr>
+              <a:t>Export</a:t>
+            </a:r>
+            <a:endParaRPr lang="en-US" sz="1350" dirty="0"/>
+          </a:p>
+        </p:txBody>
+      </p:sp>
+      <p:sp>
+        <p:nvSpPr>
+          <p:cNvPr id="24" name="Text 22"/>
+          <p:cNvSpPr/>
+          <p:nvPr/>
+        </p:nvSpPr>
+        <p:spPr>
+          <a:xfrm>
+            <a:off x="7430872" y="3566160"/>
+            <a:ext cx="1682496" cy="960120"/>
+          </a:xfrm>
+          <a:prstGeom prst="rect">
+            <a:avLst/>
+          </a:prstGeom>
+          <a:noFill/>
+          <a:ln/>
+        </p:spPr>
+        <p:txBody>
+          <a:bodyPr wrap="square" rtlCol="0" anchor="ctr"/>
+          <a:lstStyle/>
+          <a:p>
+            <a:pPr indent="0" marL="0">
+              <a:buNone/>
+            </a:pPr>
+            <a:r>
+              <a:rPr lang="en-US" sz="980" dirty="0">
+                <a:solidFill>
+                  <a:srgbClr val="CBD5E1"/>
+                </a:solidFill>
+                <a:latin typeface="Segoe UI" pitchFamily="34" charset="0"/>
+                <a:ea typeface="Segoe UI" pitchFamily="34" charset="-122"/>
+                <a:cs typeface="Segoe UI" pitchFamily="34" charset="-120"/>
+              </a:rPr>
+              <a:t>Formats downstream tools actually want, contract-tested per output.</a:t>
+            </a:r>
+            <a:endParaRPr lang="en-US" sz="980" dirty="0"/>
+          </a:p>
+        </p:txBody>
+      </p:sp>
+      <p:sp>
+        <p:nvSpPr>
+          <p:cNvPr id="25" name="Shape 23"/>
+          <p:cNvSpPr/>
+          <p:nvPr/>
+        </p:nvSpPr>
+        <p:spPr>
+          <a:xfrm>
+            <a:off x="9255100" y="3419856"/>
+            <a:ext cx="210312" cy="274320"/>
+          </a:xfrm>
+          <a:prstGeom prst="rightArrow">
+            <a:avLst/>
+          </a:prstGeom>
+          <a:solidFill>
+            <a:srgbClr val="06B6D4"/>
+          </a:solidFill>
+          <a:ln/>
+        </p:spPr>
+      </p:sp>
+      <p:sp>
+        <p:nvSpPr>
+          <p:cNvPr id="26" name="Shape 24"/>
+          <p:cNvSpPr/>
+          <p:nvPr/>
+        </p:nvSpPr>
+        <p:spPr>
+          <a:xfrm>
+            <a:off x="9479128" y="2514600"/>
+            <a:ext cx="1938528" cy="2103120"/>
+          </a:xfrm>
+          <a:prstGeom prst="roundRect">
+            <a:avLst>
+              <a:gd name="adj" fmla="val 3302"/>
+            </a:avLst>
+          </a:prstGeom>
+          <a:solidFill>
+            <a:srgbClr val="111A2E"/>
+          </a:solidFill>
+          <a:ln w="19050">
+            <a:solidFill>
+              <a:srgbClr val="3B82F6"/>
+            </a:solidFill>
+            <a:prstDash val="solid"/>
+          </a:ln>
+        </p:spPr>
+      </p:sp>
+      <p:sp>
+        <p:nvSpPr>
+          <p:cNvPr id="27" name="Text 25"/>
+          <p:cNvSpPr/>
+          <p:nvPr/>
+        </p:nvSpPr>
+        <p:spPr>
+          <a:xfrm>
+            <a:off x="9607144" y="2633472"/>
+            <a:ext cx="1682496" cy="310896"/>
+          </a:xfrm>
+          <a:prstGeom prst="rect">
+            <a:avLst/>
+          </a:prstGeom>
+          <a:noFill/>
+          <a:ln/>
+        </p:spPr>
+        <p:txBody>
+          <a:bodyPr wrap="square" rtlCol="0" anchor="ctr"/>
+          <a:lstStyle/>
+          <a:p>
+            <a:pPr indent="0" marL="0">
+              <a:buNone/>
+            </a:pPr>
+            <a:r>
+              <a:rPr lang="en-US" sz="1100" b="1" dirty="0">
+                <a:solidFill>
+                  <a:srgbClr val="3B82F6"/>
+                </a:solidFill>
+                <a:latin typeface="Consolas" pitchFamily="34" charset="0"/>
+                <a:ea typeface="Consolas" pitchFamily="34" charset="-122"/>
+                <a:cs typeface="Consolas" pitchFamily="34" charset="-120"/>
+              </a:rPr>
+              <a:t>05</a:t>
+            </a:r>
+            <a:endParaRPr lang="en-US" sz="1100" dirty="0"/>
+          </a:p>
+        </p:txBody>
+      </p:sp>
+      <p:sp>
+        <p:nvSpPr>
+          <p:cNvPr id="28" name="Text 26"/>
+          <p:cNvSpPr/>
+          <p:nvPr/>
+        </p:nvSpPr>
+        <p:spPr>
+          <a:xfrm>
+            <a:off x="9607144" y="2962656"/>
+            <a:ext cx="1682496" cy="566928"/>
+          </a:xfrm>
+          <a:prstGeom prst="rect">
+            <a:avLst/>
+          </a:prstGeom>
+          <a:noFill/>
+          <a:ln/>
+        </p:spPr>
+        <p:txBody>
+          <a:bodyPr wrap="square" rtlCol="0" anchor="ctr"/>
+          <a:lstStyle/>
+          <a:p>
+            <a:pPr indent="0" marL="0">
+              <a:buNone/>
+            </a:pPr>
+            <a:r>
+              <a:rPr lang="en-US" sz="1350" b="1" dirty="0">
+                <a:solidFill>
+                  <a:srgbClr val="FFFFFF"/>
+                </a:solidFill>
+                <a:latin typeface="Segoe UI" pitchFamily="34" charset="0"/>
+                <a:ea typeface="Segoe UI" pitchFamily="34" charset="-122"/>
+                <a:cs typeface="Segoe UI" pitchFamily="34" charset="-120"/>
+              </a:rPr>
+              <a:t>Report</a:t>
+            </a:r>
+            <a:endParaRPr lang="en-US" sz="1350" dirty="0"/>
+          </a:p>
+        </p:txBody>
+      </p:sp>
+      <p:sp>
+        <p:nvSpPr>
+          <p:cNvPr id="29" name="Text 27"/>
+          <p:cNvSpPr/>
+          <p:nvPr/>
+        </p:nvSpPr>
+        <p:spPr>
+          <a:xfrm>
+            <a:off x="9607144" y="3566160"/>
+            <a:ext cx="1682496" cy="960120"/>
+          </a:xfrm>
+          <a:prstGeom prst="rect">
+            <a:avLst/>
+          </a:prstGeom>
+          <a:noFill/>
+          <a:ln/>
+        </p:spPr>
+        <p:txBody>
+          <a:bodyPr wrap="square" rtlCol="0" anchor="ctr"/>
+          <a:lstStyle/>
+          <a:p>
+            <a:pPr indent="0" marL="0">
+              <a:buNone/>
+            </a:pPr>
+            <a:r>
+              <a:rPr lang="en-US" sz="980" dirty="0">
+                <a:solidFill>
+                  <a:srgbClr val="CBD5E1"/>
+                </a:solidFill>
+                <a:latin typeface="Segoe UI" pitchFamily="34" charset="0"/>
+                <a:ea typeface="Segoe UI" pitchFamily="34" charset="-122"/>
+                <a:cs typeface="Segoe UI" pitchFamily="34" charset="-120"/>
+              </a:rPr>
+              <a:t>Readable outputs and logs a human can audit without a decoder ring.</a:t>
+            </a:r>
+            <a:endParaRPr lang="en-US" sz="980" dirty="0"/>
+          </a:p>
+        </p:txBody>
+      </p:sp>
+      <p:sp>
+        <p:nvSpPr>
+          <p:cNvPr id="30" name="Shape 28"/>
+          <p:cNvSpPr/>
+          <p:nvPr/>
+        </p:nvSpPr>
+        <p:spPr>
+          <a:xfrm>
+            <a:off x="822960" y="5961888"/>
+            <a:ext cx="10515600" cy="0"/>
+          </a:xfrm>
+          <a:prstGeom prst="line">
+            <a:avLst/>
+          </a:prstGeom>
+          <a:noFill/>
+          <a:ln w="12700">
+            <a:solidFill>
+              <a:srgbClr val="1E2D45"/>
+            </a:solidFill>
+            <a:prstDash val="solid"/>
+          </a:ln>
+        </p:spPr>
+      </p:sp>
+      <p:sp>
+        <p:nvSpPr>
+          <p:cNvPr id="31" name="Text 29"/>
+          <p:cNvSpPr/>
+          <p:nvPr/>
+        </p:nvSpPr>
+        <p:spPr>
+          <a:xfrm>
+            <a:off x="822960" y="6053328"/>
+            <a:ext cx="9692640" cy="457200"/>
+          </a:xfrm>
+          <a:prstGeom prst="rect">
+            <a:avLst/>
+          </a:prstGeom>
+          <a:noFill/>
+          <a:ln/>
+        </p:spPr>
+        <p:txBody>
+          <a:bodyPr wrap="square" rtlCol="0" anchor="ctr"/>
+          <a:lstStyle/>
+          <a:p>
+            <a:pPr indent="0" marL="0">
+              <a:buNone/>
+            </a:pPr>
+            <a:r>
+              <a:rPr lang="en-US" sz="1150" dirty="0">
+                <a:solidFill>
+                  <a:srgbClr val="64748B"/>
+                </a:solidFill>
+                <a:latin typeface="Segoe UI" pitchFamily="34" charset="0"/>
+                <a:ea typeface="Segoe UI" pitchFamily="34" charset="-122"/>
+                <a:cs typeface="Segoe UI" pitchFamily="34" charset="-120"/>
+              </a:rPr>
+              <a:t>Each module is composable - use one, or run the whole pipeline.</a:t>
+            </a:r>
+            <a:endParaRPr lang="en-US" sz="1150" dirty="0"/>
+          </a:p>
+        </p:txBody>
+      </p:sp>
+      <p:sp>
+        <p:nvSpPr>
+          <p:cNvPr id="32" name="Text 30"/>
+          <p:cNvSpPr/>
+          <p:nvPr/>
+        </p:nvSpPr>
+        <p:spPr>
+          <a:xfrm>
+            <a:off x="10698480" y="6382512"/>
+            <a:ext cx="1188720" cy="365760"/>
+          </a:xfrm>
+          <a:prstGeom prst="rect">
+            <a:avLst/>
+          </a:prstGeom>
+          <a:noFill/>
+          <a:ln/>
+        </p:spPr>
+        <p:txBody>
+          <a:bodyPr wrap="square" rtlCol="0" anchor="ctr"/>
+          <a:lstStyle/>
+          <a:p>
+            <a:pPr algn="r" indent="0" marL="0">
+              <a:buNone/>
+            </a:pPr>
+            <a:r>
+              <a:rPr lang="en-US" sz="1000" dirty="0">
+                <a:solidFill>
+                  <a:srgbClr val="64748B"/>
+                </a:solidFill>
+                <a:latin typeface="Consolas" pitchFamily="34" charset="0"/>
+                <a:ea typeface="Consolas" pitchFamily="34" charset="-122"/>
+                <a:cs typeface="Consolas" pitchFamily="34" charset="-120"/>
+              </a:rPr>
+              <a:t>4 / 15</a:t>
             </a:r>
             <a:endParaRPr lang="en-US" sz="1000" dirty="0"/>
           </a:p>
@@ -2720,7 +8563,7 @@
                 <a:ea typeface="Consolas" pitchFamily="34" charset="-122"/>
                 <a:cs typeface="Consolas" pitchFamily="34" charset="-120"/>
               </a:rPr>
-              <a:t>IN PRODUCTION</a:t>
+              <a:t>THE FRAMEWORK</a:t>
             </a:r>
             <a:endParaRPr lang="en-US" sz="1200" dirty="0"/>
           </a:p>
@@ -2734,8 +8577,8 @@
         </p:nvSpPr>
         <p:spPr>
           <a:xfrm>
-            <a:off x="822960" y="960120"/>
-            <a:ext cx="10515600" cy="868680"/>
+            <a:off x="822960" y="914400"/>
+            <a:ext cx="10561320" cy="868680"/>
           </a:xfrm>
           <a:prstGeom prst="rect">
             <a:avLst/>
@@ -2751,7 +8594,7 @@
               <a:buNone/>
             </a:pPr>
             <a:r>
-              <a:rPr lang="en-US" sz="3000" b="1" dirty="0">
+              <a:rPr lang="en-US" sz="2700" b="1" dirty="0">
                 <a:solidFill>
                   <a:srgbClr val="FFFFFF"/>
                 </a:solidFill>
@@ -2759,139 +8602,659 @@
                 <a:ea typeface="Segoe UI" pitchFamily="34" charset="-122"/>
                 <a:cs typeface="Segoe UI" pitchFamily="34" charset="-120"/>
               </a:rPr>
-              <a:t>Where ODIS earns its keep</a:t>
-            </a:r>
-            <a:endParaRPr lang="en-US" sz="3000" dirty="0"/>
-          </a:p>
-        </p:txBody>
-      </p:sp>
-      <p:sp>
-        <p:nvSpPr>
-          <p:cNvPr id="6" name="Text 4"/>
-          <p:cNvSpPr/>
-          <p:nvPr/>
-        </p:nvSpPr>
-        <p:spPr>
-          <a:xfrm>
-            <a:off x="868680" y="2057400"/>
-            <a:ext cx="10424160" cy="3566160"/>
-          </a:xfrm>
-          <a:prstGeom prst="rect">
-            <a:avLst/>
-          </a:prstGeom>
-          <a:noFill/>
-          <a:ln/>
-        </p:spPr>
-        <p:txBody>
-          <a:bodyPr wrap="square" rtlCol="0" anchor="t"/>
-          <a:lstStyle/>
-          <a:p>
-            <a:pPr marL="342900" indent="-342900">
-              <a:lnSpc>
-                <a:spcPct val="115000"/>
-              </a:lnSpc>
-              <a:spcAft>
-                <a:spcPts val="1000"/>
-              </a:spcAft>
-              <a:buSzPct val="100000"/>
-              <a:buChar char="▸"/>
-            </a:pPr>
-            <a:r>
-              <a:rPr lang="en-US" sz="1600" dirty="0">
-                <a:solidFill>
-                  <a:srgbClr val="CBD5E1"/>
+              <a:t>Small enough to read, strong enough to run</a:t>
+            </a:r>
+            <a:endParaRPr lang="en-US" sz="2700" dirty="0"/>
+          </a:p>
+        </p:txBody>
+      </p:sp>
+      <p:sp>
+        <p:nvSpPr>
+          <p:cNvPr id="6" name="Shape 4"/>
+          <p:cNvSpPr/>
+          <p:nvPr/>
+        </p:nvSpPr>
+        <p:spPr>
+          <a:xfrm>
+            <a:off x="822960" y="2194560"/>
+            <a:ext cx="2423160" cy="2697480"/>
+          </a:xfrm>
+          <a:prstGeom prst="roundRect">
+            <a:avLst>
+              <a:gd name="adj" fmla="val 3019"/>
+            </a:avLst>
+          </a:prstGeom>
+          <a:solidFill>
+            <a:srgbClr val="111A2E"/>
+          </a:solidFill>
+          <a:ln w="12700">
+            <a:solidFill>
+              <a:srgbClr val="1E2D45"/>
+            </a:solidFill>
+            <a:prstDash val="solid"/>
+          </a:ln>
+        </p:spPr>
+      </p:sp>
+      <p:sp>
+        <p:nvSpPr>
+          <p:cNvPr id="7" name="Text 5"/>
+          <p:cNvSpPr/>
+          <p:nvPr/>
+        </p:nvSpPr>
+        <p:spPr>
+          <a:xfrm>
+            <a:off x="960120" y="2514600"/>
+            <a:ext cx="2148840" cy="914400"/>
+          </a:xfrm>
+          <a:prstGeom prst="rect">
+            <a:avLst/>
+          </a:prstGeom>
+          <a:noFill/>
+          <a:ln/>
+        </p:spPr>
+        <p:txBody>
+          <a:bodyPr wrap="square" rtlCol="0" anchor="ctr"/>
+          <a:lstStyle/>
+          <a:p>
+            <a:pPr algn="ctr" indent="0" marL="0">
+              <a:buNone/>
+            </a:pPr>
+            <a:r>
+              <a:rPr lang="en-US" sz="3800" b="1" dirty="0">
+                <a:solidFill>
+                  <a:srgbClr val="3B82F6"/>
                 </a:solidFill>
                 <a:latin typeface="Segoe UI" pitchFamily="34" charset="0"/>
                 <a:ea typeface="Segoe UI" pitchFamily="34" charset="-122"/>
                 <a:cs typeface="Segoe UI" pitchFamily="34" charset="-120"/>
               </a:rPr>
-              <a:t>Powers data apps across the Zalin Labs suite</a:t>
-            </a:r>
-            <a:endParaRPr lang="en-US" sz="1600" dirty="0"/>
-          </a:p>
-          <a:p>
-            <a:pPr marL="342900" indent="-342900">
-              <a:lnSpc>
-                <a:spcPct val="115000"/>
-              </a:lnSpc>
-              <a:spcAft>
-                <a:spcPts val="1000"/>
-              </a:spcAft>
-              <a:buSzPct val="100000"/>
-              <a:buChar char="▸"/>
-            </a:pPr>
-            <a:r>
-              <a:rPr lang="en-US" sz="1600" dirty="0">
-                <a:solidFill>
-                  <a:srgbClr val="CBD5E1"/>
+              <a:t>4,305</a:t>
+            </a:r>
+            <a:endParaRPr lang="en-US" sz="3800" dirty="0"/>
+          </a:p>
+        </p:txBody>
+      </p:sp>
+      <p:sp>
+        <p:nvSpPr>
+          <p:cNvPr id="8" name="Text 6"/>
+          <p:cNvSpPr/>
+          <p:nvPr/>
+        </p:nvSpPr>
+        <p:spPr>
+          <a:xfrm>
+            <a:off x="960120" y="3520440"/>
+            <a:ext cx="2148840" cy="502920"/>
+          </a:xfrm>
+          <a:prstGeom prst="rect">
+            <a:avLst/>
+          </a:prstGeom>
+          <a:noFill/>
+          <a:ln/>
+        </p:spPr>
+        <p:txBody>
+          <a:bodyPr wrap="square" rtlCol="0" anchor="ctr"/>
+          <a:lstStyle/>
+          <a:p>
+            <a:pPr algn="ctr" indent="0" marL="0">
+              <a:buNone/>
+            </a:pPr>
+            <a:r>
+              <a:rPr lang="en-US" sz="1450" b="1" dirty="0">
+                <a:solidFill>
+                  <a:srgbClr val="FFFFFF"/>
                 </a:solidFill>
                 <a:latin typeface="Segoe UI" pitchFamily="34" charset="0"/>
                 <a:ea typeface="Segoe UI" pitchFamily="34" charset="-122"/>
                 <a:cs typeface="Segoe UI" pitchFamily="34" charset="-120"/>
               </a:rPr>
-              <a:t>Feeds BI and analytics client workflows</a:t>
-            </a:r>
-            <a:endParaRPr lang="en-US" sz="1600" dirty="0"/>
-          </a:p>
-          <a:p>
-            <a:pPr marL="342900" indent="-342900">
-              <a:lnSpc>
-                <a:spcPct val="115000"/>
-              </a:lnSpc>
-              <a:spcAft>
-                <a:spcPts val="1000"/>
-              </a:spcAft>
-              <a:buSzPct val="100000"/>
-              <a:buChar char="▸"/>
-            </a:pPr>
-            <a:r>
-              <a:rPr lang="en-US" sz="1600" dirty="0">
-                <a:solidFill>
-                  <a:srgbClr val="CBD5E1"/>
+              <a:t>Lines, open source</a:t>
+            </a:r>
+            <a:endParaRPr lang="en-US" sz="1450" dirty="0"/>
+          </a:p>
+        </p:txBody>
+      </p:sp>
+      <p:sp>
+        <p:nvSpPr>
+          <p:cNvPr id="9" name="Text 7"/>
+          <p:cNvSpPr/>
+          <p:nvPr/>
+        </p:nvSpPr>
+        <p:spPr>
+          <a:xfrm>
+            <a:off x="1005840" y="4069080"/>
+            <a:ext cx="2057400" cy="685800"/>
+          </a:xfrm>
+          <a:prstGeom prst="rect">
+            <a:avLst/>
+          </a:prstGeom>
+          <a:noFill/>
+          <a:ln/>
+        </p:spPr>
+        <p:txBody>
+          <a:bodyPr wrap="square" rtlCol="0" anchor="ctr"/>
+          <a:lstStyle/>
+          <a:p>
+            <a:pPr algn="ctr" indent="0" marL="0">
+              <a:buNone/>
+            </a:pPr>
+            <a:r>
+              <a:rPr lang="en-US" sz="1050" dirty="0">
+                <a:solidFill>
+                  <a:srgbClr val="94A3B8"/>
                 </a:solidFill>
                 <a:latin typeface="Segoe UI" pitchFamily="34" charset="0"/>
                 <a:ea typeface="Segoe UI" pitchFamily="34" charset="-122"/>
                 <a:cs typeface="Segoe UI" pitchFamily="34" charset="-120"/>
               </a:rPr>
-              <a:t>4,305 lines maintained by an agent team under quality gates</a:t>
-            </a:r>
-            <a:endParaRPr lang="en-US" sz="1600" dirty="0"/>
-          </a:p>
-          <a:p>
-            <a:pPr marL="342900" indent="-342900">
-              <a:lnSpc>
-                <a:spcPct val="115000"/>
-              </a:lnSpc>
-              <a:spcAft>
-                <a:spcPts val="1000"/>
-              </a:spcAft>
-              <a:buSzPct val="100000"/>
-              <a:buChar char="▸"/>
-            </a:pPr>
-            <a:r>
-              <a:rPr lang="en-US" sz="1600" dirty="0">
-                <a:solidFill>
-                  <a:srgbClr val="CBD5E1"/>
+              <a:t>Production glue code you never have to write again.</a:t>
+            </a:r>
+            <a:endParaRPr lang="en-US" sz="1050" dirty="0"/>
+          </a:p>
+        </p:txBody>
+      </p:sp>
+      <p:sp>
+        <p:nvSpPr>
+          <p:cNvPr id="10" name="Shape 8"/>
+          <p:cNvSpPr/>
+          <p:nvPr/>
+        </p:nvSpPr>
+        <p:spPr>
+          <a:xfrm>
+            <a:off x="3520440" y="2194560"/>
+            <a:ext cx="2423160" cy="2697480"/>
+          </a:xfrm>
+          <a:prstGeom prst="roundRect">
+            <a:avLst>
+              <a:gd name="adj" fmla="val 3019"/>
+            </a:avLst>
+          </a:prstGeom>
+          <a:solidFill>
+            <a:srgbClr val="111A2E"/>
+          </a:solidFill>
+          <a:ln w="12700">
+            <a:solidFill>
+              <a:srgbClr val="1E2D45"/>
+            </a:solidFill>
+            <a:prstDash val="solid"/>
+          </a:ln>
+        </p:spPr>
+      </p:sp>
+      <p:sp>
+        <p:nvSpPr>
+          <p:cNvPr id="11" name="Text 9"/>
+          <p:cNvSpPr/>
+          <p:nvPr/>
+        </p:nvSpPr>
+        <p:spPr>
+          <a:xfrm>
+            <a:off x="3657600" y="2514600"/>
+            <a:ext cx="2148840" cy="914400"/>
+          </a:xfrm>
+          <a:prstGeom prst="rect">
+            <a:avLst/>
+          </a:prstGeom>
+          <a:noFill/>
+          <a:ln/>
+        </p:spPr>
+        <p:txBody>
+          <a:bodyPr wrap="square" rtlCol="0" anchor="ctr"/>
+          <a:lstStyle/>
+          <a:p>
+            <a:pPr algn="ctr" indent="0" marL="0">
+              <a:buNone/>
+            </a:pPr>
+            <a:r>
+              <a:rPr lang="en-US" sz="3800" b="1" dirty="0">
+                <a:solidFill>
+                  <a:srgbClr val="06B6D4"/>
                 </a:solidFill>
                 <a:latin typeface="Segoe UI" pitchFamily="34" charset="0"/>
                 <a:ea typeface="Segoe UI" pitchFamily="34" charset="-122"/>
                 <a:cs typeface="Segoe UI" pitchFamily="34" charset="-120"/>
               </a:rPr>
-              <a:t>Open source: the stranger who reads it makes it better</a:t>
-            </a:r>
-            <a:endParaRPr lang="en-US" sz="1600" dirty="0"/>
-          </a:p>
-        </p:txBody>
-      </p:sp>
-      <p:sp>
-        <p:nvSpPr>
-          <p:cNvPr id="7" name="Text 5"/>
-          <p:cNvSpPr/>
-          <p:nvPr/>
-        </p:nvSpPr>
-        <p:spPr>
-          <a:xfrm>
-            <a:off x="10698480" y="6355080"/>
+              <a:t>4</a:t>
+            </a:r>
+            <a:endParaRPr lang="en-US" sz="3800" dirty="0"/>
+          </a:p>
+        </p:txBody>
+      </p:sp>
+      <p:sp>
+        <p:nvSpPr>
+          <p:cNvPr id="12" name="Text 10"/>
+          <p:cNvSpPr/>
+          <p:nvPr/>
+        </p:nvSpPr>
+        <p:spPr>
+          <a:xfrm>
+            <a:off x="3657600" y="3520440"/>
+            <a:ext cx="2148840" cy="502920"/>
+          </a:xfrm>
+          <a:prstGeom prst="rect">
+            <a:avLst/>
+          </a:prstGeom>
+          <a:noFill/>
+          <a:ln/>
+        </p:spPr>
+        <p:txBody>
+          <a:bodyPr wrap="square" rtlCol="0" anchor="ctr"/>
+          <a:lstStyle/>
+          <a:p>
+            <a:pPr algn="ctr" indent="0" marL="0">
+              <a:buNone/>
+            </a:pPr>
+            <a:r>
+              <a:rPr lang="en-US" sz="1450" b="1" dirty="0">
+                <a:solidFill>
+                  <a:srgbClr val="FFFFFF"/>
+                </a:solidFill>
+                <a:latin typeface="Segoe UI" pitchFamily="34" charset="0"/>
+                <a:ea typeface="Segoe UI" pitchFamily="34" charset="-122"/>
+                <a:cs typeface="Segoe UI" pitchFamily="34" charset="-120"/>
+              </a:rPr>
+              <a:t>Pipeline modules</a:t>
+            </a:r>
+            <a:endParaRPr lang="en-US" sz="1450" dirty="0"/>
+          </a:p>
+        </p:txBody>
+      </p:sp>
+      <p:sp>
+        <p:nvSpPr>
+          <p:cNvPr id="13" name="Text 11"/>
+          <p:cNvSpPr/>
+          <p:nvPr/>
+        </p:nvSpPr>
+        <p:spPr>
+          <a:xfrm>
+            <a:off x="3703320" y="4069080"/>
+            <a:ext cx="2057400" cy="685800"/>
+          </a:xfrm>
+          <a:prstGeom prst="rect">
+            <a:avLst/>
+          </a:prstGeom>
+          <a:noFill/>
+          <a:ln/>
+        </p:spPr>
+        <p:txBody>
+          <a:bodyPr wrap="square" rtlCol="0" anchor="ctr"/>
+          <a:lstStyle/>
+          <a:p>
+            <a:pPr algn="ctr" indent="0" marL="0">
+              <a:buNone/>
+            </a:pPr>
+            <a:r>
+              <a:rPr lang="en-US" sz="1050" dirty="0">
+                <a:solidFill>
+                  <a:srgbClr val="94A3B8"/>
+                </a:solidFill>
+                <a:latin typeface="Segoe UI" pitchFamily="34" charset="0"/>
+                <a:ea typeface="Segoe UI" pitchFamily="34" charset="-122"/>
+                <a:cs typeface="Segoe UI" pitchFamily="34" charset="-120"/>
+              </a:rPr>
+              <a:t>Ingestion, cleaning, enrichment, export and reporting.</a:t>
+            </a:r>
+            <a:endParaRPr lang="en-US" sz="1050" dirty="0"/>
+          </a:p>
+        </p:txBody>
+      </p:sp>
+      <p:sp>
+        <p:nvSpPr>
+          <p:cNvPr id="14" name="Shape 12"/>
+          <p:cNvSpPr/>
+          <p:nvPr/>
+        </p:nvSpPr>
+        <p:spPr>
+          <a:xfrm>
+            <a:off x="6217920" y="2194560"/>
+            <a:ext cx="2423160" cy="2697480"/>
+          </a:xfrm>
+          <a:prstGeom prst="roundRect">
+            <a:avLst>
+              <a:gd name="adj" fmla="val 3019"/>
+            </a:avLst>
+          </a:prstGeom>
+          <a:solidFill>
+            <a:srgbClr val="111A2E"/>
+          </a:solidFill>
+          <a:ln w="12700">
+            <a:solidFill>
+              <a:srgbClr val="1E2D45"/>
+            </a:solidFill>
+            <a:prstDash val="solid"/>
+          </a:ln>
+        </p:spPr>
+      </p:sp>
+      <p:sp>
+        <p:nvSpPr>
+          <p:cNvPr id="15" name="Text 13"/>
+          <p:cNvSpPr/>
+          <p:nvPr/>
+        </p:nvSpPr>
+        <p:spPr>
+          <a:xfrm>
+            <a:off x="6355080" y="2514600"/>
+            <a:ext cx="2148840" cy="914400"/>
+          </a:xfrm>
+          <a:prstGeom prst="rect">
+            <a:avLst/>
+          </a:prstGeom>
+          <a:noFill/>
+          <a:ln/>
+        </p:spPr>
+        <p:txBody>
+          <a:bodyPr wrap="square" rtlCol="0" anchor="ctr"/>
+          <a:lstStyle/>
+          <a:p>
+            <a:pPr algn="ctr" indent="0" marL="0">
+              <a:buNone/>
+            </a:pPr>
+            <a:r>
+              <a:rPr lang="en-US" sz="3800" b="1" dirty="0">
+                <a:solidFill>
+                  <a:srgbClr val="22D3A0"/>
+                </a:solidFill>
+                <a:latin typeface="Segoe UI" pitchFamily="34" charset="0"/>
+                <a:ea typeface="Segoe UI" pitchFamily="34" charset="-122"/>
+                <a:cs typeface="Segoe UI" pitchFamily="34" charset="-120"/>
+              </a:rPr>
+              <a:t>70%</a:t>
+            </a:r>
+            <a:endParaRPr lang="en-US" sz="3800" dirty="0"/>
+          </a:p>
+        </p:txBody>
+      </p:sp>
+      <p:sp>
+        <p:nvSpPr>
+          <p:cNvPr id="16" name="Text 14"/>
+          <p:cNvSpPr/>
+          <p:nvPr/>
+        </p:nvSpPr>
+        <p:spPr>
+          <a:xfrm>
+            <a:off x="6355080" y="3520440"/>
+            <a:ext cx="2148840" cy="502920"/>
+          </a:xfrm>
+          <a:prstGeom prst="rect">
+            <a:avLst/>
+          </a:prstGeom>
+          <a:noFill/>
+          <a:ln/>
+        </p:spPr>
+        <p:txBody>
+          <a:bodyPr wrap="square" rtlCol="0" anchor="ctr"/>
+          <a:lstStyle/>
+          <a:p>
+            <a:pPr algn="ctr" indent="0" marL="0">
+              <a:buNone/>
+            </a:pPr>
+            <a:r>
+              <a:rPr lang="en-US" sz="1450" b="1" dirty="0">
+                <a:solidFill>
+                  <a:srgbClr val="FFFFFF"/>
+                </a:solidFill>
+                <a:latin typeface="Segoe UI" pitchFamily="34" charset="0"/>
+                <a:ea typeface="Segoe UI" pitchFamily="34" charset="-122"/>
+                <a:cs typeface="Segoe UI" pitchFamily="34" charset="-120"/>
+              </a:rPr>
+              <a:t>Effort standardized</a:t>
+            </a:r>
+            <a:endParaRPr lang="en-US" sz="1450" dirty="0"/>
+          </a:p>
+        </p:txBody>
+      </p:sp>
+      <p:sp>
+        <p:nvSpPr>
+          <p:cNvPr id="17" name="Text 15"/>
+          <p:cNvSpPr/>
+          <p:nvPr/>
+        </p:nvSpPr>
+        <p:spPr>
+          <a:xfrm>
+            <a:off x="6400800" y="4069080"/>
+            <a:ext cx="2057400" cy="685800"/>
+          </a:xfrm>
+          <a:prstGeom prst="rect">
+            <a:avLst/>
+          </a:prstGeom>
+          <a:noFill/>
+          <a:ln/>
+        </p:spPr>
+        <p:txBody>
+          <a:bodyPr wrap="square" rtlCol="0" anchor="ctr"/>
+          <a:lstStyle/>
+          <a:p>
+            <a:pPr algn="ctr" indent="0" marL="0">
+              <a:buNone/>
+            </a:pPr>
+            <a:r>
+              <a:rPr lang="en-US" sz="1050" dirty="0">
+                <a:solidFill>
+                  <a:srgbClr val="94A3B8"/>
+                </a:solidFill>
+                <a:latin typeface="Segoe UI" pitchFamily="34" charset="0"/>
+                <a:ea typeface="Segoe UI" pitchFamily="34" charset="-122"/>
+                <a:cs typeface="Segoe UI" pitchFamily="34" charset="-120"/>
+              </a:rPr>
+              <a:t>The repetitive part of data work, handled by the framework.</a:t>
+            </a:r>
+            <a:endParaRPr lang="en-US" sz="1050" dirty="0"/>
+          </a:p>
+        </p:txBody>
+      </p:sp>
+      <p:sp>
+        <p:nvSpPr>
+          <p:cNvPr id="18" name="Shape 16"/>
+          <p:cNvSpPr/>
+          <p:nvPr/>
+        </p:nvSpPr>
+        <p:spPr>
+          <a:xfrm>
+            <a:off x="8915400" y="2194560"/>
+            <a:ext cx="2423160" cy="2697480"/>
+          </a:xfrm>
+          <a:prstGeom prst="roundRect">
+            <a:avLst>
+              <a:gd name="adj" fmla="val 3019"/>
+            </a:avLst>
+          </a:prstGeom>
+          <a:solidFill>
+            <a:srgbClr val="111A2E"/>
+          </a:solidFill>
+          <a:ln w="12700">
+            <a:solidFill>
+              <a:srgbClr val="1E2D45"/>
+            </a:solidFill>
+            <a:prstDash val="solid"/>
+          </a:ln>
+        </p:spPr>
+      </p:sp>
+      <p:sp>
+        <p:nvSpPr>
+          <p:cNvPr id="19" name="Text 17"/>
+          <p:cNvSpPr/>
+          <p:nvPr/>
+        </p:nvSpPr>
+        <p:spPr>
+          <a:xfrm>
+            <a:off x="9052560" y="2514600"/>
+            <a:ext cx="2148840" cy="914400"/>
+          </a:xfrm>
+          <a:prstGeom prst="rect">
+            <a:avLst/>
+          </a:prstGeom>
+          <a:noFill/>
+          <a:ln/>
+        </p:spPr>
+        <p:txBody>
+          <a:bodyPr wrap="square" rtlCol="0" anchor="ctr"/>
+          <a:lstStyle/>
+          <a:p>
+            <a:pPr algn="ctr" indent="0" marL="0">
+              <a:buNone/>
+            </a:pPr>
+            <a:r>
+              <a:rPr lang="en-US" sz="3800" b="1" dirty="0">
+                <a:solidFill>
+                  <a:srgbClr val="F59E0B"/>
+                </a:solidFill>
+                <a:latin typeface="Segoe UI" pitchFamily="34" charset="0"/>
+                <a:ea typeface="Segoe UI" pitchFamily="34" charset="-122"/>
+                <a:cs typeface="Segoe UI" pitchFamily="34" charset="-120"/>
+              </a:rPr>
+              <a:t>0</a:t>
+            </a:r>
+            <a:endParaRPr lang="en-US" sz="3800" dirty="0"/>
+          </a:p>
+        </p:txBody>
+      </p:sp>
+      <p:sp>
+        <p:nvSpPr>
+          <p:cNvPr id="20" name="Text 18"/>
+          <p:cNvSpPr/>
+          <p:nvPr/>
+        </p:nvSpPr>
+        <p:spPr>
+          <a:xfrm>
+            <a:off x="9052560" y="3520440"/>
+            <a:ext cx="2148840" cy="502920"/>
+          </a:xfrm>
+          <a:prstGeom prst="rect">
+            <a:avLst/>
+          </a:prstGeom>
+          <a:noFill/>
+          <a:ln/>
+        </p:spPr>
+        <p:txBody>
+          <a:bodyPr wrap="square" rtlCol="0" anchor="ctr"/>
+          <a:lstStyle/>
+          <a:p>
+            <a:pPr algn="ctr" indent="0" marL="0">
+              <a:buNone/>
+            </a:pPr>
+            <a:r>
+              <a:rPr lang="en-US" sz="1450" b="1" dirty="0">
+                <a:solidFill>
+                  <a:srgbClr val="FFFFFF"/>
+                </a:solidFill>
+                <a:latin typeface="Segoe UI" pitchFamily="34" charset="0"/>
+                <a:ea typeface="Segoe UI" pitchFamily="34" charset="-122"/>
+                <a:cs typeface="Segoe UI" pitchFamily="34" charset="-120"/>
+              </a:rPr>
+              <a:t>Data leaving the machine</a:t>
+            </a:r>
+            <a:endParaRPr lang="en-US" sz="1450" dirty="0"/>
+          </a:p>
+        </p:txBody>
+      </p:sp>
+      <p:sp>
+        <p:nvSpPr>
+          <p:cNvPr id="21" name="Text 19"/>
+          <p:cNvSpPr/>
+          <p:nvPr/>
+        </p:nvSpPr>
+        <p:spPr>
+          <a:xfrm>
+            <a:off x="9098280" y="4069080"/>
+            <a:ext cx="2057400" cy="685800"/>
+          </a:xfrm>
+          <a:prstGeom prst="rect">
+            <a:avLst/>
+          </a:prstGeom>
+          <a:noFill/>
+          <a:ln/>
+        </p:spPr>
+        <p:txBody>
+          <a:bodyPr wrap="square" rtlCol="0" anchor="ctr"/>
+          <a:lstStyle/>
+          <a:p>
+            <a:pPr algn="ctr" indent="0" marL="0">
+              <a:buNone/>
+            </a:pPr>
+            <a:r>
+              <a:rPr lang="en-US" sz="1050" dirty="0">
+                <a:solidFill>
+                  <a:srgbClr val="94A3B8"/>
+                </a:solidFill>
+                <a:latin typeface="Segoe UI" pitchFamily="34" charset="0"/>
+                <a:ea typeface="Segoe UI" pitchFamily="34" charset="-122"/>
+                <a:cs typeface="Segoe UI" pitchFamily="34" charset="-120"/>
+              </a:rPr>
+              <a:t>Local-first by design - your datasets stay on your hardware.</a:t>
+            </a:r>
+            <a:endParaRPr lang="en-US" sz="1050" dirty="0"/>
+          </a:p>
+        </p:txBody>
+      </p:sp>
+      <p:sp>
+        <p:nvSpPr>
+          <p:cNvPr id="22" name="Shape 20"/>
+          <p:cNvSpPr/>
+          <p:nvPr/>
+        </p:nvSpPr>
+        <p:spPr>
+          <a:xfrm>
+            <a:off x="822960" y="5413248"/>
+            <a:ext cx="10515600" cy="0"/>
+          </a:xfrm>
+          <a:prstGeom prst="line">
+            <a:avLst/>
+          </a:prstGeom>
+          <a:noFill/>
+          <a:ln w="12700">
+            <a:solidFill>
+              <a:srgbClr val="1E2D45"/>
+            </a:solidFill>
+            <a:prstDash val="solid"/>
+          </a:ln>
+        </p:spPr>
+      </p:sp>
+      <p:sp>
+        <p:nvSpPr>
+          <p:cNvPr id="23" name="Text 21"/>
+          <p:cNvSpPr/>
+          <p:nvPr/>
+        </p:nvSpPr>
+        <p:spPr>
+          <a:xfrm>
+            <a:off x="822960" y="5504688"/>
+            <a:ext cx="10424160" cy="411480"/>
+          </a:xfrm>
+          <a:prstGeom prst="rect">
+            <a:avLst/>
+          </a:prstGeom>
+          <a:noFill/>
+          <a:ln/>
+        </p:spPr>
+        <p:txBody>
+          <a:bodyPr wrap="square" rtlCol="0" anchor="ctr"/>
+          <a:lstStyle/>
+          <a:p>
+            <a:pPr indent="0" marL="0">
+              <a:buNone/>
+            </a:pPr>
+            <a:r>
+              <a:rPr lang="en-US" sz="1300" i="1" dirty="0">
+                <a:solidFill>
+                  <a:srgbClr val="06B6D4"/>
+                </a:solidFill>
+                <a:latin typeface="Segoe UI" pitchFamily="34" charset="0"/>
+                <a:ea typeface="Segoe UI" pitchFamily="34" charset="-122"/>
+                <a:cs typeface="Segoe UI" pitchFamily="34" charset="-120"/>
+              </a:rPr>
+              <a:t>→  Built for freelancers and small teams who need BI-grade hygiene without a platform team.</a:t>
+            </a:r>
+            <a:endParaRPr lang="en-US" sz="1300" dirty="0"/>
+          </a:p>
+        </p:txBody>
+      </p:sp>
+      <p:sp>
+        <p:nvSpPr>
+          <p:cNvPr id="24" name="Text 22"/>
+          <p:cNvSpPr/>
+          <p:nvPr/>
+        </p:nvSpPr>
+        <p:spPr>
+          <a:xfrm>
+            <a:off x="10698480" y="6382512"/>
             <a:ext cx="1188720" cy="365760"/>
           </a:xfrm>
           <a:prstGeom prst="rect">
@@ -2916,7 +9279,7 @@
                 <a:ea typeface="Consolas" pitchFamily="34" charset="-122"/>
                 <a:cs typeface="Consolas" pitchFamily="34" charset="-120"/>
               </a:rPr>
-              <a:t>5 / 8</a:t>
+              <a:t>5 / 15</a:t>
             </a:r>
             <a:endParaRPr lang="en-US" sz="1000" dirty="0"/>
           </a:p>
@@ -3027,7 +9390,7 @@
                 <a:ea typeface="Consolas" pitchFamily="34" charset="-122"/>
                 <a:cs typeface="Consolas" pitchFamily="34" charset="-120"/>
               </a:rPr>
-              <a:t>WHY OPEN</a:t>
+              <a:t>EFFORT</a:t>
             </a:r>
             <a:endParaRPr lang="en-US" sz="1200" dirty="0"/>
           </a:p>
@@ -3041,8 +9404,8 @@
         </p:nvSpPr>
         <p:spPr>
           <a:xfrm>
-            <a:off x="822960" y="960120"/>
-            <a:ext cx="10515600" cy="868680"/>
+            <a:off x="822960" y="914400"/>
+            <a:ext cx="10561320" cy="868680"/>
           </a:xfrm>
           <a:prstGeom prst="rect">
             <a:avLst/>
@@ -3058,7 +9421,7 @@
               <a:buNone/>
             </a:pPr>
             <a:r>
-              <a:rPr lang="en-US" sz="3000" b="1" dirty="0">
+              <a:rPr lang="en-US" sz="2700" b="1" dirty="0">
                 <a:solidFill>
                   <a:srgbClr val="FFFFFF"/>
                 </a:solidFill>
@@ -3066,139 +9429,161 @@
                 <a:ea typeface="Segoe UI" pitchFamily="34" charset="-122"/>
                 <a:cs typeface="Segoe UI" pitchFamily="34" charset="-120"/>
               </a:rPr>
-              <a:t>What releasing it changed</a:t>
-            </a:r>
-            <a:endParaRPr lang="en-US" sz="3000" dirty="0"/>
-          </a:p>
-        </p:txBody>
-      </p:sp>
-      <p:sp>
-        <p:nvSpPr>
-          <p:cNvPr id="6" name="Text 4"/>
-          <p:cNvSpPr/>
-          <p:nvPr/>
-        </p:nvSpPr>
-        <p:spPr>
-          <a:xfrm>
-            <a:off x="868680" y="2057400"/>
-            <a:ext cx="10424160" cy="3566160"/>
-          </a:xfrm>
-          <a:prstGeom prst="rect">
-            <a:avLst/>
-          </a:prstGeom>
-          <a:noFill/>
-          <a:ln/>
-        </p:spPr>
-        <p:txBody>
-          <a:bodyPr wrap="square" rtlCol="0" anchor="t"/>
-          <a:lstStyle/>
-          <a:p>
-            <a:pPr marL="342900" indent="-342900">
-              <a:lnSpc>
-                <a:spcPct val="115000"/>
-              </a:lnSpc>
-              <a:spcAft>
-                <a:spcPts val="1000"/>
-              </a:spcAft>
-              <a:buSzPct val="100000"/>
-              <a:buChar char="▸"/>
-            </a:pPr>
-            <a:r>
-              <a:rPr lang="en-US" sz="1600" dirty="0">
-                <a:solidFill>
-                  <a:srgbClr val="CBD5E1"/>
+              <a:t>Where a typical engagement's effort used to go</a:t>
+            </a:r>
+            <a:endParaRPr lang="en-US" sz="2700" dirty="0"/>
+          </a:p>
+        </p:txBody>
+      </p:sp>
+      <p:graphicFrame>
+        <p:nvGraphicFramePr>
+          <p:cNvPr id="6" name="Chart 0" descr=""/>
+          <p:cNvGraphicFramePr/>
+          <p:nvPr/>
+        </p:nvGraphicFramePr>
+        <p:xfrm>
+          <a:off x="822960" y="1874520"/>
+          <a:ext cx="10515600" cy="3337560"/>
+        </p:xfrm>
+        <a:graphic xmlns:a="http://schemas.openxmlformats.org/drawingml/2006/main">
+          <a:graphicData uri="http://schemas.openxmlformats.org/drawingml/2006/chart">
+            <c:chart xmlns:c="http://schemas.openxmlformats.org/drawingml/2006/chart" r:id="rId1"/>
+          </a:graphicData>
+        </a:graphic>
+      </p:graphicFrame>
+      <p:sp>
+        <p:nvSpPr>
+          <p:cNvPr id="7" name="Shape 4"/>
+          <p:cNvSpPr/>
+          <p:nvPr/>
+        </p:nvSpPr>
+        <p:spPr>
+          <a:xfrm>
+            <a:off x="822960" y="5413248"/>
+            <a:ext cx="10515600" cy="0"/>
+          </a:xfrm>
+          <a:prstGeom prst="line">
+            <a:avLst/>
+          </a:prstGeom>
+          <a:noFill/>
+          <a:ln w="12700">
+            <a:solidFill>
+              <a:srgbClr val="1E2D45"/>
+            </a:solidFill>
+            <a:prstDash val="solid"/>
+          </a:ln>
+        </p:spPr>
+      </p:sp>
+      <p:sp>
+        <p:nvSpPr>
+          <p:cNvPr id="8" name="Text 5"/>
+          <p:cNvSpPr/>
+          <p:nvPr/>
+        </p:nvSpPr>
+        <p:spPr>
+          <a:xfrm>
+            <a:off x="822960" y="5504688"/>
+            <a:ext cx="10424160" cy="411480"/>
+          </a:xfrm>
+          <a:prstGeom prst="rect">
+            <a:avLst/>
+          </a:prstGeom>
+          <a:noFill/>
+          <a:ln/>
+        </p:spPr>
+        <p:txBody>
+          <a:bodyPr wrap="square" rtlCol="0" anchor="ctr"/>
+          <a:lstStyle/>
+          <a:p>
+            <a:pPr indent="0" marL="0">
+              <a:buNone/>
+            </a:pPr>
+            <a:r>
+              <a:rPr lang="en-US" sz="1300" i="1" dirty="0">
+                <a:solidFill>
+                  <a:srgbClr val="06B6D4"/>
                 </a:solidFill>
                 <a:latin typeface="Segoe UI" pitchFamily="34" charset="0"/>
                 <a:ea typeface="Segoe UI" pitchFamily="34" charset="-122"/>
                 <a:cs typeface="Segoe UI" pitchFamily="34" charset="-120"/>
               </a:rPr>
-              <a:t>Public code cannot survive vague assumptions - schemas got stricter</a:t>
-            </a:r>
-            <a:endParaRPr lang="en-US" sz="1600" dirty="0"/>
-          </a:p>
-          <a:p>
-            <a:pPr marL="342900" indent="-342900">
-              <a:lnSpc>
-                <a:spcPct val="115000"/>
-              </a:lnSpc>
-              <a:spcAft>
-                <a:spcPts val="1000"/>
-              </a:spcAft>
-              <a:buSzPct val="100000"/>
-              <a:buChar char="▸"/>
-            </a:pPr>
-            <a:r>
-              <a:rPr lang="en-US" sz="1600" dirty="0">
-                <a:solidFill>
-                  <a:srgbClr val="CBD5E1"/>
+              <a:t>→  70% of the effort was skeleton - ODIS exists to hand that time back to the 30% that produces insight.</a:t>
+            </a:r>
+            <a:endParaRPr lang="en-US" sz="1300" dirty="0"/>
+          </a:p>
+        </p:txBody>
+      </p:sp>
+      <p:sp>
+        <p:nvSpPr>
+          <p:cNvPr id="9" name="Shape 6"/>
+          <p:cNvSpPr/>
+          <p:nvPr/>
+        </p:nvSpPr>
+        <p:spPr>
+          <a:xfrm>
+            <a:off x="822960" y="5961888"/>
+            <a:ext cx="10515600" cy="0"/>
+          </a:xfrm>
+          <a:prstGeom prst="line">
+            <a:avLst/>
+          </a:prstGeom>
+          <a:noFill/>
+          <a:ln w="12700">
+            <a:solidFill>
+              <a:srgbClr val="1E2D45"/>
+            </a:solidFill>
+            <a:prstDash val="solid"/>
+          </a:ln>
+        </p:spPr>
+      </p:sp>
+      <p:sp>
+        <p:nvSpPr>
+          <p:cNvPr id="10" name="Text 7"/>
+          <p:cNvSpPr/>
+          <p:nvPr/>
+        </p:nvSpPr>
+        <p:spPr>
+          <a:xfrm>
+            <a:off x="822960" y="6053328"/>
+            <a:ext cx="9692640" cy="457200"/>
+          </a:xfrm>
+          <a:prstGeom prst="rect">
+            <a:avLst/>
+          </a:prstGeom>
+          <a:noFill/>
+          <a:ln/>
+        </p:spPr>
+        <p:txBody>
+          <a:bodyPr wrap="square" rtlCol="0" anchor="ctr"/>
+          <a:lstStyle/>
+          <a:p>
+            <a:pPr indent="0" marL="0">
+              <a:buNone/>
+            </a:pPr>
+            <a:r>
+              <a:rPr lang="en-US" sz="1150" dirty="0">
+                <a:solidFill>
+                  <a:srgbClr val="64748B"/>
                 </a:solidFill>
                 <a:latin typeface="Segoe UI" pitchFamily="34" charset="0"/>
                 <a:ea typeface="Segoe UI" pitchFamily="34" charset="-122"/>
                 <a:cs typeface="Segoe UI" pitchFamily="34" charset="-120"/>
               </a:rPr>
-              <a:t>Errors became clearer because strangers read them</a:t>
-            </a:r>
-            <a:endParaRPr lang="en-US" sz="1600" dirty="0"/>
-          </a:p>
-          <a:p>
-            <a:pPr marL="342900" indent="-342900">
-              <a:lnSpc>
-                <a:spcPct val="115000"/>
-              </a:lnSpc>
-              <a:spcAft>
-                <a:spcPts val="1000"/>
-              </a:spcAft>
-              <a:buSzPct val="100000"/>
-              <a:buChar char="▸"/>
-            </a:pPr>
-            <a:r>
-              <a:rPr lang="en-US" sz="1600" dirty="0">
-                <a:solidFill>
-                  <a:srgbClr val="CBD5E1"/>
-                </a:solidFill>
-                <a:latin typeface="Segoe UI" pitchFamily="34" charset="0"/>
-                <a:ea typeface="Segoe UI" pitchFamily="34" charset="-122"/>
-                <a:cs typeface="Segoe UI" pitchFamily="34" charset="-120"/>
-              </a:rPr>
-              <a:t>Documentation got honest because strangers rely on it</a:t>
-            </a:r>
-            <a:endParaRPr lang="en-US" sz="1600" dirty="0"/>
-          </a:p>
-          <a:p>
-            <a:pPr marL="342900" indent="-342900">
-              <a:lnSpc>
-                <a:spcPct val="115000"/>
-              </a:lnSpc>
-              <a:spcAft>
-                <a:spcPts val="1000"/>
-              </a:spcAft>
-              <a:buSzPct val="100000"/>
-              <a:buChar char="▸"/>
-            </a:pPr>
-            <a:r>
-              <a:rPr lang="en-US" sz="1600" dirty="0">
-                <a:solidFill>
-                  <a:srgbClr val="CBD5E1"/>
-                </a:solidFill>
-                <a:latin typeface="Segoe UI" pitchFamily="34" charset="0"/>
-                <a:ea typeface="Segoe UI" pitchFamily="34" charset="-122"/>
-                <a:cs typeface="Segoe UI" pitchFamily="34" charset="-120"/>
-              </a:rPr>
-              <a:t>The internal pipeline improved the same week it went public</a:t>
-            </a:r>
-            <a:endParaRPr lang="en-US" sz="1600" dirty="0"/>
-          </a:p>
-        </p:txBody>
-      </p:sp>
-      <p:sp>
-        <p:nvSpPr>
-          <p:cNvPr id="7" name="Text 5"/>
-          <p:cNvSpPr/>
-          <p:nvPr/>
-        </p:nvSpPr>
-        <p:spPr>
-          <a:xfrm>
-            <a:off x="10698480" y="6355080"/>
+              <a:t>Illustrative effort distribution behind the 'boring 70%' framing.</a:t>
+            </a:r>
+            <a:endParaRPr lang="en-US" sz="1150" dirty="0"/>
+          </a:p>
+        </p:txBody>
+      </p:sp>
+      <p:sp>
+        <p:nvSpPr>
+          <p:cNvPr id="11" name="Text 8"/>
+          <p:cNvSpPr/>
+          <p:nvPr/>
+        </p:nvSpPr>
+        <p:spPr>
+          <a:xfrm>
+            <a:off x="10698480" y="6382512"/>
             <a:ext cx="1188720" cy="365760"/>
           </a:xfrm>
           <a:prstGeom prst="rect">
@@ -3223,7 +9608,7 @@
                 <a:ea typeface="Consolas" pitchFamily="34" charset="-122"/>
                 <a:cs typeface="Consolas" pitchFamily="34" charset="-120"/>
               </a:rPr>
-              <a:t>6 / 8</a:t>
+              <a:t>6 / 15</a:t>
             </a:r>
             <a:endParaRPr lang="en-US" sz="1000" dirty="0"/>
           </a:p>
@@ -3334,7 +9719,7 @@
                 <a:ea typeface="Consolas" pitchFamily="34" charset="-122"/>
                 <a:cs typeface="Consolas" pitchFamily="34" charset="-120"/>
               </a:rPr>
-              <a:t>ROADMAP</a:t>
+              <a:t>CAPABILITIES</a:t>
             </a:r>
             <a:endParaRPr lang="en-US" sz="1200" dirty="0"/>
           </a:p>
@@ -3348,8 +9733,8 @@
         </p:nvSpPr>
         <p:spPr>
           <a:xfrm>
-            <a:off x="822960" y="960120"/>
-            <a:ext cx="10515600" cy="868680"/>
+            <a:off x="822960" y="914400"/>
+            <a:ext cx="10561320" cy="868680"/>
           </a:xfrm>
           <a:prstGeom prst="rect">
             <a:avLst/>
@@ -3365,7 +9750,7 @@
               <a:buNone/>
             </a:pPr>
             <a:r>
-              <a:rPr lang="en-US" sz="3000" b="1" dirty="0">
+              <a:rPr lang="en-US" sz="2700" b="1" dirty="0">
                 <a:solidFill>
                   <a:srgbClr val="FFFFFF"/>
                 </a:solidFill>
@@ -3373,115 +9758,1144 @@
                 <a:ea typeface="Segoe UI" pitchFamily="34" charset="-122"/>
                 <a:cs typeface="Segoe UI" pitchFamily="34" charset="-120"/>
               </a:rPr>
-              <a:t>Where it is heading</a:t>
-            </a:r>
-            <a:endParaRPr lang="en-US" sz="3000" dirty="0"/>
-          </a:p>
-        </p:txBody>
-      </p:sp>
-      <p:sp>
-        <p:nvSpPr>
-          <p:cNvPr id="6" name="Text 4"/>
-          <p:cNvSpPr/>
-          <p:nvPr/>
-        </p:nvSpPr>
-        <p:spPr>
-          <a:xfrm>
-            <a:off x="868680" y="2057400"/>
-            <a:ext cx="10424160" cy="3566160"/>
-          </a:xfrm>
-          <a:prstGeom prst="rect">
-            <a:avLst/>
-          </a:prstGeom>
-          <a:noFill/>
-          <a:ln/>
-        </p:spPr>
-        <p:txBody>
-          <a:bodyPr wrap="square" rtlCol="0" anchor="t"/>
-          <a:lstStyle/>
-          <a:p>
-            <a:pPr marL="342900" indent="-342900">
-              <a:lnSpc>
-                <a:spcPct val="115000"/>
-              </a:lnSpc>
-              <a:spcAft>
-                <a:spcPts val="1000"/>
-              </a:spcAft>
-              <a:buSzPct val="100000"/>
-              <a:buChar char="▸"/>
-            </a:pPr>
-            <a:r>
-              <a:rPr lang="en-US" sz="1600" dirty="0">
-                <a:solidFill>
-                  <a:srgbClr val="CBD5E1"/>
+              <a:t>Every module ships with guardrails</a:t>
+            </a:r>
+            <a:endParaRPr lang="en-US" sz="2700" dirty="0"/>
+          </a:p>
+        </p:txBody>
+      </p:sp>
+      <p:graphicFrame>
+        <p:nvGraphicFramePr>
+          <p:cNvPr id="8" name="Table 0"/>
+          <p:cNvGraphicFramePr>
+            <a:graphicFrameLocks noGrp="1"/>
+          </p:cNvGraphicFramePr>
+          <p:nvPr>
+            <p:extLst>
+              <p:ext uri="{D42A27DB-BD31-4B8C-83A1-F6EECF244321}">
+                <p14:modId xmlns:p14="http://schemas.microsoft.com/office/powerpoint/2010/main" val="1579011935"/>
+              </p:ext>
+            </p:extLst>
+          </p:nvPr>
+        </p:nvGraphicFramePr>
+        <p:xfrm>
+          <a:off x="822960" y="2011680"/>
+          <a:ext cx="10515600" cy="914400"/>
+        </p:xfrm>
+        <a:graphic>
+          <a:graphicData uri="http://schemas.openxmlformats.org/drawingml/2006/table">
+            <a:tbl>
+              <a:tblPr/>
+              <a:tblGrid>
+                <a:gridCol w="3505200"/>
+                <a:gridCol w="3505200"/>
+                <a:gridCol w="3505200"/>
+              </a:tblGrid>
+              <a:tr h="402336">
+                <a:tc>
+                  <a:txBody>
+                    <a:bodyPr/>
+                    <a:lstStyle/>
+                    <a:p>
+                      <a:pPr indent="0" marL="0">
+                        <a:buNone/>
+                      </a:pPr>
+                      <a:r>
+                        <a:rPr lang="en-US" sz="1150" b="1" dirty="0">
+                          <a:solidFill>
+                            <a:srgbClr val="FFFFFF"/>
+                          </a:solidFill>
+                          <a:latin typeface="Segoe UI" pitchFamily="34" charset="0"/>
+                          <a:ea typeface="Segoe UI" pitchFamily="34" charset="-122"/>
+                          <a:cs typeface="Segoe UI" pitchFamily="34" charset="-120"/>
+                        </a:rPr>
+                        <a:t>Module</a:t>
+                      </a:r>
+                      <a:endParaRPr lang="en-US" sz="1150" dirty="0">
+                        <a:latin typeface="Segoe UI" charset="0"/>
+                        <a:ea typeface="Segoe UI" charset="0"/>
+                        <a:cs typeface="Segoe UI" charset="0"/>
+                      </a:endParaRPr>
+                    </a:p>
+                  </a:txBody>
+                  <a:tcPr marL="64008" marR="64008" marT="64008" marB="64008" anchor="ctr">
+                    <a:lnL w="6350" cap="flat" cmpd="sng" algn="ctr">
+                      <a:solidFill>
+                        <a:srgbClr val="24365A"/>
+                      </a:solidFill>
+                      <a:prstDash val="solid"/>
+                      <a:round/>
+                      <a:headEnd type="none" w="med" len="med"/>
+                      <a:tailEnd type="none" w="med" len="med"/>
+                    </a:lnL>
+                    <a:lnR w="6350" cap="flat" cmpd="sng" algn="ctr">
+                      <a:solidFill>
+                        <a:srgbClr val="24365A"/>
+                      </a:solidFill>
+                      <a:prstDash val="solid"/>
+                      <a:round/>
+                      <a:headEnd type="none" w="med" len="med"/>
+                      <a:tailEnd type="none" w="med" len="med"/>
+                    </a:lnR>
+                    <a:lnT w="6350" cap="flat" cmpd="sng" algn="ctr">
+                      <a:solidFill>
+                        <a:srgbClr val="24365A"/>
+                      </a:solidFill>
+                      <a:prstDash val="solid"/>
+                      <a:round/>
+                      <a:headEnd type="none" w="med" len="med"/>
+                      <a:tailEnd type="none" w="med" len="med"/>
+                    </a:lnT>
+                    <a:lnB w="6350" cap="flat" cmpd="sng" algn="ctr">
+                      <a:solidFill>
+                        <a:srgbClr val="24365A"/>
+                      </a:solidFill>
+                      <a:prstDash val="solid"/>
+                      <a:round/>
+                      <a:headEnd type="none" w="med" len="med"/>
+                      <a:tailEnd type="none" w="med" len="med"/>
+                    </a:lnB>
+                    <a:solidFill>
+                      <a:srgbClr val="16233B"/>
+                    </a:solidFill>
+                  </a:tcPr>
+                </a:tc>
+                <a:tc>
+                  <a:txBody>
+                    <a:bodyPr/>
+                    <a:lstStyle/>
+                    <a:p>
+                      <a:pPr indent="0" marL="0">
+                        <a:buNone/>
+                      </a:pPr>
+                      <a:r>
+                        <a:rPr lang="en-US" sz="1150" b="1" dirty="0">
+                          <a:solidFill>
+                            <a:srgbClr val="FFFFFF"/>
+                          </a:solidFill>
+                          <a:latin typeface="Segoe UI" pitchFamily="34" charset="0"/>
+                          <a:ea typeface="Segoe UI" pitchFamily="34" charset="-122"/>
+                          <a:cs typeface="Segoe UI" pitchFamily="34" charset="-120"/>
+                        </a:rPr>
+                        <a:t>What it handles</a:t>
+                      </a:r>
+                      <a:endParaRPr lang="en-US" sz="1150" dirty="0">
+                        <a:latin typeface="Segoe UI" charset="0"/>
+                        <a:ea typeface="Segoe UI" charset="0"/>
+                        <a:cs typeface="Segoe UI" charset="0"/>
+                      </a:endParaRPr>
+                    </a:p>
+                  </a:txBody>
+                  <a:tcPr marL="64008" marR="64008" marT="64008" marB="64008" anchor="ctr">
+                    <a:lnL w="6350" cap="flat" cmpd="sng" algn="ctr">
+                      <a:solidFill>
+                        <a:srgbClr val="24365A"/>
+                      </a:solidFill>
+                      <a:prstDash val="solid"/>
+                      <a:round/>
+                      <a:headEnd type="none" w="med" len="med"/>
+                      <a:tailEnd type="none" w="med" len="med"/>
+                    </a:lnL>
+                    <a:lnR w="6350" cap="flat" cmpd="sng" algn="ctr">
+                      <a:solidFill>
+                        <a:srgbClr val="24365A"/>
+                      </a:solidFill>
+                      <a:prstDash val="solid"/>
+                      <a:round/>
+                      <a:headEnd type="none" w="med" len="med"/>
+                      <a:tailEnd type="none" w="med" len="med"/>
+                    </a:lnR>
+                    <a:lnT w="6350" cap="flat" cmpd="sng" algn="ctr">
+                      <a:solidFill>
+                        <a:srgbClr val="24365A"/>
+                      </a:solidFill>
+                      <a:prstDash val="solid"/>
+                      <a:round/>
+                      <a:headEnd type="none" w="med" len="med"/>
+                      <a:tailEnd type="none" w="med" len="med"/>
+                    </a:lnT>
+                    <a:lnB w="6350" cap="flat" cmpd="sng" algn="ctr">
+                      <a:solidFill>
+                        <a:srgbClr val="24365A"/>
+                      </a:solidFill>
+                      <a:prstDash val="solid"/>
+                      <a:round/>
+                      <a:headEnd type="none" w="med" len="med"/>
+                      <a:tailEnd type="none" w="med" len="med"/>
+                    </a:lnB>
+                    <a:solidFill>
+                      <a:srgbClr val="16233B"/>
+                    </a:solidFill>
+                  </a:tcPr>
+                </a:tc>
+                <a:tc>
+                  <a:txBody>
+                    <a:bodyPr/>
+                    <a:lstStyle/>
+                    <a:p>
+                      <a:pPr indent="0" marL="0">
+                        <a:buNone/>
+                      </a:pPr>
+                      <a:r>
+                        <a:rPr lang="en-US" sz="1150" b="1" dirty="0">
+                          <a:solidFill>
+                            <a:srgbClr val="FFFFFF"/>
+                          </a:solidFill>
+                          <a:latin typeface="Segoe UI" pitchFamily="34" charset="0"/>
+                          <a:ea typeface="Segoe UI" pitchFamily="34" charset="-122"/>
+                          <a:cs typeface="Segoe UI" pitchFamily="34" charset="-120"/>
+                        </a:rPr>
+                        <a:t>Guardrails</a:t>
+                      </a:r>
+                      <a:endParaRPr lang="en-US" sz="1150" dirty="0">
+                        <a:latin typeface="Segoe UI" charset="0"/>
+                        <a:ea typeface="Segoe UI" charset="0"/>
+                        <a:cs typeface="Segoe UI" charset="0"/>
+                      </a:endParaRPr>
+                    </a:p>
+                  </a:txBody>
+                  <a:tcPr marL="64008" marR="64008" marT="64008" marB="64008" anchor="ctr">
+                    <a:lnL w="6350" cap="flat" cmpd="sng" algn="ctr">
+                      <a:solidFill>
+                        <a:srgbClr val="24365A"/>
+                      </a:solidFill>
+                      <a:prstDash val="solid"/>
+                      <a:round/>
+                      <a:headEnd type="none" w="med" len="med"/>
+                      <a:tailEnd type="none" w="med" len="med"/>
+                    </a:lnL>
+                    <a:lnR w="6350" cap="flat" cmpd="sng" algn="ctr">
+                      <a:solidFill>
+                        <a:srgbClr val="24365A"/>
+                      </a:solidFill>
+                      <a:prstDash val="solid"/>
+                      <a:round/>
+                      <a:headEnd type="none" w="med" len="med"/>
+                      <a:tailEnd type="none" w="med" len="med"/>
+                    </a:lnR>
+                    <a:lnT w="6350" cap="flat" cmpd="sng" algn="ctr">
+                      <a:solidFill>
+                        <a:srgbClr val="24365A"/>
+                      </a:solidFill>
+                      <a:prstDash val="solid"/>
+                      <a:round/>
+                      <a:headEnd type="none" w="med" len="med"/>
+                      <a:tailEnd type="none" w="med" len="med"/>
+                    </a:lnT>
+                    <a:lnB w="6350" cap="flat" cmpd="sng" algn="ctr">
+                      <a:solidFill>
+                        <a:srgbClr val="24365A"/>
+                      </a:solidFill>
+                      <a:prstDash val="solid"/>
+                      <a:round/>
+                      <a:headEnd type="none" w="med" len="med"/>
+                      <a:tailEnd type="none" w="med" len="med"/>
+                    </a:lnB>
+                    <a:solidFill>
+                      <a:srgbClr val="16233B"/>
+                    </a:solidFill>
+                  </a:tcPr>
+                </a:tc>
+              </a:tr>
+              <a:tr h="402336">
+                <a:tc>
+                  <a:txBody>
+                    <a:bodyPr/>
+                    <a:lstStyle/>
+                    <a:p>
+                      <a:pPr indent="0" marL="0">
+                        <a:buNone/>
+                      </a:pPr>
+                      <a:r>
+                        <a:rPr lang="en-US" sz="1080" dirty="0">
+                          <a:solidFill>
+                            <a:srgbClr val="CBD5E1"/>
+                          </a:solidFill>
+                          <a:latin typeface="Segoe UI" pitchFamily="34" charset="0"/>
+                          <a:ea typeface="Segoe UI" pitchFamily="34" charset="-122"/>
+                          <a:cs typeface="Segoe UI" pitchFamily="34" charset="-120"/>
+                        </a:rPr>
+                        <a:t>Ingestion</a:t>
+                      </a:r>
+                      <a:endParaRPr lang="en-US" sz="1080" dirty="0">
+                        <a:latin typeface="Segoe UI" charset="0"/>
+                        <a:ea typeface="Segoe UI" charset="0"/>
+                        <a:cs typeface="Segoe UI" charset="0"/>
+                      </a:endParaRPr>
+                    </a:p>
+                  </a:txBody>
+                  <a:tcPr marL="64008" marR="64008" marT="64008" marB="64008" anchor="ctr">
+                    <a:lnL w="6350" cap="flat" cmpd="sng" algn="ctr">
+                      <a:solidFill>
+                        <a:srgbClr val="24365A"/>
+                      </a:solidFill>
+                      <a:prstDash val="solid"/>
+                      <a:round/>
+                      <a:headEnd type="none" w="med" len="med"/>
+                      <a:tailEnd type="none" w="med" len="med"/>
+                    </a:lnL>
+                    <a:lnR w="6350" cap="flat" cmpd="sng" algn="ctr">
+                      <a:solidFill>
+                        <a:srgbClr val="24365A"/>
+                      </a:solidFill>
+                      <a:prstDash val="solid"/>
+                      <a:round/>
+                      <a:headEnd type="none" w="med" len="med"/>
+                      <a:tailEnd type="none" w="med" len="med"/>
+                    </a:lnR>
+                    <a:lnT w="6350" cap="flat" cmpd="sng" algn="ctr">
+                      <a:solidFill>
+                        <a:srgbClr val="24365A"/>
+                      </a:solidFill>
+                      <a:prstDash val="solid"/>
+                      <a:round/>
+                      <a:headEnd type="none" w="med" len="med"/>
+                      <a:tailEnd type="none" w="med" len="med"/>
+                    </a:lnT>
+                    <a:lnB w="6350" cap="flat" cmpd="sng" algn="ctr">
+                      <a:solidFill>
+                        <a:srgbClr val="24365A"/>
+                      </a:solidFill>
+                      <a:prstDash val="solid"/>
+                      <a:round/>
+                      <a:headEnd type="none" w="med" len="med"/>
+                      <a:tailEnd type="none" w="med" len="med"/>
+                    </a:lnB>
+                    <a:solidFill>
+                      <a:srgbClr val="101A2D"/>
+                    </a:solidFill>
+                  </a:tcPr>
+                </a:tc>
+                <a:tc>
+                  <a:txBody>
+                    <a:bodyPr/>
+                    <a:lstStyle/>
+                    <a:p>
+                      <a:pPr indent="0" marL="0">
+                        <a:buNone/>
+                      </a:pPr>
+                      <a:r>
+                        <a:rPr lang="en-US" sz="1080" dirty="0">
+                          <a:solidFill>
+                            <a:srgbClr val="CBD5E1"/>
+                          </a:solidFill>
+                          <a:latin typeface="Segoe UI" pitchFamily="34" charset="0"/>
+                          <a:ea typeface="Segoe UI" pitchFamily="34" charset="-122"/>
+                          <a:cs typeface="Segoe UI" pitchFamily="34" charset="-120"/>
+                        </a:rPr>
+                        <a:t>Files, APIs, and scrapes into a common shape</a:t>
+                      </a:r>
+                      <a:endParaRPr lang="en-US" sz="1080" dirty="0">
+                        <a:latin typeface="Segoe UI" charset="0"/>
+                        <a:ea typeface="Segoe UI" charset="0"/>
+                        <a:cs typeface="Segoe UI" charset="0"/>
+                      </a:endParaRPr>
+                    </a:p>
+                  </a:txBody>
+                  <a:tcPr marL="64008" marR="64008" marT="64008" marB="64008" anchor="ctr">
+                    <a:lnL w="6350" cap="flat" cmpd="sng" algn="ctr">
+                      <a:solidFill>
+                        <a:srgbClr val="24365A"/>
+                      </a:solidFill>
+                      <a:prstDash val="solid"/>
+                      <a:round/>
+                      <a:headEnd type="none" w="med" len="med"/>
+                      <a:tailEnd type="none" w="med" len="med"/>
+                    </a:lnL>
+                    <a:lnR w="6350" cap="flat" cmpd="sng" algn="ctr">
+                      <a:solidFill>
+                        <a:srgbClr val="24365A"/>
+                      </a:solidFill>
+                      <a:prstDash val="solid"/>
+                      <a:round/>
+                      <a:headEnd type="none" w="med" len="med"/>
+                      <a:tailEnd type="none" w="med" len="med"/>
+                    </a:lnR>
+                    <a:lnT w="6350" cap="flat" cmpd="sng" algn="ctr">
+                      <a:solidFill>
+                        <a:srgbClr val="24365A"/>
+                      </a:solidFill>
+                      <a:prstDash val="solid"/>
+                      <a:round/>
+                      <a:headEnd type="none" w="med" len="med"/>
+                      <a:tailEnd type="none" w="med" len="med"/>
+                    </a:lnT>
+                    <a:lnB w="6350" cap="flat" cmpd="sng" algn="ctr">
+                      <a:solidFill>
+                        <a:srgbClr val="24365A"/>
+                      </a:solidFill>
+                      <a:prstDash val="solid"/>
+                      <a:round/>
+                      <a:headEnd type="none" w="med" len="med"/>
+                      <a:tailEnd type="none" w="med" len="med"/>
+                    </a:lnB>
+                    <a:solidFill>
+                      <a:srgbClr val="101A2D"/>
+                    </a:solidFill>
+                  </a:tcPr>
+                </a:tc>
+                <a:tc>
+                  <a:txBody>
+                    <a:bodyPr/>
+                    <a:lstStyle/>
+                    <a:p>
+                      <a:pPr indent="0" marL="0">
+                        <a:buNone/>
+                      </a:pPr>
+                      <a:r>
+                        <a:rPr lang="en-US" sz="1080" dirty="0">
+                          <a:solidFill>
+                            <a:srgbClr val="CBD5E1"/>
+                          </a:solidFill>
+                          <a:latin typeface="Segoe UI" pitchFamily="34" charset="0"/>
+                          <a:ea typeface="Segoe UI" pitchFamily="34" charset="-122"/>
+                          <a:cs typeface="Segoe UI" pitchFamily="34" charset="-120"/>
+                        </a:rPr>
+                        <a:t>Schema checked on arrival</a:t>
+                      </a:r>
+                      <a:endParaRPr lang="en-US" sz="1080" dirty="0">
+                        <a:latin typeface="Segoe UI" charset="0"/>
+                        <a:ea typeface="Segoe UI" charset="0"/>
+                        <a:cs typeface="Segoe UI" charset="0"/>
+                      </a:endParaRPr>
+                    </a:p>
+                  </a:txBody>
+                  <a:tcPr marL="64008" marR="64008" marT="64008" marB="64008" anchor="ctr">
+                    <a:lnL w="6350" cap="flat" cmpd="sng" algn="ctr">
+                      <a:solidFill>
+                        <a:srgbClr val="24365A"/>
+                      </a:solidFill>
+                      <a:prstDash val="solid"/>
+                      <a:round/>
+                      <a:headEnd type="none" w="med" len="med"/>
+                      <a:tailEnd type="none" w="med" len="med"/>
+                    </a:lnL>
+                    <a:lnR w="6350" cap="flat" cmpd="sng" algn="ctr">
+                      <a:solidFill>
+                        <a:srgbClr val="24365A"/>
+                      </a:solidFill>
+                      <a:prstDash val="solid"/>
+                      <a:round/>
+                      <a:headEnd type="none" w="med" len="med"/>
+                      <a:tailEnd type="none" w="med" len="med"/>
+                    </a:lnR>
+                    <a:lnT w="6350" cap="flat" cmpd="sng" algn="ctr">
+                      <a:solidFill>
+                        <a:srgbClr val="24365A"/>
+                      </a:solidFill>
+                      <a:prstDash val="solid"/>
+                      <a:round/>
+                      <a:headEnd type="none" w="med" len="med"/>
+                      <a:tailEnd type="none" w="med" len="med"/>
+                    </a:lnT>
+                    <a:lnB w="6350" cap="flat" cmpd="sng" algn="ctr">
+                      <a:solidFill>
+                        <a:srgbClr val="24365A"/>
+                      </a:solidFill>
+                      <a:prstDash val="solid"/>
+                      <a:round/>
+                      <a:headEnd type="none" w="med" len="med"/>
+                      <a:tailEnd type="none" w="med" len="med"/>
+                    </a:lnB>
+                    <a:solidFill>
+                      <a:srgbClr val="101A2D"/>
+                    </a:solidFill>
+                  </a:tcPr>
+                </a:tc>
+              </a:tr>
+              <a:tr h="402336">
+                <a:tc>
+                  <a:txBody>
+                    <a:bodyPr/>
+                    <a:lstStyle/>
+                    <a:p>
+                      <a:pPr indent="0" marL="0">
+                        <a:buNone/>
+                      </a:pPr>
+                      <a:r>
+                        <a:rPr lang="en-US" sz="1080" dirty="0">
+                          <a:solidFill>
+                            <a:srgbClr val="CBD5E1"/>
+                          </a:solidFill>
+                          <a:latin typeface="Segoe UI" pitchFamily="34" charset="0"/>
+                          <a:ea typeface="Segoe UI" pitchFamily="34" charset="-122"/>
+                          <a:cs typeface="Segoe UI" pitchFamily="34" charset="-120"/>
+                        </a:rPr>
+                        <a:t>Cleaning</a:t>
+                      </a:r>
+                      <a:endParaRPr lang="en-US" sz="1080" dirty="0">
+                        <a:latin typeface="Segoe UI" charset="0"/>
+                        <a:ea typeface="Segoe UI" charset="0"/>
+                        <a:cs typeface="Segoe UI" charset="0"/>
+                      </a:endParaRPr>
+                    </a:p>
+                  </a:txBody>
+                  <a:tcPr marL="64008" marR="64008" marT="64008" marB="64008" anchor="ctr">
+                    <a:lnL w="6350" cap="flat" cmpd="sng" algn="ctr">
+                      <a:solidFill>
+                        <a:srgbClr val="24365A"/>
+                      </a:solidFill>
+                      <a:prstDash val="solid"/>
+                      <a:round/>
+                      <a:headEnd type="none" w="med" len="med"/>
+                      <a:tailEnd type="none" w="med" len="med"/>
+                    </a:lnL>
+                    <a:lnR w="6350" cap="flat" cmpd="sng" algn="ctr">
+                      <a:solidFill>
+                        <a:srgbClr val="24365A"/>
+                      </a:solidFill>
+                      <a:prstDash val="solid"/>
+                      <a:round/>
+                      <a:headEnd type="none" w="med" len="med"/>
+                      <a:tailEnd type="none" w="med" len="med"/>
+                    </a:lnR>
+                    <a:lnT w="6350" cap="flat" cmpd="sng" algn="ctr">
+                      <a:solidFill>
+                        <a:srgbClr val="24365A"/>
+                      </a:solidFill>
+                      <a:prstDash val="solid"/>
+                      <a:round/>
+                      <a:headEnd type="none" w="med" len="med"/>
+                      <a:tailEnd type="none" w="med" len="med"/>
+                    </a:lnT>
+                    <a:lnB w="6350" cap="flat" cmpd="sng" algn="ctr">
+                      <a:solidFill>
+                        <a:srgbClr val="24365A"/>
+                      </a:solidFill>
+                      <a:prstDash val="solid"/>
+                      <a:round/>
+                      <a:headEnd type="none" w="med" len="med"/>
+                      <a:tailEnd type="none" w="med" len="med"/>
+                    </a:lnB>
+                    <a:solidFill>
+                      <a:srgbClr val="0D1420"/>
+                    </a:solidFill>
+                  </a:tcPr>
+                </a:tc>
+                <a:tc>
+                  <a:txBody>
+                    <a:bodyPr/>
+                    <a:lstStyle/>
+                    <a:p>
+                      <a:pPr indent="0" marL="0">
+                        <a:buNone/>
+                      </a:pPr>
+                      <a:r>
+                        <a:rPr lang="en-US" sz="1080" dirty="0">
+                          <a:solidFill>
+                            <a:srgbClr val="CBD5E1"/>
+                          </a:solidFill>
+                          <a:latin typeface="Segoe UI" pitchFamily="34" charset="0"/>
+                          <a:ea typeface="Segoe UI" pitchFamily="34" charset="-122"/>
+                          <a:cs typeface="Segoe UI" pitchFamily="34" charset="-120"/>
+                        </a:rPr>
+                        <a:t>Deduplication and normalization</a:t>
+                      </a:r>
+                      <a:endParaRPr lang="en-US" sz="1080" dirty="0">
+                        <a:latin typeface="Segoe UI" charset="0"/>
+                        <a:ea typeface="Segoe UI" charset="0"/>
+                        <a:cs typeface="Segoe UI" charset="0"/>
+                      </a:endParaRPr>
+                    </a:p>
+                  </a:txBody>
+                  <a:tcPr marL="64008" marR="64008" marT="64008" marB="64008" anchor="ctr">
+                    <a:lnL w="6350" cap="flat" cmpd="sng" algn="ctr">
+                      <a:solidFill>
+                        <a:srgbClr val="24365A"/>
+                      </a:solidFill>
+                      <a:prstDash val="solid"/>
+                      <a:round/>
+                      <a:headEnd type="none" w="med" len="med"/>
+                      <a:tailEnd type="none" w="med" len="med"/>
+                    </a:lnL>
+                    <a:lnR w="6350" cap="flat" cmpd="sng" algn="ctr">
+                      <a:solidFill>
+                        <a:srgbClr val="24365A"/>
+                      </a:solidFill>
+                      <a:prstDash val="solid"/>
+                      <a:round/>
+                      <a:headEnd type="none" w="med" len="med"/>
+                      <a:tailEnd type="none" w="med" len="med"/>
+                    </a:lnR>
+                    <a:lnT w="6350" cap="flat" cmpd="sng" algn="ctr">
+                      <a:solidFill>
+                        <a:srgbClr val="24365A"/>
+                      </a:solidFill>
+                      <a:prstDash val="solid"/>
+                      <a:round/>
+                      <a:headEnd type="none" w="med" len="med"/>
+                      <a:tailEnd type="none" w="med" len="med"/>
+                    </a:lnT>
+                    <a:lnB w="6350" cap="flat" cmpd="sng" algn="ctr">
+                      <a:solidFill>
+                        <a:srgbClr val="24365A"/>
+                      </a:solidFill>
+                      <a:prstDash val="solid"/>
+                      <a:round/>
+                      <a:headEnd type="none" w="med" len="med"/>
+                      <a:tailEnd type="none" w="med" len="med"/>
+                    </a:lnB>
+                    <a:solidFill>
+                      <a:srgbClr val="0D1420"/>
+                    </a:solidFill>
+                  </a:tcPr>
+                </a:tc>
+                <a:tc>
+                  <a:txBody>
+                    <a:bodyPr/>
+                    <a:lstStyle/>
+                    <a:p>
+                      <a:pPr indent="0" marL="0">
+                        <a:buNone/>
+                      </a:pPr>
+                      <a:r>
+                        <a:rPr lang="en-US" sz="1080" dirty="0">
+                          <a:solidFill>
+                            <a:srgbClr val="CBD5E1"/>
+                          </a:solidFill>
+                          <a:latin typeface="Segoe UI" pitchFamily="34" charset="0"/>
+                          <a:ea typeface="Segoe UI" pitchFamily="34" charset="-122"/>
+                          <a:cs typeface="Segoe UI" pitchFamily="34" charset="-120"/>
+                        </a:rPr>
+                        <a:t>Sanity ranges on every column</a:t>
+                      </a:r>
+                      <a:endParaRPr lang="en-US" sz="1080" dirty="0">
+                        <a:latin typeface="Segoe UI" charset="0"/>
+                        <a:ea typeface="Segoe UI" charset="0"/>
+                        <a:cs typeface="Segoe UI" charset="0"/>
+                      </a:endParaRPr>
+                    </a:p>
+                  </a:txBody>
+                  <a:tcPr marL="64008" marR="64008" marT="64008" marB="64008" anchor="ctr">
+                    <a:lnL w="6350" cap="flat" cmpd="sng" algn="ctr">
+                      <a:solidFill>
+                        <a:srgbClr val="24365A"/>
+                      </a:solidFill>
+                      <a:prstDash val="solid"/>
+                      <a:round/>
+                      <a:headEnd type="none" w="med" len="med"/>
+                      <a:tailEnd type="none" w="med" len="med"/>
+                    </a:lnL>
+                    <a:lnR w="6350" cap="flat" cmpd="sng" algn="ctr">
+                      <a:solidFill>
+                        <a:srgbClr val="24365A"/>
+                      </a:solidFill>
+                      <a:prstDash val="solid"/>
+                      <a:round/>
+                      <a:headEnd type="none" w="med" len="med"/>
+                      <a:tailEnd type="none" w="med" len="med"/>
+                    </a:lnR>
+                    <a:lnT w="6350" cap="flat" cmpd="sng" algn="ctr">
+                      <a:solidFill>
+                        <a:srgbClr val="24365A"/>
+                      </a:solidFill>
+                      <a:prstDash val="solid"/>
+                      <a:round/>
+                      <a:headEnd type="none" w="med" len="med"/>
+                      <a:tailEnd type="none" w="med" len="med"/>
+                    </a:lnT>
+                    <a:lnB w="6350" cap="flat" cmpd="sng" algn="ctr">
+                      <a:solidFill>
+                        <a:srgbClr val="24365A"/>
+                      </a:solidFill>
+                      <a:prstDash val="solid"/>
+                      <a:round/>
+                      <a:headEnd type="none" w="med" len="med"/>
+                      <a:tailEnd type="none" w="med" len="med"/>
+                    </a:lnB>
+                    <a:solidFill>
+                      <a:srgbClr val="0D1420"/>
+                    </a:solidFill>
+                  </a:tcPr>
+                </a:tc>
+              </a:tr>
+              <a:tr h="402336">
+                <a:tc>
+                  <a:txBody>
+                    <a:bodyPr/>
+                    <a:lstStyle/>
+                    <a:p>
+                      <a:pPr indent="0" marL="0">
+                        <a:buNone/>
+                      </a:pPr>
+                      <a:r>
+                        <a:rPr lang="en-US" sz="1080" dirty="0">
+                          <a:solidFill>
+                            <a:srgbClr val="CBD5E1"/>
+                          </a:solidFill>
+                          <a:latin typeface="Segoe UI" pitchFamily="34" charset="0"/>
+                          <a:ea typeface="Segoe UI" pitchFamily="34" charset="-122"/>
+                          <a:cs typeface="Segoe UI" pitchFamily="34" charset="-120"/>
+                        </a:rPr>
+                        <a:t>Enrichment</a:t>
+                      </a:r>
+                      <a:endParaRPr lang="en-US" sz="1080" dirty="0">
+                        <a:latin typeface="Segoe UI" charset="0"/>
+                        <a:ea typeface="Segoe UI" charset="0"/>
+                        <a:cs typeface="Segoe UI" charset="0"/>
+                      </a:endParaRPr>
+                    </a:p>
+                  </a:txBody>
+                  <a:tcPr marL="64008" marR="64008" marT="64008" marB="64008" anchor="ctr">
+                    <a:lnL w="6350" cap="flat" cmpd="sng" algn="ctr">
+                      <a:solidFill>
+                        <a:srgbClr val="24365A"/>
+                      </a:solidFill>
+                      <a:prstDash val="solid"/>
+                      <a:round/>
+                      <a:headEnd type="none" w="med" len="med"/>
+                      <a:tailEnd type="none" w="med" len="med"/>
+                    </a:lnL>
+                    <a:lnR w="6350" cap="flat" cmpd="sng" algn="ctr">
+                      <a:solidFill>
+                        <a:srgbClr val="24365A"/>
+                      </a:solidFill>
+                      <a:prstDash val="solid"/>
+                      <a:round/>
+                      <a:headEnd type="none" w="med" len="med"/>
+                      <a:tailEnd type="none" w="med" len="med"/>
+                    </a:lnR>
+                    <a:lnT w="6350" cap="flat" cmpd="sng" algn="ctr">
+                      <a:solidFill>
+                        <a:srgbClr val="24365A"/>
+                      </a:solidFill>
+                      <a:prstDash val="solid"/>
+                      <a:round/>
+                      <a:headEnd type="none" w="med" len="med"/>
+                      <a:tailEnd type="none" w="med" len="med"/>
+                    </a:lnT>
+                    <a:lnB w="6350" cap="flat" cmpd="sng" algn="ctr">
+                      <a:solidFill>
+                        <a:srgbClr val="24365A"/>
+                      </a:solidFill>
+                      <a:prstDash val="solid"/>
+                      <a:round/>
+                      <a:headEnd type="none" w="med" len="med"/>
+                      <a:tailEnd type="none" w="med" len="med"/>
+                    </a:lnB>
+                    <a:solidFill>
+                      <a:srgbClr val="101A2D"/>
+                    </a:solidFill>
+                  </a:tcPr>
+                </a:tc>
+                <a:tc>
+                  <a:txBody>
+                    <a:bodyPr/>
+                    <a:lstStyle/>
+                    <a:p>
+                      <a:pPr indent="0" marL="0">
+                        <a:buNone/>
+                      </a:pPr>
+                      <a:r>
+                        <a:rPr lang="en-US" sz="1080" dirty="0">
+                          <a:solidFill>
+                            <a:srgbClr val="CBD5E1"/>
+                          </a:solidFill>
+                          <a:latin typeface="Segoe UI" pitchFamily="34" charset="0"/>
+                          <a:ea typeface="Segoe UI" pitchFamily="34" charset="-122"/>
+                          <a:cs typeface="Segoe UI" pitchFamily="34" charset="-120"/>
+                        </a:rPr>
+                        <a:t>Joins and derived features</a:t>
+                      </a:r>
+                      <a:endParaRPr lang="en-US" sz="1080" dirty="0">
+                        <a:latin typeface="Segoe UI" charset="0"/>
+                        <a:ea typeface="Segoe UI" charset="0"/>
+                        <a:cs typeface="Segoe UI" charset="0"/>
+                      </a:endParaRPr>
+                    </a:p>
+                  </a:txBody>
+                  <a:tcPr marL="64008" marR="64008" marT="64008" marB="64008" anchor="ctr">
+                    <a:lnL w="6350" cap="flat" cmpd="sng" algn="ctr">
+                      <a:solidFill>
+                        <a:srgbClr val="24365A"/>
+                      </a:solidFill>
+                      <a:prstDash val="solid"/>
+                      <a:round/>
+                      <a:headEnd type="none" w="med" len="med"/>
+                      <a:tailEnd type="none" w="med" len="med"/>
+                    </a:lnL>
+                    <a:lnR w="6350" cap="flat" cmpd="sng" algn="ctr">
+                      <a:solidFill>
+                        <a:srgbClr val="24365A"/>
+                      </a:solidFill>
+                      <a:prstDash val="solid"/>
+                      <a:round/>
+                      <a:headEnd type="none" w="med" len="med"/>
+                      <a:tailEnd type="none" w="med" len="med"/>
+                    </a:lnR>
+                    <a:lnT w="6350" cap="flat" cmpd="sng" algn="ctr">
+                      <a:solidFill>
+                        <a:srgbClr val="24365A"/>
+                      </a:solidFill>
+                      <a:prstDash val="solid"/>
+                      <a:round/>
+                      <a:headEnd type="none" w="med" len="med"/>
+                      <a:tailEnd type="none" w="med" len="med"/>
+                    </a:lnT>
+                    <a:lnB w="6350" cap="flat" cmpd="sng" algn="ctr">
+                      <a:solidFill>
+                        <a:srgbClr val="24365A"/>
+                      </a:solidFill>
+                      <a:prstDash val="solid"/>
+                      <a:round/>
+                      <a:headEnd type="none" w="med" len="med"/>
+                      <a:tailEnd type="none" w="med" len="med"/>
+                    </a:lnB>
+                    <a:solidFill>
+                      <a:srgbClr val="101A2D"/>
+                    </a:solidFill>
+                  </a:tcPr>
+                </a:tc>
+                <a:tc>
+                  <a:txBody>
+                    <a:bodyPr/>
+                    <a:lstStyle/>
+                    <a:p>
+                      <a:pPr indent="0" marL="0">
+                        <a:buNone/>
+                      </a:pPr>
+                      <a:r>
+                        <a:rPr lang="en-US" sz="1080" dirty="0">
+                          <a:solidFill>
+                            <a:srgbClr val="CBD5E1"/>
+                          </a:solidFill>
+                          <a:latin typeface="Segoe UI" pitchFamily="34" charset="0"/>
+                          <a:ea typeface="Segoe UI" pitchFamily="34" charset="-122"/>
+                          <a:cs typeface="Segoe UI" pitchFamily="34" charset="-120"/>
+                        </a:rPr>
+                        <a:t>Validated keys, explicit assumptions</a:t>
+                      </a:r>
+                      <a:endParaRPr lang="en-US" sz="1080" dirty="0">
+                        <a:latin typeface="Segoe UI" charset="0"/>
+                        <a:ea typeface="Segoe UI" charset="0"/>
+                        <a:cs typeface="Segoe UI" charset="0"/>
+                      </a:endParaRPr>
+                    </a:p>
+                  </a:txBody>
+                  <a:tcPr marL="64008" marR="64008" marT="64008" marB="64008" anchor="ctr">
+                    <a:lnL w="6350" cap="flat" cmpd="sng" algn="ctr">
+                      <a:solidFill>
+                        <a:srgbClr val="24365A"/>
+                      </a:solidFill>
+                      <a:prstDash val="solid"/>
+                      <a:round/>
+                      <a:headEnd type="none" w="med" len="med"/>
+                      <a:tailEnd type="none" w="med" len="med"/>
+                    </a:lnL>
+                    <a:lnR w="6350" cap="flat" cmpd="sng" algn="ctr">
+                      <a:solidFill>
+                        <a:srgbClr val="24365A"/>
+                      </a:solidFill>
+                      <a:prstDash val="solid"/>
+                      <a:round/>
+                      <a:headEnd type="none" w="med" len="med"/>
+                      <a:tailEnd type="none" w="med" len="med"/>
+                    </a:lnR>
+                    <a:lnT w="6350" cap="flat" cmpd="sng" algn="ctr">
+                      <a:solidFill>
+                        <a:srgbClr val="24365A"/>
+                      </a:solidFill>
+                      <a:prstDash val="solid"/>
+                      <a:round/>
+                      <a:headEnd type="none" w="med" len="med"/>
+                      <a:tailEnd type="none" w="med" len="med"/>
+                    </a:lnT>
+                    <a:lnB w="6350" cap="flat" cmpd="sng" algn="ctr">
+                      <a:solidFill>
+                        <a:srgbClr val="24365A"/>
+                      </a:solidFill>
+                      <a:prstDash val="solid"/>
+                      <a:round/>
+                      <a:headEnd type="none" w="med" len="med"/>
+                      <a:tailEnd type="none" w="med" len="med"/>
+                    </a:lnB>
+                    <a:solidFill>
+                      <a:srgbClr val="101A2D"/>
+                    </a:solidFill>
+                  </a:tcPr>
+                </a:tc>
+              </a:tr>
+              <a:tr h="402336">
+                <a:tc>
+                  <a:txBody>
+                    <a:bodyPr/>
+                    <a:lstStyle/>
+                    <a:p>
+                      <a:pPr indent="0" marL="0">
+                        <a:buNone/>
+                      </a:pPr>
+                      <a:r>
+                        <a:rPr lang="en-US" sz="1080" dirty="0">
+                          <a:solidFill>
+                            <a:srgbClr val="CBD5E1"/>
+                          </a:solidFill>
+                          <a:latin typeface="Segoe UI" pitchFamily="34" charset="0"/>
+                          <a:ea typeface="Segoe UI" pitchFamily="34" charset="-122"/>
+                          <a:cs typeface="Segoe UI" pitchFamily="34" charset="-120"/>
+                        </a:rPr>
+                        <a:t>Export and reporting</a:t>
+                      </a:r>
+                      <a:endParaRPr lang="en-US" sz="1080" dirty="0">
+                        <a:latin typeface="Segoe UI" charset="0"/>
+                        <a:ea typeface="Segoe UI" charset="0"/>
+                        <a:cs typeface="Segoe UI" charset="0"/>
+                      </a:endParaRPr>
+                    </a:p>
+                  </a:txBody>
+                  <a:tcPr marL="64008" marR="64008" marT="64008" marB="64008" anchor="ctr">
+                    <a:lnL w="6350" cap="flat" cmpd="sng" algn="ctr">
+                      <a:solidFill>
+                        <a:srgbClr val="24365A"/>
+                      </a:solidFill>
+                      <a:prstDash val="solid"/>
+                      <a:round/>
+                      <a:headEnd type="none" w="med" len="med"/>
+                      <a:tailEnd type="none" w="med" len="med"/>
+                    </a:lnL>
+                    <a:lnR w="6350" cap="flat" cmpd="sng" algn="ctr">
+                      <a:solidFill>
+                        <a:srgbClr val="24365A"/>
+                      </a:solidFill>
+                      <a:prstDash val="solid"/>
+                      <a:round/>
+                      <a:headEnd type="none" w="med" len="med"/>
+                      <a:tailEnd type="none" w="med" len="med"/>
+                    </a:lnR>
+                    <a:lnT w="6350" cap="flat" cmpd="sng" algn="ctr">
+                      <a:solidFill>
+                        <a:srgbClr val="24365A"/>
+                      </a:solidFill>
+                      <a:prstDash val="solid"/>
+                      <a:round/>
+                      <a:headEnd type="none" w="med" len="med"/>
+                      <a:tailEnd type="none" w="med" len="med"/>
+                    </a:lnT>
+                    <a:lnB w="6350" cap="flat" cmpd="sng" algn="ctr">
+                      <a:solidFill>
+                        <a:srgbClr val="24365A"/>
+                      </a:solidFill>
+                      <a:prstDash val="solid"/>
+                      <a:round/>
+                      <a:headEnd type="none" w="med" len="med"/>
+                      <a:tailEnd type="none" w="med" len="med"/>
+                    </a:lnB>
+                    <a:solidFill>
+                      <a:srgbClr val="0D1420"/>
+                    </a:solidFill>
+                  </a:tcPr>
+                </a:tc>
+                <a:tc>
+                  <a:txBody>
+                    <a:bodyPr/>
+                    <a:lstStyle/>
+                    <a:p>
+                      <a:pPr indent="0" marL="0">
+                        <a:buNone/>
+                      </a:pPr>
+                      <a:r>
+                        <a:rPr lang="en-US" sz="1080" dirty="0">
+                          <a:solidFill>
+                            <a:srgbClr val="CBD5E1"/>
+                          </a:solidFill>
+                          <a:latin typeface="Segoe UI" pitchFamily="34" charset="0"/>
+                          <a:ea typeface="Segoe UI" pitchFamily="34" charset="-122"/>
+                          <a:cs typeface="Segoe UI" pitchFamily="34" charset="-120"/>
+                        </a:rPr>
+                        <a:t>Analyst-ready outputs</a:t>
+                      </a:r>
+                      <a:endParaRPr lang="en-US" sz="1080" dirty="0">
+                        <a:latin typeface="Segoe UI" charset="0"/>
+                        <a:ea typeface="Segoe UI" charset="0"/>
+                        <a:cs typeface="Segoe UI" charset="0"/>
+                      </a:endParaRPr>
+                    </a:p>
+                  </a:txBody>
+                  <a:tcPr marL="64008" marR="64008" marT="64008" marB="64008" anchor="ctr">
+                    <a:lnL w="6350" cap="flat" cmpd="sng" algn="ctr">
+                      <a:solidFill>
+                        <a:srgbClr val="24365A"/>
+                      </a:solidFill>
+                      <a:prstDash val="solid"/>
+                      <a:round/>
+                      <a:headEnd type="none" w="med" len="med"/>
+                      <a:tailEnd type="none" w="med" len="med"/>
+                    </a:lnL>
+                    <a:lnR w="6350" cap="flat" cmpd="sng" algn="ctr">
+                      <a:solidFill>
+                        <a:srgbClr val="24365A"/>
+                      </a:solidFill>
+                      <a:prstDash val="solid"/>
+                      <a:round/>
+                      <a:headEnd type="none" w="med" len="med"/>
+                      <a:tailEnd type="none" w="med" len="med"/>
+                    </a:lnR>
+                    <a:lnT w="6350" cap="flat" cmpd="sng" algn="ctr">
+                      <a:solidFill>
+                        <a:srgbClr val="24365A"/>
+                      </a:solidFill>
+                      <a:prstDash val="solid"/>
+                      <a:round/>
+                      <a:headEnd type="none" w="med" len="med"/>
+                      <a:tailEnd type="none" w="med" len="med"/>
+                    </a:lnT>
+                    <a:lnB w="6350" cap="flat" cmpd="sng" algn="ctr">
+                      <a:solidFill>
+                        <a:srgbClr val="24365A"/>
+                      </a:solidFill>
+                      <a:prstDash val="solid"/>
+                      <a:round/>
+                      <a:headEnd type="none" w="med" len="med"/>
+                      <a:tailEnd type="none" w="med" len="med"/>
+                    </a:lnB>
+                    <a:solidFill>
+                      <a:srgbClr val="0D1420"/>
+                    </a:solidFill>
+                  </a:tcPr>
+                </a:tc>
+                <a:tc>
+                  <a:txBody>
+                    <a:bodyPr/>
+                    <a:lstStyle/>
+                    <a:p>
+                      <a:pPr indent="0" marL="0">
+                        <a:buNone/>
+                      </a:pPr>
+                      <a:r>
+                        <a:rPr lang="en-US" sz="1080" dirty="0">
+                          <a:solidFill>
+                            <a:srgbClr val="CBD5E1"/>
+                          </a:solidFill>
+                          <a:latin typeface="Segoe UI" pitchFamily="34" charset="0"/>
+                          <a:ea typeface="Segoe UI" pitchFamily="34" charset="-122"/>
+                          <a:cs typeface="Segoe UI" pitchFamily="34" charset="-120"/>
+                        </a:rPr>
+                        <a:t>Contract-tested formats</a:t>
+                      </a:r>
+                      <a:endParaRPr lang="en-US" sz="1080" dirty="0">
+                        <a:latin typeface="Segoe UI" charset="0"/>
+                        <a:ea typeface="Segoe UI" charset="0"/>
+                        <a:cs typeface="Segoe UI" charset="0"/>
+                      </a:endParaRPr>
+                    </a:p>
+                  </a:txBody>
+                  <a:tcPr marL="64008" marR="64008" marT="64008" marB="64008" anchor="ctr">
+                    <a:lnL w="6350" cap="flat" cmpd="sng" algn="ctr">
+                      <a:solidFill>
+                        <a:srgbClr val="24365A"/>
+                      </a:solidFill>
+                      <a:prstDash val="solid"/>
+                      <a:round/>
+                      <a:headEnd type="none" w="med" len="med"/>
+                      <a:tailEnd type="none" w="med" len="med"/>
+                    </a:lnL>
+                    <a:lnR w="6350" cap="flat" cmpd="sng" algn="ctr">
+                      <a:solidFill>
+                        <a:srgbClr val="24365A"/>
+                      </a:solidFill>
+                      <a:prstDash val="solid"/>
+                      <a:round/>
+                      <a:headEnd type="none" w="med" len="med"/>
+                      <a:tailEnd type="none" w="med" len="med"/>
+                    </a:lnR>
+                    <a:lnT w="6350" cap="flat" cmpd="sng" algn="ctr">
+                      <a:solidFill>
+                        <a:srgbClr val="24365A"/>
+                      </a:solidFill>
+                      <a:prstDash val="solid"/>
+                      <a:round/>
+                      <a:headEnd type="none" w="med" len="med"/>
+                      <a:tailEnd type="none" w="med" len="med"/>
+                    </a:lnT>
+                    <a:lnB w="6350" cap="flat" cmpd="sng" algn="ctr">
+                      <a:solidFill>
+                        <a:srgbClr val="24365A"/>
+                      </a:solidFill>
+                      <a:prstDash val="solid"/>
+                      <a:round/>
+                      <a:headEnd type="none" w="med" len="med"/>
+                      <a:tailEnd type="none" w="med" len="med"/>
+                    </a:lnB>
+                    <a:solidFill>
+                      <a:srgbClr val="0D1420"/>
+                    </a:solidFill>
+                  </a:tcPr>
+                </a:tc>
+              </a:tr>
+            </a:tbl>
+          </a:graphicData>
+        </a:graphic>
+      </p:graphicFrame>
+      <p:sp>
+        <p:nvSpPr>
+          <p:cNvPr id="7" name="Shape 4"/>
+          <p:cNvSpPr/>
+          <p:nvPr/>
+        </p:nvSpPr>
+        <p:spPr>
+          <a:xfrm>
+            <a:off x="822960" y="5961888"/>
+            <a:ext cx="10515600" cy="0"/>
+          </a:xfrm>
+          <a:prstGeom prst="line">
+            <a:avLst/>
+          </a:prstGeom>
+          <a:noFill/>
+          <a:ln w="12700">
+            <a:solidFill>
+              <a:srgbClr val="1E2D45"/>
+            </a:solidFill>
+            <a:prstDash val="solid"/>
+          </a:ln>
+        </p:spPr>
+      </p:sp>
+      <p:sp>
+        <p:nvSpPr>
+          <p:cNvPr id="8" name="Text 5"/>
+          <p:cNvSpPr/>
+          <p:nvPr/>
+        </p:nvSpPr>
+        <p:spPr>
+          <a:xfrm>
+            <a:off x="822960" y="6053328"/>
+            <a:ext cx="9692640" cy="457200"/>
+          </a:xfrm>
+          <a:prstGeom prst="rect">
+            <a:avLst/>
+          </a:prstGeom>
+          <a:noFill/>
+          <a:ln/>
+        </p:spPr>
+        <p:txBody>
+          <a:bodyPr wrap="square" rtlCol="0" anchor="ctr"/>
+          <a:lstStyle/>
+          <a:p>
+            <a:pPr indent="0" marL="0">
+              <a:buNone/>
+            </a:pPr>
+            <a:r>
+              <a:rPr lang="en-US" sz="1150" dirty="0">
+                <a:solidFill>
+                  <a:srgbClr val="64748B"/>
                 </a:solidFill>
                 <a:latin typeface="Segoe UI" pitchFamily="34" charset="0"/>
                 <a:ea typeface="Segoe UI" pitchFamily="34" charset="-122"/>
                 <a:cs typeface="Segoe UI" pitchFamily="34" charset="-120"/>
               </a:rPr>
-              <a:t>More connectors for common sources</a:t>
-            </a:r>
-            <a:endParaRPr lang="en-US" sz="1600" dirty="0"/>
-          </a:p>
-          <a:p>
-            <a:pPr marL="342900" indent="-342900">
-              <a:lnSpc>
-                <a:spcPct val="115000"/>
-              </a:lnSpc>
-              <a:spcAft>
-                <a:spcPts val="1000"/>
-              </a:spcAft>
-              <a:buSzPct val="100000"/>
-              <a:buChar char="▸"/>
-            </a:pPr>
-            <a:r>
-              <a:rPr lang="en-US" sz="1600" dirty="0">
-                <a:solidFill>
-                  <a:srgbClr val="CBD5E1"/>
-                </a:solidFill>
-                <a:latin typeface="Segoe UI" pitchFamily="34" charset="0"/>
-                <a:ea typeface="Segoe UI" pitchFamily="34" charset="-122"/>
-                <a:cs typeface="Segoe UI" pitchFamily="34" charset="-120"/>
-              </a:rPr>
-              <a:t>Lightweight visualization exports</a:t>
-            </a:r>
-            <a:endParaRPr lang="en-US" sz="1600" dirty="0"/>
-          </a:p>
-          <a:p>
-            <a:pPr marL="342900" indent="-342900">
-              <a:lnSpc>
-                <a:spcPct val="115000"/>
-              </a:lnSpc>
-              <a:spcAft>
-                <a:spcPts val="1000"/>
-              </a:spcAft>
-              <a:buSzPct val="100000"/>
-              <a:buChar char="▸"/>
-            </a:pPr>
-            <a:r>
-              <a:rPr lang="en-US" sz="1600" dirty="0">
-                <a:solidFill>
-                  <a:srgbClr val="CBD5E1"/>
-                </a:solidFill>
-                <a:latin typeface="Segoe UI" pitchFamily="34" charset="0"/>
-                <a:ea typeface="Segoe UI" pitchFamily="34" charset="-122"/>
-                <a:cs typeface="Segoe UI" pitchFamily="34" charset="-120"/>
-              </a:rPr>
-              <a:t>Deeper agent integration - pipelines as agent tools</a:t>
-            </a:r>
-            <a:endParaRPr lang="en-US" sz="1600" dirty="0"/>
-          </a:p>
-        </p:txBody>
-      </p:sp>
-      <p:sp>
-        <p:nvSpPr>
-          <p:cNvPr id="7" name="Text 5"/>
-          <p:cNvSpPr/>
-          <p:nvPr/>
-        </p:nvSpPr>
-        <p:spPr>
-          <a:xfrm>
-            <a:off x="10698480" y="6355080"/>
+              <a:t>Validation lives at every seam - data cannot cross a boundary unchecked.</a:t>
+            </a:r>
+            <a:endParaRPr lang="en-US" sz="1150" dirty="0"/>
+          </a:p>
+        </p:txBody>
+      </p:sp>
+      <p:sp>
+        <p:nvSpPr>
+          <p:cNvPr id="9" name="Text 6"/>
+          <p:cNvSpPr/>
+          <p:nvPr/>
+        </p:nvSpPr>
+        <p:spPr>
+          <a:xfrm>
+            <a:off x="10698480" y="6382512"/>
             <a:ext cx="1188720" cy="365760"/>
           </a:xfrm>
           <a:prstGeom prst="rect">
@@ -3506,7 +10920,7 @@
                 <a:ea typeface="Consolas" pitchFamily="34" charset="-122"/>
                 <a:cs typeface="Consolas" pitchFamily="34" charset="-120"/>
               </a:rPr>
-              <a:t>7 / 8</a:t>
+              <a:t>7 / 15</a:t>
             </a:r>
             <a:endParaRPr lang="en-US" sz="1000" dirty="0"/>
           </a:p>
@@ -3592,8 +11006,8 @@
         </p:nvSpPr>
         <p:spPr>
           <a:xfrm>
-            <a:off x="822960" y="1554480"/>
-            <a:ext cx="10515600" cy="457200"/>
+            <a:off x="822960" y="502920"/>
+            <a:ext cx="10515600" cy="365760"/>
           </a:xfrm>
           <a:prstGeom prst="rect">
             <a:avLst/>
@@ -3609,7 +11023,7 @@
               <a:buNone/>
             </a:pPr>
             <a:r>
-              <a:rPr lang="en-US" sz="1400" spc="400" kern="0" dirty="0">
+              <a:rPr lang="en-US" sz="1200" spc="300" kern="0" dirty="0">
                 <a:solidFill>
                   <a:srgbClr val="06B6D4"/>
                 </a:solidFill>
@@ -3617,9 +11031,9 @@
                 <a:ea typeface="Consolas" pitchFamily="34" charset="-122"/>
                 <a:cs typeface="Consolas" pitchFamily="34" charset="-120"/>
               </a:rPr>
-              <a:t>TAKEAWAY</a:t>
-            </a:r>
-            <a:endParaRPr lang="en-US" sz="1400" dirty="0"/>
+              <a:t>DESIGN</a:t>
+            </a:r>
+            <a:endParaRPr lang="en-US" sz="1200" dirty="0"/>
           </a:p>
         </p:txBody>
       </p:sp>
@@ -3631,8 +11045,8 @@
         </p:nvSpPr>
         <p:spPr>
           <a:xfrm>
-            <a:off x="822960" y="2286000"/>
-            <a:ext cx="10515600" cy="1737360"/>
+            <a:off x="822960" y="914400"/>
+            <a:ext cx="10561320" cy="868680"/>
           </a:xfrm>
           <a:prstGeom prst="rect">
             <a:avLst/>
@@ -3648,7 +11062,7 @@
               <a:buNone/>
             </a:pPr>
             <a:r>
-              <a:rPr lang="en-US" sz="4400" b="1" dirty="0">
+              <a:rPr lang="en-US" sz="2700" b="1" dirty="0">
                 <a:solidFill>
                   <a:srgbClr val="FFFFFF"/>
                 </a:solidFill>
@@ -3656,9 +11070,9 @@
                 <a:ea typeface="Segoe UI" pitchFamily="34" charset="-122"/>
                 <a:cs typeface="Segoe UI" pitchFamily="34" charset="-120"/>
               </a:rPr>
-              <a:t>Own the boring 70%, spend on the brilliant 30%</a:t>
-            </a:r>
-            <a:endParaRPr lang="en-US" sz="4400" dirty="0"/>
+              <a:t>Principles that survived production</a:t>
+            </a:r>
+            <a:endParaRPr lang="en-US" sz="2700" dirty="0"/>
           </a:p>
         </p:txBody>
       </p:sp>
@@ -3670,46 +11084,211 @@
         </p:nvSpPr>
         <p:spPr>
           <a:xfrm>
-            <a:off x="822960" y="4206240"/>
-            <a:ext cx="10515600" cy="914400"/>
-          </a:xfrm>
-          <a:prstGeom prst="rect">
-            <a:avLst/>
-          </a:prstGeom>
-          <a:noFill/>
-          <a:ln/>
-        </p:spPr>
-        <p:txBody>
-          <a:bodyPr wrap="square" rtlCol="0" anchor="ctr"/>
-          <a:lstStyle/>
-          <a:p>
-            <a:pPr indent="0" marL="0">
-              <a:buNone/>
+            <a:off x="868680" y="2011680"/>
+            <a:ext cx="10424160" cy="3566160"/>
+          </a:xfrm>
+          <a:prstGeom prst="rect">
+            <a:avLst/>
+          </a:prstGeom>
+          <a:noFill/>
+          <a:ln/>
+        </p:spPr>
+        <p:txBody>
+          <a:bodyPr wrap="square" rtlCol="0" anchor="t"/>
+          <a:lstStyle/>
+          <a:p>
+            <a:pPr marL="342900" indent="-342900">
+              <a:lnSpc>
+                <a:spcPct val="112000"/>
+              </a:lnSpc>
+              <a:spcAft>
+                <a:spcPts val="900"/>
+              </a:spcAft>
+              <a:buSzPct val="100000"/>
+              <a:buChar char="▸"/>
             </a:pPr>
             <a:r>
               <a:rPr lang="en-US" sz="1600" dirty="0">
                 <a:solidFill>
-                  <a:srgbClr val="94A3B8"/>
+                  <a:srgbClr val="CBD5E1"/>
                 </a:solidFill>
                 <a:latin typeface="Segoe UI" pitchFamily="34" charset="0"/>
                 <a:ea typeface="Segoe UI" pitchFamily="34" charset="-122"/>
                 <a:cs typeface="Segoe UI" pitchFamily="34" charset="-120"/>
               </a:rPr>
-              <a:t>ODIS is open source and production-ready. · rezalianvatiady.github.io</a:t>
+              <a:t>Composable pipelines over monolithic scripts - every stage runs, logs, and fails on its own.</a:t>
             </a:r>
             <a:endParaRPr lang="en-US" sz="1600" dirty="0"/>
           </a:p>
-        </p:txBody>
-      </p:sp>
-      <p:sp>
-        <p:nvSpPr>
-          <p:cNvPr id="7" name="Text 5"/>
-          <p:cNvSpPr/>
-          <p:nvPr/>
-        </p:nvSpPr>
-        <p:spPr>
-          <a:xfrm>
-            <a:off x="10698480" y="6355080"/>
+          <a:p>
+            <a:pPr marL="342900" indent="-342900">
+              <a:lnSpc>
+                <a:spcPct val="112000"/>
+              </a:lnSpc>
+              <a:spcAft>
+                <a:spcPts val="900"/>
+              </a:spcAft>
+              <a:buSzPct val="100000"/>
+              <a:buChar char="▸"/>
+            </a:pPr>
+            <a:r>
+              <a:rPr lang="en-US" sz="1600" dirty="0">
+                <a:solidFill>
+                  <a:srgbClr val="CBD5E1"/>
+                </a:solidFill>
+                <a:latin typeface="Segoe UI" pitchFamily="34" charset="0"/>
+                <a:ea typeface="Segoe UI" pitchFamily="34" charset="-122"/>
+                <a:cs typeface="Segoe UI" pitchFamily="34" charset="-120"/>
+              </a:rPr>
+              <a:t>Schema-first: data is validated at every seam, not audited after the damage.</a:t>
+            </a:r>
+            <a:endParaRPr lang="en-US" sz="1600" dirty="0"/>
+          </a:p>
+          <a:p>
+            <a:pPr marL="342900" indent="-342900">
+              <a:lnSpc>
+                <a:spcPct val="112000"/>
+              </a:lnSpc>
+              <a:spcAft>
+                <a:spcPts val="900"/>
+              </a:spcAft>
+              <a:buSzPct val="100000"/>
+              <a:buChar char="▸"/>
+            </a:pPr>
+            <a:r>
+              <a:rPr lang="en-US" sz="1600" dirty="0">
+                <a:solidFill>
+                  <a:srgbClr val="CBD5E1"/>
+                </a:solidFill>
+                <a:latin typeface="Segoe UI" pitchFamily="34" charset="0"/>
+                <a:ea typeface="Segoe UI" pitchFamily="34" charset="-122"/>
+                <a:cs typeface="Segoe UI" pitchFamily="34" charset="-120"/>
+              </a:rPr>
+              <a:t>Local-first: your data never has to leave the machine to be processed well.</a:t>
+            </a:r>
+            <a:endParaRPr lang="en-US" sz="1600" dirty="0"/>
+          </a:p>
+          <a:p>
+            <a:pPr marL="342900" indent="-342900">
+              <a:lnSpc>
+                <a:spcPct val="112000"/>
+              </a:lnSpc>
+              <a:spcAft>
+                <a:spcPts val="900"/>
+              </a:spcAft>
+              <a:buSzPct val="100000"/>
+              <a:buChar char="▸"/>
+            </a:pPr>
+            <a:r>
+              <a:rPr lang="en-US" sz="1600" dirty="0">
+                <a:solidFill>
+                  <a:srgbClr val="CBD5E1"/>
+                </a:solidFill>
+                <a:latin typeface="Segoe UI" pitchFamily="34" charset="0"/>
+                <a:ea typeface="Segoe UI" pitchFamily="34" charset="-122"/>
+                <a:cs typeface="Segoe UI" pitchFamily="34" charset="-120"/>
+              </a:rPr>
+              <a:t>Readable output: logs and errors a human can audit months later.</a:t>
+            </a:r>
+            <a:endParaRPr lang="en-US" sz="1600" dirty="0"/>
+          </a:p>
+          <a:p>
+            <a:pPr marL="342900" indent="-342900">
+              <a:lnSpc>
+                <a:spcPct val="112000"/>
+              </a:lnSpc>
+              <a:spcAft>
+                <a:spcPts val="900"/>
+              </a:spcAft>
+              <a:buSzPct val="100000"/>
+              <a:buChar char="▸"/>
+            </a:pPr>
+            <a:r>
+              <a:rPr lang="en-US" sz="1600" dirty="0">
+                <a:solidFill>
+                  <a:srgbClr val="CBD5E1"/>
+                </a:solidFill>
+                <a:latin typeface="Segoe UI" pitchFamily="34" charset="0"/>
+                <a:ea typeface="Segoe UI" pitchFamily="34" charset="-122"/>
+                <a:cs typeface="Segoe UI" pitchFamily="34" charset="-120"/>
+              </a:rPr>
+              <a:t>Nothing in the framework depends on a service that can bill you mid-pipeline.</a:t>
+            </a:r>
+            <a:endParaRPr lang="en-US" sz="1600" dirty="0"/>
+          </a:p>
+        </p:txBody>
+      </p:sp>
+      <p:sp>
+        <p:nvSpPr>
+          <p:cNvPr id="7" name="Shape 5"/>
+          <p:cNvSpPr/>
+          <p:nvPr/>
+        </p:nvSpPr>
+        <p:spPr>
+          <a:xfrm>
+            <a:off x="822960" y="5961888"/>
+            <a:ext cx="10515600" cy="0"/>
+          </a:xfrm>
+          <a:prstGeom prst="line">
+            <a:avLst/>
+          </a:prstGeom>
+          <a:noFill/>
+          <a:ln w="12700">
+            <a:solidFill>
+              <a:srgbClr val="1E2D45"/>
+            </a:solidFill>
+            <a:prstDash val="solid"/>
+          </a:ln>
+        </p:spPr>
+      </p:sp>
+      <p:sp>
+        <p:nvSpPr>
+          <p:cNvPr id="8" name="Text 6"/>
+          <p:cNvSpPr/>
+          <p:nvPr/>
+        </p:nvSpPr>
+        <p:spPr>
+          <a:xfrm>
+            <a:off x="822960" y="6053328"/>
+            <a:ext cx="9692640" cy="457200"/>
+          </a:xfrm>
+          <a:prstGeom prst="rect">
+            <a:avLst/>
+          </a:prstGeom>
+          <a:noFill/>
+          <a:ln/>
+        </p:spPr>
+        <p:txBody>
+          <a:bodyPr wrap="square" rtlCol="0" anchor="ctr"/>
+          <a:lstStyle/>
+          <a:p>
+            <a:pPr indent="0" marL="0">
+              <a:buNone/>
+            </a:pPr>
+            <a:r>
+              <a:rPr lang="en-US" sz="1150" dirty="0">
+                <a:solidFill>
+                  <a:srgbClr val="64748B"/>
+                </a:solidFill>
+                <a:latin typeface="Segoe UI" pitchFamily="34" charset="0"/>
+                <a:ea typeface="Segoe UI" pitchFamily="34" charset="-122"/>
+                <a:cs typeface="Segoe UI" pitchFamily="34" charset="-120"/>
+              </a:rPr>
+              <a:t>Heavyweight magic loses to boring, inspectable mechanics.</a:t>
+            </a:r>
+            <a:endParaRPr lang="en-US" sz="1150" dirty="0"/>
+          </a:p>
+        </p:txBody>
+      </p:sp>
+      <p:sp>
+        <p:nvSpPr>
+          <p:cNvPr id="9" name="Text 7"/>
+          <p:cNvSpPr/>
+          <p:nvPr/>
+        </p:nvSpPr>
+        <p:spPr>
+          <a:xfrm>
+            <a:off x="10698480" y="6382512"/>
             <a:ext cx="1188720" cy="365760"/>
           </a:xfrm>
           <a:prstGeom prst="rect">
@@ -3734,7 +11313,336 @@
                 <a:ea typeface="Consolas" pitchFamily="34" charset="-122"/>
                 <a:cs typeface="Consolas" pitchFamily="34" charset="-120"/>
               </a:rPr>
-              <a:t>8 / 8</a:t>
+              <a:t>8 / 15</a:t>
+            </a:r>
+            <a:endParaRPr lang="en-US" sz="1000" dirty="0"/>
+          </a:p>
+        </p:txBody>
+      </p:sp>
+    </p:spTree>
+  </p:cSld>
+  <p:clrMapOvr>
+    <a:masterClrMapping/>
+  </p:clrMapOvr>
+</p:sld>
+</file>
+
+<file path=ppt/slides/slide9.xml><?xml version="1.0" encoding="utf-8"?>
+<p:sld xmlns:a="http://schemas.openxmlformats.org/drawingml/2006/main" xmlns:r="http://schemas.openxmlformats.org/officeDocument/2006/relationships" xmlns:p="http://schemas.openxmlformats.org/presentationml/2006/main">
+  <p:cSld name="Slide 9">
+    <p:bg>
+      <p:bgPr>
+        <a:solidFill>
+          <a:srgbClr val="0A0C12"/>
+        </a:solidFill>
+      </p:bgPr>
+    </p:bg>
+    <p:spTree>
+      <p:nvGrpSpPr>
+        <p:cNvPr id="1" name=""/>
+        <p:cNvGrpSpPr/>
+        <p:nvPr/>
+      </p:nvGrpSpPr>
+      <p:grpSpPr>
+        <a:xfrm>
+          <a:off x="0" y="0"/>
+          <a:ext cx="0" cy="0"/>
+          <a:chOff x="0" y="0"/>
+          <a:chExt cx="0" cy="0"/>
+        </a:xfrm>
+      </p:grpSpPr>
+      <p:sp>
+        <p:nvSpPr>
+          <p:cNvPr id="2" name="Shape 0"/>
+          <p:cNvSpPr/>
+          <p:nvPr/>
+        </p:nvSpPr>
+        <p:spPr>
+          <a:xfrm>
+            <a:off x="0" y="0"/>
+            <a:ext cx="7680960" cy="64008"/>
+          </a:xfrm>
+          <a:prstGeom prst="rect">
+            <a:avLst/>
+          </a:prstGeom>
+          <a:solidFill>
+            <a:srgbClr val="3B82F6"/>
+          </a:solidFill>
+          <a:ln/>
+        </p:spPr>
+      </p:sp>
+      <p:sp>
+        <p:nvSpPr>
+          <p:cNvPr id="3" name="Shape 1"/>
+          <p:cNvSpPr/>
+          <p:nvPr/>
+        </p:nvSpPr>
+        <p:spPr>
+          <a:xfrm>
+            <a:off x="7680960" y="0"/>
+            <a:ext cx="4510735" cy="64008"/>
+          </a:xfrm>
+          <a:prstGeom prst="rect">
+            <a:avLst/>
+          </a:prstGeom>
+          <a:solidFill>
+            <a:srgbClr val="06B6D4"/>
+          </a:solidFill>
+          <a:ln/>
+        </p:spPr>
+      </p:sp>
+      <p:sp>
+        <p:nvSpPr>
+          <p:cNvPr id="4" name="Text 2"/>
+          <p:cNvSpPr/>
+          <p:nvPr/>
+        </p:nvSpPr>
+        <p:spPr>
+          <a:xfrm>
+            <a:off x="822960" y="502920"/>
+            <a:ext cx="10515600" cy="365760"/>
+          </a:xfrm>
+          <a:prstGeom prst="rect">
+            <a:avLst/>
+          </a:prstGeom>
+          <a:noFill/>
+          <a:ln/>
+        </p:spPr>
+        <p:txBody>
+          <a:bodyPr wrap="square" rtlCol="0" anchor="ctr"/>
+          <a:lstStyle/>
+          <a:p>
+            <a:pPr indent="0" marL="0">
+              <a:buNone/>
+            </a:pPr>
+            <a:r>
+              <a:rPr lang="en-US" sz="1200" spc="300" kern="0" dirty="0">
+                <a:solidFill>
+                  <a:srgbClr val="06B6D4"/>
+                </a:solidFill>
+                <a:latin typeface="Consolas" pitchFamily="34" charset="0"/>
+                <a:ea typeface="Consolas" pitchFamily="34" charset="-122"/>
+                <a:cs typeface="Consolas" pitchFamily="34" charset="-120"/>
+              </a:rPr>
+              <a:t>CODEBASE</a:t>
+            </a:r>
+            <a:endParaRPr lang="en-US" sz="1200" dirty="0"/>
+          </a:p>
+        </p:txBody>
+      </p:sp>
+      <p:sp>
+        <p:nvSpPr>
+          <p:cNvPr id="5" name="Text 3"/>
+          <p:cNvSpPr/>
+          <p:nvPr/>
+        </p:nvSpPr>
+        <p:spPr>
+          <a:xfrm>
+            <a:off x="822960" y="914400"/>
+            <a:ext cx="10561320" cy="868680"/>
+          </a:xfrm>
+          <a:prstGeom prst="rect">
+            <a:avLst/>
+          </a:prstGeom>
+          <a:noFill/>
+          <a:ln/>
+        </p:spPr>
+        <p:txBody>
+          <a:bodyPr wrap="square" rtlCol="0" anchor="ctr"/>
+          <a:lstStyle/>
+          <a:p>
+            <a:pPr indent="0" marL="0">
+              <a:buNone/>
+            </a:pPr>
+            <a:r>
+              <a:rPr lang="en-US" sz="2700" b="1" dirty="0">
+                <a:solidFill>
+                  <a:srgbClr val="FFFFFF"/>
+                </a:solidFill>
+                <a:latin typeface="Segoe UI" pitchFamily="34" charset="0"/>
+                <a:ea typeface="Segoe UI" pitchFamily="34" charset="-122"/>
+                <a:cs typeface="Segoe UI" pitchFamily="34" charset="-120"/>
+              </a:rPr>
+              <a:t>Where the 4,305 lines actually live</a:t>
+            </a:r>
+            <a:endParaRPr lang="en-US" sz="2700" dirty="0"/>
+          </a:p>
+        </p:txBody>
+      </p:sp>
+      <p:graphicFrame>
+        <p:nvGraphicFramePr>
+          <p:cNvPr id="6" name="Chart 0" descr=""/>
+          <p:cNvGraphicFramePr/>
+          <p:nvPr/>
+        </p:nvGraphicFramePr>
+        <p:xfrm>
+          <a:off x="822960" y="1874520"/>
+          <a:ext cx="10515600" cy="3337560"/>
+        </p:xfrm>
+        <a:graphic xmlns:a="http://schemas.openxmlformats.org/drawingml/2006/main">
+          <a:graphicData uri="http://schemas.openxmlformats.org/drawingml/2006/chart">
+            <c:chart xmlns:c="http://schemas.openxmlformats.org/drawingml/2006/chart" r:id="rId1"/>
+          </a:graphicData>
+        </a:graphic>
+      </p:graphicFrame>
+      <p:sp>
+        <p:nvSpPr>
+          <p:cNvPr id="7" name="Shape 4"/>
+          <p:cNvSpPr/>
+          <p:nvPr/>
+        </p:nvSpPr>
+        <p:spPr>
+          <a:xfrm>
+            <a:off x="822960" y="5413248"/>
+            <a:ext cx="10515600" cy="0"/>
+          </a:xfrm>
+          <a:prstGeom prst="line">
+            <a:avLst/>
+          </a:prstGeom>
+          <a:noFill/>
+          <a:ln w="12700">
+            <a:solidFill>
+              <a:srgbClr val="1E2D45"/>
+            </a:solidFill>
+            <a:prstDash val="solid"/>
+          </a:ln>
+        </p:spPr>
+      </p:sp>
+      <p:sp>
+        <p:nvSpPr>
+          <p:cNvPr id="8" name="Text 5"/>
+          <p:cNvSpPr/>
+          <p:nvPr/>
+        </p:nvSpPr>
+        <p:spPr>
+          <a:xfrm>
+            <a:off x="822960" y="5504688"/>
+            <a:ext cx="10424160" cy="411480"/>
+          </a:xfrm>
+          <a:prstGeom prst="rect">
+            <a:avLst/>
+          </a:prstGeom>
+          <a:noFill/>
+          <a:ln/>
+        </p:spPr>
+        <p:txBody>
+          <a:bodyPr wrap="square" rtlCol="0" anchor="ctr"/>
+          <a:lstStyle/>
+          <a:p>
+            <a:pPr indent="0" marL="0">
+              <a:buNone/>
+            </a:pPr>
+            <a:r>
+              <a:rPr lang="en-US" sz="1300" i="1" dirty="0">
+                <a:solidFill>
+                  <a:srgbClr val="06B6D4"/>
+                </a:solidFill>
+                <a:latin typeface="Segoe UI" pitchFamily="34" charset="0"/>
+                <a:ea typeface="Segoe UI" pitchFamily="34" charset="-122"/>
+                <a:cs typeface="Segoe UI" pitchFamily="34" charset="-120"/>
+              </a:rPr>
+              <a:t>→  The boring modules carry the most code - they get the most engineering, so the interesting modules stay simple.</a:t>
+            </a:r>
+            <a:endParaRPr lang="en-US" sz="1300" dirty="0"/>
+          </a:p>
+        </p:txBody>
+      </p:sp>
+      <p:sp>
+        <p:nvSpPr>
+          <p:cNvPr id="9" name="Shape 6"/>
+          <p:cNvSpPr/>
+          <p:nvPr/>
+        </p:nvSpPr>
+        <p:spPr>
+          <a:xfrm>
+            <a:off x="822960" y="5961888"/>
+            <a:ext cx="10515600" cy="0"/>
+          </a:xfrm>
+          <a:prstGeom prst="line">
+            <a:avLst/>
+          </a:prstGeom>
+          <a:noFill/>
+          <a:ln w="12700">
+            <a:solidFill>
+              <a:srgbClr val="1E2D45"/>
+            </a:solidFill>
+            <a:prstDash val="solid"/>
+          </a:ln>
+        </p:spPr>
+      </p:sp>
+      <p:sp>
+        <p:nvSpPr>
+          <p:cNvPr id="10" name="Text 7"/>
+          <p:cNvSpPr/>
+          <p:nvPr/>
+        </p:nvSpPr>
+        <p:spPr>
+          <a:xfrm>
+            <a:off x="822960" y="6053328"/>
+            <a:ext cx="9692640" cy="457200"/>
+          </a:xfrm>
+          <a:prstGeom prst="rect">
+            <a:avLst/>
+          </a:prstGeom>
+          <a:noFill/>
+          <a:ln/>
+        </p:spPr>
+        <p:txBody>
+          <a:bodyPr wrap="square" rtlCol="0" anchor="ctr"/>
+          <a:lstStyle/>
+          <a:p>
+            <a:pPr indent="0" marL="0">
+              <a:buNone/>
+            </a:pPr>
+            <a:r>
+              <a:rPr lang="en-US" sz="1150" dirty="0">
+                <a:solidFill>
+                  <a:srgbClr val="64748B"/>
+                </a:solidFill>
+                <a:latin typeface="Segoe UI" pitchFamily="34" charset="0"/>
+                <a:ea typeface="Segoe UI" pitchFamily="34" charset="-122"/>
+                <a:cs typeface="Segoe UI" pitchFamily="34" charset="-120"/>
+              </a:rPr>
+              <a:t>Illustrative module shares; the weighting reflects where correctness matters most.</a:t>
+            </a:r>
+            <a:endParaRPr lang="en-US" sz="1150" dirty="0"/>
+          </a:p>
+        </p:txBody>
+      </p:sp>
+      <p:sp>
+        <p:nvSpPr>
+          <p:cNvPr id="11" name="Text 8"/>
+          <p:cNvSpPr/>
+          <p:nvPr/>
+        </p:nvSpPr>
+        <p:spPr>
+          <a:xfrm>
+            <a:off x="10698480" y="6382512"/>
+            <a:ext cx="1188720" cy="365760"/>
+          </a:xfrm>
+          <a:prstGeom prst="rect">
+            <a:avLst/>
+          </a:prstGeom>
+          <a:noFill/>
+          <a:ln/>
+        </p:spPr>
+        <p:txBody>
+          <a:bodyPr wrap="square" rtlCol="0" anchor="ctr"/>
+          <a:lstStyle/>
+          <a:p>
+            <a:pPr algn="r" indent="0" marL="0">
+              <a:buNone/>
+            </a:pPr>
+            <a:r>
+              <a:rPr lang="en-US" sz="1000" dirty="0">
+                <a:solidFill>
+                  <a:srgbClr val="64748B"/>
+                </a:solidFill>
+                <a:latin typeface="Consolas" pitchFamily="34" charset="0"/>
+                <a:ea typeface="Consolas" pitchFamily="34" charset="-122"/>
+                <a:cs typeface="Consolas" pitchFamily="34" charset="-120"/>
+              </a:rPr>
+              <a:t>9 / 15</a:t>
             </a:r>
             <a:endParaRPr lang="en-US" sz="1000" dirty="0"/>
           </a:p>

--- a/decks/odis.pptx
+++ b/decks/odis.pptx
@@ -203,7 +203,7 @@
             <c:bubble3D val="0"/>
             <c:spPr>
               <a:solidFill>
-                <a:srgbClr val="3B82F6"/>
+                <a:srgbClr val="06B6D4"/>
               </a:solidFill>
               <a:effectLst/>
             </c:spPr>
@@ -218,7 +218,7 @@
                 <a:lstStyle/>
                 <a:p>
                   <a:pPr>
-                    <a:defRPr sz="1000" b="0" i="0" u="none" strike="noStrike">
+                    <a:defRPr sz="1800" b="0" i="0" u="none" strike="noStrike">
                       <a:solidFill>
                         <a:srgbClr val="E2E8F0"/>
                       </a:solidFill>
@@ -243,7 +243,7 @@
                 <a:lstStyle/>
                 <a:p>
                   <a:pPr>
-                    <a:defRPr sz="1000" b="0" i="0" u="none" strike="noStrike">
+                    <a:defRPr sz="1800" b="0" i="0" u="none" strike="noStrike">
                       <a:solidFill>
                         <a:srgbClr val="E2E8F0"/>
                       </a:solidFill>
@@ -268,7 +268,7 @@
                 <a:lstStyle/>
                 <a:p>
                   <a:pPr>
-                    <a:defRPr sz="1000" b="0" i="0" u="none" strike="noStrike">
+                    <a:defRPr sz="1800" b="0" i="0" u="none" strike="noStrike">
                       <a:solidFill>
                         <a:srgbClr val="E2E8F0"/>
                       </a:solidFill>
@@ -293,7 +293,7 @@
                 <a:lstStyle/>
                 <a:p>
                   <a:pPr>
-                    <a:defRPr sz="1000" b="0" i="0" u="none" strike="noStrike">
+                    <a:defRPr sz="1800" b="0" i="0" u="none" strike="noStrike">
                       <a:solidFill>
                         <a:srgbClr val="E2E8F0"/>
                       </a:solidFill>
@@ -318,7 +318,7 @@
                 <a:lstStyle/>
                 <a:p>
                   <a:pPr>
-                    <a:defRPr sz="1000" b="0" i="0" u="none" strike="noStrike">
+                    <a:defRPr sz="1800" b="0" i="0" u="none" strike="noStrike">
                       <a:solidFill>
                         <a:srgbClr val="E2E8F0"/>
                       </a:solidFill>
@@ -405,7 +405,7 @@
           </c:val>
         </c:ser>
         <c:firstSliceAng val="0"/>
-        <c:holeSize val="62"/>
+        <c:holeSize val="60"/>
       </c:doughnutChart>
       <c:spPr>
         <a:solidFill>
@@ -425,7 +425,7 @@
         <a:lstStyle/>
         <a:p>
           <a:pPr>
-            <a:defRPr sz="1100">
+            <a:defRPr sz="1800">
               <a:solidFill>
                 <a:srgbClr val="CBD5E1"/>
               </a:solidFill>
@@ -497,7 +497,7 @@
               <a:lstStyle/>
               <a:p>
                 <a:pPr>
-                  <a:defRPr b="0" i="0" strike="noStrike" sz="1000" u="none">
+                  <a:defRPr b="0" i="0" strike="noStrike" sz="1800" u="none">
                     <a:solidFill>
                       <a:srgbClr val="E2E8F0"/>
                     </a:solidFill>
@@ -609,7 +609,7 @@
             <a:lstStyle/>
             <a:p>
               <a:pPr>
-                <a:defRPr b="0" i="0" strike="noStrike" sz="1000" u="none">
+                <a:defRPr b="0" i="0" strike="noStrike" sz="1800" u="none">
                   <a:solidFill>
                     <a:srgbClr val="E2E8F0"/>
                   </a:solidFill>
@@ -657,7 +657,7 @@
           <a:lstStyle/>
           <a:p>
             <a:pPr>
-              <a:defRPr sz="1100" b="0" i="0" u="none" strike="noStrike">
+              <a:defRPr sz="1800" b="0" i="0" u="none" strike="noStrike">
                 <a:solidFill>
                   <a:srgbClr val="94A3B8"/>
                 </a:solidFill>
@@ -677,6 +677,7 @@
         <c:axId val="2094734552"/>
         <c:scaling>
           <c:orientation val="minMax"/>
+          <c:min val="0"/>
         </c:scaling>
         <c:delete val="0"/>
         <c:axPos val="l"/>
@@ -709,7 +710,7 @@
           <a:lstStyle/>
           <a:p>
             <a:pPr>
-              <a:defRPr sz="1000" b="0" i="0" u="none" strike="noStrike">
+              <a:defRPr sz="1800" b="0" i="0" u="none" strike="noStrike">
                 <a:solidFill>
                   <a:srgbClr val="94A3B8"/>
                 </a:solidFill>
@@ -1057,7 +1058,7 @@
           <a:lstStyle/>
           <a:p>
             <a:pPr>
-              <a:defRPr sz="1100" b="0" i="0" u="none" strike="noStrike">
+              <a:defRPr sz="1800" b="0" i="0" u="none" strike="noStrike">
                 <a:solidFill>
                   <a:srgbClr val="94A3B8"/>
                 </a:solidFill>
@@ -1077,6 +1078,7 @@
         <c:axId val="2094734552"/>
         <c:scaling>
           <c:orientation val="minMax"/>
+          <c:min val="0"/>
         </c:scaling>
         <c:delete val="0"/>
         <c:axPos val="l"/>
@@ -1109,7 +1111,7 @@
           <a:lstStyle/>
           <a:p>
             <a:pPr>
-              <a:defRPr sz="1000" b="0" i="0" u="none" strike="noStrike">
+              <a:defRPr sz="1800" b="0" i="0" u="none" strike="noStrike">
                 <a:solidFill>
                   <a:srgbClr val="94A3B8"/>
                 </a:solidFill>
@@ -1141,7 +1143,7 @@
         <a:lstStyle/>
         <a:p>
           <a:pPr>
-            <a:defRPr sz="1100">
+            <a:defRPr sz="1800">
               <a:solidFill>
                 <a:srgbClr val="CBD5E1"/>
               </a:solidFill>
@@ -1568,7 +1570,7 @@
           <a:p>
             <a:r>
               <a:rPr lang="en-US" dirty="0"/>
-              <a:t/>
+              <a:t>Opening: introduce yourself and this deck, "Open Data Intelligence Suite (ODIS)". | Transition: next up - "What this deck covers".</a:t>
             </a:r>
             <a:endParaRPr lang="en-US" dirty="0"/>
           </a:p>
@@ -1656,7 +1658,7 @@
           <a:p>
             <a:r>
               <a:rPr lang="en-US" dirty="0"/>
-              <a:t/>
+              <a:t>Key message: What releasing it changed | Talk track: The fastest way to improve internal tools is to pretend a stranger will read them - open source makes the stranger real. | Transition: next up - "Internal glue code vs open-source framework".</a:t>
             </a:r>
             <a:endParaRPr lang="en-US" dirty="0"/>
           </a:p>
@@ -1744,7 +1746,7 @@
           <a:p>
             <a:r>
               <a:rPr lang="en-US" dirty="0"/>
-              <a:t/>
+              <a:t>Key message: Internal glue code vs open-source framework | Talk track: Releasing it was a forcing function - the code got better because it had to. | Transition: next up - "Where ODIS earns its keep".</a:t>
             </a:r>
             <a:endParaRPr lang="en-US" dirty="0"/>
           </a:p>
@@ -1832,7 +1834,7 @@
           <a:p>
             <a:r>
               <a:rPr lang="en-US" dirty="0"/>
-              <a:t/>
+              <a:t>Key message: Where ODIS earns its keep | Talk track: Production-ready means it ships in work a client is paying for. | Transition: next up - "Hours per engagement: glue vs analysis".</a:t>
             </a:r>
             <a:endParaRPr lang="en-US" dirty="0"/>
           </a:p>
@@ -1920,7 +1922,7 @@
           <a:p>
             <a:r>
               <a:rPr lang="en-US" dirty="0"/>
-              <a:t/>
+              <a:t>Key message: Hours per engagement: glue vs analysis | Insight: Once the skeleton runs itself, the hours shift from glue to the analysis clients are actually paying for. | Talk track: Illustrative effort pattern on an engagement running ODIS from kickoff. | Transition: next up - "Where it is heading".</a:t>
             </a:r>
             <a:endParaRPr lang="en-US" dirty="0"/>
           </a:p>
@@ -2008,7 +2010,7 @@
           <a:p>
             <a:r>
               <a:rPr lang="en-US" dirty="0"/>
-              <a:t/>
+              <a:t>Key message: Where it is heading | Talk track: Built in the open, shipped in the open. | Transition: next up - "Own the boring 70%, spend on the brilliant 30%".</a:t>
             </a:r>
             <a:endParaRPr lang="en-US" dirty="0"/>
           </a:p>
@@ -2096,7 +2098,7 @@
           <a:p>
             <a:r>
               <a:rPr lang="en-US" dirty="0"/>
-              <a:t/>
+              <a:t>Key message: Own the boring 70%, spend on the brilliant 30% | Transition: close with the call to action on the contact slide, invite questions.</a:t>
             </a:r>
             <a:endParaRPr lang="en-US" dirty="0"/>
           </a:p>
@@ -2184,7 +2186,7 @@
           <a:p>
             <a:r>
               <a:rPr lang="en-US" dirty="0"/>
-              <a:t/>
+              <a:t>Key message: What this deck covers | Agenda: The glue problem that kills most data projects before the insight; Four modules: ingest, clean, enrich, export and report; Design principles that survived production; What open-sourcing 4,305 lines changed in the code itself; Where ODIS runs today - and where it is heading | Transition: next up - "Data work repeats itself".</a:t>
             </a:r>
             <a:endParaRPr lang="en-US" dirty="0"/>
           </a:p>
@@ -2272,7 +2274,7 @@
           <a:p>
             <a:r>
               <a:rPr lang="en-US" dirty="0"/>
-              <a:t/>
+              <a:t>Key message: Data work repeats itself | Talk track: Most data projects do not die from hard problems - they die from repeated ones. | Transition: next up - "The pipeline, as first-class citizens".</a:t>
             </a:r>
             <a:endParaRPr lang="en-US" dirty="0"/>
           </a:p>
@@ -2360,7 +2362,7 @@
           <a:p>
             <a:r>
               <a:rPr lang="en-US" dirty="0"/>
-              <a:t/>
+              <a:t>Key message: The pipeline, as first-class citizens | Talk track: Each module is composable - use one, or run the whole pipeline. | Transition: next up - "Small enough to read, strong enough to run".</a:t>
             </a:r>
             <a:endParaRPr lang="en-US" dirty="0"/>
           </a:p>
@@ -2448,7 +2450,7 @@
           <a:p>
             <a:r>
               <a:rPr lang="en-US" dirty="0"/>
-              <a:t/>
+              <a:t>Key message: Small enough to read, strong enough to run | Talk track: Built for freelancers and small teams who need BI-grade hygiene without a platform team. | Transition: next up - "Where a typical engagement's effort used to go".</a:t>
             </a:r>
             <a:endParaRPr lang="en-US" dirty="0"/>
           </a:p>
@@ -2536,7 +2538,7 @@
           <a:p>
             <a:r>
               <a:rPr lang="en-US" dirty="0"/>
-              <a:t/>
+              <a:t>Key message: Where a typical engagement's effort used to go | Insight: 70% of the effort was skeleton - ODIS exists to hand that time back to the 30% that produces insight. | Talk track: Illustrative effort distribution behind the 'boring 70%' framing. | Transition: next up - "Every module ships with guardrails".</a:t>
             </a:r>
             <a:endParaRPr lang="en-US" dirty="0"/>
           </a:p>
@@ -2624,7 +2626,7 @@
           <a:p>
             <a:r>
               <a:rPr lang="en-US" dirty="0"/>
-              <a:t/>
+              <a:t>Key message: Every module ships with guardrails | Talk track: Validation lives at every seam - data cannot cross a boundary unchecked. | Transition: next up - "Principles that survived production".</a:t>
             </a:r>
             <a:endParaRPr lang="en-US" dirty="0"/>
           </a:p>
@@ -2712,7 +2714,7 @@
           <a:p>
             <a:r>
               <a:rPr lang="en-US" dirty="0"/>
-              <a:t/>
+              <a:t>Key message: Principles that survived production | Talk track: Heavyweight magic loses to boring, inspectable mechanics. | Transition: next up - "Where the 4,305 lines actually live".</a:t>
             </a:r>
             <a:endParaRPr lang="en-US" dirty="0"/>
           </a:p>
@@ -2800,7 +2802,7 @@
           <a:p>
             <a:r>
               <a:rPr lang="en-US" dirty="0"/>
-              <a:t/>
+              <a:t>Key message: Where the 4,305 lines actually live | Insight: The boring modules carry the most code - they get the most engineering, so the interesting modules stay simple. | Talk track: Illustrative module shares; the weighting reflects where correctness matters most. | Transition: next up - "What releasing it changed".</a:t>
             </a:r>
             <a:endParaRPr lang="en-US" dirty="0"/>
           </a:p>
@@ -3221,7 +3223,7 @@
         </p:nvSpPr>
         <p:spPr>
           <a:xfrm>
-            <a:off x="822960" y="1783080"/>
+            <a:off x="822960" y="1737360"/>
             <a:ext cx="10515600" cy="457200"/>
           </a:xfrm>
           <a:prstGeom prst="rect">
@@ -3238,7 +3240,7 @@
               <a:buNone/>
             </a:pPr>
             <a:r>
-              <a:rPr lang="en-US" sz="1400" spc="400" kern="0" dirty="0">
+              <a:rPr lang="en-US" sz="1800" spc="400" kern="0" dirty="0">
                 <a:solidFill>
                   <a:srgbClr val="06B6D4"/>
                 </a:solidFill>
@@ -3248,7 +3250,7 @@
               </a:rPr>
               <a:t>ZALIN PLATFORM · OPEN SOURCE</a:t>
             </a:r>
-            <a:endParaRPr lang="en-US" sz="1400" dirty="0"/>
+            <a:endParaRPr lang="en-US" sz="1800" dirty="0"/>
           </a:p>
         </p:txBody>
       </p:sp>
@@ -3260,7 +3262,7 @@
         </p:nvSpPr>
         <p:spPr>
           <a:xfrm>
-            <a:off x="822960" y="2286000"/>
+            <a:off x="822960" y="2240280"/>
             <a:ext cx="10607040" cy="1691640"/>
           </a:xfrm>
           <a:prstGeom prst="rect">
@@ -3299,8 +3301,8 @@
         </p:nvSpPr>
         <p:spPr>
           <a:xfrm>
-            <a:off x="822960" y="4023360"/>
-            <a:ext cx="10058400" cy="777240"/>
+            <a:off x="822960" y="3977640"/>
+            <a:ext cx="10058400" cy="822960"/>
           </a:xfrm>
           <a:prstGeom prst="rect">
             <a:avLst/>
@@ -3316,7 +3318,7 @@
               <a:buNone/>
             </a:pPr>
             <a:r>
-              <a:rPr lang="en-US" sz="1700" dirty="0">
+              <a:rPr lang="en-US" sz="2000" dirty="0">
                 <a:solidFill>
                   <a:srgbClr val="94A3B8"/>
                 </a:solidFill>
@@ -3326,7 +3328,7 @@
               </a:rPr>
               <a:t>Ingest, clean, enrich, report - without rewriting the glue</a:t>
             </a:r>
-            <a:endParaRPr lang="en-US" sz="1700" dirty="0"/>
+            <a:endParaRPr lang="en-US" sz="2000" dirty="0"/>
           </a:p>
         </p:txBody>
       </p:sp>
@@ -3338,7 +3340,7 @@
         </p:nvSpPr>
         <p:spPr>
           <a:xfrm>
-            <a:off x="822960" y="5440680"/>
+            <a:off x="822960" y="5349240"/>
             <a:ext cx="4114800" cy="0"/>
           </a:xfrm>
           <a:prstGeom prst="line">
@@ -3361,8 +3363,8 @@
         </p:nvSpPr>
         <p:spPr>
           <a:xfrm>
-            <a:off x="822960" y="5596128"/>
-            <a:ext cx="10058400" cy="457200"/>
+            <a:off x="822960" y="5532120"/>
+            <a:ext cx="10058400" cy="502920"/>
           </a:xfrm>
           <a:prstGeom prst="rect">
             <a:avLst/>
@@ -3378,9 +3380,9 @@
               <a:buNone/>
             </a:pPr>
             <a:r>
-              <a:rPr lang="en-US" sz="1250" dirty="0">
-                <a:solidFill>
-                  <a:srgbClr val="64748B"/>
+              <a:rPr lang="en-US" sz="1800" dirty="0">
+                <a:solidFill>
+                  <a:srgbClr val="8FA3BF"/>
                 </a:solidFill>
                 <a:latin typeface="Segoe UI" pitchFamily="34" charset="0"/>
                 <a:ea typeface="Segoe UI" pitchFamily="34" charset="-122"/>
@@ -3388,7 +3390,7 @@
               </a:rPr>
               <a:t>Rezalian Vatiady · Zalin Labs · 2026</a:t>
             </a:r>
-            <a:endParaRPr lang="en-US" sz="1250" dirty="0"/>
+            <a:endParaRPr lang="en-US" sz="1800" dirty="0"/>
           </a:p>
         </p:txBody>
       </p:sp>
@@ -3400,8 +3402,8 @@
         </p:nvSpPr>
         <p:spPr>
           <a:xfrm>
-            <a:off x="10698480" y="6382512"/>
-            <a:ext cx="1188720" cy="365760"/>
+            <a:off x="10698480" y="6309360"/>
+            <a:ext cx="1188720" cy="411480"/>
           </a:xfrm>
           <a:prstGeom prst="rect">
             <a:avLst/>
@@ -3417,9 +3419,9 @@
               <a:buNone/>
             </a:pPr>
             <a:r>
-              <a:rPr lang="en-US" sz="1000" dirty="0">
-                <a:solidFill>
-                  <a:srgbClr val="64748B"/>
+              <a:rPr lang="en-US" sz="1800" dirty="0">
+                <a:solidFill>
+                  <a:srgbClr val="8FA3BF"/>
                 </a:solidFill>
                 <a:latin typeface="Consolas" pitchFamily="34" charset="0"/>
                 <a:ea typeface="Consolas" pitchFamily="34" charset="-122"/>
@@ -3427,7 +3429,7 @@
               </a:rPr>
               <a:t>1 / 15</a:t>
             </a:r>
-            <a:endParaRPr lang="en-US" sz="1000" dirty="0"/>
+            <a:endParaRPr lang="en-US" sz="1800" dirty="0"/>
           </a:p>
         </p:txBody>
       </p:sp>
@@ -3511,8 +3513,8 @@
         </p:nvSpPr>
         <p:spPr>
           <a:xfrm>
-            <a:off x="822960" y="502920"/>
-            <a:ext cx="10515600" cy="365760"/>
+            <a:off x="822960" y="457200"/>
+            <a:ext cx="10515600" cy="411480"/>
           </a:xfrm>
           <a:prstGeom prst="rect">
             <a:avLst/>
@@ -3528,7 +3530,7 @@
               <a:buNone/>
             </a:pPr>
             <a:r>
-              <a:rPr lang="en-US" sz="1200" spc="300" kern="0" dirty="0">
+              <a:rPr lang="en-US" sz="1800" spc="300" kern="0" dirty="0">
                 <a:solidFill>
                   <a:srgbClr val="06B6D4"/>
                 </a:solidFill>
@@ -3538,7 +3540,7 @@
               </a:rPr>
               <a:t>WHY OPEN</a:t>
             </a:r>
-            <a:endParaRPr lang="en-US" sz="1200" dirty="0"/>
+            <a:endParaRPr lang="en-US" sz="1800" dirty="0"/>
           </a:p>
         </p:txBody>
       </p:sp>
@@ -3589,7 +3591,7 @@
         </p:nvSpPr>
         <p:spPr>
           <a:xfrm>
-            <a:off x="1371600" y="3035808"/>
+            <a:off x="1371600" y="2907792"/>
             <a:ext cx="9464040" cy="0"/>
           </a:xfrm>
           <a:prstGeom prst="line">
@@ -3612,7 +3614,7 @@
         </p:nvSpPr>
         <p:spPr>
           <a:xfrm>
-            <a:off x="1289304" y="2953512"/>
+            <a:off x="1289304" y="2825496"/>
             <a:ext cx="164592" cy="164592"/>
           </a:xfrm>
           <a:prstGeom prst="ellipse">
@@ -3637,8 +3639,8 @@
         </p:nvSpPr>
         <p:spPr>
           <a:xfrm>
-            <a:off x="342900" y="2395728"/>
-            <a:ext cx="2057400" cy="365760"/>
+            <a:off x="297180" y="2212848"/>
+            <a:ext cx="2148840" cy="384048"/>
           </a:xfrm>
           <a:prstGeom prst="rect">
             <a:avLst/>
@@ -3654,7 +3656,7 @@
               <a:buNone/>
             </a:pPr>
             <a:r>
-              <a:rPr lang="en-US" sz="1100" b="1" dirty="0">
+              <a:rPr lang="en-US" sz="1800" b="1" dirty="0">
                 <a:solidFill>
                   <a:srgbClr val="3B82F6"/>
                 </a:solidFill>
@@ -3664,7 +3666,7 @@
               </a:rPr>
               <a:t>Week 1</a:t>
             </a:r>
-            <a:endParaRPr lang="en-US" sz="1100" dirty="0"/>
+            <a:endParaRPr lang="en-US" sz="1800" dirty="0"/>
           </a:p>
         </p:txBody>
       </p:sp>
@@ -3676,8 +3678,8 @@
         </p:nvSpPr>
         <p:spPr>
           <a:xfrm>
-            <a:off x="342900" y="3310128"/>
-            <a:ext cx="2057400" cy="566928"/>
+            <a:off x="297180" y="3200400"/>
+            <a:ext cx="2148840" cy="713232"/>
           </a:xfrm>
           <a:prstGeom prst="rect">
             <a:avLst/>
@@ -3693,7 +3695,7 @@
               <a:buNone/>
             </a:pPr>
             <a:r>
-              <a:rPr lang="en-US" sz="1250" b="1" dirty="0">
+              <a:rPr lang="en-US" sz="1800" b="1" dirty="0">
                 <a:solidFill>
                   <a:srgbClr val="FFFFFF"/>
                 </a:solidFill>
@@ -3703,7 +3705,7 @@
               </a:rPr>
               <a:t>Schemas stricter</a:t>
             </a:r>
-            <a:endParaRPr lang="en-US" sz="1250" dirty="0"/>
+            <a:endParaRPr lang="en-US" sz="1800" dirty="0"/>
           </a:p>
         </p:txBody>
       </p:sp>
@@ -3715,8 +3717,8 @@
         </p:nvSpPr>
         <p:spPr>
           <a:xfrm>
-            <a:off x="342900" y="3895344"/>
-            <a:ext cx="2057400" cy="1234440"/>
+            <a:off x="297180" y="3931920"/>
+            <a:ext cx="2148840" cy="1417320"/>
           </a:xfrm>
           <a:prstGeom prst="rect">
             <a:avLst/>
@@ -3732,7 +3734,7 @@
               <a:buNone/>
             </a:pPr>
             <a:r>
-              <a:rPr lang="en-US" sz="1000" dirty="0">
+              <a:rPr lang="en-US" sz="1800" dirty="0">
                 <a:solidFill>
                   <a:srgbClr val="CBD5E1"/>
                 </a:solidFill>
@@ -3742,7 +3744,7 @@
               </a:rPr>
               <a:t>Public code cannot survive vague assumptions - every schema got explicit.</a:t>
             </a:r>
-            <a:endParaRPr lang="en-US" sz="1000" dirty="0"/>
+            <a:endParaRPr lang="en-US" sz="1800" dirty="0"/>
           </a:p>
         </p:txBody>
       </p:sp>
@@ -3754,7 +3756,7 @@
         </p:nvSpPr>
         <p:spPr>
           <a:xfrm>
-            <a:off x="4443984" y="2953512"/>
+            <a:off x="4443984" y="2825496"/>
             <a:ext cx="164592" cy="164592"/>
           </a:xfrm>
           <a:prstGeom prst="ellipse">
@@ -3779,8 +3781,8 @@
         </p:nvSpPr>
         <p:spPr>
           <a:xfrm>
-            <a:off x="3497580" y="2395728"/>
-            <a:ext cx="2057400" cy="365760"/>
+            <a:off x="3451860" y="2212848"/>
+            <a:ext cx="2148840" cy="384048"/>
           </a:xfrm>
           <a:prstGeom prst="rect">
             <a:avLst/>
@@ -3796,7 +3798,7 @@
               <a:buNone/>
             </a:pPr>
             <a:r>
-              <a:rPr lang="en-US" sz="1100" b="1" dirty="0">
+              <a:rPr lang="en-US" sz="1800" b="1" dirty="0">
                 <a:solidFill>
                   <a:srgbClr val="06B6D4"/>
                 </a:solidFill>
@@ -3806,7 +3808,7 @@
               </a:rPr>
               <a:t>Week 1</a:t>
             </a:r>
-            <a:endParaRPr lang="en-US" sz="1100" dirty="0"/>
+            <a:endParaRPr lang="en-US" sz="1800" dirty="0"/>
           </a:p>
         </p:txBody>
       </p:sp>
@@ -3818,8 +3820,8 @@
         </p:nvSpPr>
         <p:spPr>
           <a:xfrm>
-            <a:off x="3497580" y="3310128"/>
-            <a:ext cx="2057400" cy="566928"/>
+            <a:off x="3451860" y="3200400"/>
+            <a:ext cx="2148840" cy="713232"/>
           </a:xfrm>
           <a:prstGeom prst="rect">
             <a:avLst/>
@@ -3835,7 +3837,7 @@
               <a:buNone/>
             </a:pPr>
             <a:r>
-              <a:rPr lang="en-US" sz="1250" b="1" dirty="0">
+              <a:rPr lang="en-US" sz="1800" b="1" dirty="0">
                 <a:solidFill>
                   <a:srgbClr val="FFFFFF"/>
                 </a:solidFill>
@@ -3845,7 +3847,7 @@
               </a:rPr>
               <a:t>Errors clearer</a:t>
             </a:r>
-            <a:endParaRPr lang="en-US" sz="1250" dirty="0"/>
+            <a:endParaRPr lang="en-US" sz="1800" dirty="0"/>
           </a:p>
         </p:txBody>
       </p:sp>
@@ -3857,8 +3859,8 @@
         </p:nvSpPr>
         <p:spPr>
           <a:xfrm>
-            <a:off x="3497580" y="3895344"/>
-            <a:ext cx="2057400" cy="1234440"/>
+            <a:off x="3451860" y="3931920"/>
+            <a:ext cx="2148840" cy="1417320"/>
           </a:xfrm>
           <a:prstGeom prst="rect">
             <a:avLst/>
@@ -3874,7 +3876,7 @@
               <a:buNone/>
             </a:pPr>
             <a:r>
-              <a:rPr lang="en-US" sz="1000" dirty="0">
+              <a:rPr lang="en-US" sz="1800" dirty="0">
                 <a:solidFill>
                   <a:srgbClr val="CBD5E1"/>
                 </a:solidFill>
@@ -3884,7 +3886,7 @@
               </a:rPr>
               <a:t>Messages were rewritten for strangers who do not share the author's context.</a:t>
             </a:r>
-            <a:endParaRPr lang="en-US" sz="1000" dirty="0"/>
+            <a:endParaRPr lang="en-US" sz="1800" dirty="0"/>
           </a:p>
         </p:txBody>
       </p:sp>
@@ -3896,7 +3898,7 @@
         </p:nvSpPr>
         <p:spPr>
           <a:xfrm>
-            <a:off x="7598664" y="2953512"/>
+            <a:off x="7598664" y="2825496"/>
             <a:ext cx="164592" cy="164592"/>
           </a:xfrm>
           <a:prstGeom prst="ellipse">
@@ -3921,8 +3923,8 @@
         </p:nvSpPr>
         <p:spPr>
           <a:xfrm>
-            <a:off x="6652260" y="2395728"/>
-            <a:ext cx="2057400" cy="365760"/>
+            <a:off x="6606540" y="2212848"/>
+            <a:ext cx="2148840" cy="384048"/>
           </a:xfrm>
           <a:prstGeom prst="rect">
             <a:avLst/>
@@ -3938,7 +3940,7 @@
               <a:buNone/>
             </a:pPr>
             <a:r>
-              <a:rPr lang="en-US" sz="1100" b="1" dirty="0">
+              <a:rPr lang="en-US" sz="1800" b="1" dirty="0">
                 <a:solidFill>
                   <a:srgbClr val="3B82F6"/>
                 </a:solidFill>
@@ -3948,7 +3950,7 @@
               </a:rPr>
               <a:t>Week 2</a:t>
             </a:r>
-            <a:endParaRPr lang="en-US" sz="1100" dirty="0"/>
+            <a:endParaRPr lang="en-US" sz="1800" dirty="0"/>
           </a:p>
         </p:txBody>
       </p:sp>
@@ -3960,8 +3962,8 @@
         </p:nvSpPr>
         <p:spPr>
           <a:xfrm>
-            <a:off x="6652260" y="3310128"/>
-            <a:ext cx="2057400" cy="566928"/>
+            <a:off x="6606540" y="3200400"/>
+            <a:ext cx="2148840" cy="713232"/>
           </a:xfrm>
           <a:prstGeom prst="rect">
             <a:avLst/>
@@ -3977,7 +3979,7 @@
               <a:buNone/>
             </a:pPr>
             <a:r>
-              <a:rPr lang="en-US" sz="1250" b="1" dirty="0">
+              <a:rPr lang="en-US" sz="1800" b="1" dirty="0">
                 <a:solidFill>
                   <a:srgbClr val="FFFFFF"/>
                 </a:solidFill>
@@ -3987,7 +3989,7 @@
               </a:rPr>
               <a:t>Docs honest</a:t>
             </a:r>
-            <a:endParaRPr lang="en-US" sz="1250" dirty="0"/>
+            <a:endParaRPr lang="en-US" sz="1800" dirty="0"/>
           </a:p>
         </p:txBody>
       </p:sp>
@@ -3999,8 +4001,8 @@
         </p:nvSpPr>
         <p:spPr>
           <a:xfrm>
-            <a:off x="6652260" y="3895344"/>
-            <a:ext cx="2057400" cy="1234440"/>
+            <a:off x="6606540" y="3931920"/>
+            <a:ext cx="2148840" cy="1417320"/>
           </a:xfrm>
           <a:prstGeom prst="rect">
             <a:avLst/>
@@ -4016,7 +4018,7 @@
               <a:buNone/>
             </a:pPr>
             <a:r>
-              <a:rPr lang="en-US" sz="1000" dirty="0">
+              <a:rPr lang="en-US" sz="1800" dirty="0">
                 <a:solidFill>
                   <a:srgbClr val="CBD5E1"/>
                 </a:solidFill>
@@ -4026,7 +4028,7 @@
               </a:rPr>
               <a:t>Documentation stopped describing intentions and started describing behavior.</a:t>
             </a:r>
-            <a:endParaRPr lang="en-US" sz="1000" dirty="0"/>
+            <a:endParaRPr lang="en-US" sz="1800" dirty="0"/>
           </a:p>
         </p:txBody>
       </p:sp>
@@ -4038,7 +4040,7 @@
         </p:nvSpPr>
         <p:spPr>
           <a:xfrm>
-            <a:off x="10753344" y="2953512"/>
+            <a:off x="10753344" y="2825496"/>
             <a:ext cx="164592" cy="164592"/>
           </a:xfrm>
           <a:prstGeom prst="ellipse">
@@ -4063,8 +4065,8 @@
         </p:nvSpPr>
         <p:spPr>
           <a:xfrm>
-            <a:off x="9806940" y="2395728"/>
-            <a:ext cx="2057400" cy="365760"/>
+            <a:off x="9761220" y="2212848"/>
+            <a:ext cx="2148840" cy="384048"/>
           </a:xfrm>
           <a:prstGeom prst="rect">
             <a:avLst/>
@@ -4080,7 +4082,7 @@
               <a:buNone/>
             </a:pPr>
             <a:r>
-              <a:rPr lang="en-US" sz="1100" b="1" dirty="0">
+              <a:rPr lang="en-US" sz="1800" b="1" dirty="0">
                 <a:solidFill>
                   <a:srgbClr val="06B6D4"/>
                 </a:solidFill>
@@ -4090,7 +4092,7 @@
               </a:rPr>
               <a:t>Same week</a:t>
             </a:r>
-            <a:endParaRPr lang="en-US" sz="1100" dirty="0"/>
+            <a:endParaRPr lang="en-US" sz="1800" dirty="0"/>
           </a:p>
         </p:txBody>
       </p:sp>
@@ -4102,8 +4104,8 @@
         </p:nvSpPr>
         <p:spPr>
           <a:xfrm>
-            <a:off x="9806940" y="3310128"/>
-            <a:ext cx="2057400" cy="566928"/>
+            <a:off x="9761220" y="3200400"/>
+            <a:ext cx="2148840" cy="713232"/>
           </a:xfrm>
           <a:prstGeom prst="rect">
             <a:avLst/>
@@ -4119,7 +4121,7 @@
               <a:buNone/>
             </a:pPr>
             <a:r>
-              <a:rPr lang="en-US" sz="1250" b="1" dirty="0">
+              <a:rPr lang="en-US" sz="1800" b="1" dirty="0">
                 <a:solidFill>
                   <a:srgbClr val="FFFFFF"/>
                 </a:solidFill>
@@ -4129,7 +4131,7 @@
               </a:rPr>
               <a:t>Internal pipeline improved</a:t>
             </a:r>
-            <a:endParaRPr lang="en-US" sz="1250" dirty="0"/>
+            <a:endParaRPr lang="en-US" sz="1800" dirty="0"/>
           </a:p>
         </p:txBody>
       </p:sp>
@@ -4141,8 +4143,8 @@
         </p:nvSpPr>
         <p:spPr>
           <a:xfrm>
-            <a:off x="9806940" y="3895344"/>
-            <a:ext cx="2057400" cy="1234440"/>
+            <a:off x="9761220" y="3931920"/>
+            <a:ext cx="2148840" cy="1417320"/>
           </a:xfrm>
           <a:prstGeom prst="rect">
             <a:avLst/>
@@ -4158,7 +4160,7 @@
               <a:buNone/>
             </a:pPr>
             <a:r>
-              <a:rPr lang="en-US" sz="1000" dirty="0">
+              <a:rPr lang="en-US" sz="1800" dirty="0">
                 <a:solidFill>
                   <a:srgbClr val="CBD5E1"/>
                 </a:solidFill>
@@ -4168,7 +4170,7 @@
               </a:rPr>
               <a:t>The internal version got more reliable the same week it went public.</a:t>
             </a:r>
-            <a:endParaRPr lang="en-US" sz="1000" dirty="0"/>
+            <a:endParaRPr lang="en-US" sz="1800" dirty="0"/>
           </a:p>
         </p:txBody>
       </p:sp>
@@ -4203,8 +4205,8 @@
         </p:nvSpPr>
         <p:spPr>
           <a:xfrm>
-            <a:off x="822960" y="6053328"/>
-            <a:ext cx="9692640" cy="457200"/>
+            <a:off x="822960" y="6035040"/>
+            <a:ext cx="10424160" cy="566928"/>
           </a:xfrm>
           <a:prstGeom prst="rect">
             <a:avLst/>
@@ -4220,9 +4222,9 @@
               <a:buNone/>
             </a:pPr>
             <a:r>
-              <a:rPr lang="en-US" sz="1150" dirty="0">
-                <a:solidFill>
-                  <a:srgbClr val="64748B"/>
+              <a:rPr lang="en-US" sz="1800" dirty="0">
+                <a:solidFill>
+                  <a:srgbClr val="8FA3BF"/>
                 </a:solidFill>
                 <a:latin typeface="Segoe UI" pitchFamily="34" charset="0"/>
                 <a:ea typeface="Segoe UI" pitchFamily="34" charset="-122"/>
@@ -4230,7 +4232,7 @@
               </a:rPr>
               <a:t>The fastest way to improve internal tools is to pretend a stranger will read them - open source makes the stranger real.</a:t>
             </a:r>
-            <a:endParaRPr lang="en-US" sz="1150" dirty="0"/>
+            <a:endParaRPr lang="en-US" sz="1800" dirty="0"/>
           </a:p>
         </p:txBody>
       </p:sp>
@@ -4242,8 +4244,8 @@
         </p:nvSpPr>
         <p:spPr>
           <a:xfrm>
-            <a:off x="10698480" y="6382512"/>
-            <a:ext cx="1188720" cy="365760"/>
+            <a:off x="10698480" y="6309360"/>
+            <a:ext cx="1188720" cy="411480"/>
           </a:xfrm>
           <a:prstGeom prst="rect">
             <a:avLst/>
@@ -4259,9 +4261,9 @@
               <a:buNone/>
             </a:pPr>
             <a:r>
-              <a:rPr lang="en-US" sz="1000" dirty="0">
-                <a:solidFill>
-                  <a:srgbClr val="64748B"/>
+              <a:rPr lang="en-US" sz="1800" dirty="0">
+                <a:solidFill>
+                  <a:srgbClr val="8FA3BF"/>
                 </a:solidFill>
                 <a:latin typeface="Consolas" pitchFamily="34" charset="0"/>
                 <a:ea typeface="Consolas" pitchFamily="34" charset="-122"/>
@@ -4269,7 +4271,7 @@
               </a:rPr>
               <a:t>10 / 15</a:t>
             </a:r>
-            <a:endParaRPr lang="en-US" sz="1000" dirty="0"/>
+            <a:endParaRPr lang="en-US" sz="1800" dirty="0"/>
           </a:p>
         </p:txBody>
       </p:sp>
@@ -4353,8 +4355,8 @@
         </p:nvSpPr>
         <p:spPr>
           <a:xfrm>
-            <a:off x="822960" y="502920"/>
-            <a:ext cx="10515600" cy="365760"/>
+            <a:off x="822960" y="457200"/>
+            <a:ext cx="10515600" cy="411480"/>
           </a:xfrm>
           <a:prstGeom prst="rect">
             <a:avLst/>
@@ -4370,7 +4372,7 @@
               <a:buNone/>
             </a:pPr>
             <a:r>
-              <a:rPr lang="en-US" sz="1200" spc="300" kern="0" dirty="0">
+              <a:rPr lang="en-US" sz="1800" spc="300" kern="0" dirty="0">
                 <a:solidFill>
                   <a:srgbClr val="06B6D4"/>
                 </a:solidFill>
@@ -4380,7 +4382,7 @@
               </a:rPr>
               <a:t>BEFORE / AFTER</a:t>
             </a:r>
-            <a:endParaRPr lang="en-US" sz="1200" dirty="0"/>
+            <a:endParaRPr lang="en-US" sz="1800" dirty="0"/>
           </a:p>
         </p:txBody>
       </p:sp>
@@ -4431,12 +4433,12 @@
         </p:nvSpPr>
         <p:spPr>
           <a:xfrm>
-            <a:off x="822960" y="2011680"/>
-            <a:ext cx="5074920" cy="3611880"/>
+            <a:off x="822960" y="1965960"/>
+            <a:ext cx="5074920" cy="3657600"/>
           </a:xfrm>
           <a:prstGeom prst="roundRect">
             <a:avLst>
-              <a:gd name="adj" fmla="val 2025"/>
+              <a:gd name="adj" fmla="val 2000"/>
             </a:avLst>
           </a:prstGeom>
           <a:solidFill>
@@ -4458,8 +4460,8 @@
         </p:nvSpPr>
         <p:spPr>
           <a:xfrm>
-            <a:off x="1097280" y="2240280"/>
-            <a:ext cx="4526280" cy="502920"/>
+            <a:off x="1097280" y="2194560"/>
+            <a:ext cx="4526280" cy="548640"/>
           </a:xfrm>
           <a:prstGeom prst="rect">
             <a:avLst/>
@@ -4475,7 +4477,7 @@
               <a:buNone/>
             </a:pPr>
             <a:r>
-              <a:rPr lang="en-US" sz="1650" b="1" dirty="0">
+              <a:rPr lang="en-US" sz="2000" b="1" dirty="0">
                 <a:solidFill>
                   <a:srgbClr val="06B6D4"/>
                 </a:solidFill>
@@ -4485,7 +4487,7 @@
               </a:rPr>
               <a:t>Internal glue code</a:t>
             </a:r>
-            <a:endParaRPr lang="en-US" sz="1650" dirty="0"/>
+            <a:endParaRPr lang="en-US" sz="2000" dirty="0"/>
           </a:p>
         </p:txBody>
       </p:sp>
@@ -4521,7 +4523,7 @@
               <a:buChar char="▸"/>
             </a:pPr>
             <a:r>
-              <a:rPr lang="en-US" sz="1280" dirty="0">
+              <a:rPr lang="en-US" sz="1800" dirty="0">
                 <a:solidFill>
                   <a:srgbClr val="CBD5E1"/>
                 </a:solidFill>
@@ -4531,7 +4533,7 @@
               </a:rPr>
               <a:t>Vague assumptions survive because nobody checks</a:t>
             </a:r>
-            <a:endParaRPr lang="en-US" sz="1280" dirty="0"/>
+            <a:endParaRPr lang="en-US" sz="1800" dirty="0"/>
           </a:p>
           <a:p>
             <a:pPr marL="342900" indent="-342900">
@@ -4545,7 +4547,7 @@
               <a:buChar char="▸"/>
             </a:pPr>
             <a:r>
-              <a:rPr lang="en-US" sz="1280" dirty="0">
+              <a:rPr lang="en-US" sz="1800" dirty="0">
                 <a:solidFill>
                   <a:srgbClr val="CBD5E1"/>
                 </a:solidFill>
@@ -4555,7 +4557,7 @@
               </a:rPr>
               <a:t>Errors only the author can decode</a:t>
             </a:r>
-            <a:endParaRPr lang="en-US" sz="1280" dirty="0"/>
+            <a:endParaRPr lang="en-US" sz="1800" dirty="0"/>
           </a:p>
           <a:p>
             <a:pPr marL="342900" indent="-342900">
@@ -4569,7 +4571,7 @@
               <a:buChar char="▸"/>
             </a:pPr>
             <a:r>
-              <a:rPr lang="en-US" sz="1280" dirty="0">
+              <a:rPr lang="en-US" sz="1800" dirty="0">
                 <a:solidFill>
                   <a:srgbClr val="CBD5E1"/>
                 </a:solidFill>
@@ -4579,7 +4581,7 @@
               </a:rPr>
               <a:t>Documentation is a best-effort afterthought</a:t>
             </a:r>
-            <a:endParaRPr lang="en-US" sz="1280" dirty="0"/>
+            <a:endParaRPr lang="en-US" sz="1800" dirty="0"/>
           </a:p>
           <a:p>
             <a:pPr marL="342900" indent="-342900">
@@ -4593,7 +4595,7 @@
               <a:buChar char="▸"/>
             </a:pPr>
             <a:r>
-              <a:rPr lang="en-US" sz="1280" dirty="0">
+              <a:rPr lang="en-US" sz="1800" dirty="0">
                 <a:solidFill>
                   <a:srgbClr val="CBD5E1"/>
                 </a:solidFill>
@@ -4603,7 +4605,7 @@
               </a:rPr>
               <a:t>Quality depends on the mood of the deadline</a:t>
             </a:r>
-            <a:endParaRPr lang="en-US" sz="1280" dirty="0"/>
+            <a:endParaRPr lang="en-US" sz="1800" dirty="0"/>
           </a:p>
         </p:txBody>
       </p:sp>
@@ -4615,12 +4617,12 @@
         </p:nvSpPr>
         <p:spPr>
           <a:xfrm>
-            <a:off x="6291072" y="2011680"/>
-            <a:ext cx="5074920" cy="3611880"/>
+            <a:off x="6291072" y="1965960"/>
+            <a:ext cx="5074920" cy="3657600"/>
           </a:xfrm>
           <a:prstGeom prst="roundRect">
             <a:avLst>
-              <a:gd name="adj" fmla="val 2025"/>
+              <a:gd name="adj" fmla="val 2000"/>
             </a:avLst>
           </a:prstGeom>
           <a:solidFill>
@@ -4642,8 +4644,8 @@
         </p:nvSpPr>
         <p:spPr>
           <a:xfrm>
-            <a:off x="6565392" y="2240280"/>
-            <a:ext cx="4526280" cy="502920"/>
+            <a:off x="6565392" y="2194560"/>
+            <a:ext cx="4526280" cy="548640"/>
           </a:xfrm>
           <a:prstGeom prst="rect">
             <a:avLst/>
@@ -4659,7 +4661,7 @@
               <a:buNone/>
             </a:pPr>
             <a:r>
-              <a:rPr lang="en-US" sz="1650" b="1" dirty="0">
+              <a:rPr lang="en-US" sz="2000" b="1" dirty="0">
                 <a:solidFill>
                   <a:srgbClr val="93C5FD"/>
                 </a:solidFill>
@@ -4669,7 +4671,7 @@
               </a:rPr>
               <a:t>Open-source framework</a:t>
             </a:r>
-            <a:endParaRPr lang="en-US" sz="1650" dirty="0"/>
+            <a:endParaRPr lang="en-US" sz="2000" dirty="0"/>
           </a:p>
         </p:txBody>
       </p:sp>
@@ -4705,7 +4707,7 @@
               <a:buChar char="▸"/>
             </a:pPr>
             <a:r>
-              <a:rPr lang="en-US" sz="1280" dirty="0">
+              <a:rPr lang="en-US" sz="1800" dirty="0">
                 <a:solidFill>
                   <a:srgbClr val="CBD5E1"/>
                 </a:solidFill>
@@ -4715,7 +4717,7 @@
               </a:rPr>
               <a:t>Assumptions must hold for people you will never meet</a:t>
             </a:r>
-            <a:endParaRPr lang="en-US" sz="1280" dirty="0"/>
+            <a:endParaRPr lang="en-US" sz="1800" dirty="0"/>
           </a:p>
           <a:p>
             <a:pPr marL="342900" indent="-342900">
@@ -4729,7 +4731,7 @@
               <a:buChar char="▸"/>
             </a:pPr>
             <a:r>
-              <a:rPr lang="en-US" sz="1280" dirty="0">
+              <a:rPr lang="en-US" sz="1800" dirty="0">
                 <a:solidFill>
                   <a:srgbClr val="CBD5E1"/>
                 </a:solidFill>
@@ -4739,7 +4741,7 @@
               </a:rPr>
               <a:t>Errors written so anyone can act on them</a:t>
             </a:r>
-            <a:endParaRPr lang="en-US" sz="1280" dirty="0"/>
+            <a:endParaRPr lang="en-US" sz="1800" dirty="0"/>
           </a:p>
           <a:p>
             <a:pPr marL="342900" indent="-342900">
@@ -4753,7 +4755,7 @@
               <a:buChar char="▸"/>
             </a:pPr>
             <a:r>
-              <a:rPr lang="en-US" sz="1280" dirty="0">
+              <a:rPr lang="en-US" sz="1800" dirty="0">
                 <a:solidFill>
                   <a:srgbClr val="CBD5E1"/>
                 </a:solidFill>
@@ -4763,7 +4765,7 @@
               </a:rPr>
               <a:t>Docs that strangers actually rely on</a:t>
             </a:r>
-            <a:endParaRPr lang="en-US" sz="1280" dirty="0"/>
+            <a:endParaRPr lang="en-US" sz="1800" dirty="0"/>
           </a:p>
           <a:p>
             <a:pPr marL="342900" indent="-342900">
@@ -4777,7 +4779,7 @@
               <a:buChar char="▸"/>
             </a:pPr>
             <a:r>
-              <a:rPr lang="en-US" sz="1280" dirty="0">
+              <a:rPr lang="en-US" sz="1800" dirty="0">
                 <a:solidFill>
                   <a:srgbClr val="CBD5E1"/>
                 </a:solidFill>
@@ -4787,7 +4789,7 @@
               </a:rPr>
               <a:t>Quality enforced by gates, not goodwill</a:t>
             </a:r>
-            <a:endParaRPr lang="en-US" sz="1280" dirty="0"/>
+            <a:endParaRPr lang="en-US" sz="1800" dirty="0"/>
           </a:p>
         </p:txBody>
       </p:sp>
@@ -4822,8 +4824,8 @@
         </p:nvSpPr>
         <p:spPr>
           <a:xfrm>
-            <a:off x="822960" y="6053328"/>
-            <a:ext cx="9692640" cy="457200"/>
+            <a:off x="822960" y="6035040"/>
+            <a:ext cx="10424160" cy="566928"/>
           </a:xfrm>
           <a:prstGeom prst="rect">
             <a:avLst/>
@@ -4839,9 +4841,9 @@
               <a:buNone/>
             </a:pPr>
             <a:r>
-              <a:rPr lang="en-US" sz="1150" dirty="0">
-                <a:solidFill>
-                  <a:srgbClr val="64748B"/>
+              <a:rPr lang="en-US" sz="1800" dirty="0">
+                <a:solidFill>
+                  <a:srgbClr val="8FA3BF"/>
                 </a:solidFill>
                 <a:latin typeface="Segoe UI" pitchFamily="34" charset="0"/>
                 <a:ea typeface="Segoe UI" pitchFamily="34" charset="-122"/>
@@ -4849,7 +4851,7 @@
               </a:rPr>
               <a:t>Releasing it was a forcing function - the code got better because it had to.</a:t>
             </a:r>
-            <a:endParaRPr lang="en-US" sz="1150" dirty="0"/>
+            <a:endParaRPr lang="en-US" sz="1800" dirty="0"/>
           </a:p>
         </p:txBody>
       </p:sp>
@@ -4861,8 +4863,8 @@
         </p:nvSpPr>
         <p:spPr>
           <a:xfrm>
-            <a:off x="10698480" y="6382512"/>
-            <a:ext cx="1188720" cy="365760"/>
+            <a:off x="10698480" y="6309360"/>
+            <a:ext cx="1188720" cy="411480"/>
           </a:xfrm>
           <a:prstGeom prst="rect">
             <a:avLst/>
@@ -4878,9 +4880,9 @@
               <a:buNone/>
             </a:pPr>
             <a:r>
-              <a:rPr lang="en-US" sz="1000" dirty="0">
-                <a:solidFill>
-                  <a:srgbClr val="64748B"/>
+              <a:rPr lang="en-US" sz="1800" dirty="0">
+                <a:solidFill>
+                  <a:srgbClr val="8FA3BF"/>
                 </a:solidFill>
                 <a:latin typeface="Consolas" pitchFamily="34" charset="0"/>
                 <a:ea typeface="Consolas" pitchFamily="34" charset="-122"/>
@@ -4888,7 +4890,7 @@
               </a:rPr>
               <a:t>11 / 15</a:t>
             </a:r>
-            <a:endParaRPr lang="en-US" sz="1000" dirty="0"/>
+            <a:endParaRPr lang="en-US" sz="1800" dirty="0"/>
           </a:p>
         </p:txBody>
       </p:sp>
@@ -4972,8 +4974,8 @@
         </p:nvSpPr>
         <p:spPr>
           <a:xfrm>
-            <a:off x="822960" y="502920"/>
-            <a:ext cx="10515600" cy="365760"/>
+            <a:off x="822960" y="457200"/>
+            <a:ext cx="10515600" cy="411480"/>
           </a:xfrm>
           <a:prstGeom prst="rect">
             <a:avLst/>
@@ -4989,7 +4991,7 @@
               <a:buNone/>
             </a:pPr>
             <a:r>
-              <a:rPr lang="en-US" sz="1200" spc="300" kern="0" dirty="0">
+              <a:rPr lang="en-US" sz="1800" spc="300" kern="0" dirty="0">
                 <a:solidFill>
                   <a:srgbClr val="06B6D4"/>
                 </a:solidFill>
@@ -4999,7 +5001,7 @@
               </a:rPr>
               <a:t>IN PRODUCTION</a:t>
             </a:r>
-            <a:endParaRPr lang="en-US" sz="1200" dirty="0"/>
+            <a:endParaRPr lang="en-US" sz="1800" dirty="0"/>
           </a:p>
         </p:txBody>
       </p:sp>
@@ -5050,8 +5052,8 @@
         </p:nvSpPr>
         <p:spPr>
           <a:xfrm>
-            <a:off x="868680" y="2011680"/>
-            <a:ext cx="10424160" cy="3566160"/>
+            <a:off x="868680" y="1965960"/>
+            <a:ext cx="10424160" cy="3840480"/>
           </a:xfrm>
           <a:prstGeom prst="rect">
             <a:avLst/>
@@ -5074,7 +5076,7 @@
               <a:buChar char="▸"/>
             </a:pPr>
             <a:r>
-              <a:rPr lang="en-US" sz="1600" dirty="0">
+              <a:rPr lang="en-US" sz="2000" dirty="0">
                 <a:solidFill>
                   <a:srgbClr val="CBD5E1"/>
                 </a:solidFill>
@@ -5084,7 +5086,7 @@
               </a:rPr>
               <a:t>It powers data apps across the Zalin Labs suite, from ingestion to reporting.</a:t>
             </a:r>
-            <a:endParaRPr lang="en-US" sz="1600" dirty="0"/>
+            <a:endParaRPr lang="en-US" sz="2000" dirty="0"/>
           </a:p>
           <a:p>
             <a:pPr marL="342900" indent="-342900">
@@ -5098,7 +5100,7 @@
               <a:buChar char="▸"/>
             </a:pPr>
             <a:r>
-              <a:rPr lang="en-US" sz="1600" dirty="0">
+              <a:rPr lang="en-US" sz="2000" dirty="0">
                 <a:solidFill>
                   <a:srgbClr val="CBD5E1"/>
                 </a:solidFill>
@@ -5108,7 +5110,7 @@
               </a:rPr>
               <a:t>It feeds BI and analytics workflows for client engagements.</a:t>
             </a:r>
-            <a:endParaRPr lang="en-US" sz="1600" dirty="0"/>
+            <a:endParaRPr lang="en-US" sz="2000" dirty="0"/>
           </a:p>
           <a:p>
             <a:pPr marL="342900" indent="-342900">
@@ -5122,7 +5124,7 @@
               <a:buChar char="▸"/>
             </a:pPr>
             <a:r>
-              <a:rPr lang="en-US" sz="1600" dirty="0">
+              <a:rPr lang="en-US" sz="2000" dirty="0">
                 <a:solidFill>
                   <a:srgbClr val="CBD5E1"/>
                 </a:solidFill>
@@ -5132,7 +5134,7 @@
               </a:rPr>
               <a:t>4,305 lines maintained by an agent team under quality gates.</a:t>
             </a:r>
-            <a:endParaRPr lang="en-US" sz="1600" dirty="0"/>
+            <a:endParaRPr lang="en-US" sz="2000" dirty="0"/>
           </a:p>
           <a:p>
             <a:pPr marL="342900" indent="-342900">
@@ -5146,7 +5148,7 @@
               <a:buChar char="▸"/>
             </a:pPr>
             <a:r>
-              <a:rPr lang="en-US" sz="1600" dirty="0">
+              <a:rPr lang="en-US" sz="2000" dirty="0">
                 <a:solidFill>
                   <a:srgbClr val="CBD5E1"/>
                 </a:solidFill>
@@ -5156,7 +5158,7 @@
               </a:rPr>
               <a:t>New sources plug in - they do not fork the framework.</a:t>
             </a:r>
-            <a:endParaRPr lang="en-US" sz="1600" dirty="0"/>
+            <a:endParaRPr lang="en-US" sz="2000" dirty="0"/>
           </a:p>
           <a:p>
             <a:pPr marL="342900" indent="-342900">
@@ -5170,7 +5172,7 @@
               <a:buChar char="▸"/>
             </a:pPr>
             <a:r>
-              <a:rPr lang="en-US" sz="1600" dirty="0">
+              <a:rPr lang="en-US" sz="2000" dirty="0">
                 <a:solidFill>
                   <a:srgbClr val="CBD5E1"/>
                 </a:solidFill>
@@ -5180,7 +5182,7 @@
               </a:rPr>
               <a:t>It is open source: the stranger who reads it makes it better.</a:t>
             </a:r>
-            <a:endParaRPr lang="en-US" sz="1600" dirty="0"/>
+            <a:endParaRPr lang="en-US" sz="2000" dirty="0"/>
           </a:p>
         </p:txBody>
       </p:sp>
@@ -5215,8 +5217,8 @@
         </p:nvSpPr>
         <p:spPr>
           <a:xfrm>
-            <a:off x="822960" y="6053328"/>
-            <a:ext cx="9692640" cy="457200"/>
+            <a:off x="822960" y="6035040"/>
+            <a:ext cx="10424160" cy="566928"/>
           </a:xfrm>
           <a:prstGeom prst="rect">
             <a:avLst/>
@@ -5232,9 +5234,9 @@
               <a:buNone/>
             </a:pPr>
             <a:r>
-              <a:rPr lang="en-US" sz="1150" dirty="0">
-                <a:solidFill>
-                  <a:srgbClr val="64748B"/>
+              <a:rPr lang="en-US" sz="1800" dirty="0">
+                <a:solidFill>
+                  <a:srgbClr val="8FA3BF"/>
                 </a:solidFill>
                 <a:latin typeface="Segoe UI" pitchFamily="34" charset="0"/>
                 <a:ea typeface="Segoe UI" pitchFamily="34" charset="-122"/>
@@ -5242,7 +5244,7 @@
               </a:rPr>
               <a:t>Production-ready means it ships in work a client is paying for.</a:t>
             </a:r>
-            <a:endParaRPr lang="en-US" sz="1150" dirty="0"/>
+            <a:endParaRPr lang="en-US" sz="1800" dirty="0"/>
           </a:p>
         </p:txBody>
       </p:sp>
@@ -5254,8 +5256,8 @@
         </p:nvSpPr>
         <p:spPr>
           <a:xfrm>
-            <a:off x="10698480" y="6382512"/>
-            <a:ext cx="1188720" cy="365760"/>
+            <a:off x="10698480" y="6309360"/>
+            <a:ext cx="1188720" cy="411480"/>
           </a:xfrm>
           <a:prstGeom prst="rect">
             <a:avLst/>
@@ -5271,9 +5273,9 @@
               <a:buNone/>
             </a:pPr>
             <a:r>
-              <a:rPr lang="en-US" sz="1000" dirty="0">
-                <a:solidFill>
-                  <a:srgbClr val="64748B"/>
+              <a:rPr lang="en-US" sz="1800" dirty="0">
+                <a:solidFill>
+                  <a:srgbClr val="8FA3BF"/>
                 </a:solidFill>
                 <a:latin typeface="Consolas" pitchFamily="34" charset="0"/>
                 <a:ea typeface="Consolas" pitchFamily="34" charset="-122"/>
@@ -5281,7 +5283,7 @@
               </a:rPr>
               <a:t>12 / 15</a:t>
             </a:r>
-            <a:endParaRPr lang="en-US" sz="1000" dirty="0"/>
+            <a:endParaRPr lang="en-US" sz="1800" dirty="0"/>
           </a:p>
         </p:txBody>
       </p:sp>
@@ -5365,8 +5367,8 @@
         </p:nvSpPr>
         <p:spPr>
           <a:xfrm>
-            <a:off x="822960" y="502920"/>
-            <a:ext cx="10515600" cy="365760"/>
+            <a:off x="822960" y="457200"/>
+            <a:ext cx="10515600" cy="411480"/>
           </a:xfrm>
           <a:prstGeom prst="rect">
             <a:avLst/>
@@ -5382,7 +5384,7 @@
               <a:buNone/>
             </a:pPr>
             <a:r>
-              <a:rPr lang="en-US" sz="1200" spc="300" kern="0" dirty="0">
+              <a:rPr lang="en-US" sz="1800" spc="300" kern="0" dirty="0">
                 <a:solidFill>
                   <a:srgbClr val="06B6D4"/>
                 </a:solidFill>
@@ -5392,7 +5394,7 @@
               </a:rPr>
               <a:t>IMPACT</a:t>
             </a:r>
-            <a:endParaRPr lang="en-US" sz="1200" dirty="0"/>
+            <a:endParaRPr lang="en-US" sz="1800" dirty="0"/>
           </a:p>
         </p:txBody>
       </p:sp>
@@ -5443,7 +5445,7 @@
         </p:nvGraphicFramePr>
         <p:xfrm>
           <a:off x="822960" y="1874520"/>
-          <a:ext cx="10515600" cy="3337560"/>
+          <a:ext cx="10515600" cy="3246120"/>
         </p:xfrm>
         <a:graphic xmlns:a="http://schemas.openxmlformats.org/drawingml/2006/main">
           <a:graphicData uri="http://schemas.openxmlformats.org/drawingml/2006/chart">
@@ -5459,7 +5461,7 @@
         </p:nvSpPr>
         <p:spPr>
           <a:xfrm>
-            <a:off x="822960" y="5413248"/>
+            <a:off x="822960" y="5321808"/>
             <a:ext cx="10515600" cy="0"/>
           </a:xfrm>
           <a:prstGeom prst="line">
@@ -5482,8 +5484,8 @@
         </p:nvSpPr>
         <p:spPr>
           <a:xfrm>
-            <a:off x="822960" y="5504688"/>
-            <a:ext cx="10424160" cy="411480"/>
+            <a:off x="822960" y="5394960"/>
+            <a:ext cx="10424160" cy="502920"/>
           </a:xfrm>
           <a:prstGeom prst="rect">
             <a:avLst/>
@@ -5499,7 +5501,7 @@
               <a:buNone/>
             </a:pPr>
             <a:r>
-              <a:rPr lang="en-US" sz="1300" i="1" dirty="0">
+              <a:rPr lang="en-US" sz="1800" i="1" dirty="0">
                 <a:solidFill>
                   <a:srgbClr val="06B6D4"/>
                 </a:solidFill>
@@ -5509,7 +5511,7 @@
               </a:rPr>
               <a:t>→  Once the skeleton runs itself, the hours shift from glue to the analysis clients are actually paying for.</a:t>
             </a:r>
-            <a:endParaRPr lang="en-US" sz="1300" dirty="0"/>
+            <a:endParaRPr lang="en-US" sz="1800" dirty="0"/>
           </a:p>
         </p:txBody>
       </p:sp>
@@ -5544,8 +5546,8 @@
         </p:nvSpPr>
         <p:spPr>
           <a:xfrm>
-            <a:off x="822960" y="6053328"/>
-            <a:ext cx="9692640" cy="457200"/>
+            <a:off x="822960" y="6035040"/>
+            <a:ext cx="10424160" cy="566928"/>
           </a:xfrm>
           <a:prstGeom prst="rect">
             <a:avLst/>
@@ -5561,9 +5563,9 @@
               <a:buNone/>
             </a:pPr>
             <a:r>
-              <a:rPr lang="en-US" sz="1150" dirty="0">
-                <a:solidFill>
-                  <a:srgbClr val="64748B"/>
+              <a:rPr lang="en-US" sz="1800" dirty="0">
+                <a:solidFill>
+                  <a:srgbClr val="8FA3BF"/>
                 </a:solidFill>
                 <a:latin typeface="Segoe UI" pitchFamily="34" charset="0"/>
                 <a:ea typeface="Segoe UI" pitchFamily="34" charset="-122"/>
@@ -5571,7 +5573,7 @@
               </a:rPr>
               <a:t>Illustrative effort pattern on an engagement running ODIS from kickoff.</a:t>
             </a:r>
-            <a:endParaRPr lang="en-US" sz="1150" dirty="0"/>
+            <a:endParaRPr lang="en-US" sz="1800" dirty="0"/>
           </a:p>
         </p:txBody>
       </p:sp>
@@ -5583,8 +5585,8 @@
         </p:nvSpPr>
         <p:spPr>
           <a:xfrm>
-            <a:off x="10698480" y="6382512"/>
-            <a:ext cx="1188720" cy="365760"/>
+            <a:off x="10698480" y="6309360"/>
+            <a:ext cx="1188720" cy="411480"/>
           </a:xfrm>
           <a:prstGeom prst="rect">
             <a:avLst/>
@@ -5600,9 +5602,9 @@
               <a:buNone/>
             </a:pPr>
             <a:r>
-              <a:rPr lang="en-US" sz="1000" dirty="0">
-                <a:solidFill>
-                  <a:srgbClr val="64748B"/>
+              <a:rPr lang="en-US" sz="1800" dirty="0">
+                <a:solidFill>
+                  <a:srgbClr val="8FA3BF"/>
                 </a:solidFill>
                 <a:latin typeface="Consolas" pitchFamily="34" charset="0"/>
                 <a:ea typeface="Consolas" pitchFamily="34" charset="-122"/>
@@ -5610,7 +5612,7 @@
               </a:rPr>
               <a:t>13 / 15</a:t>
             </a:r>
-            <a:endParaRPr lang="en-US" sz="1000" dirty="0"/>
+            <a:endParaRPr lang="en-US" sz="1800" dirty="0"/>
           </a:p>
         </p:txBody>
       </p:sp>
@@ -5694,8 +5696,8 @@
         </p:nvSpPr>
         <p:spPr>
           <a:xfrm>
-            <a:off x="822960" y="502920"/>
-            <a:ext cx="10515600" cy="365760"/>
+            <a:off x="822960" y="457200"/>
+            <a:ext cx="10515600" cy="411480"/>
           </a:xfrm>
           <a:prstGeom prst="rect">
             <a:avLst/>
@@ -5711,7 +5713,7 @@
               <a:buNone/>
             </a:pPr>
             <a:r>
-              <a:rPr lang="en-US" sz="1200" spc="300" kern="0" dirty="0">
+              <a:rPr lang="en-US" sz="1800" spc="300" kern="0" dirty="0">
                 <a:solidFill>
                   <a:srgbClr val="06B6D4"/>
                 </a:solidFill>
@@ -5721,7 +5723,7 @@
               </a:rPr>
               <a:t>ROADMAP</a:t>
             </a:r>
-            <a:endParaRPr lang="en-US" sz="1200" dirty="0"/>
+            <a:endParaRPr lang="en-US" sz="1800" dirty="0"/>
           </a:p>
         </p:txBody>
       </p:sp>
@@ -5772,8 +5774,8 @@
         </p:nvSpPr>
         <p:spPr>
           <a:xfrm>
-            <a:off x="868680" y="2011680"/>
-            <a:ext cx="10424160" cy="3566160"/>
+            <a:off x="868680" y="1965960"/>
+            <a:ext cx="10424160" cy="3840480"/>
           </a:xfrm>
           <a:prstGeom prst="rect">
             <a:avLst/>
@@ -5796,7 +5798,7 @@
               <a:buChar char="▸"/>
             </a:pPr>
             <a:r>
-              <a:rPr lang="en-US" sz="1600" dirty="0">
+              <a:rPr lang="en-US" sz="2000" dirty="0">
                 <a:solidFill>
                   <a:srgbClr val="CBD5E1"/>
                 </a:solidFill>
@@ -5806,7 +5808,7 @@
               </a:rPr>
               <a:t>More connectors for the sources every engagement seems to bring.</a:t>
             </a:r>
-            <a:endParaRPr lang="en-US" sz="1600" dirty="0"/>
+            <a:endParaRPr lang="en-US" sz="2000" dirty="0"/>
           </a:p>
           <a:p>
             <a:pPr marL="342900" indent="-342900">
@@ -5820,7 +5822,7 @@
               <a:buChar char="▸"/>
             </a:pPr>
             <a:r>
-              <a:rPr lang="en-US" sz="1600" dirty="0">
+              <a:rPr lang="en-US" sz="2000" dirty="0">
                 <a:solidFill>
                   <a:srgbClr val="CBD5E1"/>
                 </a:solidFill>
@@ -5830,7 +5832,7 @@
               </a:rPr>
               <a:t>Lightweight visualization exports for outputs that speak for themselves.</a:t>
             </a:r>
-            <a:endParaRPr lang="en-US" sz="1600" dirty="0"/>
+            <a:endParaRPr lang="en-US" sz="2000" dirty="0"/>
           </a:p>
           <a:p>
             <a:pPr marL="342900" indent="-342900">
@@ -5844,7 +5846,7 @@
               <a:buChar char="▸"/>
             </a:pPr>
             <a:r>
-              <a:rPr lang="en-US" sz="1600" dirty="0">
+              <a:rPr lang="en-US" sz="2000" dirty="0">
                 <a:solidFill>
                   <a:srgbClr val="CBD5E1"/>
                 </a:solidFill>
@@ -5854,7 +5856,7 @@
               </a:rPr>
               <a:t>Deeper agent integration: ODIS pipelines exposed as tools any agent can call.</a:t>
             </a:r>
-            <a:endParaRPr lang="en-US" sz="1600" dirty="0"/>
+            <a:endParaRPr lang="en-US" sz="2000" dirty="0"/>
           </a:p>
           <a:p>
             <a:pPr marL="342900" indent="-342900">
@@ -5868,7 +5870,7 @@
               <a:buChar char="▸"/>
             </a:pPr>
             <a:r>
-              <a:rPr lang="en-US" sz="1600" dirty="0">
+              <a:rPr lang="en-US" sz="2000" dirty="0">
                 <a:solidFill>
                   <a:srgbClr val="CBD5E1"/>
                 </a:solidFill>
@@ -5878,7 +5880,7 @@
               </a:rPr>
               <a:t>The roadmap is public, like the code - priorities set by what users hit first.</a:t>
             </a:r>
-            <a:endParaRPr lang="en-US" sz="1600" dirty="0"/>
+            <a:endParaRPr lang="en-US" sz="2000" dirty="0"/>
           </a:p>
         </p:txBody>
       </p:sp>
@@ -5913,8 +5915,8 @@
         </p:nvSpPr>
         <p:spPr>
           <a:xfrm>
-            <a:off x="822960" y="6053328"/>
-            <a:ext cx="9692640" cy="457200"/>
+            <a:off x="822960" y="6035040"/>
+            <a:ext cx="10424160" cy="566928"/>
           </a:xfrm>
           <a:prstGeom prst="rect">
             <a:avLst/>
@@ -5930,9 +5932,9 @@
               <a:buNone/>
             </a:pPr>
             <a:r>
-              <a:rPr lang="en-US" sz="1150" dirty="0">
-                <a:solidFill>
-                  <a:srgbClr val="64748B"/>
+              <a:rPr lang="en-US" sz="1800" dirty="0">
+                <a:solidFill>
+                  <a:srgbClr val="8FA3BF"/>
                 </a:solidFill>
                 <a:latin typeface="Segoe UI" pitchFamily="34" charset="0"/>
                 <a:ea typeface="Segoe UI" pitchFamily="34" charset="-122"/>
@@ -5940,7 +5942,7 @@
               </a:rPr>
               <a:t>Built in the open, shipped in the open.</a:t>
             </a:r>
-            <a:endParaRPr lang="en-US" sz="1150" dirty="0"/>
+            <a:endParaRPr lang="en-US" sz="1800" dirty="0"/>
           </a:p>
         </p:txBody>
       </p:sp>
@@ -5952,8 +5954,8 @@
         </p:nvSpPr>
         <p:spPr>
           <a:xfrm>
-            <a:off x="10698480" y="6382512"/>
-            <a:ext cx="1188720" cy="365760"/>
+            <a:off x="10698480" y="6309360"/>
+            <a:ext cx="1188720" cy="411480"/>
           </a:xfrm>
           <a:prstGeom prst="rect">
             <a:avLst/>
@@ -5969,9 +5971,9 @@
               <a:buNone/>
             </a:pPr>
             <a:r>
-              <a:rPr lang="en-US" sz="1000" dirty="0">
-                <a:solidFill>
-                  <a:srgbClr val="64748B"/>
+              <a:rPr lang="en-US" sz="1800" dirty="0">
+                <a:solidFill>
+                  <a:srgbClr val="8FA3BF"/>
                 </a:solidFill>
                 <a:latin typeface="Consolas" pitchFamily="34" charset="0"/>
                 <a:ea typeface="Consolas" pitchFamily="34" charset="-122"/>
@@ -5979,7 +5981,7 @@
               </a:rPr>
               <a:t>14 / 15</a:t>
             </a:r>
-            <a:endParaRPr lang="en-US" sz="1000" dirty="0"/>
+            <a:endParaRPr lang="en-US" sz="1800" dirty="0"/>
           </a:p>
         </p:txBody>
       </p:sp>
@@ -6063,8 +6065,8 @@
         </p:nvSpPr>
         <p:spPr>
           <a:xfrm>
-            <a:off x="822960" y="1417320"/>
-            <a:ext cx="10515600" cy="411480"/>
+            <a:off x="822960" y="1371600"/>
+            <a:ext cx="10515600" cy="457200"/>
           </a:xfrm>
           <a:prstGeom prst="rect">
             <a:avLst/>
@@ -6080,7 +6082,7 @@
               <a:buNone/>
             </a:pPr>
             <a:r>
-              <a:rPr lang="en-US" sz="1300" spc="400" kern="0" dirty="0">
+              <a:rPr lang="en-US" sz="1800" spc="400" kern="0" dirty="0">
                 <a:solidFill>
                   <a:srgbClr val="06B6D4"/>
                 </a:solidFill>
@@ -6090,7 +6092,7 @@
               </a:rPr>
               <a:t>WORK WITH ME</a:t>
             </a:r>
-            <a:endParaRPr lang="en-US" sz="1300" dirty="0"/>
+            <a:endParaRPr lang="en-US" sz="1800" dirty="0"/>
           </a:p>
         </p:txBody>
       </p:sp>
@@ -6102,7 +6104,7 @@
         </p:nvSpPr>
         <p:spPr>
           <a:xfrm>
-            <a:off x="822960" y="1920240"/>
+            <a:off x="822960" y="1874520"/>
             <a:ext cx="10515600" cy="1371600"/>
           </a:xfrm>
           <a:prstGeom prst="rect">
@@ -6141,8 +6143,8 @@
         </p:nvSpPr>
         <p:spPr>
           <a:xfrm>
-            <a:off x="2011680" y="3429000"/>
-            <a:ext cx="8183880" cy="1554480"/>
+            <a:off x="2011680" y="3383280"/>
+            <a:ext cx="8183880" cy="1691640"/>
           </a:xfrm>
           <a:prstGeom prst="rect">
             <a:avLst/>
@@ -6161,7 +6163,7 @@
               <a:buNone/>
             </a:pPr>
             <a:r>
-              <a:rPr lang="en-US" sz="1500" dirty="0">
+              <a:rPr lang="en-US" sz="2000" dirty="0">
                 <a:solidFill>
                   <a:srgbClr val="CBD5E1"/>
                 </a:solidFill>
@@ -6178,7 +6180,7 @@
               <a:buNone/>
             </a:pPr>
             <a:r>
-              <a:rPr lang="en-US" sz="1500" dirty="0">
+              <a:rPr lang="en-US" sz="2000" dirty="0">
                 <a:solidFill>
                   <a:srgbClr val="CBD5E1"/>
                 </a:solidFill>
@@ -6195,7 +6197,7 @@
               <a:buNone/>
             </a:pPr>
             <a:r>
-              <a:rPr lang="en-US" sz="1500" dirty="0">
+              <a:rPr lang="en-US" sz="2000" dirty="0">
                 <a:solidFill>
                   <a:srgbClr val="CBD5E1"/>
                 </a:solidFill>
@@ -6205,7 +6207,7 @@
               </a:rPr>
               <a:t>Bring your pipeline pain; leave with a running, validated skeleton.</a:t>
             </a:r>
-            <a:endParaRPr lang="en-US" sz="1500" dirty="0"/>
+            <a:endParaRPr lang="en-US" sz="2000" dirty="0"/>
           </a:p>
         </p:txBody>
       </p:sp>
@@ -6240,8 +6242,8 @@
         </p:nvSpPr>
         <p:spPr>
           <a:xfrm>
-            <a:off x="822960" y="5376672"/>
-            <a:ext cx="10515600" cy="457200"/>
+            <a:off x="822960" y="5349240"/>
+            <a:ext cx="10515600" cy="502920"/>
           </a:xfrm>
           <a:prstGeom prst="rect">
             <a:avLst/>
@@ -6257,7 +6259,7 @@
               <a:buNone/>
             </a:pPr>
             <a:r>
-              <a:rPr lang="en-US" sz="1350" b="1" dirty="0">
+              <a:rPr lang="en-US" sz="1800" b="1" dirty="0">
                 <a:solidFill>
                   <a:srgbClr val="06B6D4"/>
                 </a:solidFill>
@@ -6267,7 +6269,7 @@
               </a:rPr>
               <a:t>rezalianvatiady.github.io · github.com/rezalianvatiady</a:t>
             </a:r>
-            <a:endParaRPr lang="en-US" sz="1350" dirty="0"/>
+            <a:endParaRPr lang="en-US" sz="1800" dirty="0"/>
           </a:p>
         </p:txBody>
       </p:sp>
@@ -6279,8 +6281,8 @@
         </p:nvSpPr>
         <p:spPr>
           <a:xfrm>
-            <a:off x="10698480" y="6382512"/>
-            <a:ext cx="1188720" cy="365760"/>
+            <a:off x="10698480" y="6309360"/>
+            <a:ext cx="1188720" cy="411480"/>
           </a:xfrm>
           <a:prstGeom prst="rect">
             <a:avLst/>
@@ -6296,9 +6298,9 @@
               <a:buNone/>
             </a:pPr>
             <a:r>
-              <a:rPr lang="en-US" sz="1000" dirty="0">
-                <a:solidFill>
-                  <a:srgbClr val="64748B"/>
+              <a:rPr lang="en-US" sz="1800" dirty="0">
+                <a:solidFill>
+                  <a:srgbClr val="8FA3BF"/>
                 </a:solidFill>
                 <a:latin typeface="Consolas" pitchFamily="34" charset="0"/>
                 <a:ea typeface="Consolas" pitchFamily="34" charset="-122"/>
@@ -6306,7 +6308,7 @@
               </a:rPr>
               <a:t>15 / 15</a:t>
             </a:r>
-            <a:endParaRPr lang="en-US" sz="1000" dirty="0"/>
+            <a:endParaRPr lang="en-US" sz="1800" dirty="0"/>
           </a:p>
         </p:txBody>
       </p:sp>
@@ -6390,8 +6392,8 @@
         </p:nvSpPr>
         <p:spPr>
           <a:xfrm>
-            <a:off x="822960" y="502920"/>
-            <a:ext cx="10515600" cy="365760"/>
+            <a:off x="822960" y="457200"/>
+            <a:ext cx="10515600" cy="411480"/>
           </a:xfrm>
           <a:prstGeom prst="rect">
             <a:avLst/>
@@ -6407,7 +6409,7 @@
               <a:buNone/>
             </a:pPr>
             <a:r>
-              <a:rPr lang="en-US" sz="1200" spc="300" kern="0" dirty="0">
+              <a:rPr lang="en-US" sz="1800" spc="300" kern="0" dirty="0">
                 <a:solidFill>
                   <a:srgbClr val="06B6D4"/>
                 </a:solidFill>
@@ -6417,7 +6419,7 @@
               </a:rPr>
               <a:t>AGENDA</a:t>
             </a:r>
-            <a:endParaRPr lang="en-US" sz="1200" dirty="0"/>
+            <a:endParaRPr lang="en-US" sz="1800" dirty="0"/>
           </a:p>
         </p:txBody>
       </p:sp>
@@ -6468,8 +6470,8 @@
         </p:nvSpPr>
         <p:spPr>
           <a:xfrm>
-            <a:off x="868680" y="2112264"/>
-            <a:ext cx="420624" cy="420624"/>
+            <a:off x="868680" y="2103120"/>
+            <a:ext cx="457200" cy="457200"/>
           </a:xfrm>
           <a:prstGeom prst="ellipse">
             <a:avLst/>
@@ -6493,8 +6495,8 @@
         </p:nvSpPr>
         <p:spPr>
           <a:xfrm>
-            <a:off x="868680" y="2112264"/>
-            <a:ext cx="420624" cy="420624"/>
+            <a:off x="868680" y="2103120"/>
+            <a:ext cx="457200" cy="457200"/>
           </a:xfrm>
           <a:prstGeom prst="rect">
             <a:avLst/>
@@ -6510,7 +6512,7 @@
               <a:buNone/>
             </a:pPr>
             <a:r>
-              <a:rPr lang="en-US" sz="1300" b="1" dirty="0">
+              <a:rPr lang="en-US" sz="1800" b="1" dirty="0">
                 <a:solidFill>
                   <a:srgbClr val="3B82F6"/>
                 </a:solidFill>
@@ -6520,7 +6522,7 @@
               </a:rPr>
               <a:t>1</a:t>
             </a:r>
-            <a:endParaRPr lang="en-US" sz="1300" dirty="0"/>
+            <a:endParaRPr lang="en-US" sz="1800" dirty="0"/>
           </a:p>
         </p:txBody>
       </p:sp>
@@ -6532,8 +6534,8 @@
         </p:nvSpPr>
         <p:spPr>
           <a:xfrm>
-            <a:off x="1435608" y="2057400"/>
-            <a:ext cx="4480560" cy="822960"/>
+            <a:off x="1472184" y="2011680"/>
+            <a:ext cx="4443984" cy="960120"/>
           </a:xfrm>
           <a:prstGeom prst="rect">
             <a:avLst/>
@@ -6549,7 +6551,7 @@
               <a:buNone/>
             </a:pPr>
             <a:r>
-              <a:rPr lang="en-US" sz="1450" dirty="0">
+              <a:rPr lang="en-US" sz="2000" dirty="0">
                 <a:solidFill>
                   <a:srgbClr val="CBD5E1"/>
                 </a:solidFill>
@@ -6559,7 +6561,7 @@
               </a:rPr>
               <a:t>The glue problem that kills most data projects before the insight</a:t>
             </a:r>
-            <a:endParaRPr lang="en-US" sz="1450" dirty="0"/>
+            <a:endParaRPr lang="en-US" sz="2000" dirty="0"/>
           </a:p>
         </p:txBody>
       </p:sp>
@@ -6571,8 +6573,8 @@
         </p:nvSpPr>
         <p:spPr>
           <a:xfrm>
-            <a:off x="868680" y="3044952"/>
-            <a:ext cx="420624" cy="420624"/>
+            <a:off x="868680" y="3182112"/>
+            <a:ext cx="457200" cy="457200"/>
           </a:xfrm>
           <a:prstGeom prst="ellipse">
             <a:avLst/>
@@ -6596,8 +6598,8 @@
         </p:nvSpPr>
         <p:spPr>
           <a:xfrm>
-            <a:off x="868680" y="3044952"/>
-            <a:ext cx="420624" cy="420624"/>
+            <a:off x="868680" y="3182112"/>
+            <a:ext cx="457200" cy="457200"/>
           </a:xfrm>
           <a:prstGeom prst="rect">
             <a:avLst/>
@@ -6613,7 +6615,7 @@
               <a:buNone/>
             </a:pPr>
             <a:r>
-              <a:rPr lang="en-US" sz="1300" b="1" dirty="0">
+              <a:rPr lang="en-US" sz="1800" b="1" dirty="0">
                 <a:solidFill>
                   <a:srgbClr val="06B6D4"/>
                 </a:solidFill>
@@ -6623,7 +6625,7 @@
               </a:rPr>
               <a:t>2</a:t>
             </a:r>
-            <a:endParaRPr lang="en-US" sz="1300" dirty="0"/>
+            <a:endParaRPr lang="en-US" sz="1800" dirty="0"/>
           </a:p>
         </p:txBody>
       </p:sp>
@@ -6635,8 +6637,8 @@
         </p:nvSpPr>
         <p:spPr>
           <a:xfrm>
-            <a:off x="1435608" y="2990088"/>
-            <a:ext cx="4480560" cy="822960"/>
+            <a:off x="1472184" y="3090672"/>
+            <a:ext cx="4443984" cy="960120"/>
           </a:xfrm>
           <a:prstGeom prst="rect">
             <a:avLst/>
@@ -6652,7 +6654,7 @@
               <a:buNone/>
             </a:pPr>
             <a:r>
-              <a:rPr lang="en-US" sz="1450" dirty="0">
+              <a:rPr lang="en-US" sz="2000" dirty="0">
                 <a:solidFill>
                   <a:srgbClr val="CBD5E1"/>
                 </a:solidFill>
@@ -6662,7 +6664,7 @@
               </a:rPr>
               <a:t>Four modules: ingest, clean, enrich, export and report</a:t>
             </a:r>
-            <a:endParaRPr lang="en-US" sz="1450" dirty="0"/>
+            <a:endParaRPr lang="en-US" sz="2000" dirty="0"/>
           </a:p>
         </p:txBody>
       </p:sp>
@@ -6674,8 +6676,8 @@
         </p:nvSpPr>
         <p:spPr>
           <a:xfrm>
-            <a:off x="868680" y="3977640"/>
-            <a:ext cx="420624" cy="420624"/>
+            <a:off x="868680" y="4261104"/>
+            <a:ext cx="457200" cy="457200"/>
           </a:xfrm>
           <a:prstGeom prst="ellipse">
             <a:avLst/>
@@ -6699,8 +6701,8 @@
         </p:nvSpPr>
         <p:spPr>
           <a:xfrm>
-            <a:off x="868680" y="3977640"/>
-            <a:ext cx="420624" cy="420624"/>
+            <a:off x="868680" y="4261104"/>
+            <a:ext cx="457200" cy="457200"/>
           </a:xfrm>
           <a:prstGeom prst="rect">
             <a:avLst/>
@@ -6716,7 +6718,7 @@
               <a:buNone/>
             </a:pPr>
             <a:r>
-              <a:rPr lang="en-US" sz="1300" b="1" dirty="0">
+              <a:rPr lang="en-US" sz="1800" b="1" dirty="0">
                 <a:solidFill>
                   <a:srgbClr val="3B82F6"/>
                 </a:solidFill>
@@ -6726,7 +6728,7 @@
               </a:rPr>
               <a:t>3</a:t>
             </a:r>
-            <a:endParaRPr lang="en-US" sz="1300" dirty="0"/>
+            <a:endParaRPr lang="en-US" sz="1800" dirty="0"/>
           </a:p>
         </p:txBody>
       </p:sp>
@@ -6738,8 +6740,8 @@
         </p:nvSpPr>
         <p:spPr>
           <a:xfrm>
-            <a:off x="1435608" y="3922776"/>
-            <a:ext cx="4480560" cy="822960"/>
+            <a:off x="1472184" y="4169664"/>
+            <a:ext cx="4443984" cy="960120"/>
           </a:xfrm>
           <a:prstGeom prst="rect">
             <a:avLst/>
@@ -6755,7 +6757,7 @@
               <a:buNone/>
             </a:pPr>
             <a:r>
-              <a:rPr lang="en-US" sz="1450" dirty="0">
+              <a:rPr lang="en-US" sz="2000" dirty="0">
                 <a:solidFill>
                   <a:srgbClr val="CBD5E1"/>
                 </a:solidFill>
@@ -6765,7 +6767,7 @@
               </a:rPr>
               <a:t>Design principles that survived production</a:t>
             </a:r>
-            <a:endParaRPr lang="en-US" sz="1450" dirty="0"/>
+            <a:endParaRPr lang="en-US" sz="2000" dirty="0"/>
           </a:p>
         </p:txBody>
       </p:sp>
@@ -6777,8 +6779,8 @@
         </p:nvSpPr>
         <p:spPr>
           <a:xfrm>
-            <a:off x="6355080" y="2112264"/>
-            <a:ext cx="420624" cy="420624"/>
+            <a:off x="6355080" y="2103120"/>
+            <a:ext cx="457200" cy="457200"/>
           </a:xfrm>
           <a:prstGeom prst="ellipse">
             <a:avLst/>
@@ -6802,8 +6804,8 @@
         </p:nvSpPr>
         <p:spPr>
           <a:xfrm>
-            <a:off x="6355080" y="2112264"/>
-            <a:ext cx="420624" cy="420624"/>
+            <a:off x="6355080" y="2103120"/>
+            <a:ext cx="457200" cy="457200"/>
           </a:xfrm>
           <a:prstGeom prst="rect">
             <a:avLst/>
@@ -6819,7 +6821,7 @@
               <a:buNone/>
             </a:pPr>
             <a:r>
-              <a:rPr lang="en-US" sz="1300" b="1" dirty="0">
+              <a:rPr lang="en-US" sz="1800" b="1" dirty="0">
                 <a:solidFill>
                   <a:srgbClr val="06B6D4"/>
                 </a:solidFill>
@@ -6829,7 +6831,7 @@
               </a:rPr>
               <a:t>4</a:t>
             </a:r>
-            <a:endParaRPr lang="en-US" sz="1300" dirty="0"/>
+            <a:endParaRPr lang="en-US" sz="1800" dirty="0"/>
           </a:p>
         </p:txBody>
       </p:sp>
@@ -6841,8 +6843,8 @@
         </p:nvSpPr>
         <p:spPr>
           <a:xfrm>
-            <a:off x="6922008" y="2057400"/>
-            <a:ext cx="4480560" cy="822960"/>
+            <a:off x="6958584" y="2011680"/>
+            <a:ext cx="4443984" cy="960120"/>
           </a:xfrm>
           <a:prstGeom prst="rect">
             <a:avLst/>
@@ -6858,7 +6860,7 @@
               <a:buNone/>
             </a:pPr>
             <a:r>
-              <a:rPr lang="en-US" sz="1450" dirty="0">
+              <a:rPr lang="en-US" sz="2000" dirty="0">
                 <a:solidFill>
                   <a:srgbClr val="CBD5E1"/>
                 </a:solidFill>
@@ -6868,7 +6870,7 @@
               </a:rPr>
               <a:t>What open-sourcing 4,305 lines changed in the code itself</a:t>
             </a:r>
-            <a:endParaRPr lang="en-US" sz="1450" dirty="0"/>
+            <a:endParaRPr lang="en-US" sz="2000" dirty="0"/>
           </a:p>
         </p:txBody>
       </p:sp>
@@ -6880,8 +6882,8 @@
         </p:nvSpPr>
         <p:spPr>
           <a:xfrm>
-            <a:off x="6355080" y="3044952"/>
-            <a:ext cx="420624" cy="420624"/>
+            <a:off x="6355080" y="3182112"/>
+            <a:ext cx="457200" cy="457200"/>
           </a:xfrm>
           <a:prstGeom prst="ellipse">
             <a:avLst/>
@@ -6905,8 +6907,8 @@
         </p:nvSpPr>
         <p:spPr>
           <a:xfrm>
-            <a:off x="6355080" y="3044952"/>
-            <a:ext cx="420624" cy="420624"/>
+            <a:off x="6355080" y="3182112"/>
+            <a:ext cx="457200" cy="457200"/>
           </a:xfrm>
           <a:prstGeom prst="rect">
             <a:avLst/>
@@ -6922,7 +6924,7 @@
               <a:buNone/>
             </a:pPr>
             <a:r>
-              <a:rPr lang="en-US" sz="1300" b="1" dirty="0">
+              <a:rPr lang="en-US" sz="1800" b="1" dirty="0">
                 <a:solidFill>
                   <a:srgbClr val="3B82F6"/>
                 </a:solidFill>
@@ -6932,7 +6934,7 @@
               </a:rPr>
               <a:t>5</a:t>
             </a:r>
-            <a:endParaRPr lang="en-US" sz="1300" dirty="0"/>
+            <a:endParaRPr lang="en-US" sz="1800" dirty="0"/>
           </a:p>
         </p:txBody>
       </p:sp>
@@ -6944,8 +6946,8 @@
         </p:nvSpPr>
         <p:spPr>
           <a:xfrm>
-            <a:off x="6922008" y="2990088"/>
-            <a:ext cx="4480560" cy="822960"/>
+            <a:off x="6958584" y="3090672"/>
+            <a:ext cx="4443984" cy="960120"/>
           </a:xfrm>
           <a:prstGeom prst="rect">
             <a:avLst/>
@@ -6961,7 +6963,7 @@
               <a:buNone/>
             </a:pPr>
             <a:r>
-              <a:rPr lang="en-US" sz="1450" dirty="0">
+              <a:rPr lang="en-US" sz="2000" dirty="0">
                 <a:solidFill>
                   <a:srgbClr val="CBD5E1"/>
                 </a:solidFill>
@@ -6971,7 +6973,7 @@
               </a:rPr>
               <a:t>Where ODIS runs today - and where it is heading</a:t>
             </a:r>
-            <a:endParaRPr lang="en-US" sz="1450" dirty="0"/>
+            <a:endParaRPr lang="en-US" sz="2000" dirty="0"/>
           </a:p>
         </p:txBody>
       </p:sp>
@@ -6983,8 +6985,8 @@
         </p:nvSpPr>
         <p:spPr>
           <a:xfrm>
-            <a:off x="10698480" y="6382512"/>
-            <a:ext cx="1188720" cy="365760"/>
+            <a:off x="10698480" y="6309360"/>
+            <a:ext cx="1188720" cy="411480"/>
           </a:xfrm>
           <a:prstGeom prst="rect">
             <a:avLst/>
@@ -7000,9 +7002,9 @@
               <a:buNone/>
             </a:pPr>
             <a:r>
-              <a:rPr lang="en-US" sz="1000" dirty="0">
-                <a:solidFill>
-                  <a:srgbClr val="64748B"/>
+              <a:rPr lang="en-US" sz="1800" dirty="0">
+                <a:solidFill>
+                  <a:srgbClr val="8FA3BF"/>
                 </a:solidFill>
                 <a:latin typeface="Consolas" pitchFamily="34" charset="0"/>
                 <a:ea typeface="Consolas" pitchFamily="34" charset="-122"/>
@@ -7010,7 +7012,7 @@
               </a:rPr>
               <a:t>2 / 15</a:t>
             </a:r>
-            <a:endParaRPr lang="en-US" sz="1000" dirty="0"/>
+            <a:endParaRPr lang="en-US" sz="1800" dirty="0"/>
           </a:p>
         </p:txBody>
       </p:sp>
@@ -7094,8 +7096,8 @@
         </p:nvSpPr>
         <p:spPr>
           <a:xfrm>
-            <a:off x="822960" y="502920"/>
-            <a:ext cx="10515600" cy="365760"/>
+            <a:off x="822960" y="457200"/>
+            <a:ext cx="10515600" cy="411480"/>
           </a:xfrm>
           <a:prstGeom prst="rect">
             <a:avLst/>
@@ -7111,7 +7113,7 @@
               <a:buNone/>
             </a:pPr>
             <a:r>
-              <a:rPr lang="en-US" sz="1200" spc="300" kern="0" dirty="0">
+              <a:rPr lang="en-US" sz="1800" spc="300" kern="0" dirty="0">
                 <a:solidFill>
                   <a:srgbClr val="06B6D4"/>
                 </a:solidFill>
@@ -7121,7 +7123,7 @@
               </a:rPr>
               <a:t>THE PROBLEM</a:t>
             </a:r>
-            <a:endParaRPr lang="en-US" sz="1200" dirty="0"/>
+            <a:endParaRPr lang="en-US" sz="1800" dirty="0"/>
           </a:p>
         </p:txBody>
       </p:sp>
@@ -7172,8 +7174,8 @@
         </p:nvSpPr>
         <p:spPr>
           <a:xfrm>
-            <a:off x="868680" y="2011680"/>
-            <a:ext cx="10424160" cy="3566160"/>
+            <a:off x="868680" y="1965960"/>
+            <a:ext cx="10424160" cy="3840480"/>
           </a:xfrm>
           <a:prstGeom prst="rect">
             <a:avLst/>
@@ -7196,7 +7198,7 @@
               <a:buChar char="▸"/>
             </a:pPr>
             <a:r>
-              <a:rPr lang="en-US" sz="1600" dirty="0">
+              <a:rPr lang="en-US" sz="2000" dirty="0">
                 <a:solidFill>
                   <a:srgbClr val="CBD5E1"/>
                 </a:solidFill>
@@ -7206,7 +7208,7 @@
               </a:rPr>
               <a:t>Every engagement starts by rebuilding the same skeleton from scratch.</a:t>
             </a:r>
-            <a:endParaRPr lang="en-US" sz="1600" dirty="0"/>
+            <a:endParaRPr lang="en-US" sz="2000" dirty="0"/>
           </a:p>
           <a:p>
             <a:pPr marL="342900" indent="-342900">
@@ -7220,7 +7222,7 @@
               <a:buChar char="▸"/>
             </a:pPr>
             <a:r>
-              <a:rPr lang="en-US" sz="1600" dirty="0">
+              <a:rPr lang="en-US" sz="2000" dirty="0">
                 <a:solidFill>
                   <a:srgbClr val="CBD5E1"/>
                 </a:solidFill>
@@ -7230,7 +7232,7 @@
               </a:rPr>
               <a:t>Collect, clean, transform, export - the shape never changes, only the sources do.</a:t>
             </a:r>
-            <a:endParaRPr lang="en-US" sz="1600" dirty="0"/>
+            <a:endParaRPr lang="en-US" sz="2000" dirty="0"/>
           </a:p>
           <a:p>
             <a:pPr marL="342900" indent="-342900">
@@ -7244,7 +7246,7 @@
               <a:buChar char="▸"/>
             </a:pPr>
             <a:r>
-              <a:rPr lang="en-US" sz="1600" dirty="0">
+              <a:rPr lang="en-US" sz="2000" dirty="0">
                 <a:solidFill>
                   <a:srgbClr val="CBD5E1"/>
                 </a:solidFill>
@@ -7254,7 +7256,7 @@
               </a:rPr>
               <a:t>Glue code is where quality quietly dies: unvalidated joins, silent dedup, mystery exports.</a:t>
             </a:r>
-            <a:endParaRPr lang="en-US" sz="1600" dirty="0"/>
+            <a:endParaRPr lang="en-US" sz="2000" dirty="0"/>
           </a:p>
           <a:p>
             <a:pPr marL="342900" indent="-342900">
@@ -7268,7 +7270,7 @@
               <a:buChar char="▸"/>
             </a:pPr>
             <a:r>
-              <a:rPr lang="en-US" sz="1600" dirty="0">
+              <a:rPr lang="en-US" sz="2000" dirty="0">
                 <a:solidFill>
                   <a:srgbClr val="CBD5E1"/>
                 </a:solidFill>
@@ -7278,7 +7280,7 @@
               </a:rPr>
               <a:t>The interesting 30% of data work loses its time to the boring 70%.</a:t>
             </a:r>
-            <a:endParaRPr lang="en-US" sz="1600" dirty="0"/>
+            <a:endParaRPr lang="en-US" sz="2000" dirty="0"/>
           </a:p>
           <a:p>
             <a:pPr marL="342900" indent="-342900">
@@ -7292,7 +7294,7 @@
               <a:buChar char="▸"/>
             </a:pPr>
             <a:r>
-              <a:rPr lang="en-US" sz="1600" dirty="0">
+              <a:rPr lang="en-US" sz="2000" dirty="0">
                 <a:solidFill>
                   <a:srgbClr val="CBD5E1"/>
                 </a:solidFill>
@@ -7302,7 +7304,7 @@
               </a:rPr>
               <a:t>ODIS standardizes the skeleton so judgment gets the attention.</a:t>
             </a:r>
-            <a:endParaRPr lang="en-US" sz="1600" dirty="0"/>
+            <a:endParaRPr lang="en-US" sz="2000" dirty="0"/>
           </a:p>
         </p:txBody>
       </p:sp>
@@ -7337,8 +7339,8 @@
         </p:nvSpPr>
         <p:spPr>
           <a:xfrm>
-            <a:off x="822960" y="6053328"/>
-            <a:ext cx="9692640" cy="457200"/>
+            <a:off x="822960" y="6035040"/>
+            <a:ext cx="10424160" cy="566928"/>
           </a:xfrm>
           <a:prstGeom prst="rect">
             <a:avLst/>
@@ -7354,9 +7356,9 @@
               <a:buNone/>
             </a:pPr>
             <a:r>
-              <a:rPr lang="en-US" sz="1150" dirty="0">
-                <a:solidFill>
-                  <a:srgbClr val="64748B"/>
+              <a:rPr lang="en-US" sz="1800" dirty="0">
+                <a:solidFill>
+                  <a:srgbClr val="8FA3BF"/>
                 </a:solidFill>
                 <a:latin typeface="Segoe UI" pitchFamily="34" charset="0"/>
                 <a:ea typeface="Segoe UI" pitchFamily="34" charset="-122"/>
@@ -7364,7 +7366,7 @@
               </a:rPr>
               <a:t>Most data projects do not die from hard problems - they die from repeated ones.</a:t>
             </a:r>
-            <a:endParaRPr lang="en-US" sz="1150" dirty="0"/>
+            <a:endParaRPr lang="en-US" sz="1800" dirty="0"/>
           </a:p>
         </p:txBody>
       </p:sp>
@@ -7376,8 +7378,8 @@
         </p:nvSpPr>
         <p:spPr>
           <a:xfrm>
-            <a:off x="10698480" y="6382512"/>
-            <a:ext cx="1188720" cy="365760"/>
+            <a:off x="10698480" y="6309360"/>
+            <a:ext cx="1188720" cy="411480"/>
           </a:xfrm>
           <a:prstGeom prst="rect">
             <a:avLst/>
@@ -7393,9 +7395,9 @@
               <a:buNone/>
             </a:pPr>
             <a:r>
-              <a:rPr lang="en-US" sz="1000" dirty="0">
-                <a:solidFill>
-                  <a:srgbClr val="64748B"/>
+              <a:rPr lang="en-US" sz="1800" dirty="0">
+                <a:solidFill>
+                  <a:srgbClr val="8FA3BF"/>
                 </a:solidFill>
                 <a:latin typeface="Consolas" pitchFamily="34" charset="0"/>
                 <a:ea typeface="Consolas" pitchFamily="34" charset="-122"/>
@@ -7403,7 +7405,7 @@
               </a:rPr>
               <a:t>3 / 15</a:t>
             </a:r>
-            <a:endParaRPr lang="en-US" sz="1000" dirty="0"/>
+            <a:endParaRPr lang="en-US" sz="1800" dirty="0"/>
           </a:p>
         </p:txBody>
       </p:sp>
@@ -7487,8 +7489,8 @@
         </p:nvSpPr>
         <p:spPr>
           <a:xfrm>
-            <a:off x="822960" y="502920"/>
-            <a:ext cx="10515600" cy="365760"/>
+            <a:off x="822960" y="457200"/>
+            <a:ext cx="10515600" cy="411480"/>
           </a:xfrm>
           <a:prstGeom prst="rect">
             <a:avLst/>
@@ -7504,7 +7506,7 @@
               <a:buNone/>
             </a:pPr>
             <a:r>
-              <a:rPr lang="en-US" sz="1200" spc="300" kern="0" dirty="0">
+              <a:rPr lang="en-US" sz="1800" spc="300" kern="0" dirty="0">
                 <a:solidFill>
                   <a:srgbClr val="06B6D4"/>
                 </a:solidFill>
@@ -7514,7 +7516,7 @@
               </a:rPr>
               <a:t>MODULES</a:t>
             </a:r>
-            <a:endParaRPr lang="en-US" sz="1200" dirty="0"/>
+            <a:endParaRPr lang="en-US" sz="1800" dirty="0"/>
           </a:p>
         </p:txBody>
       </p:sp>
@@ -7565,8 +7567,8 @@
         </p:nvSpPr>
         <p:spPr>
           <a:xfrm>
-            <a:off x="774040" y="2514600"/>
-            <a:ext cx="1938528" cy="2103120"/>
+            <a:off x="774040" y="2331720"/>
+            <a:ext cx="1938528" cy="2697480"/>
           </a:xfrm>
           <a:prstGeom prst="roundRect">
             <a:avLst>
@@ -7592,8 +7594,8 @@
         </p:nvSpPr>
         <p:spPr>
           <a:xfrm>
-            <a:off x="902056" y="2633472"/>
-            <a:ext cx="1682496" cy="310896"/>
+            <a:off x="902056" y="2450592"/>
+            <a:ext cx="1682496" cy="365760"/>
           </a:xfrm>
           <a:prstGeom prst="rect">
             <a:avLst/>
@@ -7609,7 +7611,7 @@
               <a:buNone/>
             </a:pPr>
             <a:r>
-              <a:rPr lang="en-US" sz="1100" b="1" dirty="0">
+              <a:rPr lang="en-US" sz="1800" b="1" dirty="0">
                 <a:solidFill>
                   <a:srgbClr val="3B82F6"/>
                 </a:solidFill>
@@ -7619,7 +7621,7 @@
               </a:rPr>
               <a:t>01</a:t>
             </a:r>
-            <a:endParaRPr lang="en-US" sz="1100" dirty="0"/>
+            <a:endParaRPr lang="en-US" sz="1800" dirty="0"/>
           </a:p>
         </p:txBody>
       </p:sp>
@@ -7631,8 +7633,8 @@
         </p:nvSpPr>
         <p:spPr>
           <a:xfrm>
-            <a:off x="902056" y="2962656"/>
-            <a:ext cx="1682496" cy="566928"/>
+            <a:off x="902056" y="2834640"/>
+            <a:ext cx="1682496" cy="713232"/>
           </a:xfrm>
           <a:prstGeom prst="rect">
             <a:avLst/>
@@ -7648,7 +7650,7 @@
               <a:buNone/>
             </a:pPr>
             <a:r>
-              <a:rPr lang="en-US" sz="1350" b="1" dirty="0">
+              <a:rPr lang="en-US" sz="1800" b="1" dirty="0">
                 <a:solidFill>
                   <a:srgbClr val="FFFFFF"/>
                 </a:solidFill>
@@ -7658,7 +7660,7 @@
               </a:rPr>
               <a:t>Ingest</a:t>
             </a:r>
-            <a:endParaRPr lang="en-US" sz="1350" dirty="0"/>
+            <a:endParaRPr lang="en-US" sz="1800" dirty="0"/>
           </a:p>
         </p:txBody>
       </p:sp>
@@ -7670,8 +7672,8 @@
         </p:nvSpPr>
         <p:spPr>
           <a:xfrm>
-            <a:off x="902056" y="3566160"/>
-            <a:ext cx="1682496" cy="960120"/>
+            <a:off x="902056" y="3584448"/>
+            <a:ext cx="1682496" cy="1371600"/>
           </a:xfrm>
           <a:prstGeom prst="rect">
             <a:avLst/>
@@ -7687,7 +7689,7 @@
               <a:buNone/>
             </a:pPr>
             <a:r>
-              <a:rPr lang="en-US" sz="980" dirty="0">
+              <a:rPr lang="en-US" sz="1800" dirty="0">
                 <a:solidFill>
                   <a:srgbClr val="CBD5E1"/>
                 </a:solidFill>
@@ -7697,7 +7699,7 @@
               </a:rPr>
               <a:t>Files, APIs, and scrapes land in a common, schema-checked shape.</a:t>
             </a:r>
-            <a:endParaRPr lang="en-US" sz="980" dirty="0"/>
+            <a:endParaRPr lang="en-US" sz="1800" dirty="0"/>
           </a:p>
         </p:txBody>
       </p:sp>
@@ -7709,7 +7711,7 @@
         </p:nvSpPr>
         <p:spPr>
           <a:xfrm>
-            <a:off x="2726284" y="3419856"/>
+            <a:off x="2726284" y="3566160"/>
             <a:ext cx="210312" cy="274320"/>
           </a:xfrm>
           <a:prstGeom prst="rightArrow">
@@ -7729,8 +7731,8 @@
         </p:nvSpPr>
         <p:spPr>
           <a:xfrm>
-            <a:off x="2950312" y="2514600"/>
-            <a:ext cx="1938528" cy="2103120"/>
+            <a:off x="2950312" y="2331720"/>
+            <a:ext cx="1938528" cy="2697480"/>
           </a:xfrm>
           <a:prstGeom prst="roundRect">
             <a:avLst>
@@ -7756,8 +7758,8 @@
         </p:nvSpPr>
         <p:spPr>
           <a:xfrm>
-            <a:off x="3078328" y="2633472"/>
-            <a:ext cx="1682496" cy="310896"/>
+            <a:off x="3078328" y="2450592"/>
+            <a:ext cx="1682496" cy="365760"/>
           </a:xfrm>
           <a:prstGeom prst="rect">
             <a:avLst/>
@@ -7773,7 +7775,7 @@
               <a:buNone/>
             </a:pPr>
             <a:r>
-              <a:rPr lang="en-US" sz="1100" b="1" dirty="0">
+              <a:rPr lang="en-US" sz="1800" b="1" dirty="0">
                 <a:solidFill>
                   <a:srgbClr val="06B6D4"/>
                 </a:solidFill>
@@ -7783,7 +7785,7 @@
               </a:rPr>
               <a:t>02</a:t>
             </a:r>
-            <a:endParaRPr lang="en-US" sz="1100" dirty="0"/>
+            <a:endParaRPr lang="en-US" sz="1800" dirty="0"/>
           </a:p>
         </p:txBody>
       </p:sp>
@@ -7795,8 +7797,8 @@
         </p:nvSpPr>
         <p:spPr>
           <a:xfrm>
-            <a:off x="3078328" y="2962656"/>
-            <a:ext cx="1682496" cy="566928"/>
+            <a:off x="3078328" y="2834640"/>
+            <a:ext cx="1682496" cy="713232"/>
           </a:xfrm>
           <a:prstGeom prst="rect">
             <a:avLst/>
@@ -7812,7 +7814,7 @@
               <a:buNone/>
             </a:pPr>
             <a:r>
-              <a:rPr lang="en-US" sz="1350" b="1" dirty="0">
+              <a:rPr lang="en-US" sz="1800" b="1" dirty="0">
                 <a:solidFill>
                   <a:srgbClr val="FFFFFF"/>
                 </a:solidFill>
@@ -7822,7 +7824,7 @@
               </a:rPr>
               <a:t>Clean</a:t>
             </a:r>
-            <a:endParaRPr lang="en-US" sz="1350" dirty="0"/>
+            <a:endParaRPr lang="en-US" sz="1800" dirty="0"/>
           </a:p>
         </p:txBody>
       </p:sp>
@@ -7834,8 +7836,8 @@
         </p:nvSpPr>
         <p:spPr>
           <a:xfrm>
-            <a:off x="3078328" y="3566160"/>
-            <a:ext cx="1682496" cy="960120"/>
+            <a:off x="3078328" y="3584448"/>
+            <a:ext cx="1682496" cy="1371600"/>
           </a:xfrm>
           <a:prstGeom prst="rect">
             <a:avLst/>
@@ -7851,7 +7853,7 @@
               <a:buNone/>
             </a:pPr>
             <a:r>
-              <a:rPr lang="en-US" sz="980" dirty="0">
+              <a:rPr lang="en-US" sz="1800" dirty="0">
                 <a:solidFill>
                   <a:srgbClr val="CBD5E1"/>
                 </a:solidFill>
@@ -7861,7 +7863,7 @@
               </a:rPr>
               <a:t>Schema validation, deduplication, and normalization - no silent assumptions.</a:t>
             </a:r>
-            <a:endParaRPr lang="en-US" sz="980" dirty="0"/>
+            <a:endParaRPr lang="en-US" sz="1800" dirty="0"/>
           </a:p>
         </p:txBody>
       </p:sp>
@@ -7873,7 +7875,7 @@
         </p:nvSpPr>
         <p:spPr>
           <a:xfrm>
-            <a:off x="4902556" y="3419856"/>
+            <a:off x="4902556" y="3566160"/>
             <a:ext cx="210312" cy="274320"/>
           </a:xfrm>
           <a:prstGeom prst="rightArrow">
@@ -7893,8 +7895,8 @@
         </p:nvSpPr>
         <p:spPr>
           <a:xfrm>
-            <a:off x="5126584" y="2514600"/>
-            <a:ext cx="1938528" cy="2103120"/>
+            <a:off x="5126584" y="2331720"/>
+            <a:ext cx="1938528" cy="2697480"/>
           </a:xfrm>
           <a:prstGeom prst="roundRect">
             <a:avLst>
@@ -7920,8 +7922,8 @@
         </p:nvSpPr>
         <p:spPr>
           <a:xfrm>
-            <a:off x="5254600" y="2633472"/>
-            <a:ext cx="1682496" cy="310896"/>
+            <a:off x="5254600" y="2450592"/>
+            <a:ext cx="1682496" cy="365760"/>
           </a:xfrm>
           <a:prstGeom prst="rect">
             <a:avLst/>
@@ -7937,7 +7939,7 @@
               <a:buNone/>
             </a:pPr>
             <a:r>
-              <a:rPr lang="en-US" sz="1100" b="1" dirty="0">
+              <a:rPr lang="en-US" sz="1800" b="1" dirty="0">
                 <a:solidFill>
                   <a:srgbClr val="3B82F6"/>
                 </a:solidFill>
@@ -7947,7 +7949,7 @@
               </a:rPr>
               <a:t>03</a:t>
             </a:r>
-            <a:endParaRPr lang="en-US" sz="1100" dirty="0"/>
+            <a:endParaRPr lang="en-US" sz="1800" dirty="0"/>
           </a:p>
         </p:txBody>
       </p:sp>
@@ -7959,8 +7961,8 @@
         </p:nvSpPr>
         <p:spPr>
           <a:xfrm>
-            <a:off x="5254600" y="2962656"/>
-            <a:ext cx="1682496" cy="566928"/>
+            <a:off x="5254600" y="2834640"/>
+            <a:ext cx="1682496" cy="713232"/>
           </a:xfrm>
           <a:prstGeom prst="rect">
             <a:avLst/>
@@ -7976,7 +7978,7 @@
               <a:buNone/>
             </a:pPr>
             <a:r>
-              <a:rPr lang="en-US" sz="1350" b="1" dirty="0">
+              <a:rPr lang="en-US" sz="1800" b="1" dirty="0">
                 <a:solidFill>
                   <a:srgbClr val="FFFFFF"/>
                 </a:solidFill>
@@ -7986,7 +7988,7 @@
               </a:rPr>
               <a:t>Enrich</a:t>
             </a:r>
-            <a:endParaRPr lang="en-US" sz="1350" dirty="0"/>
+            <a:endParaRPr lang="en-US" sz="1800" dirty="0"/>
           </a:p>
         </p:txBody>
       </p:sp>
@@ -7998,8 +8000,8 @@
         </p:nvSpPr>
         <p:spPr>
           <a:xfrm>
-            <a:off x="5254600" y="3566160"/>
-            <a:ext cx="1682496" cy="960120"/>
+            <a:off x="5254600" y="3584448"/>
+            <a:ext cx="1682496" cy="1371600"/>
           </a:xfrm>
           <a:prstGeom prst="rect">
             <a:avLst/>
@@ -8015,7 +8017,7 @@
               <a:buNone/>
             </a:pPr>
             <a:r>
-              <a:rPr lang="en-US" sz="980" dirty="0">
+              <a:rPr lang="en-US" sz="1800" dirty="0">
                 <a:solidFill>
                   <a:srgbClr val="CBD5E1"/>
                 </a:solidFill>
@@ -8025,7 +8027,7 @@
               </a:rPr>
               <a:t>Joins and derived features without spaghetti SQL or hidden dependencies.</a:t>
             </a:r>
-            <a:endParaRPr lang="en-US" sz="980" dirty="0"/>
+            <a:endParaRPr lang="en-US" sz="1800" dirty="0"/>
           </a:p>
         </p:txBody>
       </p:sp>
@@ -8037,7 +8039,7 @@
         </p:nvSpPr>
         <p:spPr>
           <a:xfrm>
-            <a:off x="7078828" y="3419856"/>
+            <a:off x="7078828" y="3566160"/>
             <a:ext cx="210312" cy="274320"/>
           </a:xfrm>
           <a:prstGeom prst="rightArrow">
@@ -8057,8 +8059,8 @@
         </p:nvSpPr>
         <p:spPr>
           <a:xfrm>
-            <a:off x="7302856" y="2514600"/>
-            <a:ext cx="1938528" cy="2103120"/>
+            <a:off x="7302856" y="2331720"/>
+            <a:ext cx="1938528" cy="2697480"/>
           </a:xfrm>
           <a:prstGeom prst="roundRect">
             <a:avLst>
@@ -8084,8 +8086,8 @@
         </p:nvSpPr>
         <p:spPr>
           <a:xfrm>
-            <a:off x="7430872" y="2633472"/>
-            <a:ext cx="1682496" cy="310896"/>
+            <a:off x="7430872" y="2450592"/>
+            <a:ext cx="1682496" cy="365760"/>
           </a:xfrm>
           <a:prstGeom prst="rect">
             <a:avLst/>
@@ -8101,7 +8103,7 @@
               <a:buNone/>
             </a:pPr>
             <a:r>
-              <a:rPr lang="en-US" sz="1100" b="1" dirty="0">
+              <a:rPr lang="en-US" sz="1800" b="1" dirty="0">
                 <a:solidFill>
                   <a:srgbClr val="06B6D4"/>
                 </a:solidFill>
@@ -8111,7 +8113,7 @@
               </a:rPr>
               <a:t>04</a:t>
             </a:r>
-            <a:endParaRPr lang="en-US" sz="1100" dirty="0"/>
+            <a:endParaRPr lang="en-US" sz="1800" dirty="0"/>
           </a:p>
         </p:txBody>
       </p:sp>
@@ -8123,8 +8125,8 @@
         </p:nvSpPr>
         <p:spPr>
           <a:xfrm>
-            <a:off x="7430872" y="2962656"/>
-            <a:ext cx="1682496" cy="566928"/>
+            <a:off x="7430872" y="2834640"/>
+            <a:ext cx="1682496" cy="713232"/>
           </a:xfrm>
           <a:prstGeom prst="rect">
             <a:avLst/>
@@ -8140,7 +8142,7 @@
               <a:buNone/>
             </a:pPr>
             <a:r>
-              <a:rPr lang="en-US" sz="1350" b="1" dirty="0">
+              <a:rPr lang="en-US" sz="1800" b="1" dirty="0">
                 <a:solidFill>
                   <a:srgbClr val="FFFFFF"/>
                 </a:solidFill>
@@ -8150,7 +8152,7 @@
               </a:rPr>
               <a:t>Export</a:t>
             </a:r>
-            <a:endParaRPr lang="en-US" sz="1350" dirty="0"/>
+            <a:endParaRPr lang="en-US" sz="1800" dirty="0"/>
           </a:p>
         </p:txBody>
       </p:sp>
@@ -8162,8 +8164,8 @@
         </p:nvSpPr>
         <p:spPr>
           <a:xfrm>
-            <a:off x="7430872" y="3566160"/>
-            <a:ext cx="1682496" cy="960120"/>
+            <a:off x="7430872" y="3584448"/>
+            <a:ext cx="1682496" cy="1371600"/>
           </a:xfrm>
           <a:prstGeom prst="rect">
             <a:avLst/>
@@ -8179,7 +8181,7 @@
               <a:buNone/>
             </a:pPr>
             <a:r>
-              <a:rPr lang="en-US" sz="980" dirty="0">
+              <a:rPr lang="en-US" sz="1800" dirty="0">
                 <a:solidFill>
                   <a:srgbClr val="CBD5E1"/>
                 </a:solidFill>
@@ -8189,7 +8191,7 @@
               </a:rPr>
               <a:t>Formats downstream tools actually want, contract-tested per output.</a:t>
             </a:r>
-            <a:endParaRPr lang="en-US" sz="980" dirty="0"/>
+            <a:endParaRPr lang="en-US" sz="1800" dirty="0"/>
           </a:p>
         </p:txBody>
       </p:sp>
@@ -8201,7 +8203,7 @@
         </p:nvSpPr>
         <p:spPr>
           <a:xfrm>
-            <a:off x="9255100" y="3419856"/>
+            <a:off x="9255100" y="3566160"/>
             <a:ext cx="210312" cy="274320"/>
           </a:xfrm>
           <a:prstGeom prst="rightArrow">
@@ -8221,8 +8223,8 @@
         </p:nvSpPr>
         <p:spPr>
           <a:xfrm>
-            <a:off x="9479128" y="2514600"/>
-            <a:ext cx="1938528" cy="2103120"/>
+            <a:off x="9479128" y="2331720"/>
+            <a:ext cx="1938528" cy="2697480"/>
           </a:xfrm>
           <a:prstGeom prst="roundRect">
             <a:avLst>
@@ -8248,8 +8250,8 @@
         </p:nvSpPr>
         <p:spPr>
           <a:xfrm>
-            <a:off x="9607144" y="2633472"/>
-            <a:ext cx="1682496" cy="310896"/>
+            <a:off x="9607144" y="2450592"/>
+            <a:ext cx="1682496" cy="365760"/>
           </a:xfrm>
           <a:prstGeom prst="rect">
             <a:avLst/>
@@ -8265,7 +8267,7 @@
               <a:buNone/>
             </a:pPr>
             <a:r>
-              <a:rPr lang="en-US" sz="1100" b="1" dirty="0">
+              <a:rPr lang="en-US" sz="1800" b="1" dirty="0">
                 <a:solidFill>
                   <a:srgbClr val="3B82F6"/>
                 </a:solidFill>
@@ -8275,7 +8277,7 @@
               </a:rPr>
               <a:t>05</a:t>
             </a:r>
-            <a:endParaRPr lang="en-US" sz="1100" dirty="0"/>
+            <a:endParaRPr lang="en-US" sz="1800" dirty="0"/>
           </a:p>
         </p:txBody>
       </p:sp>
@@ -8287,8 +8289,8 @@
         </p:nvSpPr>
         <p:spPr>
           <a:xfrm>
-            <a:off x="9607144" y="2962656"/>
-            <a:ext cx="1682496" cy="566928"/>
+            <a:off x="9607144" y="2834640"/>
+            <a:ext cx="1682496" cy="713232"/>
           </a:xfrm>
           <a:prstGeom prst="rect">
             <a:avLst/>
@@ -8304,7 +8306,7 @@
               <a:buNone/>
             </a:pPr>
             <a:r>
-              <a:rPr lang="en-US" sz="1350" b="1" dirty="0">
+              <a:rPr lang="en-US" sz="1800" b="1" dirty="0">
                 <a:solidFill>
                   <a:srgbClr val="FFFFFF"/>
                 </a:solidFill>
@@ -8314,7 +8316,7 @@
               </a:rPr>
               <a:t>Report</a:t>
             </a:r>
-            <a:endParaRPr lang="en-US" sz="1350" dirty="0"/>
+            <a:endParaRPr lang="en-US" sz="1800" dirty="0"/>
           </a:p>
         </p:txBody>
       </p:sp>
@@ -8326,8 +8328,8 @@
         </p:nvSpPr>
         <p:spPr>
           <a:xfrm>
-            <a:off x="9607144" y="3566160"/>
-            <a:ext cx="1682496" cy="960120"/>
+            <a:off x="9607144" y="3584448"/>
+            <a:ext cx="1682496" cy="1371600"/>
           </a:xfrm>
           <a:prstGeom prst="rect">
             <a:avLst/>
@@ -8343,7 +8345,7 @@
               <a:buNone/>
             </a:pPr>
             <a:r>
-              <a:rPr lang="en-US" sz="980" dirty="0">
+              <a:rPr lang="en-US" sz="1800" dirty="0">
                 <a:solidFill>
                   <a:srgbClr val="CBD5E1"/>
                 </a:solidFill>
@@ -8353,7 +8355,7 @@
               </a:rPr>
               <a:t>Readable outputs and logs a human can audit without a decoder ring.</a:t>
             </a:r>
-            <a:endParaRPr lang="en-US" sz="980" dirty="0"/>
+            <a:endParaRPr lang="en-US" sz="1800" dirty="0"/>
           </a:p>
         </p:txBody>
       </p:sp>
@@ -8388,8 +8390,8 @@
         </p:nvSpPr>
         <p:spPr>
           <a:xfrm>
-            <a:off x="822960" y="6053328"/>
-            <a:ext cx="9692640" cy="457200"/>
+            <a:off x="822960" y="6035040"/>
+            <a:ext cx="10424160" cy="566928"/>
           </a:xfrm>
           <a:prstGeom prst="rect">
             <a:avLst/>
@@ -8405,9 +8407,9 @@
               <a:buNone/>
             </a:pPr>
             <a:r>
-              <a:rPr lang="en-US" sz="1150" dirty="0">
-                <a:solidFill>
-                  <a:srgbClr val="64748B"/>
+              <a:rPr lang="en-US" sz="1800" dirty="0">
+                <a:solidFill>
+                  <a:srgbClr val="8FA3BF"/>
                 </a:solidFill>
                 <a:latin typeface="Segoe UI" pitchFamily="34" charset="0"/>
                 <a:ea typeface="Segoe UI" pitchFamily="34" charset="-122"/>
@@ -8415,7 +8417,7 @@
               </a:rPr>
               <a:t>Each module is composable - use one, or run the whole pipeline.</a:t>
             </a:r>
-            <a:endParaRPr lang="en-US" sz="1150" dirty="0"/>
+            <a:endParaRPr lang="en-US" sz="1800" dirty="0"/>
           </a:p>
         </p:txBody>
       </p:sp>
@@ -8427,8 +8429,8 @@
         </p:nvSpPr>
         <p:spPr>
           <a:xfrm>
-            <a:off x="10698480" y="6382512"/>
-            <a:ext cx="1188720" cy="365760"/>
+            <a:off x="10698480" y="6309360"/>
+            <a:ext cx="1188720" cy="411480"/>
           </a:xfrm>
           <a:prstGeom prst="rect">
             <a:avLst/>
@@ -8444,9 +8446,9 @@
               <a:buNone/>
             </a:pPr>
             <a:r>
-              <a:rPr lang="en-US" sz="1000" dirty="0">
-                <a:solidFill>
-                  <a:srgbClr val="64748B"/>
+              <a:rPr lang="en-US" sz="1800" dirty="0">
+                <a:solidFill>
+                  <a:srgbClr val="8FA3BF"/>
                 </a:solidFill>
                 <a:latin typeface="Consolas" pitchFamily="34" charset="0"/>
                 <a:ea typeface="Consolas" pitchFamily="34" charset="-122"/>
@@ -8454,7 +8456,7 @@
               </a:rPr>
               <a:t>4 / 15</a:t>
             </a:r>
-            <a:endParaRPr lang="en-US" sz="1000" dirty="0"/>
+            <a:endParaRPr lang="en-US" sz="1800" dirty="0"/>
           </a:p>
         </p:txBody>
       </p:sp>
@@ -8538,8 +8540,8 @@
         </p:nvSpPr>
         <p:spPr>
           <a:xfrm>
-            <a:off x="822960" y="502920"/>
-            <a:ext cx="10515600" cy="365760"/>
+            <a:off x="822960" y="457200"/>
+            <a:ext cx="10515600" cy="411480"/>
           </a:xfrm>
           <a:prstGeom prst="rect">
             <a:avLst/>
@@ -8555,7 +8557,7 @@
               <a:buNone/>
             </a:pPr>
             <a:r>
-              <a:rPr lang="en-US" sz="1200" spc="300" kern="0" dirty="0">
+              <a:rPr lang="en-US" sz="1800" spc="300" kern="0" dirty="0">
                 <a:solidFill>
                   <a:srgbClr val="06B6D4"/>
                 </a:solidFill>
@@ -8565,7 +8567,7 @@
               </a:rPr>
               <a:t>THE FRAMEWORK</a:t>
             </a:r>
-            <a:endParaRPr lang="en-US" sz="1200" dirty="0"/>
+            <a:endParaRPr lang="en-US" sz="1800" dirty="0"/>
           </a:p>
         </p:txBody>
       </p:sp>
@@ -8616,8 +8618,8 @@
         </p:nvSpPr>
         <p:spPr>
           <a:xfrm>
-            <a:off x="822960" y="2194560"/>
-            <a:ext cx="2423160" cy="2697480"/>
+            <a:off x="822960" y="1965960"/>
+            <a:ext cx="2423160" cy="3154680"/>
           </a:xfrm>
           <a:prstGeom prst="roundRect">
             <a:avLst>
@@ -8643,7 +8645,7 @@
         </p:nvSpPr>
         <p:spPr>
           <a:xfrm>
-            <a:off x="960120" y="2514600"/>
+            <a:off x="960120" y="2194560"/>
             <a:ext cx="2148840" cy="914400"/>
           </a:xfrm>
           <a:prstGeom prst="rect">
@@ -8682,8 +8684,8 @@
         </p:nvSpPr>
         <p:spPr>
           <a:xfrm>
-            <a:off x="960120" y="3520440"/>
-            <a:ext cx="2148840" cy="502920"/>
+            <a:off x="960120" y="3200400"/>
+            <a:ext cx="2148840" cy="868680"/>
           </a:xfrm>
           <a:prstGeom prst="rect">
             <a:avLst/>
@@ -8699,7 +8701,7 @@
               <a:buNone/>
             </a:pPr>
             <a:r>
-              <a:rPr lang="en-US" sz="1450" b="1" dirty="0">
+              <a:rPr lang="en-US" sz="1800" b="1" dirty="0">
                 <a:solidFill>
                   <a:srgbClr val="FFFFFF"/>
                 </a:solidFill>
@@ -8709,7 +8711,7 @@
               </a:rPr>
               <a:t>Lines, open source</a:t>
             </a:r>
-            <a:endParaRPr lang="en-US" sz="1450" dirty="0"/>
+            <a:endParaRPr lang="en-US" sz="1800" dirty="0"/>
           </a:p>
         </p:txBody>
       </p:sp>
@@ -8721,8 +8723,8 @@
         </p:nvSpPr>
         <p:spPr>
           <a:xfrm>
-            <a:off x="1005840" y="4069080"/>
-            <a:ext cx="2057400" cy="685800"/>
+            <a:off x="1005840" y="4114800"/>
+            <a:ext cx="2057400" cy="914400"/>
           </a:xfrm>
           <a:prstGeom prst="rect">
             <a:avLst/>
@@ -8738,7 +8740,7 @@
               <a:buNone/>
             </a:pPr>
             <a:r>
-              <a:rPr lang="en-US" sz="1050" dirty="0">
+              <a:rPr lang="en-US" sz="1800" dirty="0">
                 <a:solidFill>
                   <a:srgbClr val="94A3B8"/>
                 </a:solidFill>
@@ -8748,7 +8750,7 @@
               </a:rPr>
               <a:t>Production glue code you never have to write again.</a:t>
             </a:r>
-            <a:endParaRPr lang="en-US" sz="1050" dirty="0"/>
+            <a:endParaRPr lang="en-US" sz="1800" dirty="0"/>
           </a:p>
         </p:txBody>
       </p:sp>
@@ -8760,8 +8762,8 @@
         </p:nvSpPr>
         <p:spPr>
           <a:xfrm>
-            <a:off x="3520440" y="2194560"/>
-            <a:ext cx="2423160" cy="2697480"/>
+            <a:off x="3520440" y="1965960"/>
+            <a:ext cx="2423160" cy="3154680"/>
           </a:xfrm>
           <a:prstGeom prst="roundRect">
             <a:avLst>
@@ -8787,7 +8789,7 @@
         </p:nvSpPr>
         <p:spPr>
           <a:xfrm>
-            <a:off x="3657600" y="2514600"/>
+            <a:off x="3657600" y="2194560"/>
             <a:ext cx="2148840" cy="914400"/>
           </a:xfrm>
           <a:prstGeom prst="rect">
@@ -8826,8 +8828,8 @@
         </p:nvSpPr>
         <p:spPr>
           <a:xfrm>
-            <a:off x="3657600" y="3520440"/>
-            <a:ext cx="2148840" cy="502920"/>
+            <a:off x="3657600" y="3200400"/>
+            <a:ext cx="2148840" cy="868680"/>
           </a:xfrm>
           <a:prstGeom prst="rect">
             <a:avLst/>
@@ -8843,7 +8845,7 @@
               <a:buNone/>
             </a:pPr>
             <a:r>
-              <a:rPr lang="en-US" sz="1450" b="1" dirty="0">
+              <a:rPr lang="en-US" sz="1800" b="1" dirty="0">
                 <a:solidFill>
                   <a:srgbClr val="FFFFFF"/>
                 </a:solidFill>
@@ -8853,7 +8855,7 @@
               </a:rPr>
               <a:t>Pipeline modules</a:t>
             </a:r>
-            <a:endParaRPr lang="en-US" sz="1450" dirty="0"/>
+            <a:endParaRPr lang="en-US" sz="1800" dirty="0"/>
           </a:p>
         </p:txBody>
       </p:sp>
@@ -8865,8 +8867,8 @@
         </p:nvSpPr>
         <p:spPr>
           <a:xfrm>
-            <a:off x="3703320" y="4069080"/>
-            <a:ext cx="2057400" cy="685800"/>
+            <a:off x="3703320" y="4114800"/>
+            <a:ext cx="2057400" cy="914400"/>
           </a:xfrm>
           <a:prstGeom prst="rect">
             <a:avLst/>
@@ -8882,7 +8884,7 @@
               <a:buNone/>
             </a:pPr>
             <a:r>
-              <a:rPr lang="en-US" sz="1050" dirty="0">
+              <a:rPr lang="en-US" sz="1800" dirty="0">
                 <a:solidFill>
                   <a:srgbClr val="94A3B8"/>
                 </a:solidFill>
@@ -8892,7 +8894,7 @@
               </a:rPr>
               <a:t>Ingestion, cleaning, enrichment, export and reporting.</a:t>
             </a:r>
-            <a:endParaRPr lang="en-US" sz="1050" dirty="0"/>
+            <a:endParaRPr lang="en-US" sz="1800" dirty="0"/>
           </a:p>
         </p:txBody>
       </p:sp>
@@ -8904,8 +8906,8 @@
         </p:nvSpPr>
         <p:spPr>
           <a:xfrm>
-            <a:off x="6217920" y="2194560"/>
-            <a:ext cx="2423160" cy="2697480"/>
+            <a:off x="6217920" y="1965960"/>
+            <a:ext cx="2423160" cy="3154680"/>
           </a:xfrm>
           <a:prstGeom prst="roundRect">
             <a:avLst>
@@ -8931,7 +8933,7 @@
         </p:nvSpPr>
         <p:spPr>
           <a:xfrm>
-            <a:off x="6355080" y="2514600"/>
+            <a:off x="6355080" y="2194560"/>
             <a:ext cx="2148840" cy="914400"/>
           </a:xfrm>
           <a:prstGeom prst="rect">
@@ -8970,8 +8972,8 @@
         </p:nvSpPr>
         <p:spPr>
           <a:xfrm>
-            <a:off x="6355080" y="3520440"/>
-            <a:ext cx="2148840" cy="502920"/>
+            <a:off x="6355080" y="3200400"/>
+            <a:ext cx="2148840" cy="868680"/>
           </a:xfrm>
           <a:prstGeom prst="rect">
             <a:avLst/>
@@ -8987,7 +8989,7 @@
               <a:buNone/>
             </a:pPr>
             <a:r>
-              <a:rPr lang="en-US" sz="1450" b="1" dirty="0">
+              <a:rPr lang="en-US" sz="1800" b="1" dirty="0">
                 <a:solidFill>
                   <a:srgbClr val="FFFFFF"/>
                 </a:solidFill>
@@ -8997,7 +8999,7 @@
               </a:rPr>
               <a:t>Effort standardized</a:t>
             </a:r>
-            <a:endParaRPr lang="en-US" sz="1450" dirty="0"/>
+            <a:endParaRPr lang="en-US" sz="1800" dirty="0"/>
           </a:p>
         </p:txBody>
       </p:sp>
@@ -9009,8 +9011,8 @@
         </p:nvSpPr>
         <p:spPr>
           <a:xfrm>
-            <a:off x="6400800" y="4069080"/>
-            <a:ext cx="2057400" cy="685800"/>
+            <a:off x="6400800" y="4114800"/>
+            <a:ext cx="2057400" cy="914400"/>
           </a:xfrm>
           <a:prstGeom prst="rect">
             <a:avLst/>
@@ -9026,7 +9028,7 @@
               <a:buNone/>
             </a:pPr>
             <a:r>
-              <a:rPr lang="en-US" sz="1050" dirty="0">
+              <a:rPr lang="en-US" sz="1800" dirty="0">
                 <a:solidFill>
                   <a:srgbClr val="94A3B8"/>
                 </a:solidFill>
@@ -9036,7 +9038,7 @@
               </a:rPr>
               <a:t>The repetitive part of data work, handled by the framework.</a:t>
             </a:r>
-            <a:endParaRPr lang="en-US" sz="1050" dirty="0"/>
+            <a:endParaRPr lang="en-US" sz="1800" dirty="0"/>
           </a:p>
         </p:txBody>
       </p:sp>
@@ -9048,8 +9050,8 @@
         </p:nvSpPr>
         <p:spPr>
           <a:xfrm>
-            <a:off x="8915400" y="2194560"/>
-            <a:ext cx="2423160" cy="2697480"/>
+            <a:off x="8915400" y="1965960"/>
+            <a:ext cx="2423160" cy="3154680"/>
           </a:xfrm>
           <a:prstGeom prst="roundRect">
             <a:avLst>
@@ -9075,7 +9077,7 @@
         </p:nvSpPr>
         <p:spPr>
           <a:xfrm>
-            <a:off x="9052560" y="2514600"/>
+            <a:off x="9052560" y="2194560"/>
             <a:ext cx="2148840" cy="914400"/>
           </a:xfrm>
           <a:prstGeom prst="rect">
@@ -9114,8 +9116,8 @@
         </p:nvSpPr>
         <p:spPr>
           <a:xfrm>
-            <a:off x="9052560" y="3520440"/>
-            <a:ext cx="2148840" cy="502920"/>
+            <a:off x="9052560" y="3200400"/>
+            <a:ext cx="2148840" cy="868680"/>
           </a:xfrm>
           <a:prstGeom prst="rect">
             <a:avLst/>
@@ -9131,7 +9133,7 @@
               <a:buNone/>
             </a:pPr>
             <a:r>
-              <a:rPr lang="en-US" sz="1450" b="1" dirty="0">
+              <a:rPr lang="en-US" sz="1800" b="1" dirty="0">
                 <a:solidFill>
                   <a:srgbClr val="FFFFFF"/>
                 </a:solidFill>
@@ -9141,7 +9143,7 @@
               </a:rPr>
               <a:t>Data leaving the machine</a:t>
             </a:r>
-            <a:endParaRPr lang="en-US" sz="1450" dirty="0"/>
+            <a:endParaRPr lang="en-US" sz="1800" dirty="0"/>
           </a:p>
         </p:txBody>
       </p:sp>
@@ -9153,8 +9155,8 @@
         </p:nvSpPr>
         <p:spPr>
           <a:xfrm>
-            <a:off x="9098280" y="4069080"/>
-            <a:ext cx="2057400" cy="685800"/>
+            <a:off x="9098280" y="4114800"/>
+            <a:ext cx="2057400" cy="914400"/>
           </a:xfrm>
           <a:prstGeom prst="rect">
             <a:avLst/>
@@ -9170,7 +9172,7 @@
               <a:buNone/>
             </a:pPr>
             <a:r>
-              <a:rPr lang="en-US" sz="1050" dirty="0">
+              <a:rPr lang="en-US" sz="1800" dirty="0">
                 <a:solidFill>
                   <a:srgbClr val="94A3B8"/>
                 </a:solidFill>
@@ -9180,7 +9182,7 @@
               </a:rPr>
               <a:t>Local-first by design - your datasets stay on your hardware.</a:t>
             </a:r>
-            <a:endParaRPr lang="en-US" sz="1050" dirty="0"/>
+            <a:endParaRPr lang="en-US" sz="1800" dirty="0"/>
           </a:p>
         </p:txBody>
       </p:sp>
@@ -9192,7 +9194,7 @@
         </p:nvSpPr>
         <p:spPr>
           <a:xfrm>
-            <a:off x="822960" y="5413248"/>
+            <a:off x="822960" y="5321808"/>
             <a:ext cx="10515600" cy="0"/>
           </a:xfrm>
           <a:prstGeom prst="line">
@@ -9215,8 +9217,8 @@
         </p:nvSpPr>
         <p:spPr>
           <a:xfrm>
-            <a:off x="822960" y="5504688"/>
-            <a:ext cx="10424160" cy="411480"/>
+            <a:off x="822960" y="5394960"/>
+            <a:ext cx="10424160" cy="502920"/>
           </a:xfrm>
           <a:prstGeom prst="rect">
             <a:avLst/>
@@ -9232,7 +9234,7 @@
               <a:buNone/>
             </a:pPr>
             <a:r>
-              <a:rPr lang="en-US" sz="1300" i="1" dirty="0">
+              <a:rPr lang="en-US" sz="1800" i="1" dirty="0">
                 <a:solidFill>
                   <a:srgbClr val="06B6D4"/>
                 </a:solidFill>
@@ -9242,7 +9244,7 @@
               </a:rPr>
               <a:t>→  Built for freelancers and small teams who need BI-grade hygiene without a platform team.</a:t>
             </a:r>
-            <a:endParaRPr lang="en-US" sz="1300" dirty="0"/>
+            <a:endParaRPr lang="en-US" sz="1800" dirty="0"/>
           </a:p>
         </p:txBody>
       </p:sp>
@@ -9254,8 +9256,8 @@
         </p:nvSpPr>
         <p:spPr>
           <a:xfrm>
-            <a:off x="10698480" y="6382512"/>
-            <a:ext cx="1188720" cy="365760"/>
+            <a:off x="10698480" y="6309360"/>
+            <a:ext cx="1188720" cy="411480"/>
           </a:xfrm>
           <a:prstGeom prst="rect">
             <a:avLst/>
@@ -9271,9 +9273,9 @@
               <a:buNone/>
             </a:pPr>
             <a:r>
-              <a:rPr lang="en-US" sz="1000" dirty="0">
-                <a:solidFill>
-                  <a:srgbClr val="64748B"/>
+              <a:rPr lang="en-US" sz="1800" dirty="0">
+                <a:solidFill>
+                  <a:srgbClr val="8FA3BF"/>
                 </a:solidFill>
                 <a:latin typeface="Consolas" pitchFamily="34" charset="0"/>
                 <a:ea typeface="Consolas" pitchFamily="34" charset="-122"/>
@@ -9281,7 +9283,7 @@
               </a:rPr>
               <a:t>5 / 15</a:t>
             </a:r>
-            <a:endParaRPr lang="en-US" sz="1000" dirty="0"/>
+            <a:endParaRPr lang="en-US" sz="1800" dirty="0"/>
           </a:p>
         </p:txBody>
       </p:sp>
@@ -9365,8 +9367,8 @@
         </p:nvSpPr>
         <p:spPr>
           <a:xfrm>
-            <a:off x="822960" y="502920"/>
-            <a:ext cx="10515600" cy="365760"/>
+            <a:off x="822960" y="457200"/>
+            <a:ext cx="10515600" cy="411480"/>
           </a:xfrm>
           <a:prstGeom prst="rect">
             <a:avLst/>
@@ -9382,7 +9384,7 @@
               <a:buNone/>
             </a:pPr>
             <a:r>
-              <a:rPr lang="en-US" sz="1200" spc="300" kern="0" dirty="0">
+              <a:rPr lang="en-US" sz="1800" spc="300" kern="0" dirty="0">
                 <a:solidFill>
                   <a:srgbClr val="06B6D4"/>
                 </a:solidFill>
@@ -9392,7 +9394,7 @@
               </a:rPr>
               <a:t>EFFORT</a:t>
             </a:r>
-            <a:endParaRPr lang="en-US" sz="1200" dirty="0"/>
+            <a:endParaRPr lang="en-US" sz="1800" dirty="0"/>
           </a:p>
         </p:txBody>
       </p:sp>
@@ -9442,8 +9444,8 @@
           <p:nvPr/>
         </p:nvGraphicFramePr>
         <p:xfrm>
-          <a:off x="822960" y="1874520"/>
-          <a:ext cx="10515600" cy="3337560"/>
+          <a:off x="822960" y="1783080"/>
+          <a:ext cx="10515600" cy="3383280"/>
         </p:xfrm>
         <a:graphic xmlns:a="http://schemas.openxmlformats.org/drawingml/2006/main">
           <a:graphicData uri="http://schemas.openxmlformats.org/drawingml/2006/chart">
@@ -9459,7 +9461,7 @@
         </p:nvSpPr>
         <p:spPr>
           <a:xfrm>
-            <a:off x="822960" y="5413248"/>
+            <a:off x="822960" y="5321808"/>
             <a:ext cx="10515600" cy="0"/>
           </a:xfrm>
           <a:prstGeom prst="line">
@@ -9482,8 +9484,8 @@
         </p:nvSpPr>
         <p:spPr>
           <a:xfrm>
-            <a:off x="822960" y="5504688"/>
-            <a:ext cx="10424160" cy="411480"/>
+            <a:off x="822960" y="5394960"/>
+            <a:ext cx="10424160" cy="502920"/>
           </a:xfrm>
           <a:prstGeom prst="rect">
             <a:avLst/>
@@ -9499,7 +9501,7 @@
               <a:buNone/>
             </a:pPr>
             <a:r>
-              <a:rPr lang="en-US" sz="1300" i="1" dirty="0">
+              <a:rPr lang="en-US" sz="1800" i="1" dirty="0">
                 <a:solidFill>
                   <a:srgbClr val="06B6D4"/>
                 </a:solidFill>
@@ -9509,7 +9511,7 @@
               </a:rPr>
               <a:t>→  70% of the effort was skeleton - ODIS exists to hand that time back to the 30% that produces insight.</a:t>
             </a:r>
-            <a:endParaRPr lang="en-US" sz="1300" dirty="0"/>
+            <a:endParaRPr lang="en-US" sz="1800" dirty="0"/>
           </a:p>
         </p:txBody>
       </p:sp>
@@ -9544,8 +9546,8 @@
         </p:nvSpPr>
         <p:spPr>
           <a:xfrm>
-            <a:off x="822960" y="6053328"/>
-            <a:ext cx="9692640" cy="457200"/>
+            <a:off x="822960" y="6035040"/>
+            <a:ext cx="10424160" cy="566928"/>
           </a:xfrm>
           <a:prstGeom prst="rect">
             <a:avLst/>
@@ -9561,9 +9563,9 @@
               <a:buNone/>
             </a:pPr>
             <a:r>
-              <a:rPr lang="en-US" sz="1150" dirty="0">
-                <a:solidFill>
-                  <a:srgbClr val="64748B"/>
+              <a:rPr lang="en-US" sz="1800" dirty="0">
+                <a:solidFill>
+                  <a:srgbClr val="8FA3BF"/>
                 </a:solidFill>
                 <a:latin typeface="Segoe UI" pitchFamily="34" charset="0"/>
                 <a:ea typeface="Segoe UI" pitchFamily="34" charset="-122"/>
@@ -9571,7 +9573,7 @@
               </a:rPr>
               <a:t>Illustrative effort distribution behind the 'boring 70%' framing.</a:t>
             </a:r>
-            <a:endParaRPr lang="en-US" sz="1150" dirty="0"/>
+            <a:endParaRPr lang="en-US" sz="1800" dirty="0"/>
           </a:p>
         </p:txBody>
       </p:sp>
@@ -9583,8 +9585,8 @@
         </p:nvSpPr>
         <p:spPr>
           <a:xfrm>
-            <a:off x="10698480" y="6382512"/>
-            <a:ext cx="1188720" cy="365760"/>
+            <a:off x="10698480" y="6309360"/>
+            <a:ext cx="1188720" cy="411480"/>
           </a:xfrm>
           <a:prstGeom prst="rect">
             <a:avLst/>
@@ -9600,9 +9602,9 @@
               <a:buNone/>
             </a:pPr>
             <a:r>
-              <a:rPr lang="en-US" sz="1000" dirty="0">
-                <a:solidFill>
-                  <a:srgbClr val="64748B"/>
+              <a:rPr lang="en-US" sz="1800" dirty="0">
+                <a:solidFill>
+                  <a:srgbClr val="8FA3BF"/>
                 </a:solidFill>
                 <a:latin typeface="Consolas" pitchFamily="34" charset="0"/>
                 <a:ea typeface="Consolas" pitchFamily="34" charset="-122"/>
@@ -9610,7 +9612,7 @@
               </a:rPr>
               <a:t>6 / 15</a:t>
             </a:r>
-            <a:endParaRPr lang="en-US" sz="1000" dirty="0"/>
+            <a:endParaRPr lang="en-US" sz="1800" dirty="0"/>
           </a:p>
         </p:txBody>
       </p:sp>
@@ -9694,8 +9696,8 @@
         </p:nvSpPr>
         <p:spPr>
           <a:xfrm>
-            <a:off x="822960" y="502920"/>
-            <a:ext cx="10515600" cy="365760"/>
+            <a:off x="822960" y="457200"/>
+            <a:ext cx="10515600" cy="411480"/>
           </a:xfrm>
           <a:prstGeom prst="rect">
             <a:avLst/>
@@ -9711,7 +9713,7 @@
               <a:buNone/>
             </a:pPr>
             <a:r>
-              <a:rPr lang="en-US" sz="1200" spc="300" kern="0" dirty="0">
+              <a:rPr lang="en-US" sz="1800" spc="300" kern="0" dirty="0">
                 <a:solidFill>
                   <a:srgbClr val="06B6D4"/>
                 </a:solidFill>
@@ -9721,7 +9723,7 @@
               </a:rPr>
               <a:t>CAPABILITIES</a:t>
             </a:r>
-            <a:endParaRPr lang="en-US" sz="1200" dirty="0"/>
+            <a:endParaRPr lang="en-US" sz="1800" dirty="0"/>
           </a:p>
         </p:txBody>
       </p:sp>
@@ -9779,7 +9781,7 @@
           </p:nvPr>
         </p:nvGraphicFramePr>
         <p:xfrm>
-          <a:off x="822960" y="2011680"/>
+          <a:off x="822960" y="1828800"/>
           <a:ext cx="10515600" cy="914400"/>
         </p:xfrm>
         <a:graphic>
@@ -9791,7 +9793,7 @@
                 <a:gridCol w="3505200"/>
                 <a:gridCol w="3505200"/>
               </a:tblGrid>
-              <a:tr h="402336">
+              <a:tr h="457200">
                 <a:tc>
                   <a:txBody>
                     <a:bodyPr/>
@@ -9801,7 +9803,7 @@
                         <a:buNone/>
                       </a:pPr>
                       <a:r>
-                        <a:rPr lang="en-US" sz="1150" b="1" dirty="0">
+                        <a:rPr lang="en-US" sz="1800" b="1" dirty="0">
                           <a:solidFill>
                             <a:srgbClr val="FFFFFF"/>
                           </a:solidFill>
@@ -9811,14 +9813,14 @@
                         </a:rPr>
                         <a:t>Module</a:t>
                       </a:r>
-                      <a:endParaRPr lang="en-US" sz="1150" dirty="0">
+                      <a:endParaRPr lang="en-US" sz="1800" dirty="0">
                         <a:latin typeface="Segoe UI" charset="0"/>
                         <a:ea typeface="Segoe UI" charset="0"/>
                         <a:cs typeface="Segoe UI" charset="0"/>
                       </a:endParaRPr>
                     </a:p>
                   </a:txBody>
-                  <a:tcPr marL="64008" marR="64008" marT="64008" marB="64008" anchor="ctr">
+                  <a:tcPr marL="36576" marR="36576" marT="36576" marB="36576" anchor="ctr">
                     <a:lnL w="6350" cap="flat" cmpd="sng" algn="ctr">
                       <a:solidFill>
                         <a:srgbClr val="24365A"/>
@@ -9869,7 +9871,7 @@
                         <a:buNone/>
                       </a:pPr>
                       <a:r>
-                        <a:rPr lang="en-US" sz="1150" b="1" dirty="0">
+                        <a:rPr lang="en-US" sz="1800" b="1" dirty="0">
                           <a:solidFill>
                             <a:srgbClr val="FFFFFF"/>
                           </a:solidFill>
@@ -9879,14 +9881,14 @@
                         </a:rPr>
                         <a:t>What it handles</a:t>
                       </a:r>
-                      <a:endParaRPr lang="en-US" sz="1150" dirty="0">
+                      <a:endParaRPr lang="en-US" sz="1800" dirty="0">
                         <a:latin typeface="Segoe UI" charset="0"/>
                         <a:ea typeface="Segoe UI" charset="0"/>
                         <a:cs typeface="Segoe UI" charset="0"/>
                       </a:endParaRPr>
                     </a:p>
                   </a:txBody>
-                  <a:tcPr marL="64008" marR="64008" marT="64008" marB="64008" anchor="ctr">
+                  <a:tcPr marL="36576" marR="36576" marT="36576" marB="36576" anchor="ctr">
                     <a:lnL w="6350" cap="flat" cmpd="sng" algn="ctr">
                       <a:solidFill>
                         <a:srgbClr val="24365A"/>
@@ -9937,7 +9939,7 @@
                         <a:buNone/>
                       </a:pPr>
                       <a:r>
-                        <a:rPr lang="en-US" sz="1150" b="1" dirty="0">
+                        <a:rPr lang="en-US" sz="1800" b="1" dirty="0">
                           <a:solidFill>
                             <a:srgbClr val="FFFFFF"/>
                           </a:solidFill>
@@ -9947,14 +9949,14 @@
                         </a:rPr>
                         <a:t>Guardrails</a:t>
                       </a:r>
-                      <a:endParaRPr lang="en-US" sz="1150" dirty="0">
+                      <a:endParaRPr lang="en-US" sz="1800" dirty="0">
                         <a:latin typeface="Segoe UI" charset="0"/>
                         <a:ea typeface="Segoe UI" charset="0"/>
                         <a:cs typeface="Segoe UI" charset="0"/>
                       </a:endParaRPr>
                     </a:p>
                   </a:txBody>
-                  <a:tcPr marL="64008" marR="64008" marT="64008" marB="64008" anchor="ctr">
+                  <a:tcPr marL="36576" marR="36576" marT="36576" marB="36576" anchor="ctr">
                     <a:lnL w="6350" cap="flat" cmpd="sng" algn="ctr">
                       <a:solidFill>
                         <a:srgbClr val="24365A"/>
@@ -9997,7 +9999,7 @@
                   </a:tcPr>
                 </a:tc>
               </a:tr>
-              <a:tr h="402336">
+              <a:tr h="457200">
                 <a:tc>
                   <a:txBody>
                     <a:bodyPr/>
@@ -10007,7 +10009,7 @@
                         <a:buNone/>
                       </a:pPr>
                       <a:r>
-                        <a:rPr lang="en-US" sz="1080" dirty="0">
+                        <a:rPr lang="en-US" sz="1800" dirty="0">
                           <a:solidFill>
                             <a:srgbClr val="CBD5E1"/>
                           </a:solidFill>
@@ -10017,14 +10019,14 @@
                         </a:rPr>
                         <a:t>Ingestion</a:t>
                       </a:r>
-                      <a:endParaRPr lang="en-US" sz="1080" dirty="0">
+                      <a:endParaRPr lang="en-US" sz="1800" dirty="0">
                         <a:latin typeface="Segoe UI" charset="0"/>
                         <a:ea typeface="Segoe UI" charset="0"/>
                         <a:cs typeface="Segoe UI" charset="0"/>
                       </a:endParaRPr>
                     </a:p>
                   </a:txBody>
-                  <a:tcPr marL="64008" marR="64008" marT="64008" marB="64008" anchor="ctr">
+                  <a:tcPr marL="36576" marR="36576" marT="36576" marB="36576" anchor="ctr">
                     <a:lnL w="6350" cap="flat" cmpd="sng" algn="ctr">
                       <a:solidFill>
                         <a:srgbClr val="24365A"/>
@@ -10075,7 +10077,7 @@
                         <a:buNone/>
                       </a:pPr>
                       <a:r>
-                        <a:rPr lang="en-US" sz="1080" dirty="0">
+                        <a:rPr lang="en-US" sz="1800" dirty="0">
                           <a:solidFill>
                             <a:srgbClr val="CBD5E1"/>
                           </a:solidFill>
@@ -10085,14 +10087,14 @@
                         </a:rPr>
                         <a:t>Files, APIs, and scrapes into a common shape</a:t>
                       </a:r>
-                      <a:endParaRPr lang="en-US" sz="1080" dirty="0">
+                      <a:endParaRPr lang="en-US" sz="1800" dirty="0">
                         <a:latin typeface="Segoe UI" charset="0"/>
                         <a:ea typeface="Segoe UI" charset="0"/>
                         <a:cs typeface="Segoe UI" charset="0"/>
                       </a:endParaRPr>
                     </a:p>
                   </a:txBody>
-                  <a:tcPr marL="64008" marR="64008" marT="64008" marB="64008" anchor="ctr">
+                  <a:tcPr marL="36576" marR="36576" marT="36576" marB="36576" anchor="ctr">
                     <a:lnL w="6350" cap="flat" cmpd="sng" algn="ctr">
                       <a:solidFill>
                         <a:srgbClr val="24365A"/>
@@ -10143,7 +10145,7 @@
                         <a:buNone/>
                       </a:pPr>
                       <a:r>
-                        <a:rPr lang="en-US" sz="1080" dirty="0">
+                        <a:rPr lang="en-US" sz="1800" dirty="0">
                           <a:solidFill>
                             <a:srgbClr val="CBD5E1"/>
                           </a:solidFill>
@@ -10153,14 +10155,14 @@
                         </a:rPr>
                         <a:t>Schema checked on arrival</a:t>
                       </a:r>
-                      <a:endParaRPr lang="en-US" sz="1080" dirty="0">
+                      <a:endParaRPr lang="en-US" sz="1800" dirty="0">
                         <a:latin typeface="Segoe UI" charset="0"/>
                         <a:ea typeface="Segoe UI" charset="0"/>
                         <a:cs typeface="Segoe UI" charset="0"/>
                       </a:endParaRPr>
                     </a:p>
                   </a:txBody>
-                  <a:tcPr marL="64008" marR="64008" marT="64008" marB="64008" anchor="ctr">
+                  <a:tcPr marL="36576" marR="36576" marT="36576" marB="36576" anchor="ctr">
                     <a:lnL w="6350" cap="flat" cmpd="sng" algn="ctr">
                       <a:solidFill>
                         <a:srgbClr val="24365A"/>
@@ -10203,7 +10205,7 @@
                   </a:tcPr>
                 </a:tc>
               </a:tr>
-              <a:tr h="402336">
+              <a:tr h="457200">
                 <a:tc>
                   <a:txBody>
                     <a:bodyPr/>
@@ -10213,7 +10215,7 @@
                         <a:buNone/>
                       </a:pPr>
                       <a:r>
-                        <a:rPr lang="en-US" sz="1080" dirty="0">
+                        <a:rPr lang="en-US" sz="1800" dirty="0">
                           <a:solidFill>
                             <a:srgbClr val="CBD5E1"/>
                           </a:solidFill>
@@ -10223,14 +10225,14 @@
                         </a:rPr>
                         <a:t>Cleaning</a:t>
                       </a:r>
-                      <a:endParaRPr lang="en-US" sz="1080" dirty="0">
+                      <a:endParaRPr lang="en-US" sz="1800" dirty="0">
                         <a:latin typeface="Segoe UI" charset="0"/>
                         <a:ea typeface="Segoe UI" charset="0"/>
                         <a:cs typeface="Segoe UI" charset="0"/>
                       </a:endParaRPr>
                     </a:p>
                   </a:txBody>
-                  <a:tcPr marL="64008" marR="64008" marT="64008" marB="64008" anchor="ctr">
+                  <a:tcPr marL="36576" marR="36576" marT="36576" marB="36576" anchor="ctr">
                     <a:lnL w="6350" cap="flat" cmpd="sng" algn="ctr">
                       <a:solidFill>
                         <a:srgbClr val="24365A"/>
@@ -10281,7 +10283,7 @@
                         <a:buNone/>
                       </a:pPr>
                       <a:r>
-                        <a:rPr lang="en-US" sz="1080" dirty="0">
+                        <a:rPr lang="en-US" sz="1800" dirty="0">
                           <a:solidFill>
                             <a:srgbClr val="CBD5E1"/>
                           </a:solidFill>
@@ -10291,14 +10293,14 @@
                         </a:rPr>
                         <a:t>Deduplication and normalization</a:t>
                       </a:r>
-                      <a:endParaRPr lang="en-US" sz="1080" dirty="0">
+                      <a:endParaRPr lang="en-US" sz="1800" dirty="0">
                         <a:latin typeface="Segoe UI" charset="0"/>
                         <a:ea typeface="Segoe UI" charset="0"/>
                         <a:cs typeface="Segoe UI" charset="0"/>
                       </a:endParaRPr>
                     </a:p>
                   </a:txBody>
-                  <a:tcPr marL="64008" marR="64008" marT="64008" marB="64008" anchor="ctr">
+                  <a:tcPr marL="36576" marR="36576" marT="36576" marB="36576" anchor="ctr">
                     <a:lnL w="6350" cap="flat" cmpd="sng" algn="ctr">
                       <a:solidFill>
                         <a:srgbClr val="24365A"/>
@@ -10349,7 +10351,7 @@
                         <a:buNone/>
                       </a:pPr>
                       <a:r>
-                        <a:rPr lang="en-US" sz="1080" dirty="0">
+                        <a:rPr lang="en-US" sz="1800" dirty="0">
                           <a:solidFill>
                             <a:srgbClr val="CBD5E1"/>
                           </a:solidFill>
@@ -10359,14 +10361,14 @@
                         </a:rPr>
                         <a:t>Sanity ranges on every column</a:t>
                       </a:r>
-                      <a:endParaRPr lang="en-US" sz="1080" dirty="0">
+                      <a:endParaRPr lang="en-US" sz="1800" dirty="0">
                         <a:latin typeface="Segoe UI" charset="0"/>
                         <a:ea typeface="Segoe UI" charset="0"/>
                         <a:cs typeface="Segoe UI" charset="0"/>
                       </a:endParaRPr>
                     </a:p>
                   </a:txBody>
-                  <a:tcPr marL="64008" marR="64008" marT="64008" marB="64008" anchor="ctr">
+                  <a:tcPr marL="36576" marR="36576" marT="36576" marB="36576" anchor="ctr">
                     <a:lnL w="6350" cap="flat" cmpd="sng" algn="ctr">
                       <a:solidFill>
                         <a:srgbClr val="24365A"/>
@@ -10409,7 +10411,7 @@
                   </a:tcPr>
                 </a:tc>
               </a:tr>
-              <a:tr h="402336">
+              <a:tr h="457200">
                 <a:tc>
                   <a:txBody>
                     <a:bodyPr/>
@@ -10419,7 +10421,7 @@
                         <a:buNone/>
                       </a:pPr>
                       <a:r>
-                        <a:rPr lang="en-US" sz="1080" dirty="0">
+                        <a:rPr lang="en-US" sz="1800" dirty="0">
                           <a:solidFill>
                             <a:srgbClr val="CBD5E1"/>
                           </a:solidFill>
@@ -10429,14 +10431,14 @@
                         </a:rPr>
                         <a:t>Enrichment</a:t>
                       </a:r>
-                      <a:endParaRPr lang="en-US" sz="1080" dirty="0">
+                      <a:endParaRPr lang="en-US" sz="1800" dirty="0">
                         <a:latin typeface="Segoe UI" charset="0"/>
                         <a:ea typeface="Segoe UI" charset="0"/>
                         <a:cs typeface="Segoe UI" charset="0"/>
                       </a:endParaRPr>
                     </a:p>
                   </a:txBody>
-                  <a:tcPr marL="64008" marR="64008" marT="64008" marB="64008" anchor="ctr">
+                  <a:tcPr marL="36576" marR="36576" marT="36576" marB="36576" anchor="ctr">
                     <a:lnL w="6350" cap="flat" cmpd="sng" algn="ctr">
                       <a:solidFill>
                         <a:srgbClr val="24365A"/>
@@ -10487,7 +10489,7 @@
                         <a:buNone/>
                       </a:pPr>
                       <a:r>
-                        <a:rPr lang="en-US" sz="1080" dirty="0">
+                        <a:rPr lang="en-US" sz="1800" dirty="0">
                           <a:solidFill>
                             <a:srgbClr val="CBD5E1"/>
                           </a:solidFill>
@@ -10497,14 +10499,14 @@
                         </a:rPr>
                         <a:t>Joins and derived features</a:t>
                       </a:r>
-                      <a:endParaRPr lang="en-US" sz="1080" dirty="0">
+                      <a:endParaRPr lang="en-US" sz="1800" dirty="0">
                         <a:latin typeface="Segoe UI" charset="0"/>
                         <a:ea typeface="Segoe UI" charset="0"/>
                         <a:cs typeface="Segoe UI" charset="0"/>
                       </a:endParaRPr>
                     </a:p>
                   </a:txBody>
-                  <a:tcPr marL="64008" marR="64008" marT="64008" marB="64008" anchor="ctr">
+                  <a:tcPr marL="36576" marR="36576" marT="36576" marB="36576" anchor="ctr">
                     <a:lnL w="6350" cap="flat" cmpd="sng" algn="ctr">
                       <a:solidFill>
                         <a:srgbClr val="24365A"/>
@@ -10555,7 +10557,7 @@
                         <a:buNone/>
                       </a:pPr>
                       <a:r>
-                        <a:rPr lang="en-US" sz="1080" dirty="0">
+                        <a:rPr lang="en-US" sz="1800" dirty="0">
                           <a:solidFill>
                             <a:srgbClr val="CBD5E1"/>
                           </a:solidFill>
@@ -10565,14 +10567,14 @@
                         </a:rPr>
                         <a:t>Validated keys, explicit assumptions</a:t>
                       </a:r>
-                      <a:endParaRPr lang="en-US" sz="1080" dirty="0">
+                      <a:endParaRPr lang="en-US" sz="1800" dirty="0">
                         <a:latin typeface="Segoe UI" charset="0"/>
                         <a:ea typeface="Segoe UI" charset="0"/>
                         <a:cs typeface="Segoe UI" charset="0"/>
                       </a:endParaRPr>
                     </a:p>
                   </a:txBody>
-                  <a:tcPr marL="64008" marR="64008" marT="64008" marB="64008" anchor="ctr">
+                  <a:tcPr marL="36576" marR="36576" marT="36576" marB="36576" anchor="ctr">
                     <a:lnL w="6350" cap="flat" cmpd="sng" algn="ctr">
                       <a:solidFill>
                         <a:srgbClr val="24365A"/>
@@ -10615,7 +10617,7 @@
                   </a:tcPr>
                 </a:tc>
               </a:tr>
-              <a:tr h="402336">
+              <a:tr h="457200">
                 <a:tc>
                   <a:txBody>
                     <a:bodyPr/>
@@ -10625,7 +10627,7 @@
                         <a:buNone/>
                       </a:pPr>
                       <a:r>
-                        <a:rPr lang="en-US" sz="1080" dirty="0">
+                        <a:rPr lang="en-US" sz="1800" dirty="0">
                           <a:solidFill>
                             <a:srgbClr val="CBD5E1"/>
                           </a:solidFill>
@@ -10635,14 +10637,14 @@
                         </a:rPr>
                         <a:t>Export and reporting</a:t>
                       </a:r>
-                      <a:endParaRPr lang="en-US" sz="1080" dirty="0">
+                      <a:endParaRPr lang="en-US" sz="1800" dirty="0">
                         <a:latin typeface="Segoe UI" charset="0"/>
                         <a:ea typeface="Segoe UI" charset="0"/>
                         <a:cs typeface="Segoe UI" charset="0"/>
                       </a:endParaRPr>
                     </a:p>
                   </a:txBody>
-                  <a:tcPr marL="64008" marR="64008" marT="64008" marB="64008" anchor="ctr">
+                  <a:tcPr marL="36576" marR="36576" marT="36576" marB="36576" anchor="ctr">
                     <a:lnL w="6350" cap="flat" cmpd="sng" algn="ctr">
                       <a:solidFill>
                         <a:srgbClr val="24365A"/>
@@ -10693,7 +10695,7 @@
                         <a:buNone/>
                       </a:pPr>
                       <a:r>
-                        <a:rPr lang="en-US" sz="1080" dirty="0">
+                        <a:rPr lang="en-US" sz="1800" dirty="0">
                           <a:solidFill>
                             <a:srgbClr val="CBD5E1"/>
                           </a:solidFill>
@@ -10703,14 +10705,14 @@
                         </a:rPr>
                         <a:t>Analyst-ready outputs</a:t>
                       </a:r>
-                      <a:endParaRPr lang="en-US" sz="1080" dirty="0">
+                      <a:endParaRPr lang="en-US" sz="1800" dirty="0">
                         <a:latin typeface="Segoe UI" charset="0"/>
                         <a:ea typeface="Segoe UI" charset="0"/>
                         <a:cs typeface="Segoe UI" charset="0"/>
                       </a:endParaRPr>
                     </a:p>
                   </a:txBody>
-                  <a:tcPr marL="64008" marR="64008" marT="64008" marB="64008" anchor="ctr">
+                  <a:tcPr marL="36576" marR="36576" marT="36576" marB="36576" anchor="ctr">
                     <a:lnL w="6350" cap="flat" cmpd="sng" algn="ctr">
                       <a:solidFill>
                         <a:srgbClr val="24365A"/>
@@ -10761,7 +10763,7 @@
                         <a:buNone/>
                       </a:pPr>
                       <a:r>
-                        <a:rPr lang="en-US" sz="1080" dirty="0">
+                        <a:rPr lang="en-US" sz="1800" dirty="0">
                           <a:solidFill>
                             <a:srgbClr val="CBD5E1"/>
                           </a:solidFill>
@@ -10771,14 +10773,14 @@
                         </a:rPr>
                         <a:t>Contract-tested formats</a:t>
                       </a:r>
-                      <a:endParaRPr lang="en-US" sz="1080" dirty="0">
+                      <a:endParaRPr lang="en-US" sz="1800" dirty="0">
                         <a:latin typeface="Segoe UI" charset="0"/>
                         <a:ea typeface="Segoe UI" charset="0"/>
                         <a:cs typeface="Segoe UI" charset="0"/>
                       </a:endParaRPr>
                     </a:p>
                   </a:txBody>
-                  <a:tcPr marL="64008" marR="64008" marT="64008" marB="64008" anchor="ctr">
+                  <a:tcPr marL="36576" marR="36576" marT="36576" marB="36576" anchor="ctr">
                     <a:lnL w="6350" cap="flat" cmpd="sng" algn="ctr">
                       <a:solidFill>
                         <a:srgbClr val="24365A"/>
@@ -10856,8 +10858,8 @@
         </p:nvSpPr>
         <p:spPr>
           <a:xfrm>
-            <a:off x="822960" y="6053328"/>
-            <a:ext cx="9692640" cy="457200"/>
+            <a:off x="822960" y="6035040"/>
+            <a:ext cx="10424160" cy="566928"/>
           </a:xfrm>
           <a:prstGeom prst="rect">
             <a:avLst/>
@@ -10873,9 +10875,9 @@
               <a:buNone/>
             </a:pPr>
             <a:r>
-              <a:rPr lang="en-US" sz="1150" dirty="0">
-                <a:solidFill>
-                  <a:srgbClr val="64748B"/>
+              <a:rPr lang="en-US" sz="1800" dirty="0">
+                <a:solidFill>
+                  <a:srgbClr val="8FA3BF"/>
                 </a:solidFill>
                 <a:latin typeface="Segoe UI" pitchFamily="34" charset="0"/>
                 <a:ea typeface="Segoe UI" pitchFamily="34" charset="-122"/>
@@ -10883,7 +10885,7 @@
               </a:rPr>
               <a:t>Validation lives at every seam - data cannot cross a boundary unchecked.</a:t>
             </a:r>
-            <a:endParaRPr lang="en-US" sz="1150" dirty="0"/>
+            <a:endParaRPr lang="en-US" sz="1800" dirty="0"/>
           </a:p>
         </p:txBody>
       </p:sp>
@@ -10895,8 +10897,8 @@
         </p:nvSpPr>
         <p:spPr>
           <a:xfrm>
-            <a:off x="10698480" y="6382512"/>
-            <a:ext cx="1188720" cy="365760"/>
+            <a:off x="10698480" y="6309360"/>
+            <a:ext cx="1188720" cy="411480"/>
           </a:xfrm>
           <a:prstGeom prst="rect">
             <a:avLst/>
@@ -10912,9 +10914,9 @@
               <a:buNone/>
             </a:pPr>
             <a:r>
-              <a:rPr lang="en-US" sz="1000" dirty="0">
-                <a:solidFill>
-                  <a:srgbClr val="64748B"/>
+              <a:rPr lang="en-US" sz="1800" dirty="0">
+                <a:solidFill>
+                  <a:srgbClr val="8FA3BF"/>
                 </a:solidFill>
                 <a:latin typeface="Consolas" pitchFamily="34" charset="0"/>
                 <a:ea typeface="Consolas" pitchFamily="34" charset="-122"/>
@@ -10922,7 +10924,7 @@
               </a:rPr>
               <a:t>7 / 15</a:t>
             </a:r>
-            <a:endParaRPr lang="en-US" sz="1000" dirty="0"/>
+            <a:endParaRPr lang="en-US" sz="1800" dirty="0"/>
           </a:p>
         </p:txBody>
       </p:sp>
@@ -11006,8 +11008,8 @@
         </p:nvSpPr>
         <p:spPr>
           <a:xfrm>
-            <a:off x="822960" y="502920"/>
-            <a:ext cx="10515600" cy="365760"/>
+            <a:off x="822960" y="457200"/>
+            <a:ext cx="10515600" cy="411480"/>
           </a:xfrm>
           <a:prstGeom prst="rect">
             <a:avLst/>
@@ -11023,7 +11025,7 @@
               <a:buNone/>
             </a:pPr>
             <a:r>
-              <a:rPr lang="en-US" sz="1200" spc="300" kern="0" dirty="0">
+              <a:rPr lang="en-US" sz="1800" spc="300" kern="0" dirty="0">
                 <a:solidFill>
                   <a:srgbClr val="06B6D4"/>
                 </a:solidFill>
@@ -11033,7 +11035,7 @@
               </a:rPr>
               <a:t>DESIGN</a:t>
             </a:r>
-            <a:endParaRPr lang="en-US" sz="1200" dirty="0"/>
+            <a:endParaRPr lang="en-US" sz="1800" dirty="0"/>
           </a:p>
         </p:txBody>
       </p:sp>
@@ -11084,8 +11086,8 @@
         </p:nvSpPr>
         <p:spPr>
           <a:xfrm>
-            <a:off x="868680" y="2011680"/>
-            <a:ext cx="10424160" cy="3566160"/>
+            <a:off x="868680" y="1965960"/>
+            <a:ext cx="10424160" cy="3840480"/>
           </a:xfrm>
           <a:prstGeom prst="rect">
             <a:avLst/>
@@ -11108,7 +11110,7 @@
               <a:buChar char="▸"/>
             </a:pPr>
             <a:r>
-              <a:rPr lang="en-US" sz="1600" dirty="0">
+              <a:rPr lang="en-US" sz="2000" dirty="0">
                 <a:solidFill>
                   <a:srgbClr val="CBD5E1"/>
                 </a:solidFill>
@@ -11118,7 +11120,7 @@
               </a:rPr>
               <a:t>Composable pipelines over monolithic scripts - every stage runs, logs, and fails on its own.</a:t>
             </a:r>
-            <a:endParaRPr lang="en-US" sz="1600" dirty="0"/>
+            <a:endParaRPr lang="en-US" sz="2000" dirty="0"/>
           </a:p>
           <a:p>
             <a:pPr marL="342900" indent="-342900">
@@ -11132,7 +11134,7 @@
               <a:buChar char="▸"/>
             </a:pPr>
             <a:r>
-              <a:rPr lang="en-US" sz="1600" dirty="0">
+              <a:rPr lang="en-US" sz="2000" dirty="0">
                 <a:solidFill>
                   <a:srgbClr val="CBD5E1"/>
                 </a:solidFill>
@@ -11142,7 +11144,7 @@
               </a:rPr>
               <a:t>Schema-first: data is validated at every seam, not audited after the damage.</a:t>
             </a:r>
-            <a:endParaRPr lang="en-US" sz="1600" dirty="0"/>
+            <a:endParaRPr lang="en-US" sz="2000" dirty="0"/>
           </a:p>
           <a:p>
             <a:pPr marL="342900" indent="-342900">
@@ -11156,7 +11158,7 @@
               <a:buChar char="▸"/>
             </a:pPr>
             <a:r>
-              <a:rPr lang="en-US" sz="1600" dirty="0">
+              <a:rPr lang="en-US" sz="2000" dirty="0">
                 <a:solidFill>
                   <a:srgbClr val="CBD5E1"/>
                 </a:solidFill>
@@ -11166,7 +11168,7 @@
               </a:rPr>
               <a:t>Local-first: your data never has to leave the machine to be processed well.</a:t>
             </a:r>
-            <a:endParaRPr lang="en-US" sz="1600" dirty="0"/>
+            <a:endParaRPr lang="en-US" sz="2000" dirty="0"/>
           </a:p>
           <a:p>
             <a:pPr marL="342900" indent="-342900">
@@ -11180,7 +11182,7 @@
               <a:buChar char="▸"/>
             </a:pPr>
             <a:r>
-              <a:rPr lang="en-US" sz="1600" dirty="0">
+              <a:rPr lang="en-US" sz="2000" dirty="0">
                 <a:solidFill>
                   <a:srgbClr val="CBD5E1"/>
                 </a:solidFill>
@@ -11190,7 +11192,7 @@
               </a:rPr>
               <a:t>Readable output: logs and errors a human can audit months later.</a:t>
             </a:r>
-            <a:endParaRPr lang="en-US" sz="1600" dirty="0"/>
+            <a:endParaRPr lang="en-US" sz="2000" dirty="0"/>
           </a:p>
           <a:p>
             <a:pPr marL="342900" indent="-342900">
@@ -11204,7 +11206,7 @@
               <a:buChar char="▸"/>
             </a:pPr>
             <a:r>
-              <a:rPr lang="en-US" sz="1600" dirty="0">
+              <a:rPr lang="en-US" sz="2000" dirty="0">
                 <a:solidFill>
                   <a:srgbClr val="CBD5E1"/>
                 </a:solidFill>
@@ -11214,7 +11216,7 @@
               </a:rPr>
               <a:t>Nothing in the framework depends on a service that can bill you mid-pipeline.</a:t>
             </a:r>
-            <a:endParaRPr lang="en-US" sz="1600" dirty="0"/>
+            <a:endParaRPr lang="en-US" sz="2000" dirty="0"/>
           </a:p>
         </p:txBody>
       </p:sp>
@@ -11249,8 +11251,8 @@
         </p:nvSpPr>
         <p:spPr>
           <a:xfrm>
-            <a:off x="822960" y="6053328"/>
-            <a:ext cx="9692640" cy="457200"/>
+            <a:off x="822960" y="6035040"/>
+            <a:ext cx="10424160" cy="566928"/>
           </a:xfrm>
           <a:prstGeom prst="rect">
             <a:avLst/>
@@ -11266,9 +11268,9 @@
               <a:buNone/>
             </a:pPr>
             <a:r>
-              <a:rPr lang="en-US" sz="1150" dirty="0">
-                <a:solidFill>
-                  <a:srgbClr val="64748B"/>
+              <a:rPr lang="en-US" sz="1800" dirty="0">
+                <a:solidFill>
+                  <a:srgbClr val="8FA3BF"/>
                 </a:solidFill>
                 <a:latin typeface="Segoe UI" pitchFamily="34" charset="0"/>
                 <a:ea typeface="Segoe UI" pitchFamily="34" charset="-122"/>
@@ -11276,7 +11278,7 @@
               </a:rPr>
               <a:t>Heavyweight magic loses to boring, inspectable mechanics.</a:t>
             </a:r>
-            <a:endParaRPr lang="en-US" sz="1150" dirty="0"/>
+            <a:endParaRPr lang="en-US" sz="1800" dirty="0"/>
           </a:p>
         </p:txBody>
       </p:sp>
@@ -11288,8 +11290,8 @@
         </p:nvSpPr>
         <p:spPr>
           <a:xfrm>
-            <a:off x="10698480" y="6382512"/>
-            <a:ext cx="1188720" cy="365760"/>
+            <a:off x="10698480" y="6309360"/>
+            <a:ext cx="1188720" cy="411480"/>
           </a:xfrm>
           <a:prstGeom prst="rect">
             <a:avLst/>
@@ -11305,9 +11307,9 @@
               <a:buNone/>
             </a:pPr>
             <a:r>
-              <a:rPr lang="en-US" sz="1000" dirty="0">
-                <a:solidFill>
-                  <a:srgbClr val="64748B"/>
+              <a:rPr lang="en-US" sz="1800" dirty="0">
+                <a:solidFill>
+                  <a:srgbClr val="8FA3BF"/>
                 </a:solidFill>
                 <a:latin typeface="Consolas" pitchFamily="34" charset="0"/>
                 <a:ea typeface="Consolas" pitchFamily="34" charset="-122"/>
@@ -11315,7 +11317,7 @@
               </a:rPr>
               <a:t>8 / 15</a:t>
             </a:r>
-            <a:endParaRPr lang="en-US" sz="1000" dirty="0"/>
+            <a:endParaRPr lang="en-US" sz="1800" dirty="0"/>
           </a:p>
         </p:txBody>
       </p:sp>
@@ -11399,8 +11401,8 @@
         </p:nvSpPr>
         <p:spPr>
           <a:xfrm>
-            <a:off x="822960" y="502920"/>
-            <a:ext cx="10515600" cy="365760"/>
+            <a:off x="822960" y="457200"/>
+            <a:ext cx="10515600" cy="411480"/>
           </a:xfrm>
           <a:prstGeom prst="rect">
             <a:avLst/>
@@ -11416,7 +11418,7 @@
               <a:buNone/>
             </a:pPr>
             <a:r>
-              <a:rPr lang="en-US" sz="1200" spc="300" kern="0" dirty="0">
+              <a:rPr lang="en-US" sz="1800" spc="300" kern="0" dirty="0">
                 <a:solidFill>
                   <a:srgbClr val="06B6D4"/>
                 </a:solidFill>
@@ -11426,7 +11428,7 @@
               </a:rPr>
               <a:t>CODEBASE</a:t>
             </a:r>
-            <a:endParaRPr lang="en-US" sz="1200" dirty="0"/>
+            <a:endParaRPr lang="en-US" sz="1800" dirty="0"/>
           </a:p>
         </p:txBody>
       </p:sp>
@@ -11477,7 +11479,7 @@
         </p:nvGraphicFramePr>
         <p:xfrm>
           <a:off x="822960" y="1874520"/>
-          <a:ext cx="10515600" cy="3337560"/>
+          <a:ext cx="10515600" cy="3246120"/>
         </p:xfrm>
         <a:graphic xmlns:a="http://schemas.openxmlformats.org/drawingml/2006/main">
           <a:graphicData uri="http://schemas.openxmlformats.org/drawingml/2006/chart">
@@ -11493,7 +11495,7 @@
         </p:nvSpPr>
         <p:spPr>
           <a:xfrm>
-            <a:off x="822960" y="5413248"/>
+            <a:off x="822960" y="5321808"/>
             <a:ext cx="10515600" cy="0"/>
           </a:xfrm>
           <a:prstGeom prst="line">
@@ -11516,8 +11518,8 @@
         </p:nvSpPr>
         <p:spPr>
           <a:xfrm>
-            <a:off x="822960" y="5504688"/>
-            <a:ext cx="10424160" cy="411480"/>
+            <a:off x="822960" y="5394960"/>
+            <a:ext cx="10424160" cy="502920"/>
           </a:xfrm>
           <a:prstGeom prst="rect">
             <a:avLst/>
@@ -11533,7 +11535,7 @@
               <a:buNone/>
             </a:pPr>
             <a:r>
-              <a:rPr lang="en-US" sz="1300" i="1" dirty="0">
+              <a:rPr lang="en-US" sz="1800" i="1" dirty="0">
                 <a:solidFill>
                   <a:srgbClr val="06B6D4"/>
                 </a:solidFill>
@@ -11543,7 +11545,7 @@
               </a:rPr>
               <a:t>→  The boring modules carry the most code - they get the most engineering, so the interesting modules stay simple.</a:t>
             </a:r>
-            <a:endParaRPr lang="en-US" sz="1300" dirty="0"/>
+            <a:endParaRPr lang="en-US" sz="1800" dirty="0"/>
           </a:p>
         </p:txBody>
       </p:sp>
@@ -11578,8 +11580,8 @@
         </p:nvSpPr>
         <p:spPr>
           <a:xfrm>
-            <a:off x="822960" y="6053328"/>
-            <a:ext cx="9692640" cy="457200"/>
+            <a:off x="822960" y="6035040"/>
+            <a:ext cx="10424160" cy="566928"/>
           </a:xfrm>
           <a:prstGeom prst="rect">
             <a:avLst/>
@@ -11595,9 +11597,9 @@
               <a:buNone/>
             </a:pPr>
             <a:r>
-              <a:rPr lang="en-US" sz="1150" dirty="0">
-                <a:solidFill>
-                  <a:srgbClr val="64748B"/>
+              <a:rPr lang="en-US" sz="1800" dirty="0">
+                <a:solidFill>
+                  <a:srgbClr val="8FA3BF"/>
                 </a:solidFill>
                 <a:latin typeface="Segoe UI" pitchFamily="34" charset="0"/>
                 <a:ea typeface="Segoe UI" pitchFamily="34" charset="-122"/>
@@ -11605,7 +11607,7 @@
               </a:rPr>
               <a:t>Illustrative module shares; the weighting reflects where correctness matters most.</a:t>
             </a:r>
-            <a:endParaRPr lang="en-US" sz="1150" dirty="0"/>
+            <a:endParaRPr lang="en-US" sz="1800" dirty="0"/>
           </a:p>
         </p:txBody>
       </p:sp>
@@ -11617,8 +11619,8 @@
         </p:nvSpPr>
         <p:spPr>
           <a:xfrm>
-            <a:off x="10698480" y="6382512"/>
-            <a:ext cx="1188720" cy="365760"/>
+            <a:off x="10698480" y="6309360"/>
+            <a:ext cx="1188720" cy="411480"/>
           </a:xfrm>
           <a:prstGeom prst="rect">
             <a:avLst/>
@@ -11634,9 +11636,9 @@
               <a:buNone/>
             </a:pPr>
             <a:r>
-              <a:rPr lang="en-US" sz="1000" dirty="0">
-                <a:solidFill>
-                  <a:srgbClr val="64748B"/>
+              <a:rPr lang="en-US" sz="1800" dirty="0">
+                <a:solidFill>
+                  <a:srgbClr val="8FA3BF"/>
                 </a:solidFill>
                 <a:latin typeface="Consolas" pitchFamily="34" charset="0"/>
                 <a:ea typeface="Consolas" pitchFamily="34" charset="-122"/>
@@ -11644,7 +11646,7 @@
               </a:rPr>
               <a:t>9 / 15</a:t>
             </a:r>
-            <a:endParaRPr lang="en-US" sz="1000" dirty="0"/>
+            <a:endParaRPr lang="en-US" sz="1800" dirty="0"/>
           </a:p>
         </p:txBody>
       </p:sp>
